--- a/Diagram.pptx
+++ b/Diagram.pptx
@@ -5,10 +5,11 @@
     <p:sldMasterId id="2147483648" r:id="rId1"/>
   </p:sldMasterIdLst>
   <p:notesMasterIdLst>
-    <p:notesMasterId r:id="rId5"/>
+    <p:notesMasterId r:id="rId6"/>
   </p:notesMasterIdLst>
   <p:sldIdLst>
     <p:sldId id="256" r:id="rId4"/>
+    <p:sldId id="257" r:id="rId5"/>
   </p:sldIdLst>
   <p:sldSz cx="12192000" cy="6858000"/>
   <p:notesSz cx="6858000" cy="9144000"/>
@@ -134,7 +135,7 @@
       </p:grpSpPr>
       <p:sp>
         <p:nvSpPr>
-          <p:cNvPr id="844300209" name="Header Placeholder 1"/>
+          <p:cNvPr id="1591346694" name="Header Placeholder 1"/>
           <p:cNvSpPr>
             <a:spLocks noGrp="1"/>
           </p:cNvSpPr>
@@ -168,7 +169,7 @@
       </p:sp>
       <p:sp>
         <p:nvSpPr>
-          <p:cNvPr id="559788322" name="Date Placeholder 2"/>
+          <p:cNvPr id="230271193" name="Date Placeholder 2"/>
           <p:cNvSpPr>
             <a:spLocks noGrp="1"/>
           </p:cNvSpPr>
@@ -206,7 +207,7 @@
       </p:sp>
       <p:sp>
         <p:nvSpPr>
-          <p:cNvPr id="797944034" name="Slide Image Placeholder 3"/>
+          <p:cNvPr id="1073369822" name="Slide Image Placeholder 3"/>
           <p:cNvSpPr>
             <a:spLocks noChangeAspect="1" noGrp="1" noRot="1"/>
           </p:cNvSpPr>
@@ -242,7 +243,7 @@
       </p:sp>
       <p:sp>
         <p:nvSpPr>
-          <p:cNvPr id="2107793609" name="Notes Placeholder 4"/>
+          <p:cNvPr id="1132151676" name="Notes Placeholder 4"/>
           <p:cNvSpPr>
             <a:spLocks noGrp="1"/>
           </p:cNvSpPr>
@@ -316,7 +317,7 @@
       </p:sp>
       <p:sp>
         <p:nvSpPr>
-          <p:cNvPr id="2115482464" name="Footer Placeholder 5"/>
+          <p:cNvPr id="2063620904" name="Footer Placeholder 5"/>
           <p:cNvSpPr>
             <a:spLocks noGrp="1"/>
           </p:cNvSpPr>
@@ -350,7 +351,7 @@
       </p:sp>
       <p:sp>
         <p:nvSpPr>
-          <p:cNvPr id="770367269" name="Slide Number Placeholder 6"/>
+          <p:cNvPr id="1521474989" name="Slide Number Placeholder 6"/>
           <p:cNvSpPr>
             <a:spLocks noGrp="1"/>
           </p:cNvSpPr>
@@ -503,7 +504,7 @@
       </p:grpSpPr>
       <p:sp>
         <p:nvSpPr>
-          <p:cNvPr id="7943041" name="Slide Image Placeholder 1"/>
+          <p:cNvPr id="1996274625" name="Slide Image Placeholder 1"/>
           <p:cNvSpPr>
             <a:spLocks noChangeAspect="1" noGrp="1" noRot="1"/>
           </p:cNvSpPr>
@@ -520,7 +521,7 @@
       </p:sp>
       <p:sp>
         <p:nvSpPr>
-          <p:cNvPr id="2144822870" name="Notes Placeholder 2"/>
+          <p:cNvPr id="1015519726" name="Notes Placeholder 2"/>
           <p:cNvSpPr>
             <a:spLocks noGrp="1"/>
           </p:cNvSpPr>
@@ -545,7 +546,7 @@
       </p:sp>
       <p:sp>
         <p:nvSpPr>
-          <p:cNvPr id="1802157194" name="Slide Number Placeholder 3"/>
+          <p:cNvPr id="1562652848" name="Slide Number Placeholder 3"/>
           <p:cNvSpPr>
             <a:spLocks noGrp="1"/>
           </p:cNvSpPr>
@@ -566,6 +567,91 @@
               <a:t>1</a:t>
             </a:fld>
             <a:endParaRPr lang="en-US"/>
+          </a:p>
+        </p:txBody>
+      </p:sp>
+    </p:spTree>
+  </p:cSld>
+  <p:clrMapOvr>
+    <a:masterClrMapping/>
+  </p:clrMapOvr>
+</p:notes>
+</file>
+
+<file path=ppt/notesSlides/notesSlide2.xml><?xml version="1.0" encoding="utf-8"?>
+<p:notes xmlns:a="http://schemas.openxmlformats.org/drawingml/2006/main" xmlns:r="http://schemas.openxmlformats.org/officeDocument/2006/relationships" xmlns:p="http://schemas.openxmlformats.org/presentationml/2006/main" xmlns:m="http://schemas.openxmlformats.org/officeDocument/2006/math" xmlns:w="http://schemas.openxmlformats.org/wordprocessingml/2006/main">
+  <p:cSld name="">
+    <p:spTree>
+      <p:nvGrpSpPr>
+        <p:cNvPr id="1" name=""/>
+        <p:cNvGrpSpPr/>
+        <p:nvPr/>
+      </p:nvGrpSpPr>
+      <p:grpSpPr bwMode="auto">
+        <a:xfrm>
+          <a:off x="0" y="0"/>
+          <a:ext cx="0" cy="0"/>
+          <a:chOff x="0" y="0"/>
+          <a:chExt cx="0" cy="0"/>
+        </a:xfrm>
+      </p:grpSpPr>
+      <p:sp>
+        <p:nvSpPr>
+          <p:cNvPr id="2" name="Slide Image Placeholder 1"/>
+          <p:cNvSpPr>
+            <a:spLocks noChangeAspect="1" noGrp="1" noRot="1"/>
+          </p:cNvSpPr>
+          <p:nvPr>
+            <p:ph type="sldImg"/>
+          </p:nvPr>
+        </p:nvSpPr>
+        <p:spPr bwMode="auto"/>
+      </p:sp>
+      <p:sp>
+        <p:nvSpPr>
+          <p:cNvPr id="3" name="Notes Placeholder 2"/>
+          <p:cNvSpPr>
+            <a:spLocks noGrp="1"/>
+          </p:cNvSpPr>
+          <p:nvPr>
+            <p:ph type="body" idx="1"/>
+          </p:nvPr>
+        </p:nvSpPr>
+        <p:spPr bwMode="auto"/>
+        <p:txBody>
+          <a:bodyPr/>
+          <a:lstStyle/>
+          <a:p>
+            <a:pPr>
+              <a:defRPr/>
+            </a:pPr>
+            <a:endParaRPr/>
+          </a:p>
+        </p:txBody>
+      </p:sp>
+      <p:sp>
+        <p:nvSpPr>
+          <p:cNvPr id="4" name="Slide Number Placeholder 3"/>
+          <p:cNvSpPr>
+            <a:spLocks noGrp="1"/>
+          </p:cNvSpPr>
+          <p:nvPr>
+            <p:ph type="sldNum" sz="quarter" idx="10"/>
+          </p:nvPr>
+        </p:nvSpPr>
+        <p:spPr bwMode="auto"/>
+        <p:txBody>
+          <a:bodyPr/>
+          <a:lstStyle/>
+          <a:p>
+            <a:pPr>
+              <a:defRPr/>
+            </a:pPr>
+            <a:fld id="{BEFB40B8-C03E-A3D8-FACF-85666CF61227}" type="slidenum">
+              <a:rPr/>
+              <a:t/>
+            </a:fld>
+            <a:endParaRPr/>
           </a:p>
         </p:txBody>
       </p:sp>
@@ -596,7 +682,7 @@
       </p:grpSpPr>
       <p:sp>
         <p:nvSpPr>
-          <p:cNvPr id="1434970999" name="Title 1"/>
+          <p:cNvPr id="347350584" name="Title 1"/>
           <p:cNvSpPr>
             <a:spLocks noGrp="1"/>
           </p:cNvSpPr>
@@ -631,7 +717,7 @@
       </p:sp>
       <p:sp>
         <p:nvSpPr>
-          <p:cNvPr id="1016235325" name="Subtitle 2"/>
+          <p:cNvPr id="1996650117" name="Subtitle 2"/>
           <p:cNvSpPr>
             <a:spLocks noGrp="1"/>
           </p:cNvSpPr>
@@ -699,7 +785,7 @@
       </p:sp>
       <p:sp>
         <p:nvSpPr>
-          <p:cNvPr id="923240953" name="Date Placeholder 3"/>
+          <p:cNvPr id="959509372" name="Date Placeholder 3"/>
           <p:cNvSpPr>
             <a:spLocks noGrp="1"/>
           </p:cNvSpPr>
@@ -725,7 +811,7 @@
       </p:sp>
       <p:sp>
         <p:nvSpPr>
-          <p:cNvPr id="795549901" name="Footer Placeholder 4"/>
+          <p:cNvPr id="698586020" name="Footer Placeholder 4"/>
           <p:cNvSpPr>
             <a:spLocks noGrp="1"/>
           </p:cNvSpPr>
@@ -747,7 +833,7 @@
       </p:sp>
       <p:sp>
         <p:nvSpPr>
-          <p:cNvPr id="1319663276" name="Slide Number Placeholder 5"/>
+          <p:cNvPr id="744291524" name="Slide Number Placeholder 5"/>
           <p:cNvSpPr>
             <a:spLocks noGrp="1"/>
           </p:cNvSpPr>
@@ -798,7 +884,7 @@
       </p:grpSpPr>
       <p:sp>
         <p:nvSpPr>
-          <p:cNvPr id="1142288610" name="Title 1"/>
+          <p:cNvPr id="1583323807" name="Title 1"/>
           <p:cNvSpPr>
             <a:spLocks noGrp="1"/>
           </p:cNvSpPr>
@@ -824,7 +910,7 @@
       </p:sp>
       <p:sp>
         <p:nvSpPr>
-          <p:cNvPr id="763220501" name="Vertical Text Placeholder 2"/>
+          <p:cNvPr id="911999057" name="Vertical Text Placeholder 2"/>
           <p:cNvSpPr>
             <a:spLocks noGrp="1"/>
           </p:cNvSpPr>
@@ -890,7 +976,7 @@
       </p:sp>
       <p:sp>
         <p:nvSpPr>
-          <p:cNvPr id="1607853875" name="Date Placeholder 3"/>
+          <p:cNvPr id="187654892" name="Date Placeholder 3"/>
           <p:cNvSpPr>
             <a:spLocks noGrp="1"/>
           </p:cNvSpPr>
@@ -916,7 +1002,7 @@
       </p:sp>
       <p:sp>
         <p:nvSpPr>
-          <p:cNvPr id="1075787805" name="Footer Placeholder 4"/>
+          <p:cNvPr id="1030409727" name="Footer Placeholder 4"/>
           <p:cNvSpPr>
             <a:spLocks noGrp="1"/>
           </p:cNvSpPr>
@@ -938,7 +1024,7 @@
       </p:sp>
       <p:sp>
         <p:nvSpPr>
-          <p:cNvPr id="568565469" name="Slide Number Placeholder 5"/>
+          <p:cNvPr id="535689725" name="Slide Number Placeholder 5"/>
           <p:cNvSpPr>
             <a:spLocks noGrp="1"/>
           </p:cNvSpPr>
@@ -989,7 +1075,7 @@
       </p:grpSpPr>
       <p:sp>
         <p:nvSpPr>
-          <p:cNvPr id="173028275" name="Vertical Title 1"/>
+          <p:cNvPr id="1806549211" name="Vertical Title 1"/>
           <p:cNvSpPr>
             <a:spLocks noGrp="1"/>
           </p:cNvSpPr>
@@ -1020,7 +1106,7 @@
       </p:sp>
       <p:sp>
         <p:nvSpPr>
-          <p:cNvPr id="1982985410" name="Vertical Text Placeholder 2"/>
+          <p:cNvPr id="532531487" name="Vertical Text Placeholder 2"/>
           <p:cNvSpPr>
             <a:spLocks noGrp="1"/>
           </p:cNvSpPr>
@@ -1091,7 +1177,7 @@
       </p:sp>
       <p:sp>
         <p:nvSpPr>
-          <p:cNvPr id="1972795402" name="Date Placeholder 3"/>
+          <p:cNvPr id="1447359814" name="Date Placeholder 3"/>
           <p:cNvSpPr>
             <a:spLocks noGrp="1"/>
           </p:cNvSpPr>
@@ -1117,7 +1203,7 @@
       </p:sp>
       <p:sp>
         <p:nvSpPr>
-          <p:cNvPr id="436034653" name="Footer Placeholder 4"/>
+          <p:cNvPr id="231532970" name="Footer Placeholder 4"/>
           <p:cNvSpPr>
             <a:spLocks noGrp="1"/>
           </p:cNvSpPr>
@@ -1139,7 +1225,7 @@
       </p:sp>
       <p:sp>
         <p:nvSpPr>
-          <p:cNvPr id="799305575" name="Slide Number Placeholder 5"/>
+          <p:cNvPr id="462929246" name="Slide Number Placeholder 5"/>
           <p:cNvSpPr>
             <a:spLocks noGrp="1"/>
           </p:cNvSpPr>
@@ -1190,7 +1276,7 @@
       </p:grpSpPr>
       <p:sp>
         <p:nvSpPr>
-          <p:cNvPr id="579241214" name="Title 1"/>
+          <p:cNvPr id="1963600996" name="Title 1"/>
           <p:cNvSpPr>
             <a:spLocks noGrp="1"/>
           </p:cNvSpPr>
@@ -1216,7 +1302,7 @@
       </p:sp>
       <p:sp>
         <p:nvSpPr>
-          <p:cNvPr id="2045462163" name="Content Placeholder 2"/>
+          <p:cNvPr id="593129340" name="Content Placeholder 2"/>
           <p:cNvSpPr>
             <a:spLocks noGrp="1"/>
           </p:cNvSpPr>
@@ -1282,7 +1368,7 @@
       </p:sp>
       <p:sp>
         <p:nvSpPr>
-          <p:cNvPr id="1767521066" name="Date Placeholder 3"/>
+          <p:cNvPr id="1841461258" name="Date Placeholder 3"/>
           <p:cNvSpPr>
             <a:spLocks noGrp="1"/>
           </p:cNvSpPr>
@@ -1308,7 +1394,7 @@
       </p:sp>
       <p:sp>
         <p:nvSpPr>
-          <p:cNvPr id="62318776" name="Footer Placeholder 4"/>
+          <p:cNvPr id="990681336" name="Footer Placeholder 4"/>
           <p:cNvSpPr>
             <a:spLocks noGrp="1"/>
           </p:cNvSpPr>
@@ -1330,7 +1416,7 @@
       </p:sp>
       <p:sp>
         <p:nvSpPr>
-          <p:cNvPr id="1148217415" name="Slide Number Placeholder 5"/>
+          <p:cNvPr id="75843203" name="Slide Number Placeholder 5"/>
           <p:cNvSpPr>
             <a:spLocks noGrp="1"/>
           </p:cNvSpPr>
@@ -1381,7 +1467,7 @@
       </p:grpSpPr>
       <p:sp>
         <p:nvSpPr>
-          <p:cNvPr id="254451458" name="Title 1"/>
+          <p:cNvPr id="1920639989" name="Title 1"/>
           <p:cNvSpPr>
             <a:spLocks noGrp="1"/>
           </p:cNvSpPr>
@@ -1416,7 +1502,7 @@
       </p:sp>
       <p:sp>
         <p:nvSpPr>
-          <p:cNvPr id="4269011" name="Text Placeholder 2"/>
+          <p:cNvPr id="86001659" name="Text Placeholder 2"/>
           <p:cNvSpPr>
             <a:spLocks noGrp="1"/>
           </p:cNvSpPr>
@@ -1538,7 +1624,7 @@
       </p:sp>
       <p:sp>
         <p:nvSpPr>
-          <p:cNvPr id="1070590183" name="Date Placeholder 3"/>
+          <p:cNvPr id="170209575" name="Date Placeholder 3"/>
           <p:cNvSpPr>
             <a:spLocks noGrp="1"/>
           </p:cNvSpPr>
@@ -1564,7 +1650,7 @@
       </p:sp>
       <p:sp>
         <p:nvSpPr>
-          <p:cNvPr id="118467865" name="Footer Placeholder 4"/>
+          <p:cNvPr id="72014043" name="Footer Placeholder 4"/>
           <p:cNvSpPr>
             <a:spLocks noGrp="1"/>
           </p:cNvSpPr>
@@ -1586,7 +1672,7 @@
       </p:sp>
       <p:sp>
         <p:nvSpPr>
-          <p:cNvPr id="1808090672" name="Slide Number Placeholder 5"/>
+          <p:cNvPr id="1019042749" name="Slide Number Placeholder 5"/>
           <p:cNvSpPr>
             <a:spLocks noGrp="1"/>
           </p:cNvSpPr>
@@ -1637,7 +1723,7 @@
       </p:grpSpPr>
       <p:sp>
         <p:nvSpPr>
-          <p:cNvPr id="2113824892" name="Title 1"/>
+          <p:cNvPr id="565876912" name="Title 1"/>
           <p:cNvSpPr>
             <a:spLocks noGrp="1"/>
           </p:cNvSpPr>
@@ -1663,7 +1749,7 @@
       </p:sp>
       <p:sp>
         <p:nvSpPr>
-          <p:cNvPr id="337235711" name="Content Placeholder 2"/>
+          <p:cNvPr id="1756768194" name="Content Placeholder 2"/>
           <p:cNvSpPr>
             <a:spLocks noGrp="1"/>
           </p:cNvSpPr>
@@ -1734,7 +1820,7 @@
       </p:sp>
       <p:sp>
         <p:nvSpPr>
-          <p:cNvPr id="653997421" name="Content Placeholder 3"/>
+          <p:cNvPr id="1348171525" name="Content Placeholder 3"/>
           <p:cNvSpPr>
             <a:spLocks noGrp="1"/>
           </p:cNvSpPr>
@@ -1805,7 +1891,7 @@
       </p:sp>
       <p:sp>
         <p:nvSpPr>
-          <p:cNvPr id="2036901161" name="Date Placeholder 4"/>
+          <p:cNvPr id="795197051" name="Date Placeholder 4"/>
           <p:cNvSpPr>
             <a:spLocks noGrp="1"/>
           </p:cNvSpPr>
@@ -1831,7 +1917,7 @@
       </p:sp>
       <p:sp>
         <p:nvSpPr>
-          <p:cNvPr id="775584117" name="Footer Placeholder 5"/>
+          <p:cNvPr id="1496546849" name="Footer Placeholder 5"/>
           <p:cNvSpPr>
             <a:spLocks noGrp="1"/>
           </p:cNvSpPr>
@@ -1853,7 +1939,7 @@
       </p:sp>
       <p:sp>
         <p:nvSpPr>
-          <p:cNvPr id="1802767928" name="Slide Number Placeholder 6"/>
+          <p:cNvPr id="620695216" name="Slide Number Placeholder 6"/>
           <p:cNvSpPr>
             <a:spLocks noGrp="1"/>
           </p:cNvSpPr>
@@ -1904,7 +1990,7 @@
       </p:grpSpPr>
       <p:sp>
         <p:nvSpPr>
-          <p:cNvPr id="118442108" name="Title 1"/>
+          <p:cNvPr id="339561341" name="Title 1"/>
           <p:cNvSpPr>
             <a:spLocks noGrp="1"/>
           </p:cNvSpPr>
@@ -1935,7 +2021,7 @@
       </p:sp>
       <p:sp>
         <p:nvSpPr>
-          <p:cNvPr id="1479661099" name="Text Placeholder 2"/>
+          <p:cNvPr id="353836697" name="Text Placeholder 2"/>
           <p:cNvSpPr>
             <a:spLocks noGrp="1"/>
           </p:cNvSpPr>
@@ -2003,7 +2089,7 @@
       </p:sp>
       <p:sp>
         <p:nvSpPr>
-          <p:cNvPr id="1920915542" name="Content Placeholder 3"/>
+          <p:cNvPr id="448969864" name="Content Placeholder 3"/>
           <p:cNvSpPr>
             <a:spLocks noGrp="1"/>
           </p:cNvSpPr>
@@ -2074,7 +2160,7 @@
       </p:sp>
       <p:sp>
         <p:nvSpPr>
-          <p:cNvPr id="341479970" name="Text Placeholder 4"/>
+          <p:cNvPr id="677581313" name="Text Placeholder 4"/>
           <p:cNvSpPr>
             <a:spLocks noGrp="1"/>
           </p:cNvSpPr>
@@ -2142,7 +2228,7 @@
       </p:sp>
       <p:sp>
         <p:nvSpPr>
-          <p:cNvPr id="1981679040" name="Content Placeholder 5"/>
+          <p:cNvPr id="1683937358" name="Content Placeholder 5"/>
           <p:cNvSpPr>
             <a:spLocks noGrp="1"/>
           </p:cNvSpPr>
@@ -2213,7 +2299,7 @@
       </p:sp>
       <p:sp>
         <p:nvSpPr>
-          <p:cNvPr id="139394993" name="Date Placeholder 6"/>
+          <p:cNvPr id="2011455065" name="Date Placeholder 6"/>
           <p:cNvSpPr>
             <a:spLocks noGrp="1"/>
           </p:cNvSpPr>
@@ -2239,7 +2325,7 @@
       </p:sp>
       <p:sp>
         <p:nvSpPr>
-          <p:cNvPr id="653078747" name="Footer Placeholder 7"/>
+          <p:cNvPr id="68706642" name="Footer Placeholder 7"/>
           <p:cNvSpPr>
             <a:spLocks noGrp="1"/>
           </p:cNvSpPr>
@@ -2261,7 +2347,7 @@
       </p:sp>
       <p:sp>
         <p:nvSpPr>
-          <p:cNvPr id="1561494240" name="Slide Number Placeholder 8"/>
+          <p:cNvPr id="435832168" name="Slide Number Placeholder 8"/>
           <p:cNvSpPr>
             <a:spLocks noGrp="1"/>
           </p:cNvSpPr>
@@ -2312,7 +2398,7 @@
       </p:grpSpPr>
       <p:sp>
         <p:nvSpPr>
-          <p:cNvPr id="18809456" name="Title 1"/>
+          <p:cNvPr id="1587228119" name="Title 1"/>
           <p:cNvSpPr>
             <a:spLocks noGrp="1"/>
           </p:cNvSpPr>
@@ -2338,7 +2424,7 @@
       </p:sp>
       <p:sp>
         <p:nvSpPr>
-          <p:cNvPr id="690729885" name="Date Placeholder 2"/>
+          <p:cNvPr id="301879962" name="Date Placeholder 2"/>
           <p:cNvSpPr>
             <a:spLocks noGrp="1"/>
           </p:cNvSpPr>
@@ -2364,7 +2450,7 @@
       </p:sp>
       <p:sp>
         <p:nvSpPr>
-          <p:cNvPr id="890950506" name="Footer Placeholder 3"/>
+          <p:cNvPr id="562577452" name="Footer Placeholder 3"/>
           <p:cNvSpPr>
             <a:spLocks noGrp="1"/>
           </p:cNvSpPr>
@@ -2386,7 +2472,7 @@
       </p:sp>
       <p:sp>
         <p:nvSpPr>
-          <p:cNvPr id="1617604016" name="Slide Number Placeholder 4"/>
+          <p:cNvPr id="186886080" name="Slide Number Placeholder 4"/>
           <p:cNvSpPr>
             <a:spLocks noGrp="1"/>
           </p:cNvSpPr>
@@ -2437,7 +2523,7 @@
       </p:grpSpPr>
       <p:sp>
         <p:nvSpPr>
-          <p:cNvPr id="30066221" name="Date Placeholder 1"/>
+          <p:cNvPr id="1704061685" name="Date Placeholder 1"/>
           <p:cNvSpPr>
             <a:spLocks noGrp="1"/>
           </p:cNvSpPr>
@@ -2463,7 +2549,7 @@
       </p:sp>
       <p:sp>
         <p:nvSpPr>
-          <p:cNvPr id="1986065284" name="Footer Placeholder 2"/>
+          <p:cNvPr id="364584825" name="Footer Placeholder 2"/>
           <p:cNvSpPr>
             <a:spLocks noGrp="1"/>
           </p:cNvSpPr>
@@ -2485,7 +2571,7 @@
       </p:sp>
       <p:sp>
         <p:nvSpPr>
-          <p:cNvPr id="384235221" name="Slide Number Placeholder 3"/>
+          <p:cNvPr id="1727213065" name="Slide Number Placeholder 3"/>
           <p:cNvSpPr>
             <a:spLocks noGrp="1"/>
           </p:cNvSpPr>
@@ -2536,7 +2622,7 @@
       </p:grpSpPr>
       <p:sp>
         <p:nvSpPr>
-          <p:cNvPr id="71399731" name="Title 1"/>
+          <p:cNvPr id="2050072046" name="Title 1"/>
           <p:cNvSpPr>
             <a:spLocks noGrp="1"/>
           </p:cNvSpPr>
@@ -2571,7 +2657,7 @@
       </p:sp>
       <p:sp>
         <p:nvSpPr>
-          <p:cNvPr id="6080903" name="Content Placeholder 2"/>
+          <p:cNvPr id="829148357" name="Content Placeholder 2"/>
           <p:cNvSpPr>
             <a:spLocks noGrp="1"/>
           </p:cNvSpPr>
@@ -2670,7 +2756,7 @@
       </p:sp>
       <p:sp>
         <p:nvSpPr>
-          <p:cNvPr id="2000437426" name="Text Placeholder 3"/>
+          <p:cNvPr id="909021469" name="Text Placeholder 3"/>
           <p:cNvSpPr>
             <a:spLocks noGrp="1"/>
           </p:cNvSpPr>
@@ -2738,7 +2824,7 @@
       </p:sp>
       <p:sp>
         <p:nvSpPr>
-          <p:cNvPr id="97485981" name="Date Placeholder 4"/>
+          <p:cNvPr id="1085999207" name="Date Placeholder 4"/>
           <p:cNvSpPr>
             <a:spLocks noGrp="1"/>
           </p:cNvSpPr>
@@ -2764,7 +2850,7 @@
       </p:sp>
       <p:sp>
         <p:nvSpPr>
-          <p:cNvPr id="1626453864" name="Footer Placeholder 5"/>
+          <p:cNvPr id="396765600" name="Footer Placeholder 5"/>
           <p:cNvSpPr>
             <a:spLocks noGrp="1"/>
           </p:cNvSpPr>
@@ -2786,7 +2872,7 @@
       </p:sp>
       <p:sp>
         <p:nvSpPr>
-          <p:cNvPr id="1577751446" name="Slide Number Placeholder 6"/>
+          <p:cNvPr id="1379957419" name="Slide Number Placeholder 6"/>
           <p:cNvSpPr>
             <a:spLocks noGrp="1"/>
           </p:cNvSpPr>
@@ -2837,7 +2923,7 @@
       </p:grpSpPr>
       <p:sp>
         <p:nvSpPr>
-          <p:cNvPr id="628907463" name="Title 1"/>
+          <p:cNvPr id="487598557" name="Title 1"/>
           <p:cNvSpPr>
             <a:spLocks noGrp="1"/>
           </p:cNvSpPr>
@@ -2872,7 +2958,7 @@
       </p:sp>
       <p:sp>
         <p:nvSpPr>
-          <p:cNvPr id="926792716" name="Picture Placeholder 2"/>
+          <p:cNvPr id="1838818762" name="Picture Placeholder 2"/>
           <p:cNvSpPr>
             <a:spLocks noChangeAspect="1" noGrp="1"/>
           </p:cNvSpPr>
@@ -2940,7 +3026,7 @@
       </p:sp>
       <p:sp>
         <p:nvSpPr>
-          <p:cNvPr id="984680180" name="Text Placeholder 3"/>
+          <p:cNvPr id="961735731" name="Text Placeholder 3"/>
           <p:cNvSpPr>
             <a:spLocks noGrp="1"/>
           </p:cNvSpPr>
@@ -3008,7 +3094,7 @@
       </p:sp>
       <p:sp>
         <p:nvSpPr>
-          <p:cNvPr id="1461636558" name="Date Placeholder 4"/>
+          <p:cNvPr id="1433543281" name="Date Placeholder 4"/>
           <p:cNvSpPr>
             <a:spLocks noGrp="1"/>
           </p:cNvSpPr>
@@ -3034,7 +3120,7 @@
       </p:sp>
       <p:sp>
         <p:nvSpPr>
-          <p:cNvPr id="718384762" name="Footer Placeholder 5"/>
+          <p:cNvPr id="1760693649" name="Footer Placeholder 5"/>
           <p:cNvSpPr>
             <a:spLocks noGrp="1"/>
           </p:cNvSpPr>
@@ -3056,7 +3142,7 @@
       </p:sp>
       <p:sp>
         <p:nvSpPr>
-          <p:cNvPr id="1416295636" name="Slide Number Placeholder 6"/>
+          <p:cNvPr id="1606666418" name="Slide Number Placeholder 6"/>
           <p:cNvSpPr>
             <a:spLocks noGrp="1"/>
           </p:cNvSpPr>
@@ -3112,7 +3198,7 @@
       </p:grpSpPr>
       <p:sp>
         <p:nvSpPr>
-          <p:cNvPr id="630923847" name="Title Placeholder 1"/>
+          <p:cNvPr id="2043647429" name="Title Placeholder 1"/>
           <p:cNvSpPr>
             <a:spLocks noGrp="1"/>
           </p:cNvSpPr>
@@ -3148,7 +3234,7 @@
       </p:sp>
       <p:sp>
         <p:nvSpPr>
-          <p:cNvPr id="434469709" name="Text Placeholder 2"/>
+          <p:cNvPr id="1469580859" name="Text Placeholder 2"/>
           <p:cNvSpPr>
             <a:spLocks noGrp="1"/>
           </p:cNvSpPr>
@@ -3224,7 +3310,7 @@
       </p:sp>
       <p:sp>
         <p:nvSpPr>
-          <p:cNvPr id="1743675374" name="Date Placeholder 3"/>
+          <p:cNvPr id="1878917343" name="Date Placeholder 3"/>
           <p:cNvSpPr>
             <a:spLocks noGrp="1"/>
           </p:cNvSpPr>
@@ -3268,7 +3354,7 @@
       </p:sp>
       <p:sp>
         <p:nvSpPr>
-          <p:cNvPr id="1407585599" name="Footer Placeholder 4"/>
+          <p:cNvPr id="2138963881" name="Footer Placeholder 4"/>
           <p:cNvSpPr>
             <a:spLocks noGrp="1"/>
           </p:cNvSpPr>
@@ -3308,7 +3394,7 @@
       </p:sp>
       <p:sp>
         <p:nvSpPr>
-          <p:cNvPr id="1704721629" name="Slide Number Placeholder 5"/>
+          <p:cNvPr id="1930394038" name="Slide Number Placeholder 5"/>
           <p:cNvSpPr>
             <a:spLocks noGrp="1"/>
           </p:cNvSpPr>
@@ -3668,67 +3754,14 @@
       </p:grpSpPr>
       <p:sp>
         <p:nvSpPr>
-          <p:cNvPr id="38448264" name=""/>
+          <p:cNvPr id="143587816" name=""/>
           <p:cNvSpPr/>
           <p:nvPr/>
         </p:nvSpPr>
         <p:spPr bwMode="auto">
           <a:xfrm rot="0" flipH="0" flipV="0">
-            <a:off x="220404" y="1072962"/>
-            <a:ext cx="1606176" cy="2745441"/>
-          </a:xfrm>
-          <a:prstGeom prst="flowChartAlternateProcess">
-            <a:avLst/>
-          </a:prstGeom>
-          <a:solidFill>
-            <a:schemeClr val="accent1">
-              <a:alpha val="0"/>
-            </a:schemeClr>
-          </a:solidFill>
-          <a:ln w="38099" cap="flat" cmpd="sng" algn="ctr">
-            <a:solidFill>
-              <a:schemeClr val="tx1"/>
-            </a:solidFill>
-            <a:prstDash val="solid"/>
-            <a:miter lim="800000"/>
-          </a:ln>
-        </p:spPr>
-        <p:style>
-          <a:lnRef idx="2">
-            <a:schemeClr val="accent1">
-              <a:shade val="50000"/>
-            </a:schemeClr>
-          </a:lnRef>
-          <a:fillRef idx="1">
-            <a:schemeClr val="accent1"/>
-          </a:fillRef>
-          <a:effectRef idx="0">
-            <a:schemeClr val="accent1"/>
-          </a:effectRef>
-          <a:fontRef idx="minor">
-            <a:schemeClr val="lt1"/>
-          </a:fontRef>
-        </p:style>
-        <p:txBody>
-          <a:bodyPr anchor="ctr"/>
-          <a:p>
-            <a:pPr algn="ctr">
-              <a:defRPr/>
-            </a:pPr>
-            <a:endParaRPr/>
-          </a:p>
-        </p:txBody>
-      </p:sp>
-      <p:sp>
-        <p:nvSpPr>
-          <p:cNvPr id="848823414" name=""/>
-          <p:cNvSpPr/>
-          <p:nvPr/>
-        </p:nvSpPr>
-        <p:spPr bwMode="auto">
-          <a:xfrm rot="0" flipH="0" flipV="0">
-            <a:off x="2168397" y="653676"/>
-            <a:ext cx="2249543" cy="1307352"/>
+            <a:off x="2056338" y="587332"/>
+            <a:ext cx="1651897" cy="1002980"/>
           </a:xfrm>
           <a:prstGeom prst="rect">
             <a:avLst/>
@@ -3744,7 +3777,7 @@
             </a:gsLst>
             <a:lin ang="0" scaled="1"/>
           </a:gradFill>
-          <a:ln w="76199" cap="flat" cmpd="sng" algn="ctr">
+          <a:ln w="19049" cap="flat" cmpd="sng" algn="ctr">
             <a:solidFill>
               <a:schemeClr val="accent1">
                 <a:alpha val="99999"/>
@@ -3777,27 +3810,33 @@
               <a:defRPr/>
             </a:pPr>
             <a:r>
-              <a:rPr b="1">
+              <a:rPr b="0">
                 <a:solidFill>
                   <a:schemeClr val="tx1"/>
                 </a:solidFill>
+                <a:latin typeface="Times New Roman"/>
+                <a:ea typeface="Times New Roman"/>
+                <a:cs typeface="Times New Roman"/>
               </a:rPr>
               <a:t>DINOV3</a:t>
             </a:r>
-            <a:endParaRPr/>
-          </a:p>
-        </p:txBody>
-      </p:sp>
-      <p:sp>
-        <p:nvSpPr>
-          <p:cNvPr id="21571270" name=""/>
+            <a:endParaRPr b="0">
+              <a:latin typeface="Times New Roman"/>
+              <a:cs typeface="Times New Roman"/>
+            </a:endParaRPr>
+          </a:p>
+        </p:txBody>
+      </p:sp>
+      <p:sp>
+        <p:nvSpPr>
+          <p:cNvPr id="2112198299" name=""/>
           <p:cNvSpPr/>
           <p:nvPr/>
         </p:nvSpPr>
         <p:spPr bwMode="auto">
           <a:xfrm rot="0" flipH="0" flipV="0">
-            <a:off x="2168397" y="2728632"/>
-            <a:ext cx="2249542" cy="1307351"/>
+            <a:off x="2056338" y="2172294"/>
+            <a:ext cx="1651897" cy="1022001"/>
           </a:xfrm>
           <a:prstGeom prst="rect">
             <a:avLst/>
@@ -3816,7 +3855,7 @@
             </a:gsLst>
             <a:lin ang="0" scaled="1"/>
           </a:gradFill>
-          <a:ln w="76199" cap="flat" cmpd="sng" algn="ctr">
+          <a:ln w="19049" cap="flat" cmpd="sng" algn="ctr">
             <a:solidFill>
               <a:schemeClr val="accent2">
                 <a:lumMod val="60000"/>
@@ -3851,33 +3890,46 @@
               <a:defRPr/>
             </a:pPr>
             <a:r>
-              <a:rPr b="1">
+              <a:rPr b="0">
                 <a:solidFill>
                   <a:schemeClr val="tx1"/>
                 </a:solidFill>
+                <a:latin typeface="Times New Roman"/>
+                <a:ea typeface="Times New Roman"/>
+                <a:cs typeface="Times New Roman"/>
               </a:rPr>
               <a:t>QWEN3 Embeddings</a:t>
             </a:r>
-            <a:endParaRPr/>
-          </a:p>
-        </p:txBody>
-      </p:sp>
-      <p:sp>
-        <p:nvSpPr>
-          <p:cNvPr id="472995597" name=""/>
+            <a:endParaRPr b="0">
+              <a:latin typeface="Times New Roman"/>
+              <a:cs typeface="Times New Roman"/>
+            </a:endParaRPr>
+          </a:p>
+        </p:txBody>
+      </p:sp>
+      <p:sp>
+        <p:nvSpPr>
+          <p:cNvPr id="1878762556" name=""/>
           <p:cNvSpPr/>
           <p:nvPr/>
         </p:nvSpPr>
         <p:spPr bwMode="auto">
           <a:xfrm rot="0" flipH="0" flipV="0">
-            <a:off x="5134115" y="972927"/>
-            <a:ext cx="662294" cy="668850"/>
+            <a:off x="4648061" y="694980"/>
+            <a:ext cx="179649" cy="668849"/>
           </a:xfrm>
           <a:prstGeom prst="cube">
             <a:avLst>
               <a:gd name="adj" fmla="val 25000"/>
             </a:avLst>
           </a:prstGeom>
+          <a:ln w="12700" cap="flat" cmpd="sng" algn="ctr">
+            <a:solidFill>
+              <a:schemeClr val="tx1"/>
+            </a:solidFill>
+            <a:prstDash val="solid"/>
+            <a:miter lim="800000"/>
+          </a:ln>
         </p:spPr>
         <p:style>
           <a:lnRef idx="2">
@@ -3901,20 +3953,23 @@
             <a:pPr algn="ctr">
               <a:defRPr/>
             </a:pPr>
-            <a:endParaRPr/>
-          </a:p>
-        </p:txBody>
-      </p:sp>
-      <p:sp>
-        <p:nvSpPr>
-          <p:cNvPr id="1981328613" name=""/>
+            <a:endParaRPr>
+              <a:latin typeface="Times New Roman"/>
+              <a:cs typeface="Times New Roman"/>
+            </a:endParaRPr>
+          </a:p>
+        </p:txBody>
+      </p:sp>
+      <p:sp>
+        <p:nvSpPr>
+          <p:cNvPr id="463500821" name=""/>
           <p:cNvSpPr txBox="1"/>
           <p:nvPr/>
         </p:nvSpPr>
         <p:spPr bwMode="auto">
           <a:xfrm rot="0" flipH="0" flipV="0">
-            <a:off x="4832232" y="1686349"/>
-            <a:ext cx="1266061" cy="274679"/>
+            <a:off x="4104496" y="1423918"/>
+            <a:ext cx="1266780" cy="305159"/>
           </a:xfrm>
           <a:prstGeom prst="rect">
             <a:avLst/>
@@ -3930,31 +3985,977 @@
               <a:defRPr/>
             </a:pPr>
             <a:r>
-              <a:rPr sz="1200"/>
+              <a:rPr sz="1400">
+                <a:latin typeface="Times New Roman"/>
+                <a:ea typeface="Times New Roman"/>
+                <a:cs typeface="Times New Roman"/>
+              </a:rPr>
               <a:t>Batch, 768</a:t>
             </a:r>
-            <a:endParaRPr sz="1200"/>
-          </a:p>
-        </p:txBody>
-      </p:sp>
-      <p:sp>
-        <p:nvSpPr>
-          <p:cNvPr id="1620637840" name=""/>
+            <a:endParaRPr sz="1400">
+              <a:latin typeface="Times New Roman"/>
+              <a:cs typeface="Times New Roman"/>
+            </a:endParaRPr>
+          </a:p>
+        </p:txBody>
+      </p:sp>
+      <p:sp>
+        <p:nvSpPr>
+          <p:cNvPr id="962717940" name=""/>
           <p:cNvSpPr/>
           <p:nvPr/>
         </p:nvSpPr>
         <p:spPr bwMode="auto">
           <a:xfrm rot="0" flipH="0" flipV="0">
-            <a:off x="6600264" y="865280"/>
+            <a:off x="5877881" y="587332"/>
             <a:ext cx="1450413" cy="884145"/>
+          </a:xfrm>
+          <a:prstGeom prst="rect">
+            <a:avLst/>
+          </a:prstGeom>
+          <a:solidFill>
+            <a:srgbClr val="FF0000">
+              <a:alpha val="44999"/>
+            </a:srgbClr>
+          </a:solidFill>
+          <a:ln w="19049" cap="flat" cmpd="sng" algn="ctr">
+            <a:solidFill>
+              <a:schemeClr val="tx1">
+                <a:alpha val="99999"/>
+              </a:schemeClr>
+            </a:solidFill>
+            <a:prstDash val="solid"/>
+            <a:miter lim="800000"/>
+          </a:ln>
+        </p:spPr>
+        <p:style>
+          <a:lnRef idx="2">
+            <a:schemeClr val="accent1">
+              <a:shade val="50000"/>
+            </a:schemeClr>
+          </a:lnRef>
+          <a:fillRef idx="1">
+            <a:schemeClr val="accent1"/>
+          </a:fillRef>
+          <a:effectRef idx="0">
+            <a:schemeClr val="accent1"/>
+          </a:effectRef>
+          <a:fontRef idx="minor">
+            <a:schemeClr val="lt1"/>
+          </a:fontRef>
+        </p:style>
+        <p:txBody>
+          <a:bodyPr anchor="ctr"/>
+          <a:p>
+            <a:pPr algn="ctr">
+              <a:defRPr/>
+            </a:pPr>
+            <a:r>
+              <a:rPr sz="1400" b="0">
+                <a:solidFill>
+                  <a:schemeClr val="tx1"/>
+                </a:solidFill>
+                <a:latin typeface="Times New Roman"/>
+                <a:ea typeface="Times New Roman"/>
+                <a:cs typeface="Times New Roman"/>
+              </a:rPr>
+              <a:t>UPSAMPLER</a:t>
+            </a:r>
+            <a:endParaRPr b="0">
+              <a:latin typeface="Times New Roman"/>
+              <a:cs typeface="Times New Roman"/>
+            </a:endParaRPr>
+          </a:p>
+        </p:txBody>
+      </p:sp>
+      <p:sp>
+        <p:nvSpPr>
+          <p:cNvPr id="80758464" name=""/>
+          <p:cNvSpPr txBox="1"/>
+          <p:nvPr/>
+        </p:nvSpPr>
+        <p:spPr bwMode="auto">
+          <a:xfrm rot="0" flipH="0" flipV="0">
+            <a:off x="7659884" y="1608817"/>
+            <a:ext cx="1906629" cy="305159"/>
+          </a:xfrm>
+          <a:prstGeom prst="rect">
+            <a:avLst/>
+          </a:prstGeom>
+          <a:noFill/>
+        </p:spPr>
+        <p:txBody>
+          <a:bodyPr vertOverflow="overflow" horzOverflow="overflow" vert="horz" wrap="square" lIns="91440" tIns="45720" rIns="91440" bIns="45720" numCol="1" spcCol="0" rtlCol="0" fromWordArt="0" anchor="t" anchorCtr="0" forceAA="0" upright="0" compatLnSpc="0">
+            <a:spAutoFit/>
+          </a:bodyPr>
+          <a:p>
+            <a:pPr algn="ctr">
+              <a:defRPr/>
+            </a:pPr>
+            <a:r>
+              <a:rPr sz="1400">
+                <a:latin typeface="Times New Roman"/>
+                <a:ea typeface="Times New Roman"/>
+                <a:cs typeface="Times New Roman"/>
+              </a:rPr>
+              <a:t>Batch, 768, 224, 224</a:t>
+            </a:r>
+            <a:endParaRPr sz="1400">
+              <a:latin typeface="Times New Roman"/>
+              <a:cs typeface="Times New Roman"/>
+            </a:endParaRPr>
+          </a:p>
+        </p:txBody>
+      </p:sp>
+      <p:sp>
+        <p:nvSpPr>
+          <p:cNvPr id="1807390435" name=""/>
+          <p:cNvSpPr/>
+          <p:nvPr/>
+        </p:nvSpPr>
+        <p:spPr bwMode="auto">
+          <a:xfrm rot="0" flipH="0" flipV="0">
+            <a:off x="141029" y="808859"/>
+            <a:ext cx="1512793" cy="2291434"/>
+          </a:xfrm>
+          <a:prstGeom prst="cube">
+            <a:avLst>
+              <a:gd name="adj" fmla="val 25000"/>
+            </a:avLst>
+          </a:prstGeom>
+          <a:gradFill>
+            <a:gsLst>
+              <a:gs pos="0">
+                <a:schemeClr val="accent1">
+                  <a:alpha val="99999"/>
+                </a:schemeClr>
+              </a:gs>
+              <a:gs pos="100000">
+                <a:schemeClr val="accent2">
+                  <a:lumMod val="60000"/>
+                  <a:lumOff val="40000"/>
+                  <a:alpha val="99999"/>
+                </a:schemeClr>
+              </a:gs>
+            </a:gsLst>
+            <a:lin ang="0" scaled="1"/>
+          </a:gradFill>
+          <a:ln w="12700" cap="flat" cmpd="sng" algn="ctr">
+            <a:solidFill>
+              <a:schemeClr val="accent1">
+                <a:shade val="50000"/>
+                <a:alpha val="84000"/>
+              </a:schemeClr>
+            </a:solidFill>
+            <a:prstDash val="solid"/>
+            <a:miter lim="800000"/>
+          </a:ln>
+        </p:spPr>
+        <p:style>
+          <a:lnRef idx="2">
+            <a:schemeClr val="accent1">
+              <a:shade val="50000"/>
+            </a:schemeClr>
+          </a:lnRef>
+          <a:fillRef idx="1">
+            <a:schemeClr val="accent1"/>
+          </a:fillRef>
+          <a:effectRef idx="0">
+            <a:schemeClr val="accent1"/>
+          </a:effectRef>
+          <a:fontRef idx="minor">
+            <a:schemeClr val="lt1"/>
+          </a:fontRef>
+        </p:style>
+        <p:txBody>
+          <a:bodyPr anchor="ctr"/>
+          <a:p>
+            <a:pPr algn="ctr">
+              <a:defRPr/>
+            </a:pPr>
+            <a:r>
+              <a:rPr sz="1800" b="1">
+                <a:solidFill>
+                  <a:schemeClr val="tx1"/>
+                </a:solidFill>
+                <a:latin typeface="Times New Roman"/>
+                <a:ea typeface="Times New Roman"/>
+                <a:cs typeface="Times New Roman"/>
+              </a:rPr>
+              <a:t>Images</a:t>
+            </a:r>
+            <a:endParaRPr sz="1800" b="1">
+              <a:solidFill>
+                <a:schemeClr val="tx1"/>
+              </a:solidFill>
+              <a:latin typeface="Times New Roman"/>
+              <a:ea typeface="Times New Roman"/>
+              <a:cs typeface="Times New Roman"/>
+            </a:endParaRPr>
+          </a:p>
+          <a:p>
+            <a:pPr algn="ctr">
+              <a:defRPr/>
+            </a:pPr>
+            <a:r>
+              <a:rPr sz="1800" b="1">
+                <a:solidFill>
+                  <a:schemeClr val="tx1"/>
+                </a:solidFill>
+                <a:latin typeface="Times New Roman"/>
+                <a:ea typeface="Times New Roman"/>
+                <a:cs typeface="Times New Roman"/>
+              </a:rPr>
+              <a:t>And </a:t>
+            </a:r>
+            <a:endParaRPr sz="1800" b="1">
+              <a:solidFill>
+                <a:schemeClr val="tx1"/>
+              </a:solidFill>
+              <a:latin typeface="Times New Roman"/>
+              <a:ea typeface="Times New Roman"/>
+              <a:cs typeface="Times New Roman"/>
+            </a:endParaRPr>
+          </a:p>
+          <a:p>
+            <a:pPr algn="ctr">
+              <a:defRPr/>
+            </a:pPr>
+            <a:r>
+              <a:rPr sz="1800" b="1">
+                <a:solidFill>
+                  <a:schemeClr val="tx1"/>
+                </a:solidFill>
+                <a:latin typeface="Times New Roman"/>
+                <a:ea typeface="Times New Roman"/>
+                <a:cs typeface="Times New Roman"/>
+              </a:rPr>
+              <a:t>Captions</a:t>
+            </a:r>
+            <a:endParaRPr sz="2000" b="1">
+              <a:solidFill>
+                <a:schemeClr val="tx1"/>
+              </a:solidFill>
+              <a:latin typeface="Times New Roman"/>
+              <a:cs typeface="Times New Roman"/>
+            </a:endParaRPr>
+          </a:p>
+        </p:txBody>
+      </p:sp>
+      <p:sp>
+        <p:nvSpPr>
+          <p:cNvPr id="309775709" name=""/>
+          <p:cNvSpPr/>
+          <p:nvPr/>
+        </p:nvSpPr>
+        <p:spPr bwMode="auto">
+          <a:xfrm rot="0" flipH="0" flipV="0">
+            <a:off x="4387680" y="2144904"/>
+            <a:ext cx="1186738" cy="1017915"/>
+          </a:xfrm>
+          <a:prstGeom prst="cube">
+            <a:avLst>
+              <a:gd name="adj" fmla="val 25000"/>
+            </a:avLst>
+          </a:prstGeom>
+          <a:solidFill>
+            <a:schemeClr val="accent2">
+              <a:lumMod val="60000"/>
+              <a:lumOff val="40000"/>
+            </a:schemeClr>
+          </a:solidFill>
+          <a:ln w="12700" cap="flat" cmpd="sng" algn="ctr">
+            <a:solidFill>
+              <a:schemeClr val="tx1"/>
+            </a:solidFill>
+            <a:prstDash val="solid"/>
+            <a:miter lim="800000"/>
+          </a:ln>
+        </p:spPr>
+        <p:style>
+          <a:lnRef idx="2">
+            <a:schemeClr val="accent1">
+              <a:shade val="50000"/>
+            </a:schemeClr>
+          </a:lnRef>
+          <a:fillRef idx="1">
+            <a:schemeClr val="accent1"/>
+          </a:fillRef>
+          <a:effectRef idx="0">
+            <a:schemeClr val="accent1"/>
+          </a:effectRef>
+          <a:fontRef idx="minor">
+            <a:schemeClr val="lt1"/>
+          </a:fontRef>
+        </p:style>
+        <p:txBody>
+          <a:bodyPr anchor="ctr"/>
+          <a:p>
+            <a:pPr algn="ctr">
+              <a:defRPr/>
+            </a:pPr>
+            <a:endParaRPr>
+              <a:latin typeface="Times New Roman"/>
+              <a:cs typeface="Times New Roman"/>
+            </a:endParaRPr>
+          </a:p>
+        </p:txBody>
+      </p:sp>
+      <p:sp>
+        <p:nvSpPr>
+          <p:cNvPr id="2013582902" name=""/>
+          <p:cNvSpPr txBox="1"/>
+          <p:nvPr/>
+        </p:nvSpPr>
+        <p:spPr bwMode="auto">
+          <a:xfrm rot="0" flipH="0" flipV="0">
+            <a:off x="4290613" y="3291660"/>
+            <a:ext cx="1269659" cy="305159"/>
+          </a:xfrm>
+          <a:prstGeom prst="rect">
+            <a:avLst/>
+          </a:prstGeom>
+          <a:noFill/>
+        </p:spPr>
+        <p:txBody>
+          <a:bodyPr vertOverflow="overflow" horzOverflow="overflow" vert="horz" wrap="square" lIns="91440" tIns="45720" rIns="91440" bIns="45720" numCol="1" spcCol="0" rtlCol="0" fromWordArt="0" anchor="t" anchorCtr="0" forceAA="0" upright="0" compatLnSpc="0">
+            <a:spAutoFit/>
+          </a:bodyPr>
+          <a:p>
+            <a:pPr algn="ctr">
+              <a:defRPr/>
+            </a:pPr>
+            <a:r>
+              <a:rPr sz="1400">
+                <a:latin typeface="Times New Roman"/>
+                <a:ea typeface="Times New Roman"/>
+                <a:cs typeface="Times New Roman"/>
+              </a:rPr>
+              <a:t>Batch, 4096</a:t>
+            </a:r>
+            <a:endParaRPr sz="1400">
+              <a:latin typeface="Times New Roman"/>
+              <a:cs typeface="Times New Roman"/>
+            </a:endParaRPr>
+          </a:p>
+        </p:txBody>
+      </p:sp>
+      <p:sp>
+        <p:nvSpPr>
+          <p:cNvPr id="931977481" name=""/>
+          <p:cNvSpPr/>
+          <p:nvPr/>
+        </p:nvSpPr>
+        <p:spPr bwMode="auto">
+          <a:xfrm rot="0" flipH="0" flipV="0">
+            <a:off x="3810955" y="981845"/>
+            <a:ext cx="479657" cy="182232"/>
+          </a:xfrm>
+          <a:prstGeom prst="rightArrow">
+            <a:avLst>
+              <a:gd name="adj1" fmla="val 50000"/>
+              <a:gd name="adj2" fmla="val 50000"/>
+            </a:avLst>
+          </a:prstGeom>
+          <a:solidFill>
+            <a:schemeClr val="tx1"/>
+          </a:solidFill>
+          <a:ln w="12699" cap="flat" cmpd="sng" algn="ctr">
+            <a:solidFill>
+              <a:schemeClr val="tx1"/>
+            </a:solidFill>
+            <a:prstDash val="solid"/>
+            <a:miter lim="800000"/>
+          </a:ln>
+        </p:spPr>
+        <p:style>
+          <a:lnRef idx="2">
+            <a:schemeClr val="accent1">
+              <a:shade val="50000"/>
+            </a:schemeClr>
+          </a:lnRef>
+          <a:fillRef idx="1">
+            <a:schemeClr val="accent1"/>
+          </a:fillRef>
+          <a:effectRef idx="0">
+            <a:schemeClr val="accent1"/>
+          </a:effectRef>
+          <a:fontRef idx="minor">
+            <a:schemeClr val="lt1"/>
+          </a:fontRef>
+        </p:style>
+        <p:txBody>
+          <a:bodyPr anchor="ctr"/>
+          <a:p>
+            <a:pPr algn="ctr">
+              <a:defRPr/>
+            </a:pPr>
+            <a:endParaRPr>
+              <a:latin typeface="Times New Roman"/>
+              <a:cs typeface="Times New Roman"/>
+            </a:endParaRPr>
+          </a:p>
+        </p:txBody>
+      </p:sp>
+      <p:sp>
+        <p:nvSpPr>
+          <p:cNvPr id="474296952" name=""/>
+          <p:cNvSpPr/>
+          <p:nvPr/>
+        </p:nvSpPr>
+        <p:spPr bwMode="auto">
+          <a:xfrm rot="0" flipH="0" flipV="0">
+            <a:off x="8046021" y="511416"/>
+            <a:ext cx="1185838" cy="1080868"/>
+          </a:xfrm>
+          <a:prstGeom prst="cube">
+            <a:avLst>
+              <a:gd name="adj" fmla="val 25000"/>
+            </a:avLst>
+          </a:prstGeom>
+          <a:ln w="12700" cap="flat" cmpd="sng" algn="ctr">
+            <a:solidFill>
+              <a:schemeClr val="tx1"/>
+            </a:solidFill>
+            <a:prstDash val="solid"/>
+            <a:miter lim="800000"/>
+          </a:ln>
+        </p:spPr>
+        <p:style>
+          <a:lnRef idx="2">
+            <a:schemeClr val="accent1">
+              <a:shade val="50000"/>
+            </a:schemeClr>
+          </a:lnRef>
+          <a:fillRef idx="1">
+            <a:schemeClr val="accent1"/>
+          </a:fillRef>
+          <a:effectRef idx="0">
+            <a:schemeClr val="accent1"/>
+          </a:effectRef>
+          <a:fontRef idx="minor">
+            <a:schemeClr val="lt1"/>
+          </a:fontRef>
+        </p:style>
+        <p:txBody>
+          <a:bodyPr anchor="ctr"/>
+          <a:p>
+            <a:pPr algn="ctr">
+              <a:defRPr/>
+            </a:pPr>
+            <a:endParaRPr>
+              <a:latin typeface="Times New Roman"/>
+              <a:cs typeface="Times New Roman"/>
+            </a:endParaRPr>
+          </a:p>
+        </p:txBody>
+      </p:sp>
+      <p:sp>
+        <p:nvSpPr>
+          <p:cNvPr id="2131415118" name=""/>
+          <p:cNvSpPr/>
+          <p:nvPr/>
+        </p:nvSpPr>
+        <p:spPr bwMode="auto">
+          <a:xfrm rot="0" flipH="0" flipV="0">
+            <a:off x="5224772" y="938288"/>
+            <a:ext cx="507088" cy="182232"/>
+          </a:xfrm>
+          <a:prstGeom prst="rightArrow">
+            <a:avLst>
+              <a:gd name="adj1" fmla="val 50000"/>
+              <a:gd name="adj2" fmla="val 50000"/>
+            </a:avLst>
+          </a:prstGeom>
+          <a:solidFill>
+            <a:schemeClr val="tx1"/>
+          </a:solidFill>
+          <a:ln w="12699" cap="flat" cmpd="sng" algn="ctr">
+            <a:solidFill>
+              <a:schemeClr val="tx1"/>
+            </a:solidFill>
+            <a:prstDash val="solid"/>
+            <a:miter lim="800000"/>
+          </a:ln>
+        </p:spPr>
+        <p:style>
+          <a:lnRef idx="2">
+            <a:schemeClr val="accent1">
+              <a:shade val="50000"/>
+            </a:schemeClr>
+          </a:lnRef>
+          <a:fillRef idx="1">
+            <a:schemeClr val="accent1"/>
+          </a:fillRef>
+          <a:effectRef idx="0">
+            <a:schemeClr val="accent1"/>
+          </a:effectRef>
+          <a:fontRef idx="minor">
+            <a:schemeClr val="lt1"/>
+          </a:fontRef>
+        </p:style>
+        <p:txBody>
+          <a:bodyPr anchor="ctr"/>
+          <a:p>
+            <a:pPr algn="ctr">
+              <a:defRPr/>
+            </a:pPr>
+            <a:endParaRPr>
+              <a:latin typeface="Times New Roman"/>
+              <a:cs typeface="Times New Roman"/>
+            </a:endParaRPr>
+          </a:p>
+        </p:txBody>
+      </p:sp>
+      <p:sp>
+        <p:nvSpPr>
+          <p:cNvPr id="1195896855" name=""/>
+          <p:cNvSpPr/>
+          <p:nvPr/>
+        </p:nvSpPr>
+        <p:spPr bwMode="auto">
+          <a:xfrm rot="0" flipH="0" flipV="0">
+            <a:off x="7406340" y="981845"/>
+            <a:ext cx="507087" cy="182232"/>
+          </a:xfrm>
+          <a:prstGeom prst="rightArrow">
+            <a:avLst>
+              <a:gd name="adj1" fmla="val 50000"/>
+              <a:gd name="adj2" fmla="val 50000"/>
+            </a:avLst>
+          </a:prstGeom>
+          <a:solidFill>
+            <a:schemeClr val="tx1"/>
+          </a:solidFill>
+          <a:ln w="12699" cap="flat" cmpd="sng" algn="ctr">
+            <a:solidFill>
+              <a:schemeClr val="tx1"/>
+            </a:solidFill>
+            <a:prstDash val="solid"/>
+            <a:miter lim="800000"/>
+          </a:ln>
+        </p:spPr>
+        <p:style>
+          <a:lnRef idx="2">
+            <a:schemeClr val="accent1">
+              <a:shade val="50000"/>
+            </a:schemeClr>
+          </a:lnRef>
+          <a:fillRef idx="1">
+            <a:schemeClr val="accent1"/>
+          </a:fillRef>
+          <a:effectRef idx="0">
+            <a:schemeClr val="accent1"/>
+          </a:effectRef>
+          <a:fontRef idx="minor">
+            <a:schemeClr val="lt1"/>
+          </a:fontRef>
+        </p:style>
+        <p:txBody>
+          <a:bodyPr anchor="ctr"/>
+          <a:p>
+            <a:pPr algn="ctr">
+              <a:defRPr/>
+            </a:pPr>
+            <a:endParaRPr>
+              <a:latin typeface="Times New Roman"/>
+              <a:cs typeface="Times New Roman"/>
+            </a:endParaRPr>
+          </a:p>
+        </p:txBody>
+      </p:sp>
+      <p:sp>
+        <p:nvSpPr>
+          <p:cNvPr id="1769312677" name=""/>
+          <p:cNvSpPr txBox="1"/>
+          <p:nvPr/>
+        </p:nvSpPr>
+        <p:spPr bwMode="auto">
+          <a:xfrm rot="0" flipH="0" flipV="0">
+            <a:off x="5594558" y="1471477"/>
+            <a:ext cx="1919589" cy="305159"/>
+          </a:xfrm>
+          <a:prstGeom prst="rect">
+            <a:avLst/>
+          </a:prstGeom>
+          <a:noFill/>
+        </p:spPr>
+        <p:txBody>
+          <a:bodyPr vertOverflow="overflow" horzOverflow="overflow" vert="horz" wrap="square" lIns="91440" tIns="45720" rIns="91440" bIns="45720" numCol="1" spcCol="0" rtlCol="0" fromWordArt="0" anchor="t" anchorCtr="0" forceAA="0" upright="0" compatLnSpc="0">
+            <a:spAutoFit/>
+          </a:bodyPr>
+          <a:p>
+            <a:pPr algn="ctr">
+              <a:defRPr/>
+            </a:pPr>
+            <a:r>
+              <a:rPr sz="1400">
+                <a:latin typeface="Times New Roman"/>
+                <a:ea typeface="Times New Roman"/>
+                <a:cs typeface="Times New Roman"/>
+              </a:rPr>
+              <a:t>E.g. AnyUP</a:t>
+            </a:r>
+            <a:endParaRPr sz="1400">
+              <a:latin typeface="Times New Roman"/>
+              <a:cs typeface="Times New Roman"/>
+            </a:endParaRPr>
+          </a:p>
+        </p:txBody>
+      </p:sp>
+      <p:sp>
+        <p:nvSpPr>
+          <p:cNvPr id="2052150878" name=""/>
+          <p:cNvSpPr/>
+          <p:nvPr/>
+        </p:nvSpPr>
+        <p:spPr bwMode="auto">
+          <a:xfrm rot="0" flipH="0" flipV="0">
+            <a:off x="9933913" y="571471"/>
+            <a:ext cx="1450413" cy="884144"/>
+          </a:xfrm>
+          <a:prstGeom prst="rect">
+            <a:avLst/>
+          </a:prstGeom>
+          <a:solidFill>
+            <a:schemeClr val="accent6">
+              <a:alpha val="66000"/>
+            </a:schemeClr>
+          </a:solidFill>
+          <a:ln w="19049" cap="flat" cmpd="sng" algn="ctr">
+            <a:solidFill>
+              <a:schemeClr val="tx1">
+                <a:alpha val="99999"/>
+              </a:schemeClr>
+            </a:solidFill>
+            <a:prstDash val="solid"/>
+            <a:miter lim="800000"/>
+          </a:ln>
+        </p:spPr>
+        <p:style>
+          <a:lnRef idx="2">
+            <a:schemeClr val="accent1">
+              <a:shade val="50000"/>
+            </a:schemeClr>
+          </a:lnRef>
+          <a:fillRef idx="1">
+            <a:schemeClr val="accent1"/>
+          </a:fillRef>
+          <a:effectRef idx="0">
+            <a:schemeClr val="accent1"/>
+          </a:effectRef>
+          <a:fontRef idx="minor">
+            <a:schemeClr val="lt1"/>
+          </a:fontRef>
+        </p:style>
+        <p:txBody>
+          <a:bodyPr anchor="ctr"/>
+          <a:p>
+            <a:pPr algn="ctr">
+              <a:defRPr/>
+            </a:pPr>
+            <a:r>
+              <a:rPr sz="1400" b="0">
+                <a:solidFill>
+                  <a:schemeClr val="tx1"/>
+                </a:solidFill>
+                <a:latin typeface="Times New Roman"/>
+                <a:ea typeface="Times New Roman"/>
+                <a:cs typeface="Times New Roman"/>
+              </a:rPr>
+              <a:t>AVG Pooling</a:t>
+            </a:r>
+            <a:endParaRPr b="0">
+              <a:latin typeface="Times New Roman"/>
+              <a:cs typeface="Times New Roman"/>
+            </a:endParaRPr>
+          </a:p>
+        </p:txBody>
+      </p:sp>
+      <p:sp>
+        <p:nvSpPr>
+          <p:cNvPr id="1351673339" name=""/>
+          <p:cNvSpPr txBox="1"/>
+          <p:nvPr/>
+        </p:nvSpPr>
+        <p:spPr bwMode="auto">
+          <a:xfrm rot="0" flipH="0" flipV="0">
+            <a:off x="9798000" y="3291660"/>
+            <a:ext cx="1905189" cy="305159"/>
+          </a:xfrm>
+          <a:prstGeom prst="rect">
+            <a:avLst/>
+          </a:prstGeom>
+          <a:noFill/>
+        </p:spPr>
+        <p:txBody>
+          <a:bodyPr vertOverflow="overflow" horzOverflow="overflow" vert="horz" wrap="square" lIns="91440" tIns="45720" rIns="91440" bIns="45720" numCol="1" spcCol="0" rtlCol="0" fromWordArt="0" anchor="t" anchorCtr="0" forceAA="0" upright="0" compatLnSpc="0">
+            <a:spAutoFit/>
+          </a:bodyPr>
+          <a:p>
+            <a:pPr algn="ctr">
+              <a:defRPr/>
+            </a:pPr>
+            <a:r>
+              <a:rPr sz="1400">
+                <a:latin typeface="Times New Roman"/>
+                <a:ea typeface="Times New Roman"/>
+                <a:cs typeface="Times New Roman"/>
+              </a:rPr>
+              <a:t>Batch, 768, 32, 32</a:t>
+            </a:r>
+            <a:endParaRPr sz="1400">
+              <a:latin typeface="Times New Roman"/>
+              <a:cs typeface="Times New Roman"/>
+            </a:endParaRPr>
+          </a:p>
+        </p:txBody>
+      </p:sp>
+      <p:sp>
+        <p:nvSpPr>
+          <p:cNvPr id="233432704" name=""/>
+          <p:cNvSpPr/>
+          <p:nvPr/>
+        </p:nvSpPr>
+        <p:spPr bwMode="auto">
+          <a:xfrm rot="0" flipH="0" flipV="0">
+            <a:off x="9312556" y="890729"/>
+            <a:ext cx="507087" cy="182232"/>
+          </a:xfrm>
+          <a:prstGeom prst="rightArrow">
+            <a:avLst>
+              <a:gd name="adj1" fmla="val 50000"/>
+              <a:gd name="adj2" fmla="val 50000"/>
+            </a:avLst>
+          </a:prstGeom>
+          <a:solidFill>
+            <a:schemeClr val="tx1"/>
+          </a:solidFill>
+          <a:ln w="12699" cap="flat" cmpd="sng" algn="ctr">
+            <a:solidFill>
+              <a:schemeClr val="tx1"/>
+            </a:solidFill>
+            <a:prstDash val="solid"/>
+            <a:miter lim="800000"/>
+          </a:ln>
+        </p:spPr>
+        <p:style>
+          <a:lnRef idx="2">
+            <a:schemeClr val="accent1">
+              <a:shade val="50000"/>
+            </a:schemeClr>
+          </a:lnRef>
+          <a:fillRef idx="1">
+            <a:schemeClr val="accent1"/>
+          </a:fillRef>
+          <a:effectRef idx="0">
+            <a:schemeClr val="accent1"/>
+          </a:effectRef>
+          <a:fontRef idx="minor">
+            <a:schemeClr val="lt1"/>
+          </a:fontRef>
+        </p:style>
+        <p:txBody>
+          <a:bodyPr anchor="ctr"/>
+          <a:p>
+            <a:pPr algn="ctr">
+              <a:defRPr/>
+            </a:pPr>
+            <a:endParaRPr>
+              <a:latin typeface="Times New Roman"/>
+              <a:cs typeface="Times New Roman"/>
+            </a:endParaRPr>
+          </a:p>
+        </p:txBody>
+      </p:sp>
+      <p:sp>
+        <p:nvSpPr>
+          <p:cNvPr id="2072352170" name=""/>
+          <p:cNvSpPr/>
+          <p:nvPr/>
+        </p:nvSpPr>
+        <p:spPr bwMode="auto">
+          <a:xfrm rot="0" flipH="0" flipV="0">
+            <a:off x="10317822" y="2113427"/>
+            <a:ext cx="682594" cy="1080867"/>
+          </a:xfrm>
+          <a:prstGeom prst="cube">
+            <a:avLst>
+              <a:gd name="adj" fmla="val 25000"/>
+            </a:avLst>
+          </a:prstGeom>
+          <a:ln w="12700" cap="flat" cmpd="sng" algn="ctr">
+            <a:solidFill>
+              <a:schemeClr val="tx1"/>
+            </a:solidFill>
+            <a:prstDash val="solid"/>
+            <a:miter lim="800000"/>
+          </a:ln>
+        </p:spPr>
+        <p:style>
+          <a:lnRef idx="2">
+            <a:schemeClr val="accent1">
+              <a:shade val="50000"/>
+            </a:schemeClr>
+          </a:lnRef>
+          <a:fillRef idx="1">
+            <a:schemeClr val="accent1"/>
+          </a:fillRef>
+          <a:effectRef idx="0">
+            <a:schemeClr val="accent1"/>
+          </a:effectRef>
+          <a:fontRef idx="minor">
+            <a:schemeClr val="lt1"/>
+          </a:fontRef>
+        </p:style>
+        <p:txBody>
+          <a:bodyPr anchor="ctr"/>
+          <a:p>
+            <a:pPr algn="ctr">
+              <a:defRPr/>
+            </a:pPr>
+            <a:endParaRPr>
+              <a:latin typeface="Times New Roman"/>
+              <a:cs typeface="Times New Roman"/>
+            </a:endParaRPr>
+          </a:p>
+        </p:txBody>
+      </p:sp>
+      <p:sp>
+        <p:nvSpPr>
+          <p:cNvPr id="835518524" name=""/>
+          <p:cNvSpPr/>
+          <p:nvPr/>
+        </p:nvSpPr>
+        <p:spPr bwMode="auto">
+          <a:xfrm rot="5399978" flipH="0" flipV="0">
+            <a:off x="10405576" y="1715762"/>
+            <a:ext cx="507087" cy="182232"/>
+          </a:xfrm>
+          <a:prstGeom prst="rightArrow">
+            <a:avLst>
+              <a:gd name="adj1" fmla="val 50000"/>
+              <a:gd name="adj2" fmla="val 50000"/>
+            </a:avLst>
+          </a:prstGeom>
+          <a:solidFill>
+            <a:schemeClr val="tx1"/>
+          </a:solidFill>
+          <a:ln w="12699" cap="flat" cmpd="sng" algn="ctr">
+            <a:solidFill>
+              <a:schemeClr val="tx1"/>
+            </a:solidFill>
+            <a:prstDash val="solid"/>
+            <a:miter lim="800000"/>
+          </a:ln>
+        </p:spPr>
+        <p:style>
+          <a:lnRef idx="2">
+            <a:schemeClr val="accent1">
+              <a:shade val="50000"/>
+            </a:schemeClr>
+          </a:lnRef>
+          <a:fillRef idx="1">
+            <a:schemeClr val="accent1"/>
+          </a:fillRef>
+          <a:effectRef idx="0">
+            <a:schemeClr val="accent1"/>
+          </a:effectRef>
+          <a:fontRef idx="minor">
+            <a:schemeClr val="lt1"/>
+          </a:fontRef>
+        </p:style>
+        <p:txBody>
+          <a:bodyPr anchor="ctr"/>
+          <a:p>
+            <a:pPr algn="ctr">
+              <a:defRPr/>
+            </a:pPr>
+            <a:endParaRPr>
+              <a:latin typeface="Times New Roman"/>
+              <a:cs typeface="Times New Roman"/>
+            </a:endParaRPr>
+          </a:p>
+        </p:txBody>
+      </p:sp>
+      <p:sp>
+        <p:nvSpPr>
+          <p:cNvPr id="1878748202" name=""/>
+          <p:cNvSpPr/>
+          <p:nvPr/>
+        </p:nvSpPr>
+        <p:spPr bwMode="auto">
+          <a:xfrm rot="0" flipH="0" flipV="0">
+            <a:off x="3810955" y="2705802"/>
+            <a:ext cx="479656" cy="182232"/>
+          </a:xfrm>
+          <a:prstGeom prst="rightArrow">
+            <a:avLst>
+              <a:gd name="adj1" fmla="val 50000"/>
+              <a:gd name="adj2" fmla="val 50000"/>
+            </a:avLst>
+          </a:prstGeom>
+          <a:solidFill>
+            <a:schemeClr val="tx1"/>
+          </a:solidFill>
+          <a:ln w="12699" cap="flat" cmpd="sng" algn="ctr">
+            <a:solidFill>
+              <a:schemeClr val="tx1"/>
+            </a:solidFill>
+            <a:prstDash val="solid"/>
+            <a:miter lim="800000"/>
+          </a:ln>
+        </p:spPr>
+        <p:style>
+          <a:lnRef idx="2">
+            <a:schemeClr val="accent1">
+              <a:shade val="50000"/>
+            </a:schemeClr>
+          </a:lnRef>
+          <a:fillRef idx="1">
+            <a:schemeClr val="accent1"/>
+          </a:fillRef>
+          <a:effectRef idx="0">
+            <a:schemeClr val="accent1"/>
+          </a:effectRef>
+          <a:fontRef idx="minor">
+            <a:schemeClr val="lt1"/>
+          </a:fontRef>
+        </p:style>
+        <p:txBody>
+          <a:bodyPr anchor="ctr"/>
+          <a:p>
+            <a:pPr algn="ctr">
+              <a:defRPr/>
+            </a:pPr>
+            <a:endParaRPr>
+              <a:latin typeface="Times New Roman"/>
+              <a:cs typeface="Times New Roman"/>
+            </a:endParaRPr>
+          </a:p>
+        </p:txBody>
+      </p:sp>
+      <p:sp>
+        <p:nvSpPr>
+          <p:cNvPr id="411988997" name=""/>
+          <p:cNvSpPr/>
+          <p:nvPr/>
+        </p:nvSpPr>
+        <p:spPr bwMode="auto">
+          <a:xfrm rot="0" flipH="0" flipV="0">
+            <a:off x="6884570" y="3855825"/>
+            <a:ext cx="2322902" cy="1307350"/>
           </a:xfrm>
           <a:prstGeom prst="rect">
             <a:avLst/>
           </a:prstGeom>
           <a:gradFill>
             <a:gsLst>
-              <a:gs pos="3000">
-                <a:srgbClr val="FF0000"/>
+              <a:gs pos="19000">
+                <a:schemeClr val="tx1">
+                  <a:lumMod val="50000"/>
+                  <a:lumOff val="50000"/>
+                </a:schemeClr>
               </a:gs>
               <a:gs pos="100000">
                 <a:srgbClr val="FFFFFF"/>
@@ -3962,11 +4963,13 @@
             </a:gsLst>
             <a:lin ang="0" scaled="1"/>
           </a:gradFill>
-          <a:ln w="76199" cap="flat" cmpd="sng" algn="ctr">
+          <a:ln w="19049" cap="flat" cmpd="sng" algn="ctr">
             <a:solidFill>
-              <a:srgbClr val="FF0000">
+              <a:schemeClr val="tx1">
+                <a:lumMod val="65098"/>
+                <a:lumOff val="34902"/>
                 <a:alpha val="99999"/>
-              </a:srgbClr>
+              </a:schemeClr>
             </a:solidFill>
             <a:prstDash val="solid"/>
             <a:miter lim="800000"/>
@@ -3995,68 +4998,78 @@
               <a:defRPr/>
             </a:pPr>
             <a:r>
-              <a:rPr sz="1400" b="1">
+              <a:rPr sz="2200" b="1">
                 <a:solidFill>
                   <a:schemeClr val="tx1"/>
                 </a:solidFill>
+                <a:latin typeface="Times New Roman"/>
+                <a:ea typeface="Times New Roman"/>
+                <a:cs typeface="Times New Roman"/>
               </a:rPr>
-              <a:t>UPSAMPLER</a:t>
-            </a:r>
-            <a:endParaRPr/>
-          </a:p>
-        </p:txBody>
-      </p:sp>
-      <p:sp>
-        <p:nvSpPr>
-          <p:cNvPr id="1816975608" name=""/>
-          <p:cNvSpPr txBox="1"/>
-          <p:nvPr/>
-        </p:nvSpPr>
-        <p:spPr bwMode="auto">
-          <a:xfrm rot="0" flipH="0" flipV="0">
-            <a:off x="6374676" y="1823689"/>
-            <a:ext cx="1901590" cy="274679"/>
-          </a:xfrm>
-          <a:prstGeom prst="rect">
-            <a:avLst/>
-          </a:prstGeom>
-          <a:noFill/>
-        </p:spPr>
-        <p:txBody>
-          <a:bodyPr vertOverflow="overflow" horzOverflow="overflow" vert="horz" wrap="square" lIns="91440" tIns="45720" rIns="91440" bIns="45720" numCol="1" spcCol="0" rtlCol="0" fromWordArt="0" anchor="t" anchorCtr="0" forceAA="0" upright="0" compatLnSpc="0">
-            <a:spAutoFit/>
-          </a:bodyPr>
+              <a:t>Aligner</a:t>
+            </a:r>
+            <a:endParaRPr sz="2200" b="1">
+              <a:solidFill>
+                <a:schemeClr val="tx1"/>
+              </a:solidFill>
+              <a:latin typeface="Times New Roman"/>
+              <a:cs typeface="Times New Roman"/>
+            </a:endParaRPr>
+          </a:p>
           <a:p>
             <a:pPr algn="ctr">
               <a:defRPr/>
             </a:pPr>
             <a:r>
-              <a:rPr sz="1200"/>
-              <a:t>Batch, 768, 224, 224</a:t>
-            </a:r>
-            <a:endParaRPr sz="1200"/>
-          </a:p>
-        </p:txBody>
-      </p:sp>
-      <p:sp>
-        <p:nvSpPr>
-          <p:cNvPr id="32748186" name=""/>
+              <a:rPr lang="en-US" sz="1600" b="0" i="0" u="none" strike="noStrike" cap="none" spc="0">
+                <a:solidFill>
+                  <a:srgbClr val="000000"/>
+                </a:solidFill>
+                <a:latin typeface="Times New Roman"/>
+                <a:ea typeface="Times New Roman"/>
+                <a:cs typeface="Times New Roman"/>
+              </a:rPr>
+              <a:t>(Latent Space Projection)</a:t>
+            </a:r>
+            <a:endParaRPr sz="2200" b="1">
+              <a:solidFill>
+                <a:schemeClr val="tx1"/>
+              </a:solidFill>
+              <a:latin typeface="Times New Roman"/>
+              <a:cs typeface="Times New Roman"/>
+            </a:endParaRPr>
+          </a:p>
+        </p:txBody>
+      </p:sp>
+      <p:sp>
+        <p:nvSpPr>
+          <p:cNvPr id="163849788" name=""/>
           <p:cNvSpPr/>
           <p:nvPr/>
         </p:nvSpPr>
         <p:spPr bwMode="auto">
-          <a:xfrm rot="0" flipH="0" flipV="0">
-            <a:off x="505220" y="1302547"/>
-            <a:ext cx="1097242" cy="1042283"/>
-          </a:xfrm>
-          <a:prstGeom prst="cube">
+          <a:xfrm rot="5399978" flipH="0" flipV="0">
+            <a:off x="6259949" y="2271794"/>
+            <a:ext cx="1017867" cy="1782003"/>
+          </a:xfrm>
+          <a:prstGeom prst="bentArrow">
             <a:avLst>
-              <a:gd name="adj" fmla="val 25000"/>
+              <a:gd name="adj1" fmla="val 25000"/>
+              <a:gd name="adj2" fmla="val 25000"/>
+              <a:gd name="adj3" fmla="val 25000"/>
+              <a:gd name="adj4" fmla="val 39272"/>
             </a:avLst>
           </a:prstGeom>
           <a:solidFill>
             <a:schemeClr val="tx1"/>
           </a:solidFill>
+          <a:ln w="12700" cap="flat" cmpd="sng" algn="ctr">
+            <a:solidFill>
+              <a:schemeClr val="tx1"/>
+            </a:solidFill>
+            <a:prstDash val="solid"/>
+            <a:miter lim="800000"/>
+          </a:ln>
         </p:spPr>
         <p:style>
           <a:lnRef idx="2">
@@ -4080,33 +5093,42 @@
             <a:pPr algn="ctr">
               <a:defRPr/>
             </a:pPr>
-            <a:r>
-              <a:rPr sz="1600"/>
-              <a:t>IMG’s</a:t>
-            </a:r>
-            <a:endParaRPr/>
-          </a:p>
-        </p:txBody>
-      </p:sp>
-      <p:sp>
-        <p:nvSpPr>
-          <p:cNvPr id="726349699" name=""/>
+            <a:endParaRPr>
+              <a:latin typeface="Times New Roman"/>
+              <a:cs typeface="Times New Roman"/>
+            </a:endParaRPr>
+          </a:p>
+        </p:txBody>
+      </p:sp>
+      <p:sp>
+        <p:nvSpPr>
+          <p:cNvPr id="1952972620" name=""/>
           <p:cNvSpPr/>
           <p:nvPr/>
         </p:nvSpPr>
         <p:spPr bwMode="auto">
-          <a:xfrm rot="0" flipH="0" flipV="0">
-            <a:off x="506154" y="2451286"/>
-            <a:ext cx="1062690" cy="1129925"/>
-          </a:xfrm>
-          <a:prstGeom prst="cube">
+          <a:xfrm rot="5399978" flipH="0" flipV="1">
+            <a:off x="8722926" y="2271793"/>
+            <a:ext cx="1017866" cy="1782002"/>
+          </a:xfrm>
+          <a:prstGeom prst="bentArrow">
             <a:avLst>
-              <a:gd name="adj" fmla="val 25000"/>
+              <a:gd name="adj1" fmla="val 25000"/>
+              <a:gd name="adj2" fmla="val 25000"/>
+              <a:gd name="adj3" fmla="val 25000"/>
+              <a:gd name="adj4" fmla="val 39272"/>
             </a:avLst>
           </a:prstGeom>
           <a:solidFill>
             <a:schemeClr val="tx1"/>
           </a:solidFill>
+          <a:ln w="12700" cap="flat" cmpd="sng" algn="ctr">
+            <a:solidFill>
+              <a:schemeClr val="tx1"/>
+            </a:solidFill>
+            <a:prstDash val="solid"/>
+            <a:miter lim="800000"/>
+          </a:ln>
         </p:spPr>
         <p:style>
           <a:lnRef idx="2">
@@ -4130,62 +5152,52 @@
             <a:pPr algn="ctr">
               <a:defRPr/>
             </a:pPr>
-            <a:r>
-              <a:rPr sz="1600"/>
-              <a:t>CPT’s</a:t>
-            </a:r>
-            <a:endParaRPr/>
-          </a:p>
-        </p:txBody>
-      </p:sp>
-      <p:sp>
-        <p:nvSpPr>
-          <p:cNvPr id="669248532" name=""/>
-          <p:cNvSpPr txBox="1"/>
-          <p:nvPr/>
-        </p:nvSpPr>
-        <p:spPr bwMode="auto">
-          <a:xfrm rot="0" flipH="0" flipV="0">
-            <a:off x="336042" y="3898644"/>
-            <a:ext cx="1277940" cy="274679"/>
-          </a:xfrm>
-          <a:prstGeom prst="rect">
-            <a:avLst/>
-          </a:prstGeom>
-          <a:noFill/>
-        </p:spPr>
-        <p:txBody>
-          <a:bodyPr vertOverflow="overflow" horzOverflow="overflow" vert="horz" wrap="square" lIns="91440" tIns="45720" rIns="91440" bIns="45720" numCol="1" spcCol="0" rtlCol="0" fromWordArt="0" anchor="t" anchorCtr="0" forceAA="0" upright="0" compatLnSpc="0">
-            <a:spAutoFit/>
-          </a:bodyPr>
-          <a:p>
-            <a:pPr algn="ctr">
-              <a:defRPr/>
-            </a:pPr>
-            <a:r>
-              <a:rPr sz="1200" b="1"/>
-              <a:t>INPUT</a:t>
-            </a:r>
-            <a:endParaRPr sz="1200" b="1"/>
-          </a:p>
-        </p:txBody>
-      </p:sp>
-      <p:sp>
-        <p:nvSpPr>
-          <p:cNvPr id="228813244" name=""/>
+            <a:endParaRPr>
+              <a:latin typeface="Times New Roman"/>
+              <a:cs typeface="Times New Roman"/>
+            </a:endParaRPr>
+          </a:p>
+        </p:txBody>
+      </p:sp>
+      <p:sp>
+        <p:nvSpPr>
+          <p:cNvPr id="1427565375" name=""/>
           <p:cNvSpPr/>
           <p:nvPr/>
         </p:nvSpPr>
         <p:spPr bwMode="auto">
-          <a:xfrm rot="0" flipH="0" flipV="0">
-            <a:off x="5134115" y="3094574"/>
-            <a:ext cx="662293" cy="668850"/>
-          </a:xfrm>
-          <a:prstGeom prst="cube">
+          <a:xfrm rot="7959655" flipH="0" flipV="0">
+            <a:off x="1401051" y="1429554"/>
+            <a:ext cx="858220" cy="858637"/>
+          </a:xfrm>
+          <a:prstGeom prst="leftUpArrow">
             <a:avLst>
-              <a:gd name="adj" fmla="val 25000"/>
+              <a:gd name="adj1" fmla="val 25000"/>
+              <a:gd name="adj2" fmla="val 25000"/>
+              <a:gd name="adj3" fmla="val 25000"/>
             </a:avLst>
           </a:prstGeom>
+          <a:gradFill>
+            <a:gsLst>
+              <a:gs pos="0">
+                <a:schemeClr val="accent1"/>
+              </a:gs>
+              <a:gs pos="100000">
+                <a:schemeClr val="accent2"/>
+              </a:gs>
+            </a:gsLst>
+            <a:lin ang="0" scaled="1"/>
+          </a:gradFill>
+          <a:ln w="12700" cap="flat" cmpd="sng" algn="ctr">
+            <a:solidFill>
+              <a:schemeClr val="accent1">
+                <a:shade val="50000"/>
+                <a:alpha val="99999"/>
+              </a:schemeClr>
+            </a:solidFill>
+            <a:prstDash val="solid"/>
+            <a:miter lim="800000"/>
+          </a:ln>
         </p:spPr>
         <p:style>
           <a:lnRef idx="2">
@@ -4203,26 +5215,17 @@
             <a:schemeClr val="lt1"/>
           </a:fontRef>
         </p:style>
-        <p:txBody>
-          <a:bodyPr anchor="ctr"/>
-          <a:p>
-            <a:pPr algn="ctr">
-              <a:defRPr/>
-            </a:pPr>
-            <a:endParaRPr/>
-          </a:p>
-        </p:txBody>
-      </p:sp>
-      <p:sp>
-        <p:nvSpPr>
-          <p:cNvPr id="136220831" name=""/>
+      </p:sp>
+      <p:sp>
+        <p:nvSpPr>
+          <p:cNvPr id="1323560613" name=""/>
           <p:cNvSpPr txBox="1"/>
           <p:nvPr/>
         </p:nvSpPr>
         <p:spPr bwMode="auto">
           <a:xfrm rot="0" flipH="0" flipV="0">
-            <a:off x="4387681" y="82293"/>
-            <a:ext cx="2817457" cy="274679"/>
+            <a:off x="4981050" y="72956"/>
+            <a:ext cx="1840568" cy="366119"/>
           </a:xfrm>
           <a:prstGeom prst="rect">
             <a:avLst/>
@@ -4238,10 +5241,2315 @@
               <a:defRPr/>
             </a:pPr>
             <a:r>
-              <a:rPr sz="1200" b="1"/>
-              <a:t>FOWARD PROCESS IN TRAINING</a:t>
-            </a:r>
-            <a:endParaRPr sz="1200" b="1"/>
+              <a:rPr sz="1800" b="1">
+                <a:latin typeface="Times New Roman"/>
+                <a:cs typeface="Times New Roman"/>
+              </a:rPr>
+              <a:t>TRAINING</a:t>
+            </a:r>
+            <a:endParaRPr sz="1800" b="1">
+              <a:latin typeface="Times New Roman"/>
+              <a:cs typeface="Times New Roman"/>
+            </a:endParaRPr>
+          </a:p>
+        </p:txBody>
+      </p:sp>
+      <p:sp>
+        <p:nvSpPr>
+          <p:cNvPr id="1629433810" name=""/>
+          <p:cNvSpPr/>
+          <p:nvPr/>
+        </p:nvSpPr>
+        <p:spPr bwMode="auto">
+          <a:xfrm rot="0" flipH="0" flipV="0">
+            <a:off x="7406340" y="5832788"/>
+            <a:ext cx="1425668" cy="461181"/>
+          </a:xfrm>
+          <a:prstGeom prst="rect">
+            <a:avLst/>
+          </a:prstGeom>
+          <a:gradFill>
+            <a:gsLst>
+              <a:gs pos="19000">
+                <a:schemeClr val="tx1">
+                  <a:lumMod val="50000"/>
+                  <a:lumOff val="50000"/>
+                </a:schemeClr>
+              </a:gs>
+              <a:gs pos="100000">
+                <a:srgbClr val="FFFFFF"/>
+              </a:gs>
+            </a:gsLst>
+            <a:lin ang="0" scaled="1"/>
+          </a:gradFill>
+          <a:ln w="19049" cap="flat" cmpd="sng" algn="ctr">
+            <a:solidFill>
+              <a:schemeClr val="tx1">
+                <a:lumMod val="65098"/>
+                <a:lumOff val="34902"/>
+                <a:alpha val="99999"/>
+              </a:schemeClr>
+            </a:solidFill>
+            <a:prstDash val="solid"/>
+            <a:miter lim="800000"/>
+          </a:ln>
+        </p:spPr>
+        <p:style>
+          <a:lnRef idx="2">
+            <a:schemeClr val="accent1">
+              <a:shade val="50000"/>
+            </a:schemeClr>
+          </a:lnRef>
+          <a:fillRef idx="1">
+            <a:schemeClr val="accent1"/>
+          </a:fillRef>
+          <a:effectRef idx="0">
+            <a:schemeClr val="accent1"/>
+          </a:effectRef>
+          <a:fontRef idx="minor">
+            <a:schemeClr val="lt1"/>
+          </a:fontRef>
+        </p:style>
+        <p:txBody>
+          <a:bodyPr anchor="ctr"/>
+          <a:p>
+            <a:pPr algn="ctr">
+              <a:defRPr/>
+            </a:pPr>
+            <a:r>
+              <a:rPr lang="en-US" sz="1600" b="0" i="0" u="none" strike="noStrike" cap="none" spc="0">
+                <a:solidFill>
+                  <a:srgbClr val="000000"/>
+                </a:solidFill>
+                <a:latin typeface="Times New Roman"/>
+                <a:ea typeface="Times New Roman"/>
+                <a:cs typeface="Times New Roman"/>
+              </a:rPr>
+              <a:t>Constrative loss</a:t>
+            </a:r>
+            <a:endParaRPr sz="2200" b="1">
+              <a:solidFill>
+                <a:schemeClr val="tx1"/>
+              </a:solidFill>
+              <a:latin typeface="Times New Roman"/>
+              <a:cs typeface="Times New Roman"/>
+            </a:endParaRPr>
+          </a:p>
+        </p:txBody>
+      </p:sp>
+      <p:sp>
+        <p:nvSpPr>
+          <p:cNvPr id="147346234" name=""/>
+          <p:cNvSpPr/>
+          <p:nvPr/>
+        </p:nvSpPr>
+        <p:spPr bwMode="auto">
+          <a:xfrm rot="5399978" flipH="0" flipV="0">
+            <a:off x="7865630" y="5429234"/>
+            <a:ext cx="507087" cy="182232"/>
+          </a:xfrm>
+          <a:prstGeom prst="rightArrow">
+            <a:avLst>
+              <a:gd name="adj1" fmla="val 50000"/>
+              <a:gd name="adj2" fmla="val 50000"/>
+            </a:avLst>
+          </a:prstGeom>
+          <a:solidFill>
+            <a:schemeClr val="tx1"/>
+          </a:solidFill>
+          <a:ln w="12699" cap="flat" cmpd="sng" algn="ctr">
+            <a:solidFill>
+              <a:schemeClr val="tx1"/>
+            </a:solidFill>
+            <a:prstDash val="solid"/>
+            <a:miter lim="800000"/>
+          </a:ln>
+        </p:spPr>
+        <p:style>
+          <a:lnRef idx="2">
+            <a:schemeClr val="accent1">
+              <a:shade val="50000"/>
+            </a:schemeClr>
+          </a:lnRef>
+          <a:fillRef idx="1">
+            <a:schemeClr val="accent1"/>
+          </a:fillRef>
+          <a:effectRef idx="0">
+            <a:schemeClr val="accent1"/>
+          </a:effectRef>
+          <a:fontRef idx="minor">
+            <a:schemeClr val="lt1"/>
+          </a:fontRef>
+        </p:style>
+        <p:txBody>
+          <a:bodyPr anchor="ctr"/>
+          <a:p>
+            <a:pPr algn="ctr">
+              <a:defRPr/>
+            </a:pPr>
+            <a:endParaRPr>
+              <a:latin typeface="Times New Roman"/>
+              <a:cs typeface="Times New Roman"/>
+            </a:endParaRPr>
+          </a:p>
+        </p:txBody>
+      </p:sp>
+    </p:spTree>
+  </p:cSld>
+  <p:clrMapOvr>
+    <a:masterClrMapping/>
+  </p:clrMapOvr>
+  <mc:AlternateContent xmlns:mc="http://schemas.openxmlformats.org/markup-compatibility/2006">
+    <mc:Choice xmlns:p159="http://schemas.microsoft.com/office/powerpoint/2015/09/main" xmlns:p14="http://schemas.microsoft.com/office/powerpoint/2010/main" Requires="p159">
+      <p:transition p14:dur="2000" advClick="1"/>
+    </mc:Choice>
+    <mc:Fallback>
+      <p:transition advClick="1"/>
+    </mc:Fallback>
+  </mc:AlternateContent>
+</p:sld>
+</file>
+
+<file path=ppt/slides/slide2.xml><?xml version="1.0" encoding="utf-8"?>
+<p:sld xmlns:a="http://schemas.openxmlformats.org/drawingml/2006/main" xmlns:r="http://schemas.openxmlformats.org/officeDocument/2006/relationships" xmlns:p="http://schemas.openxmlformats.org/presentationml/2006/main" xmlns:m="http://schemas.openxmlformats.org/officeDocument/2006/math" xmlns:w="http://schemas.openxmlformats.org/wordprocessingml/2006/main" xmlns:mc="http://schemas.openxmlformats.org/markup-compatibility/2006" showMasterPhAnim="0" showMasterSp="1" show="1">
+  <p:cSld name="">
+    <p:spTree>
+      <p:nvGrpSpPr>
+        <p:cNvPr id="1" name=""/>
+        <p:cNvGrpSpPr/>
+        <p:nvPr/>
+      </p:nvGrpSpPr>
+      <p:grpSpPr bwMode="auto">
+        <a:xfrm>
+          <a:off x="0" y="0"/>
+          <a:ext cx="0" cy="0"/>
+          <a:chOff x="0" y="0"/>
+          <a:chExt cx="0" cy="0"/>
+        </a:xfrm>
+      </p:grpSpPr>
+      <p:sp>
+        <p:nvSpPr>
+          <p:cNvPr id="1244737966" name=""/>
+          <p:cNvSpPr/>
+          <p:nvPr/>
+        </p:nvSpPr>
+        <p:spPr bwMode="auto">
+          <a:xfrm rot="0" flipH="0" flipV="0">
+            <a:off x="1825935" y="1251902"/>
+            <a:ext cx="1604841" cy="990718"/>
+          </a:xfrm>
+          <a:prstGeom prst="rect">
+            <a:avLst/>
+          </a:prstGeom>
+          <a:gradFill>
+            <a:gsLst>
+              <a:gs pos="19000">
+                <a:schemeClr val="tx1">
+                  <a:lumMod val="50000"/>
+                  <a:lumOff val="50000"/>
+                </a:schemeClr>
+              </a:gs>
+              <a:gs pos="100000">
+                <a:srgbClr val="FFFFFF"/>
+              </a:gs>
+            </a:gsLst>
+            <a:lin ang="0" scaled="1"/>
+          </a:gradFill>
+          <a:ln w="19049" cap="flat" cmpd="sng" algn="ctr">
+            <a:solidFill>
+              <a:schemeClr val="tx1">
+                <a:lumMod val="65098"/>
+                <a:lumOff val="34902"/>
+                <a:alpha val="99999"/>
+              </a:schemeClr>
+            </a:solidFill>
+            <a:prstDash val="solid"/>
+            <a:miter lim="800000"/>
+          </a:ln>
+        </p:spPr>
+        <p:style>
+          <a:lnRef idx="2">
+            <a:schemeClr val="accent1">
+              <a:shade val="50000"/>
+            </a:schemeClr>
+          </a:lnRef>
+          <a:fillRef idx="1">
+            <a:schemeClr val="accent1"/>
+          </a:fillRef>
+          <a:effectRef idx="0">
+            <a:schemeClr val="accent1"/>
+          </a:effectRef>
+          <a:fontRef idx="minor">
+            <a:schemeClr val="lt1"/>
+          </a:fontRef>
+        </p:style>
+        <p:txBody>
+          <a:bodyPr anchor="ctr"/>
+          <a:p>
+            <a:pPr algn="ctr">
+              <a:defRPr/>
+            </a:pPr>
+            <a:r>
+              <a:rPr lang="en-US" sz="1600" b="0" i="0" u="none" strike="noStrike" cap="none" spc="0">
+                <a:solidFill>
+                  <a:srgbClr val="000000"/>
+                </a:solidFill>
+                <a:latin typeface="Times New Roman"/>
+                <a:ea typeface="Times New Roman"/>
+                <a:cs typeface="Times New Roman"/>
+              </a:rPr>
+              <a:t>Affine linear transformation</a:t>
+            </a:r>
+            <a:endParaRPr sz="2200" b="1">
+              <a:solidFill>
+                <a:schemeClr val="tx1"/>
+              </a:solidFill>
+              <a:latin typeface="Times New Roman"/>
+              <a:cs typeface="Times New Roman"/>
+            </a:endParaRPr>
+          </a:p>
+        </p:txBody>
+      </p:sp>
+      <p:sp>
+        <p:nvSpPr>
+          <p:cNvPr id="330789754" name=""/>
+          <p:cNvSpPr/>
+          <p:nvPr/>
+        </p:nvSpPr>
+        <p:spPr bwMode="auto">
+          <a:xfrm rot="0" flipH="0" flipV="0">
+            <a:off x="351870" y="979648"/>
+            <a:ext cx="624199" cy="544507"/>
+          </a:xfrm>
+          <a:prstGeom prst="cube">
+            <a:avLst>
+              <a:gd name="adj" fmla="val 25000"/>
+            </a:avLst>
+          </a:prstGeom>
+          <a:solidFill>
+            <a:schemeClr val="accent2">
+              <a:lumMod val="60000"/>
+              <a:lumOff val="40000"/>
+            </a:schemeClr>
+          </a:solidFill>
+          <a:ln w="12700" cap="flat" cmpd="sng" algn="ctr">
+            <a:solidFill>
+              <a:schemeClr val="tx1"/>
+            </a:solidFill>
+            <a:prstDash val="solid"/>
+            <a:miter lim="800000"/>
+          </a:ln>
+        </p:spPr>
+        <p:style>
+          <a:lnRef idx="2">
+            <a:schemeClr val="accent1">
+              <a:shade val="50000"/>
+            </a:schemeClr>
+          </a:lnRef>
+          <a:fillRef idx="1">
+            <a:schemeClr val="accent1"/>
+          </a:fillRef>
+          <a:effectRef idx="0">
+            <a:schemeClr val="accent1"/>
+          </a:effectRef>
+          <a:fontRef idx="minor">
+            <a:schemeClr val="lt1"/>
+          </a:fontRef>
+        </p:style>
+        <p:txBody>
+          <a:bodyPr anchor="ctr"/>
+          <a:p>
+            <a:pPr algn="ctr">
+              <a:defRPr/>
+            </a:pPr>
+            <a:endParaRPr>
+              <a:latin typeface="Times New Roman"/>
+              <a:cs typeface="Times New Roman"/>
+            </a:endParaRPr>
+          </a:p>
+        </p:txBody>
+      </p:sp>
+      <p:sp>
+        <p:nvSpPr>
+          <p:cNvPr id="191813478" name=""/>
+          <p:cNvSpPr/>
+          <p:nvPr/>
+        </p:nvSpPr>
+        <p:spPr bwMode="auto">
+          <a:xfrm rot="0" flipH="0" flipV="0">
+            <a:off x="463929" y="1655854"/>
+            <a:ext cx="400081" cy="632013"/>
+          </a:xfrm>
+          <a:prstGeom prst="cube">
+            <a:avLst>
+              <a:gd name="adj" fmla="val 25000"/>
+            </a:avLst>
+          </a:prstGeom>
+          <a:ln w="12700" cap="flat" cmpd="sng" algn="ctr">
+            <a:solidFill>
+              <a:schemeClr val="tx1"/>
+            </a:solidFill>
+            <a:prstDash val="solid"/>
+            <a:miter lim="800000"/>
+          </a:ln>
+        </p:spPr>
+        <p:style>
+          <a:lnRef idx="2">
+            <a:schemeClr val="accent1">
+              <a:shade val="50000"/>
+            </a:schemeClr>
+          </a:lnRef>
+          <a:fillRef idx="1">
+            <a:schemeClr val="accent1"/>
+          </a:fillRef>
+          <a:effectRef idx="0">
+            <a:schemeClr val="accent1"/>
+          </a:effectRef>
+          <a:fontRef idx="minor">
+            <a:schemeClr val="lt1"/>
+          </a:fontRef>
+        </p:style>
+        <p:txBody>
+          <a:bodyPr anchor="ctr"/>
+          <a:p>
+            <a:pPr algn="ctr">
+              <a:defRPr/>
+            </a:pPr>
+            <a:endParaRPr>
+              <a:latin typeface="Times New Roman"/>
+              <a:cs typeface="Times New Roman"/>
+            </a:endParaRPr>
+          </a:p>
+        </p:txBody>
+      </p:sp>
+      <p:sp>
+        <p:nvSpPr>
+          <p:cNvPr id="1825126795" name=""/>
+          <p:cNvSpPr/>
+          <p:nvPr/>
+        </p:nvSpPr>
+        <p:spPr bwMode="auto">
+          <a:xfrm rot="0" flipH="0" flipV="0">
+            <a:off x="267826" y="812426"/>
+            <a:ext cx="812426" cy="1624852"/>
+          </a:xfrm>
+          <a:prstGeom prst="flowChartAlternateProcess">
+            <a:avLst/>
+          </a:prstGeom>
+          <a:noFill/>
+          <a:ln w="19049" cap="flat" cmpd="sng" algn="ctr">
+            <a:solidFill>
+              <a:schemeClr val="tx1"/>
+            </a:solidFill>
+            <a:prstDash val="solid"/>
+            <a:miter lim="800000"/>
+          </a:ln>
+        </p:spPr>
+        <p:style>
+          <a:lnRef idx="2">
+            <a:schemeClr val="accent1">
+              <a:shade val="50000"/>
+            </a:schemeClr>
+          </a:lnRef>
+          <a:fillRef idx="1">
+            <a:schemeClr val="accent1"/>
+          </a:fillRef>
+          <a:effectRef idx="0">
+            <a:schemeClr val="accent1"/>
+          </a:effectRef>
+          <a:fontRef idx="minor">
+            <a:schemeClr val="lt1"/>
+          </a:fontRef>
+        </p:style>
+      </p:sp>
+      <p:sp>
+        <p:nvSpPr>
+          <p:cNvPr id="1058035739" name=""/>
+          <p:cNvSpPr txBox="1"/>
+          <p:nvPr/>
+        </p:nvSpPr>
+        <p:spPr bwMode="auto">
+          <a:xfrm rot="0" flipH="0" flipV="0">
+            <a:off x="28960" y="2525924"/>
+            <a:ext cx="1295219" cy="731879"/>
+          </a:xfrm>
+          <a:prstGeom prst="rect">
+            <a:avLst/>
+          </a:prstGeom>
+          <a:noFill/>
+        </p:spPr>
+        <p:txBody>
+          <a:bodyPr vertOverflow="overflow" horzOverflow="overflow" vert="horz" wrap="square" lIns="91440" tIns="45720" rIns="91440" bIns="45720" numCol="1" spcCol="0" rtlCol="0" fromWordArt="0" anchor="t" anchorCtr="0" forceAA="0" upright="0" compatLnSpc="0">
+            <a:spAutoFit/>
+          </a:bodyPr>
+          <a:p>
+            <a:pPr algn="ctr">
+              <a:defRPr/>
+            </a:pPr>
+            <a:r>
+              <a:rPr sz="1400">
+                <a:latin typeface="Times New Roman"/>
+                <a:cs typeface="Times New Roman"/>
+              </a:rPr>
+              <a:t>Embeddings</a:t>
+            </a:r>
+            <a:endParaRPr sz="1400">
+              <a:latin typeface="Times New Roman"/>
+              <a:cs typeface="Times New Roman"/>
+            </a:endParaRPr>
+          </a:p>
+          <a:p>
+            <a:pPr algn="ctr">
+              <a:defRPr/>
+            </a:pPr>
+            <a:r>
+              <a:rPr sz="1400">
+                <a:latin typeface="Times New Roman"/>
+                <a:cs typeface="Times New Roman"/>
+              </a:rPr>
+              <a:t>with mismatch shapes</a:t>
+            </a:r>
+            <a:endParaRPr sz="1400">
+              <a:latin typeface="Times New Roman"/>
+              <a:cs typeface="Times New Roman"/>
+            </a:endParaRPr>
+          </a:p>
+        </p:txBody>
+      </p:sp>
+      <p:sp>
+        <p:nvSpPr>
+          <p:cNvPr id="661828217" name=""/>
+          <p:cNvSpPr/>
+          <p:nvPr/>
+        </p:nvSpPr>
+        <p:spPr bwMode="auto">
+          <a:xfrm rot="0" flipH="0" flipV="0">
+            <a:off x="4289461" y="979648"/>
+            <a:ext cx="624198" cy="544506"/>
+          </a:xfrm>
+          <a:prstGeom prst="cube">
+            <a:avLst>
+              <a:gd name="adj" fmla="val 25000"/>
+            </a:avLst>
+          </a:prstGeom>
+          <a:solidFill>
+            <a:schemeClr val="accent2">
+              <a:lumMod val="60000"/>
+              <a:lumOff val="40000"/>
+            </a:schemeClr>
+          </a:solidFill>
+          <a:ln w="12700" cap="flat" cmpd="sng" algn="ctr">
+            <a:solidFill>
+              <a:schemeClr val="tx1"/>
+            </a:solidFill>
+            <a:prstDash val="solid"/>
+            <a:miter lim="800000"/>
+          </a:ln>
+        </p:spPr>
+        <p:style>
+          <a:lnRef idx="2">
+            <a:schemeClr val="accent1">
+              <a:shade val="50000"/>
+            </a:schemeClr>
+          </a:lnRef>
+          <a:fillRef idx="1">
+            <a:schemeClr val="accent1"/>
+          </a:fillRef>
+          <a:effectRef idx="0">
+            <a:schemeClr val="accent1"/>
+          </a:effectRef>
+          <a:fontRef idx="minor">
+            <a:schemeClr val="lt1"/>
+          </a:fontRef>
+        </p:style>
+        <p:txBody>
+          <a:bodyPr anchor="ctr"/>
+          <a:p>
+            <a:pPr algn="ctr">
+              <a:defRPr/>
+            </a:pPr>
+            <a:endParaRPr>
+              <a:latin typeface="Times New Roman"/>
+              <a:cs typeface="Times New Roman"/>
+            </a:endParaRPr>
+          </a:p>
+        </p:txBody>
+      </p:sp>
+      <p:sp>
+        <p:nvSpPr>
+          <p:cNvPr id="188468614" name=""/>
+          <p:cNvSpPr/>
+          <p:nvPr/>
+        </p:nvSpPr>
+        <p:spPr bwMode="auto">
+          <a:xfrm rot="0" flipH="0" flipV="0">
+            <a:off x="4205418" y="812426"/>
+            <a:ext cx="812425" cy="1624851"/>
+          </a:xfrm>
+          <a:prstGeom prst="flowChartAlternateProcess">
+            <a:avLst/>
+          </a:prstGeom>
+          <a:noFill/>
+          <a:ln w="19049" cap="flat" cmpd="sng" algn="ctr">
+            <a:solidFill>
+              <a:schemeClr val="tx1"/>
+            </a:solidFill>
+            <a:prstDash val="solid"/>
+            <a:miter lim="800000"/>
+          </a:ln>
+        </p:spPr>
+        <p:style>
+          <a:lnRef idx="2">
+            <a:schemeClr val="accent1">
+              <a:shade val="50000"/>
+            </a:schemeClr>
+          </a:lnRef>
+          <a:fillRef idx="1">
+            <a:schemeClr val="accent1"/>
+          </a:fillRef>
+          <a:effectRef idx="0">
+            <a:schemeClr val="accent1"/>
+          </a:effectRef>
+          <a:fontRef idx="minor">
+            <a:schemeClr val="lt1"/>
+          </a:fontRef>
+        </p:style>
+      </p:sp>
+      <p:sp>
+        <p:nvSpPr>
+          <p:cNvPr id="420476364" name=""/>
+          <p:cNvSpPr txBox="1"/>
+          <p:nvPr/>
+        </p:nvSpPr>
+        <p:spPr bwMode="auto">
+          <a:xfrm rot="0" flipH="0" flipV="0">
+            <a:off x="3966552" y="2525924"/>
+            <a:ext cx="1284778" cy="731879"/>
+          </a:xfrm>
+          <a:prstGeom prst="rect">
+            <a:avLst/>
+          </a:prstGeom>
+          <a:noFill/>
+        </p:spPr>
+        <p:txBody>
+          <a:bodyPr vertOverflow="overflow" horzOverflow="overflow" vert="horz" wrap="square" lIns="91440" tIns="45720" rIns="91440" bIns="45720" numCol="1" spcCol="0" rtlCol="0" fromWordArt="0" anchor="t" anchorCtr="0" forceAA="0" upright="0" compatLnSpc="0">
+            <a:spAutoFit/>
+          </a:bodyPr>
+          <a:p>
+            <a:pPr algn="ctr">
+              <a:defRPr/>
+            </a:pPr>
+            <a:r>
+              <a:rPr lang="en-US" sz="1400" b="0" i="0" u="none" strike="noStrike" cap="none" spc="0">
+                <a:solidFill>
+                  <a:schemeClr val="tx1"/>
+                </a:solidFill>
+                <a:latin typeface="Times New Roman"/>
+                <a:ea typeface="Times New Roman"/>
+                <a:cs typeface="Times New Roman"/>
+              </a:rPr>
+              <a:t>Embeddings</a:t>
+            </a:r>
+            <a:endParaRPr sz="1400">
+              <a:latin typeface="Times New Roman"/>
+              <a:cs typeface="Times New Roman"/>
+            </a:endParaRPr>
+          </a:p>
+          <a:p>
+            <a:pPr algn="ctr">
+              <a:defRPr/>
+            </a:pPr>
+            <a:r>
+              <a:rPr lang="en-US" sz="1400" b="0" i="0" u="none" strike="noStrike" cap="none" spc="0">
+                <a:solidFill>
+                  <a:schemeClr val="tx1"/>
+                </a:solidFill>
+                <a:latin typeface="Times New Roman"/>
+                <a:ea typeface="Times New Roman"/>
+                <a:cs typeface="Times New Roman"/>
+              </a:rPr>
+              <a:t>with match shapes</a:t>
+            </a:r>
+            <a:endParaRPr sz="1400">
+              <a:latin typeface="Times New Roman"/>
+              <a:cs typeface="Times New Roman"/>
+            </a:endParaRPr>
+          </a:p>
+        </p:txBody>
+      </p:sp>
+      <p:sp>
+        <p:nvSpPr>
+          <p:cNvPr id="1169719554" name=""/>
+          <p:cNvSpPr/>
+          <p:nvPr/>
+        </p:nvSpPr>
+        <p:spPr bwMode="auto">
+          <a:xfrm rot="0" flipH="0" flipV="0">
+            <a:off x="4289461" y="1747261"/>
+            <a:ext cx="624198" cy="544506"/>
+          </a:xfrm>
+          <a:prstGeom prst="cube">
+            <a:avLst>
+              <a:gd name="adj" fmla="val 25000"/>
+            </a:avLst>
+          </a:prstGeom>
+          <a:solidFill>
+            <a:schemeClr val="accent1"/>
+          </a:solidFill>
+          <a:ln w="12700" cap="flat" cmpd="sng" algn="ctr">
+            <a:solidFill>
+              <a:schemeClr val="tx1"/>
+            </a:solidFill>
+            <a:prstDash val="solid"/>
+            <a:miter lim="800000"/>
+          </a:ln>
+        </p:spPr>
+        <p:style>
+          <a:lnRef idx="2">
+            <a:schemeClr val="accent1">
+              <a:shade val="50000"/>
+            </a:schemeClr>
+          </a:lnRef>
+          <a:fillRef idx="1">
+            <a:schemeClr val="accent1"/>
+          </a:fillRef>
+          <a:effectRef idx="0">
+            <a:schemeClr val="accent1"/>
+          </a:effectRef>
+          <a:fontRef idx="minor">
+            <a:schemeClr val="lt1"/>
+          </a:fontRef>
+        </p:style>
+        <p:txBody>
+          <a:bodyPr anchor="ctr"/>
+          <a:p>
+            <a:pPr algn="ctr">
+              <a:defRPr/>
+            </a:pPr>
+            <a:endParaRPr>
+              <a:latin typeface="Times New Roman"/>
+              <a:cs typeface="Times New Roman"/>
+            </a:endParaRPr>
+          </a:p>
+        </p:txBody>
+      </p:sp>
+      <p:sp>
+        <p:nvSpPr>
+          <p:cNvPr id="1234066283" name=""/>
+          <p:cNvSpPr/>
+          <p:nvPr/>
+        </p:nvSpPr>
+        <p:spPr bwMode="auto">
+          <a:xfrm rot="0" flipH="0" flipV="0">
+            <a:off x="1196249" y="1624852"/>
+            <a:ext cx="479656" cy="182232"/>
+          </a:xfrm>
+          <a:prstGeom prst="rightArrow">
+            <a:avLst>
+              <a:gd name="adj1" fmla="val 50000"/>
+              <a:gd name="adj2" fmla="val 50000"/>
+            </a:avLst>
+          </a:prstGeom>
+          <a:solidFill>
+            <a:schemeClr val="tx1"/>
+          </a:solidFill>
+          <a:ln w="12699" cap="flat" cmpd="sng" algn="ctr">
+            <a:solidFill>
+              <a:schemeClr val="tx1"/>
+            </a:solidFill>
+            <a:prstDash val="solid"/>
+            <a:miter lim="800000"/>
+          </a:ln>
+        </p:spPr>
+        <p:style>
+          <a:lnRef idx="2">
+            <a:schemeClr val="accent1">
+              <a:shade val="50000"/>
+            </a:schemeClr>
+          </a:lnRef>
+          <a:fillRef idx="1">
+            <a:schemeClr val="accent1"/>
+          </a:fillRef>
+          <a:effectRef idx="0">
+            <a:schemeClr val="accent1"/>
+          </a:effectRef>
+          <a:fontRef idx="minor">
+            <a:schemeClr val="lt1"/>
+          </a:fontRef>
+        </p:style>
+        <p:txBody>
+          <a:bodyPr anchor="ctr"/>
+          <a:p>
+            <a:pPr algn="ctr">
+              <a:defRPr/>
+            </a:pPr>
+            <a:endParaRPr>
+              <a:latin typeface="Times New Roman"/>
+              <a:cs typeface="Times New Roman"/>
+            </a:endParaRPr>
+          </a:p>
+        </p:txBody>
+      </p:sp>
+      <p:sp>
+        <p:nvSpPr>
+          <p:cNvPr id="1605695488" name=""/>
+          <p:cNvSpPr/>
+          <p:nvPr/>
+        </p:nvSpPr>
+        <p:spPr bwMode="auto">
+          <a:xfrm rot="0" flipH="0" flipV="0">
+            <a:off x="3571126" y="1624852"/>
+            <a:ext cx="479656" cy="182232"/>
+          </a:xfrm>
+          <a:prstGeom prst="rightArrow">
+            <a:avLst>
+              <a:gd name="adj1" fmla="val 50000"/>
+              <a:gd name="adj2" fmla="val 50000"/>
+            </a:avLst>
+          </a:prstGeom>
+          <a:solidFill>
+            <a:schemeClr val="tx1"/>
+          </a:solidFill>
+          <a:ln w="12699" cap="flat" cmpd="sng" algn="ctr">
+            <a:solidFill>
+              <a:schemeClr val="tx1"/>
+            </a:solidFill>
+            <a:prstDash val="solid"/>
+            <a:miter lim="800000"/>
+          </a:ln>
+        </p:spPr>
+        <p:style>
+          <a:lnRef idx="2">
+            <a:schemeClr val="accent1">
+              <a:shade val="50000"/>
+            </a:schemeClr>
+          </a:lnRef>
+          <a:fillRef idx="1">
+            <a:schemeClr val="accent1"/>
+          </a:fillRef>
+          <a:effectRef idx="0">
+            <a:schemeClr val="accent1"/>
+          </a:effectRef>
+          <a:fontRef idx="minor">
+            <a:schemeClr val="lt1"/>
+          </a:fontRef>
+        </p:style>
+        <p:txBody>
+          <a:bodyPr anchor="ctr"/>
+          <a:p>
+            <a:pPr algn="ctr">
+              <a:defRPr/>
+            </a:pPr>
+            <a:endParaRPr>
+              <a:latin typeface="Times New Roman"/>
+              <a:cs typeface="Times New Roman"/>
+            </a:endParaRPr>
+          </a:p>
+        </p:txBody>
+      </p:sp>
+      <p:sp>
+        <p:nvSpPr>
+          <p:cNvPr id="2091639205" name=""/>
+          <p:cNvSpPr txBox="1"/>
+          <p:nvPr/>
+        </p:nvSpPr>
+        <p:spPr bwMode="auto">
+          <a:xfrm rot="0" flipH="0" flipV="0">
+            <a:off x="1984167" y="2284698"/>
+            <a:ext cx="1288378" cy="305159"/>
+          </a:xfrm>
+          <a:prstGeom prst="rect">
+            <a:avLst/>
+          </a:prstGeom>
+          <a:noFill/>
+        </p:spPr>
+        <p:txBody>
+          <a:bodyPr vertOverflow="overflow" horzOverflow="overflow" vert="horz" wrap="square" lIns="91440" tIns="45720" rIns="91440" bIns="45720" numCol="1" spcCol="0" rtlCol="0" fromWordArt="0" anchor="t" anchorCtr="0" forceAA="0" upright="0" compatLnSpc="0">
+            <a:spAutoFit/>
+          </a:bodyPr>
+          <a:p>
+            <a:pPr algn="ctr">
+              <a:defRPr/>
+            </a:pPr>
+            <a:r>
+              <a:rPr sz="1400">
+                <a:latin typeface="Times New Roman"/>
+                <a:cs typeface="Times New Roman"/>
+              </a:rPr>
+              <a:t>(Bias = True)</a:t>
+            </a:r>
+            <a:endParaRPr sz="1400">
+              <a:latin typeface="Times New Roman"/>
+              <a:cs typeface="Times New Roman"/>
+            </a:endParaRPr>
+          </a:p>
+        </p:txBody>
+      </p:sp>
+      <p:sp>
+        <p:nvSpPr>
+          <p:cNvPr id="456457995" name=""/>
+          <p:cNvSpPr/>
+          <p:nvPr/>
+        </p:nvSpPr>
+        <p:spPr bwMode="auto">
+          <a:xfrm rot="0" flipH="0" flipV="0">
+            <a:off x="6095999" y="922917"/>
+            <a:ext cx="1412400" cy="1603007"/>
+          </a:xfrm>
+          <a:prstGeom prst="rect">
+            <a:avLst/>
+          </a:prstGeom>
+          <a:gradFill>
+            <a:gsLst>
+              <a:gs pos="19000">
+                <a:schemeClr val="tx1">
+                  <a:lumMod val="50000"/>
+                  <a:lumOff val="50000"/>
+                </a:schemeClr>
+              </a:gs>
+              <a:gs pos="100000">
+                <a:srgbClr val="FFFFFF"/>
+              </a:gs>
+            </a:gsLst>
+            <a:lin ang="0" scaled="1"/>
+          </a:gradFill>
+          <a:ln w="19049" cap="flat" cmpd="sng" algn="ctr">
+            <a:solidFill>
+              <a:schemeClr val="tx1">
+                <a:lumMod val="65098"/>
+                <a:lumOff val="34902"/>
+                <a:alpha val="99999"/>
+              </a:schemeClr>
+            </a:solidFill>
+            <a:prstDash val="solid"/>
+            <a:miter lim="800000"/>
+          </a:ln>
+        </p:spPr>
+        <p:style>
+          <a:lnRef idx="2">
+            <a:schemeClr val="accent1">
+              <a:shade val="50000"/>
+            </a:schemeClr>
+          </a:lnRef>
+          <a:fillRef idx="1">
+            <a:schemeClr val="accent1"/>
+          </a:fillRef>
+          <a:effectRef idx="0">
+            <a:schemeClr val="accent1"/>
+          </a:effectRef>
+          <a:fontRef idx="minor">
+            <a:schemeClr val="lt1"/>
+          </a:fontRef>
+        </p:style>
+        <p:txBody>
+          <a:bodyPr anchor="ctr"/>
+          <a:p>
+            <a:pPr algn="ctr">
+              <a:defRPr/>
+            </a:pPr>
+            <a:r>
+              <a:rPr lang="en-US" sz="2400" b="0" i="0" u="none" strike="noStrike" cap="none" spc="0">
+                <a:solidFill>
+                  <a:srgbClr val="000000"/>
+                </a:solidFill>
+                <a:latin typeface="Times New Roman"/>
+                <a:ea typeface="Times New Roman"/>
+                <a:cs typeface="Times New Roman"/>
+              </a:rPr>
+              <a:t>LoRA</a:t>
+            </a:r>
+            <a:endParaRPr sz="3600" b="1">
+              <a:solidFill>
+                <a:schemeClr val="tx1"/>
+              </a:solidFill>
+              <a:latin typeface="Times New Roman"/>
+              <a:cs typeface="Times New Roman"/>
+            </a:endParaRPr>
+          </a:p>
+        </p:txBody>
+      </p:sp>
+      <p:sp>
+        <p:nvSpPr>
+          <p:cNvPr id="2000062697" name=""/>
+          <p:cNvSpPr/>
+          <p:nvPr/>
+        </p:nvSpPr>
+        <p:spPr bwMode="auto">
+          <a:xfrm rot="0" flipH="0" flipV="0">
+            <a:off x="5367055" y="1595019"/>
+            <a:ext cx="479656" cy="182232"/>
+          </a:xfrm>
+          <a:prstGeom prst="rightArrow">
+            <a:avLst>
+              <a:gd name="adj1" fmla="val 50000"/>
+              <a:gd name="adj2" fmla="val 50000"/>
+            </a:avLst>
+          </a:prstGeom>
+          <a:solidFill>
+            <a:schemeClr val="tx1"/>
+          </a:solidFill>
+          <a:ln w="12699" cap="flat" cmpd="sng" algn="ctr">
+            <a:solidFill>
+              <a:schemeClr val="tx1"/>
+            </a:solidFill>
+            <a:prstDash val="solid"/>
+            <a:miter lim="800000"/>
+          </a:ln>
+        </p:spPr>
+        <p:style>
+          <a:lnRef idx="2">
+            <a:schemeClr val="accent1">
+              <a:shade val="50000"/>
+            </a:schemeClr>
+          </a:lnRef>
+          <a:fillRef idx="1">
+            <a:schemeClr val="accent1"/>
+          </a:fillRef>
+          <a:effectRef idx="0">
+            <a:schemeClr val="accent1"/>
+          </a:effectRef>
+          <a:fontRef idx="minor">
+            <a:schemeClr val="lt1"/>
+          </a:fontRef>
+        </p:style>
+        <p:txBody>
+          <a:bodyPr anchor="ctr"/>
+          <a:p>
+            <a:pPr algn="ctr">
+              <a:defRPr/>
+            </a:pPr>
+            <a:endParaRPr>
+              <a:latin typeface="Times New Roman"/>
+              <a:cs typeface="Times New Roman"/>
+            </a:endParaRPr>
+          </a:p>
+        </p:txBody>
+      </p:sp>
+      <p:sp>
+        <p:nvSpPr>
+          <p:cNvPr id="1829542684" name=""/>
+          <p:cNvSpPr txBox="1"/>
+          <p:nvPr/>
+        </p:nvSpPr>
+        <p:spPr bwMode="auto">
+          <a:xfrm rot="0" flipH="0" flipV="0">
+            <a:off x="7620955" y="931761"/>
+            <a:ext cx="4339332" cy="1585319"/>
+          </a:xfrm>
+          <a:prstGeom prst="rect">
+            <a:avLst/>
+          </a:prstGeom>
+          <a:noFill/>
+        </p:spPr>
+        <p:txBody>
+          <a:bodyPr vertOverflow="overflow" horzOverflow="overflow" vert="horz" wrap="square" lIns="91440" tIns="45720" rIns="91440" bIns="45720" numCol="1" spcCol="0" rtlCol="0" fromWordArt="0" anchor="t" anchorCtr="0" forceAA="0" upright="0" compatLnSpc="0">
+            <a:spAutoFit/>
+          </a:bodyPr>
+          <a:p>
+            <a:pPr algn="l">
+              <a:defRPr/>
+            </a:pPr>
+            <a:r>
+              <a:rPr sz="1400">
+                <a:latin typeface="Times New Roman"/>
+                <a:cs typeface="Times New Roman"/>
+              </a:rPr>
+              <a:t>Base = </a:t>
+            </a:r>
+            <a:r>
+              <a:rPr sz="1400">
+                <a:latin typeface="Times New Roman"/>
+                <a:cs typeface="Times New Roman"/>
+              </a:rPr>
+              <a:t> [B, 1024, 4096]</a:t>
+            </a:r>
+            <a:r>
+              <a:rPr sz="1400">
+                <a:latin typeface="Times New Roman"/>
+                <a:cs typeface="Times New Roman"/>
+              </a:rPr>
+              <a:t> after linear layer (1024 patches)</a:t>
+            </a:r>
+            <a:endParaRPr sz="1400">
+              <a:latin typeface="Times New Roman"/>
+              <a:cs typeface="Times New Roman"/>
+            </a:endParaRPr>
+          </a:p>
+          <a:p>
+            <a:pPr algn="l">
+              <a:defRPr/>
+            </a:pPr>
+            <a:r>
+              <a:rPr sz="1400">
+                <a:latin typeface="Times New Roman"/>
+                <a:cs typeface="Times New Roman"/>
+              </a:rPr>
+              <a:t>Rank = 16</a:t>
+            </a:r>
+            <a:endParaRPr sz="1400">
+              <a:latin typeface="Times New Roman"/>
+              <a:cs typeface="Times New Roman"/>
+            </a:endParaRPr>
+          </a:p>
+          <a:p>
+            <a:pPr algn="l">
+              <a:defRPr/>
+            </a:pPr>
+            <a:r>
+              <a:rPr sz="1400">
+                <a:latin typeface="Times New Roman"/>
+                <a:cs typeface="Times New Roman"/>
+              </a:rPr>
+              <a:t>Matrix A = [768, rank] </a:t>
+            </a:r>
+            <a:endParaRPr sz="1400">
+              <a:latin typeface="Times New Roman"/>
+              <a:cs typeface="Times New Roman"/>
+            </a:endParaRPr>
+          </a:p>
+          <a:p>
+            <a:pPr algn="l">
+              <a:defRPr/>
+            </a:pPr>
+            <a:r>
+              <a:rPr sz="1400">
+                <a:latin typeface="Times New Roman"/>
+                <a:cs typeface="Times New Roman"/>
+              </a:rPr>
+              <a:t>Operation 1 : </a:t>
+            </a:r>
+            <a:r>
+              <a:rPr sz="1400">
+                <a:latin typeface="Times New Roman"/>
+                <a:cs typeface="Times New Roman"/>
+              </a:rPr>
+              <a:t> Base</a:t>
+            </a:r>
+            <a:r>
+              <a:rPr lang="en-US" sz="1400" b="0" i="0" u="none" strike="noStrike" cap="none" spc="0">
+                <a:solidFill>
+                  <a:schemeClr val="tx1"/>
+                </a:solidFill>
+                <a:latin typeface="Times New Roman"/>
+                <a:ea typeface="Times New Roman"/>
+                <a:cs typeface="Times New Roman"/>
+              </a:rPr>
+              <a:t> X Matrix A = [B, 1024, 16]</a:t>
+            </a:r>
+            <a:endParaRPr sz="1400">
+              <a:latin typeface="Times New Roman"/>
+              <a:cs typeface="Times New Roman"/>
+            </a:endParaRPr>
+          </a:p>
+          <a:p>
+            <a:pPr algn="l">
+              <a:defRPr/>
+            </a:pPr>
+            <a:r>
+              <a:rPr lang="en-US" sz="1400" b="0" i="0" u="none" strike="noStrike" cap="none" spc="0">
+                <a:solidFill>
+                  <a:schemeClr val="tx1"/>
+                </a:solidFill>
+                <a:latin typeface="Times New Roman"/>
+                <a:ea typeface="Times New Roman"/>
+                <a:cs typeface="Times New Roman"/>
+              </a:rPr>
+              <a:t>Matrix B = [16, 4096]</a:t>
+            </a:r>
+            <a:endParaRPr sz="1400">
+              <a:latin typeface="Times New Roman"/>
+              <a:cs typeface="Times New Roman"/>
+            </a:endParaRPr>
+          </a:p>
+          <a:p>
+            <a:pPr algn="l">
+              <a:defRPr/>
+            </a:pPr>
+            <a:r>
+              <a:rPr sz="1400">
+                <a:latin typeface="Times New Roman"/>
+                <a:cs typeface="Times New Roman"/>
+              </a:rPr>
+              <a:t>Operation 2 : </a:t>
+            </a:r>
+            <a:r>
+              <a:rPr lang="en-US" sz="1400" b="0" i="0" u="none" strike="noStrike" cap="none" spc="0">
+                <a:solidFill>
+                  <a:schemeClr val="tx1"/>
+                </a:solidFill>
+                <a:latin typeface="Times New Roman"/>
+                <a:ea typeface="Times New Roman"/>
+                <a:cs typeface="Times New Roman"/>
+              </a:rPr>
+              <a:t>Operation 1 X Matrix B = [B, 1024, 4096]</a:t>
+            </a:r>
+            <a:endParaRPr lang="en-US" sz="1400" b="0" i="0" u="none" strike="noStrike" cap="none" spc="0">
+              <a:solidFill>
+                <a:schemeClr val="tx1"/>
+              </a:solidFill>
+              <a:latin typeface="Times New Roman"/>
+              <a:ea typeface="Times New Roman"/>
+              <a:cs typeface="Times New Roman"/>
+            </a:endParaRPr>
+          </a:p>
+          <a:p>
+            <a:pPr algn="l">
+              <a:defRPr/>
+            </a:pPr>
+            <a:r>
+              <a:rPr sz="1400">
+                <a:latin typeface="Times New Roman"/>
+                <a:cs typeface="Times New Roman"/>
+              </a:rPr>
+              <a:t>Residual operation = Base + (Operation 2 *  (32 / rank))</a:t>
+            </a:r>
+            <a:endParaRPr sz="1400">
+              <a:latin typeface="Times New Roman"/>
+              <a:cs typeface="Times New Roman"/>
+            </a:endParaRPr>
+          </a:p>
+        </p:txBody>
+      </p:sp>
+      <p:sp>
+        <p:nvSpPr>
+          <p:cNvPr id="1065193096" name=""/>
+          <p:cNvSpPr txBox="1"/>
+          <p:nvPr/>
+        </p:nvSpPr>
+        <p:spPr bwMode="auto">
+          <a:xfrm rot="0" flipH="0" flipV="0">
+            <a:off x="4981050" y="72956"/>
+            <a:ext cx="1843447" cy="366119"/>
+          </a:xfrm>
+          <a:prstGeom prst="rect">
+            <a:avLst/>
+          </a:prstGeom>
+          <a:noFill/>
+        </p:spPr>
+        <p:txBody>
+          <a:bodyPr vertOverflow="overflow" horzOverflow="overflow" vert="horz" wrap="square" lIns="91440" tIns="45720" rIns="91440" bIns="45720" numCol="1" spcCol="0" rtlCol="0" fromWordArt="0" anchor="t" anchorCtr="0" forceAA="0" upright="0" compatLnSpc="0">
+            <a:spAutoFit/>
+          </a:bodyPr>
+          <a:p>
+            <a:pPr algn="ctr">
+              <a:defRPr/>
+            </a:pPr>
+            <a:r>
+              <a:rPr sz="1800" b="1">
+                <a:latin typeface="Times New Roman"/>
+                <a:cs typeface="Times New Roman"/>
+              </a:rPr>
+              <a:t>ALIGNER</a:t>
+            </a:r>
+            <a:endParaRPr sz="1800" b="1">
+              <a:latin typeface="Times New Roman"/>
+              <a:cs typeface="Times New Roman"/>
+            </a:endParaRPr>
+          </a:p>
+        </p:txBody>
+      </p:sp>
+      <p:sp>
+        <p:nvSpPr>
+          <p:cNvPr id="201324682" name=""/>
+          <p:cNvSpPr/>
+          <p:nvPr/>
+        </p:nvSpPr>
+        <p:spPr bwMode="auto">
+          <a:xfrm rot="5399978" flipH="0" flipV="0">
+            <a:off x="6447335" y="2885282"/>
+            <a:ext cx="709728" cy="243235"/>
+          </a:xfrm>
+          <a:prstGeom prst="rightArrow">
+            <a:avLst>
+              <a:gd name="adj1" fmla="val 50000"/>
+              <a:gd name="adj2" fmla="val 50000"/>
+            </a:avLst>
+          </a:prstGeom>
+          <a:solidFill>
+            <a:schemeClr val="tx1"/>
+          </a:solidFill>
+          <a:ln w="12699" cap="flat" cmpd="sng" algn="ctr">
+            <a:solidFill>
+              <a:schemeClr val="tx1"/>
+            </a:solidFill>
+            <a:prstDash val="solid"/>
+            <a:miter lim="800000"/>
+          </a:ln>
+        </p:spPr>
+        <p:style>
+          <a:lnRef idx="2">
+            <a:schemeClr val="accent1">
+              <a:shade val="50000"/>
+            </a:schemeClr>
+          </a:lnRef>
+          <a:fillRef idx="1">
+            <a:schemeClr val="accent1"/>
+          </a:fillRef>
+          <a:effectRef idx="0">
+            <a:schemeClr val="accent1"/>
+          </a:effectRef>
+          <a:fontRef idx="minor">
+            <a:schemeClr val="lt1"/>
+          </a:fontRef>
+        </p:style>
+        <p:txBody>
+          <a:bodyPr anchor="ctr"/>
+          <a:p>
+            <a:pPr algn="ctr">
+              <a:defRPr/>
+            </a:pPr>
+            <a:endParaRPr>
+              <a:latin typeface="Times New Roman"/>
+              <a:cs typeface="Times New Roman"/>
+            </a:endParaRPr>
+          </a:p>
+        </p:txBody>
+      </p:sp>
+      <p:sp>
+        <p:nvSpPr>
+          <p:cNvPr id="1254999616" name=""/>
+          <p:cNvSpPr/>
+          <p:nvPr/>
+        </p:nvSpPr>
+        <p:spPr bwMode="auto">
+          <a:xfrm rot="0" flipH="0" flipV="0">
+            <a:off x="4111240" y="3580110"/>
+            <a:ext cx="1604840" cy="990718"/>
+          </a:xfrm>
+          <a:prstGeom prst="rect">
+            <a:avLst/>
+          </a:prstGeom>
+          <a:gradFill>
+            <a:gsLst>
+              <a:gs pos="0">
+                <a:schemeClr val="tx1">
+                  <a:lumMod val="50000"/>
+                  <a:lumOff val="50000"/>
+                </a:schemeClr>
+              </a:gs>
+              <a:gs pos="100000">
+                <a:schemeClr val="accent6"/>
+              </a:gs>
+            </a:gsLst>
+            <a:lin ang="0" scaled="1"/>
+          </a:gradFill>
+          <a:ln w="19049" cap="flat" cmpd="sng" algn="ctr">
+            <a:solidFill>
+              <a:schemeClr val="tx1">
+                <a:lumMod val="65098"/>
+                <a:lumOff val="34902"/>
+                <a:alpha val="99999"/>
+              </a:schemeClr>
+            </a:solidFill>
+            <a:prstDash val="solid"/>
+            <a:miter lim="800000"/>
+          </a:ln>
+        </p:spPr>
+        <p:style>
+          <a:lnRef idx="2">
+            <a:schemeClr val="accent1">
+              <a:shade val="50000"/>
+            </a:schemeClr>
+          </a:lnRef>
+          <a:fillRef idx="1">
+            <a:schemeClr val="accent1"/>
+          </a:fillRef>
+          <a:effectRef idx="0">
+            <a:schemeClr val="accent1"/>
+          </a:effectRef>
+          <a:fontRef idx="minor">
+            <a:schemeClr val="lt1"/>
+          </a:fontRef>
+        </p:style>
+        <p:txBody>
+          <a:bodyPr anchor="ctr"/>
+          <a:p>
+            <a:pPr algn="ctr">
+              <a:defRPr/>
+            </a:pPr>
+            <a:r>
+              <a:rPr lang="en-US" sz="1600" b="0" i="0" u="none" strike="noStrike" cap="none" spc="0">
+                <a:solidFill>
+                  <a:srgbClr val="000000"/>
+                </a:solidFill>
+                <a:latin typeface="Times New Roman"/>
+                <a:ea typeface="Times New Roman"/>
+                <a:cs typeface="Times New Roman"/>
+              </a:rPr>
+              <a:t>Query</a:t>
+            </a:r>
+            <a:endParaRPr sz="2200" b="1">
+              <a:solidFill>
+                <a:schemeClr val="tx1"/>
+              </a:solidFill>
+              <a:latin typeface="Times New Roman"/>
+              <a:cs typeface="Times New Roman"/>
+            </a:endParaRPr>
+          </a:p>
+        </p:txBody>
+      </p:sp>
+      <p:sp>
+        <p:nvSpPr>
+          <p:cNvPr id="1463988303" name=""/>
+          <p:cNvSpPr/>
+          <p:nvPr/>
+        </p:nvSpPr>
+        <p:spPr bwMode="auto">
+          <a:xfrm rot="0" flipH="0" flipV="0">
+            <a:off x="6121397" y="3580110"/>
+            <a:ext cx="1604840" cy="990718"/>
+          </a:xfrm>
+          <a:prstGeom prst="rect">
+            <a:avLst/>
+          </a:prstGeom>
+          <a:gradFill>
+            <a:gsLst>
+              <a:gs pos="0">
+                <a:schemeClr val="tx1">
+                  <a:lumMod val="50000"/>
+                  <a:lumOff val="50000"/>
+                  <a:alpha val="81000"/>
+                </a:schemeClr>
+              </a:gs>
+              <a:gs pos="100000">
+                <a:srgbClr val="FF0000">
+                  <a:alpha val="81000"/>
+                </a:srgbClr>
+              </a:gs>
+            </a:gsLst>
+            <a:lin ang="0" scaled="1"/>
+          </a:gradFill>
+          <a:ln w="19049" cap="flat" cmpd="sng" algn="ctr">
+            <a:solidFill>
+              <a:schemeClr val="tx1">
+                <a:lumMod val="65098"/>
+                <a:lumOff val="34902"/>
+                <a:alpha val="99999"/>
+              </a:schemeClr>
+            </a:solidFill>
+            <a:prstDash val="solid"/>
+            <a:miter lim="800000"/>
+          </a:ln>
+        </p:spPr>
+        <p:style>
+          <a:lnRef idx="2">
+            <a:schemeClr val="accent1">
+              <a:shade val="50000"/>
+            </a:schemeClr>
+          </a:lnRef>
+          <a:fillRef idx="1">
+            <a:schemeClr val="accent1"/>
+          </a:fillRef>
+          <a:effectRef idx="0">
+            <a:schemeClr val="accent1"/>
+          </a:effectRef>
+          <a:fontRef idx="minor">
+            <a:schemeClr val="lt1"/>
+          </a:fontRef>
+        </p:style>
+        <p:txBody>
+          <a:bodyPr anchor="ctr"/>
+          <a:p>
+            <a:pPr algn="ctr">
+              <a:defRPr/>
+            </a:pPr>
+            <a:r>
+              <a:rPr lang="en-US" sz="1600" b="0" i="0" u="none" strike="noStrike" cap="none" spc="0">
+                <a:solidFill>
+                  <a:srgbClr val="000000"/>
+                </a:solidFill>
+                <a:latin typeface="Times New Roman"/>
+                <a:ea typeface="Times New Roman"/>
+                <a:cs typeface="Times New Roman"/>
+              </a:rPr>
+              <a:t>Key</a:t>
+            </a:r>
+            <a:endParaRPr sz="2200" b="1">
+              <a:solidFill>
+                <a:schemeClr val="tx1"/>
+              </a:solidFill>
+              <a:latin typeface="Times New Roman"/>
+              <a:cs typeface="Times New Roman"/>
+            </a:endParaRPr>
+          </a:p>
+        </p:txBody>
+      </p:sp>
+      <p:sp>
+        <p:nvSpPr>
+          <p:cNvPr id="553655163" name=""/>
+          <p:cNvSpPr/>
+          <p:nvPr/>
+        </p:nvSpPr>
+        <p:spPr bwMode="auto">
+          <a:xfrm rot="0" flipH="0" flipV="0">
+            <a:off x="8181640" y="3580110"/>
+            <a:ext cx="1604840" cy="990718"/>
+          </a:xfrm>
+          <a:prstGeom prst="rect">
+            <a:avLst/>
+          </a:prstGeom>
+          <a:gradFill>
+            <a:gsLst>
+              <a:gs pos="0">
+                <a:schemeClr val="tx1">
+                  <a:lumMod val="50000"/>
+                  <a:lumOff val="50000"/>
+                </a:schemeClr>
+              </a:gs>
+              <a:gs pos="100000">
+                <a:schemeClr val="accent1"/>
+              </a:gs>
+            </a:gsLst>
+            <a:lin ang="0" scaled="1"/>
+          </a:gradFill>
+          <a:ln w="19049" cap="flat" cmpd="sng" algn="ctr">
+            <a:solidFill>
+              <a:schemeClr val="tx1">
+                <a:lumMod val="65098"/>
+                <a:lumOff val="34902"/>
+                <a:alpha val="99999"/>
+              </a:schemeClr>
+            </a:solidFill>
+            <a:prstDash val="solid"/>
+            <a:miter lim="800000"/>
+          </a:ln>
+        </p:spPr>
+        <p:style>
+          <a:lnRef idx="2">
+            <a:schemeClr val="accent1">
+              <a:shade val="50000"/>
+            </a:schemeClr>
+          </a:lnRef>
+          <a:fillRef idx="1">
+            <a:schemeClr val="accent1"/>
+          </a:fillRef>
+          <a:effectRef idx="0">
+            <a:schemeClr val="accent1"/>
+          </a:effectRef>
+          <a:fontRef idx="minor">
+            <a:schemeClr val="lt1"/>
+          </a:fontRef>
+        </p:style>
+        <p:txBody>
+          <a:bodyPr anchor="ctr"/>
+          <a:p>
+            <a:pPr algn="ctr">
+              <a:defRPr/>
+            </a:pPr>
+            <a:r>
+              <a:rPr lang="en-US" sz="1600" b="0" i="0" u="none" strike="noStrike" cap="none" spc="0">
+                <a:solidFill>
+                  <a:srgbClr val="000000"/>
+                </a:solidFill>
+                <a:latin typeface="Times New Roman"/>
+                <a:ea typeface="Times New Roman"/>
+                <a:cs typeface="Times New Roman"/>
+              </a:rPr>
+              <a:t>Value</a:t>
+            </a:r>
+            <a:endParaRPr sz="2200" b="1">
+              <a:solidFill>
+                <a:schemeClr val="tx1"/>
+              </a:solidFill>
+              <a:latin typeface="Times New Roman"/>
+              <a:cs typeface="Times New Roman"/>
+            </a:endParaRPr>
+          </a:p>
+        </p:txBody>
+      </p:sp>
+      <p:sp>
+        <p:nvSpPr>
+          <p:cNvPr id="1490043761" name=""/>
+          <p:cNvSpPr txBox="1"/>
+          <p:nvPr/>
+        </p:nvSpPr>
+        <p:spPr bwMode="auto">
+          <a:xfrm rot="0" flipH="0" flipV="0">
+            <a:off x="4269291" y="4631583"/>
+            <a:ext cx="1296297" cy="305159"/>
+          </a:xfrm>
+          <a:prstGeom prst="rect">
+            <a:avLst/>
+          </a:prstGeom>
+          <a:noFill/>
+        </p:spPr>
+        <p:txBody>
+          <a:bodyPr vertOverflow="overflow" horzOverflow="overflow" vert="horz" wrap="square" lIns="91440" tIns="45720" rIns="91440" bIns="45720" numCol="1" spcCol="0" rtlCol="0" fromWordArt="0" anchor="t" anchorCtr="0" forceAA="0" upright="0" compatLnSpc="0">
+            <a:spAutoFit/>
+          </a:bodyPr>
+          <a:p>
+            <a:pPr algn="ctr">
+              <a:defRPr/>
+            </a:pPr>
+            <a:r>
+              <a:rPr sz="1400">
+                <a:latin typeface="Times New Roman"/>
+                <a:cs typeface="Times New Roman"/>
+              </a:rPr>
+              <a:t>Text_queries</a:t>
+            </a:r>
+            <a:endParaRPr sz="1400">
+              <a:latin typeface="Times New Roman"/>
+              <a:cs typeface="Times New Roman"/>
+            </a:endParaRPr>
+          </a:p>
+        </p:txBody>
+      </p:sp>
+      <p:sp>
+        <p:nvSpPr>
+          <p:cNvPr id="1472551906" name=""/>
+          <p:cNvSpPr txBox="1"/>
+          <p:nvPr/>
+        </p:nvSpPr>
+        <p:spPr bwMode="auto">
+          <a:xfrm rot="0" flipH="0" flipV="0">
+            <a:off x="6324298" y="4631583"/>
+            <a:ext cx="1302056" cy="305159"/>
+          </a:xfrm>
+          <a:prstGeom prst="rect">
+            <a:avLst/>
+          </a:prstGeom>
+          <a:noFill/>
+        </p:spPr>
+        <p:txBody>
+          <a:bodyPr vertOverflow="overflow" horzOverflow="overflow" vert="horz" wrap="square" lIns="91440" tIns="45720" rIns="91440" bIns="45720" numCol="1" spcCol="0" rtlCol="0" fromWordArt="0" anchor="t" anchorCtr="0" forceAA="0" upright="0" compatLnSpc="0">
+            <a:spAutoFit/>
+          </a:bodyPr>
+          <a:p>
+            <a:pPr algn="ctr">
+              <a:defRPr/>
+            </a:pPr>
+            <a:r>
+              <a:rPr sz="1400">
+                <a:latin typeface="Times New Roman"/>
+                <a:cs typeface="Times New Roman"/>
+              </a:rPr>
+              <a:t>visual features</a:t>
+            </a:r>
+            <a:endParaRPr sz="1400">
+              <a:latin typeface="Times New Roman"/>
+              <a:cs typeface="Times New Roman"/>
+            </a:endParaRPr>
+          </a:p>
+        </p:txBody>
+      </p:sp>
+      <p:sp>
+        <p:nvSpPr>
+          <p:cNvPr id="1855117497" name=""/>
+          <p:cNvSpPr txBox="1"/>
+          <p:nvPr/>
+        </p:nvSpPr>
+        <p:spPr bwMode="auto">
+          <a:xfrm rot="0" flipH="0" flipV="0">
+            <a:off x="8381697" y="4631583"/>
+            <a:ext cx="1302415" cy="305159"/>
+          </a:xfrm>
+          <a:prstGeom prst="rect">
+            <a:avLst/>
+          </a:prstGeom>
+          <a:noFill/>
+        </p:spPr>
+        <p:txBody>
+          <a:bodyPr vertOverflow="overflow" horzOverflow="overflow" vert="horz" wrap="square" lIns="91440" tIns="45720" rIns="91440" bIns="45720" numCol="1" spcCol="0" rtlCol="0" fromWordArt="0" anchor="t" anchorCtr="0" forceAA="0" upright="0" compatLnSpc="0">
+            <a:spAutoFit/>
+          </a:bodyPr>
+          <a:p>
+            <a:pPr algn="ctr">
+              <a:defRPr/>
+            </a:pPr>
+            <a:r>
+              <a:rPr sz="1400">
+                <a:latin typeface="Times New Roman"/>
+                <a:cs typeface="Times New Roman"/>
+              </a:rPr>
+              <a:t>visual features</a:t>
+            </a:r>
+            <a:endParaRPr sz="1400">
+              <a:latin typeface="Times New Roman"/>
+              <a:cs typeface="Times New Roman"/>
+            </a:endParaRPr>
+          </a:p>
+        </p:txBody>
+      </p:sp>
+      <p:sp>
+        <p:nvSpPr>
+          <p:cNvPr id="1656700138" name=""/>
+          <p:cNvSpPr/>
+          <p:nvPr/>
+        </p:nvSpPr>
+        <p:spPr bwMode="auto">
+          <a:xfrm rot="0" flipH="0" flipV="0">
+            <a:off x="3810954" y="3429000"/>
+            <a:ext cx="6175583" cy="1566955"/>
+          </a:xfrm>
+          <a:prstGeom prst="flowChartAlternateProcess">
+            <a:avLst/>
+          </a:prstGeom>
+          <a:noFill/>
+          <a:ln w="19049" cap="flat" cmpd="sng" algn="ctr">
+            <a:solidFill>
+              <a:schemeClr val="tx1"/>
+            </a:solidFill>
+            <a:prstDash val="solid"/>
+            <a:miter lim="800000"/>
+          </a:ln>
+        </p:spPr>
+        <p:style>
+          <a:lnRef idx="2">
+            <a:schemeClr val="accent1">
+              <a:shade val="50000"/>
+            </a:schemeClr>
+          </a:lnRef>
+          <a:fillRef idx="1">
+            <a:schemeClr val="accent1"/>
+          </a:fillRef>
+          <a:effectRef idx="0">
+            <a:schemeClr val="accent1"/>
+          </a:effectRef>
+          <a:fontRef idx="minor">
+            <a:schemeClr val="lt1"/>
+          </a:fontRef>
+        </p:style>
+      </p:sp>
+      <p:sp>
+        <p:nvSpPr>
+          <p:cNvPr id="676372373" name=""/>
+          <p:cNvSpPr txBox="1"/>
+          <p:nvPr/>
+        </p:nvSpPr>
+        <p:spPr bwMode="auto">
+          <a:xfrm rot="0" flipH="0" flipV="0">
+            <a:off x="1984167" y="3996583"/>
+            <a:ext cx="1781559" cy="518519"/>
+          </a:xfrm>
+          <a:prstGeom prst="rect">
+            <a:avLst/>
+          </a:prstGeom>
+          <a:noFill/>
+        </p:spPr>
+        <p:txBody>
+          <a:bodyPr vertOverflow="overflow" horzOverflow="overflow" vert="horz" wrap="square" lIns="91440" tIns="45720" rIns="91440" bIns="45720" numCol="1" spcCol="0" rtlCol="0" fromWordArt="0" anchor="t" anchorCtr="0" forceAA="0" upright="0" compatLnSpc="0">
+            <a:spAutoFit/>
+          </a:bodyPr>
+          <a:p>
+            <a:pPr algn="ctr">
+              <a:defRPr/>
+            </a:pPr>
+            <a:r>
+              <a:rPr sz="1400">
+                <a:latin typeface="Times New Roman"/>
+                <a:cs typeface="Times New Roman"/>
+              </a:rPr>
+              <a:t>Cross Attention</a:t>
+            </a:r>
+            <a:endParaRPr sz="1400">
+              <a:latin typeface="Times New Roman"/>
+              <a:cs typeface="Times New Roman"/>
+            </a:endParaRPr>
+          </a:p>
+          <a:p>
+            <a:pPr algn="ctr">
+              <a:defRPr/>
+            </a:pPr>
+            <a:r>
+              <a:rPr sz="1400">
+                <a:latin typeface="Times New Roman"/>
+                <a:cs typeface="Times New Roman"/>
+              </a:rPr>
+              <a:t>(Multi-head attention)</a:t>
+            </a:r>
+            <a:endParaRPr sz="1400">
+              <a:latin typeface="Times New Roman"/>
+              <a:cs typeface="Times New Roman"/>
+            </a:endParaRPr>
+          </a:p>
+        </p:txBody>
+      </p:sp>
+      <p:sp>
+        <p:nvSpPr>
+          <p:cNvPr id="826380535" name=""/>
+          <p:cNvSpPr/>
+          <p:nvPr/>
+        </p:nvSpPr>
+        <p:spPr bwMode="auto">
+          <a:xfrm rot="5399978" flipH="0" flipV="0">
+            <a:off x="6588903" y="5155967"/>
+            <a:ext cx="426593" cy="243234"/>
+          </a:xfrm>
+          <a:prstGeom prst="rightArrow">
+            <a:avLst>
+              <a:gd name="adj1" fmla="val 50000"/>
+              <a:gd name="adj2" fmla="val 50000"/>
+            </a:avLst>
+          </a:prstGeom>
+          <a:solidFill>
+            <a:schemeClr val="tx1"/>
+          </a:solidFill>
+          <a:ln w="12699" cap="flat" cmpd="sng" algn="ctr">
+            <a:solidFill>
+              <a:schemeClr val="tx1"/>
+            </a:solidFill>
+            <a:prstDash val="solid"/>
+            <a:miter lim="800000"/>
+          </a:ln>
+        </p:spPr>
+        <p:style>
+          <a:lnRef idx="2">
+            <a:schemeClr val="accent1">
+              <a:shade val="50000"/>
+            </a:schemeClr>
+          </a:lnRef>
+          <a:fillRef idx="1">
+            <a:schemeClr val="accent1"/>
+          </a:fillRef>
+          <a:effectRef idx="0">
+            <a:schemeClr val="accent1"/>
+          </a:effectRef>
+          <a:fontRef idx="minor">
+            <a:schemeClr val="lt1"/>
+          </a:fontRef>
+        </p:style>
+        <p:txBody>
+          <a:bodyPr anchor="ctr"/>
+          <a:p>
+            <a:pPr algn="ctr">
+              <a:defRPr/>
+            </a:pPr>
+            <a:endParaRPr>
+              <a:latin typeface="Times New Roman"/>
+              <a:cs typeface="Times New Roman"/>
+            </a:endParaRPr>
+          </a:p>
+        </p:txBody>
+      </p:sp>
+      <p:sp>
+        <p:nvSpPr>
+          <p:cNvPr id="149149895" name=""/>
+          <p:cNvSpPr/>
+          <p:nvPr/>
+        </p:nvSpPr>
+        <p:spPr bwMode="auto">
+          <a:xfrm rot="0" flipH="0" flipV="0">
+            <a:off x="6198472" y="5518999"/>
+            <a:ext cx="1207455" cy="522838"/>
+          </a:xfrm>
+          <a:prstGeom prst="rect">
+            <a:avLst/>
+          </a:prstGeom>
+          <a:gradFill>
+            <a:gsLst>
+              <a:gs pos="19000">
+                <a:schemeClr val="tx1">
+                  <a:lumMod val="50000"/>
+                  <a:lumOff val="50000"/>
+                </a:schemeClr>
+              </a:gs>
+              <a:gs pos="100000">
+                <a:srgbClr val="FFFFFF"/>
+              </a:gs>
+            </a:gsLst>
+            <a:lin ang="0" scaled="1"/>
+          </a:gradFill>
+          <a:ln w="19049" cap="flat" cmpd="sng" algn="ctr">
+            <a:solidFill>
+              <a:schemeClr val="tx1">
+                <a:lumMod val="65098"/>
+                <a:lumOff val="34902"/>
+                <a:alpha val="99999"/>
+              </a:schemeClr>
+            </a:solidFill>
+            <a:prstDash val="solid"/>
+            <a:miter lim="800000"/>
+          </a:ln>
+        </p:spPr>
+        <p:style>
+          <a:lnRef idx="2">
+            <a:schemeClr val="accent1">
+              <a:shade val="50000"/>
+            </a:schemeClr>
+          </a:lnRef>
+          <a:fillRef idx="1">
+            <a:schemeClr val="accent1"/>
+          </a:fillRef>
+          <a:effectRef idx="0">
+            <a:schemeClr val="accent1"/>
+          </a:effectRef>
+          <a:fontRef idx="minor">
+            <a:schemeClr val="lt1"/>
+          </a:fontRef>
+        </p:style>
+        <p:txBody>
+          <a:bodyPr anchor="ctr"/>
+          <a:p>
+            <a:pPr algn="ctr">
+              <a:defRPr/>
+            </a:pPr>
+            <a:r>
+              <a:rPr lang="en-US" sz="1600" b="0" i="0" u="none" strike="noStrike" cap="none" spc="0">
+                <a:solidFill>
+                  <a:srgbClr val="000000"/>
+                </a:solidFill>
+                <a:latin typeface="Times New Roman"/>
+                <a:ea typeface="Times New Roman"/>
+                <a:cs typeface="Times New Roman"/>
+              </a:rPr>
+              <a:t>Softmax</a:t>
+            </a:r>
+            <a:endParaRPr sz="2200" b="1">
+              <a:solidFill>
+                <a:schemeClr val="tx1"/>
+              </a:solidFill>
+              <a:latin typeface="Times New Roman"/>
+              <a:cs typeface="Times New Roman"/>
+            </a:endParaRPr>
+          </a:p>
+        </p:txBody>
+      </p:sp>
+      <p:sp>
+        <p:nvSpPr>
+          <p:cNvPr id="727930373" name=""/>
+          <p:cNvSpPr txBox="1"/>
+          <p:nvPr/>
+        </p:nvSpPr>
+        <p:spPr bwMode="auto">
+          <a:xfrm rot="0" flipH="0" flipV="0">
+            <a:off x="7688885" y="6174853"/>
+            <a:ext cx="1735429" cy="518519"/>
+          </a:xfrm>
+          <a:prstGeom prst="rect">
+            <a:avLst/>
+          </a:prstGeom>
+          <a:noFill/>
+        </p:spPr>
+        <p:txBody>
+          <a:bodyPr vertOverflow="overflow" horzOverflow="overflow" vert="horz" wrap="square" lIns="91440" tIns="45720" rIns="91440" bIns="45720" numCol="1" spcCol="0" rtlCol="0" fromWordArt="0" anchor="t" anchorCtr="0" forceAA="0" upright="0" compatLnSpc="0">
+            <a:spAutoFit/>
+          </a:bodyPr>
+          <a:p>
+            <a:pPr algn="l">
+              <a:defRPr/>
+            </a:pPr>
+            <a:r>
+              <a:rPr sz="1400" b="1">
+                <a:latin typeface="Times New Roman"/>
+                <a:ea typeface="Times New Roman"/>
+                <a:cs typeface="Times New Roman"/>
+              </a:rPr>
+              <a:t>Aligned Embedding</a:t>
+            </a:r>
+            <a:endParaRPr sz="1400" b="1">
+              <a:latin typeface="Times New Roman"/>
+              <a:ea typeface="Times New Roman"/>
+              <a:cs typeface="Times New Roman"/>
+            </a:endParaRPr>
+          </a:p>
+          <a:p>
+            <a:pPr algn="l">
+              <a:defRPr/>
+            </a:pPr>
+            <a:r>
+              <a:rPr sz="1400">
+                <a:latin typeface="Times New Roman"/>
+                <a:ea typeface="Times New Roman"/>
+                <a:cs typeface="Times New Roman"/>
+              </a:rPr>
+              <a:t>B, Num_Terms, 4096</a:t>
+            </a:r>
+            <a:endParaRPr sz="1400">
+              <a:latin typeface="Times New Roman"/>
+              <a:cs typeface="Times New Roman"/>
+            </a:endParaRPr>
+          </a:p>
+        </p:txBody>
+      </p:sp>
+      <p:sp>
+        <p:nvSpPr>
+          <p:cNvPr id="178399591" name=""/>
+          <p:cNvSpPr/>
+          <p:nvPr/>
+        </p:nvSpPr>
+        <p:spPr bwMode="auto">
+          <a:xfrm rot="0" flipH="0" flipV="0">
+            <a:off x="7620955" y="5689302"/>
+            <a:ext cx="479656" cy="182232"/>
+          </a:xfrm>
+          <a:prstGeom prst="rightArrow">
+            <a:avLst>
+              <a:gd name="adj1" fmla="val 50000"/>
+              <a:gd name="adj2" fmla="val 50000"/>
+            </a:avLst>
+          </a:prstGeom>
+          <a:solidFill>
+            <a:schemeClr val="tx1"/>
+          </a:solidFill>
+          <a:ln w="12699" cap="flat" cmpd="sng" algn="ctr">
+            <a:solidFill>
+              <a:schemeClr val="tx1"/>
+            </a:solidFill>
+            <a:prstDash val="solid"/>
+            <a:miter lim="800000"/>
+          </a:ln>
+        </p:spPr>
+        <p:style>
+          <a:lnRef idx="2">
+            <a:schemeClr val="accent1">
+              <a:shade val="50000"/>
+            </a:schemeClr>
+          </a:lnRef>
+          <a:fillRef idx="1">
+            <a:schemeClr val="accent1"/>
+          </a:fillRef>
+          <a:effectRef idx="0">
+            <a:schemeClr val="accent1"/>
+          </a:effectRef>
+          <a:fontRef idx="minor">
+            <a:schemeClr val="lt1"/>
+          </a:fontRef>
+        </p:style>
+        <p:txBody>
+          <a:bodyPr anchor="ctr"/>
+          <a:p>
+            <a:pPr algn="ctr">
+              <a:defRPr/>
+            </a:pPr>
+            <a:endParaRPr>
+              <a:latin typeface="Times New Roman"/>
+              <a:cs typeface="Times New Roman"/>
+            </a:endParaRPr>
+          </a:p>
+        </p:txBody>
+      </p:sp>
+      <p:sp>
+        <p:nvSpPr>
+          <p:cNvPr id="214072604" name=""/>
+          <p:cNvSpPr/>
+          <p:nvPr/>
+        </p:nvSpPr>
+        <p:spPr bwMode="auto">
+          <a:xfrm rot="0" flipH="0" flipV="0">
+            <a:off x="8301288" y="5203752"/>
+            <a:ext cx="510263" cy="971100"/>
+          </a:xfrm>
+          <a:prstGeom prst="cube">
+            <a:avLst>
+              <a:gd name="adj" fmla="val 25000"/>
+            </a:avLst>
+          </a:prstGeom>
+          <a:solidFill>
+            <a:srgbClr val="CF73E6"/>
+          </a:solidFill>
+          <a:ln w="12700" cap="flat" cmpd="sng" algn="ctr">
+            <a:solidFill>
+              <a:schemeClr val="tx1"/>
+            </a:solidFill>
+            <a:prstDash val="solid"/>
+            <a:miter lim="800000"/>
+          </a:ln>
+        </p:spPr>
+        <p:style>
+          <a:lnRef idx="2">
+            <a:schemeClr val="accent1">
+              <a:shade val="50000"/>
+            </a:schemeClr>
+          </a:lnRef>
+          <a:fillRef idx="1">
+            <a:schemeClr val="accent1"/>
+          </a:fillRef>
+          <a:effectRef idx="0">
+            <a:schemeClr val="accent1"/>
+          </a:effectRef>
+          <a:fontRef idx="minor">
+            <a:schemeClr val="lt1"/>
+          </a:fontRef>
+        </p:style>
+        <p:txBody>
+          <a:bodyPr anchor="ctr"/>
+          <a:p>
+            <a:pPr algn="ctr">
+              <a:defRPr/>
+            </a:pPr>
+            <a:endParaRPr>
+              <a:latin typeface="Times New Roman"/>
+              <a:cs typeface="Times New Roman"/>
+            </a:endParaRPr>
+          </a:p>
+        </p:txBody>
+      </p:sp>
+      <p:sp>
+        <p:nvSpPr>
+          <p:cNvPr id="819522939" name=""/>
+          <p:cNvSpPr/>
+          <p:nvPr/>
+        </p:nvSpPr>
+        <p:spPr bwMode="auto">
+          <a:xfrm rot="10799990" flipH="0" flipV="0">
+            <a:off x="5476253" y="5659469"/>
+            <a:ext cx="479656" cy="182232"/>
+          </a:xfrm>
+          <a:prstGeom prst="rightArrow">
+            <a:avLst>
+              <a:gd name="adj1" fmla="val 50000"/>
+              <a:gd name="adj2" fmla="val 50000"/>
+            </a:avLst>
+          </a:prstGeom>
+          <a:solidFill>
+            <a:schemeClr val="tx1"/>
+          </a:solidFill>
+          <a:ln w="12699" cap="flat" cmpd="sng" algn="ctr">
+            <a:solidFill>
+              <a:schemeClr val="tx1"/>
+            </a:solidFill>
+            <a:prstDash val="solid"/>
+            <a:miter lim="800000"/>
+          </a:ln>
+        </p:spPr>
+        <p:style>
+          <a:lnRef idx="2">
+            <a:schemeClr val="accent1">
+              <a:shade val="50000"/>
+            </a:schemeClr>
+          </a:lnRef>
+          <a:fillRef idx="1">
+            <a:schemeClr val="accent1"/>
+          </a:fillRef>
+          <a:effectRef idx="0">
+            <a:schemeClr val="accent1"/>
+          </a:effectRef>
+          <a:fontRef idx="minor">
+            <a:schemeClr val="lt1"/>
+          </a:fontRef>
+        </p:style>
+        <p:txBody>
+          <a:bodyPr anchor="ctr"/>
+          <a:p>
+            <a:pPr algn="ctr">
+              <a:defRPr/>
+            </a:pPr>
+            <a:endParaRPr>
+              <a:latin typeface="Times New Roman"/>
+              <a:cs typeface="Times New Roman"/>
+            </a:endParaRPr>
+          </a:p>
+        </p:txBody>
+      </p:sp>
+      <p:sp>
+        <p:nvSpPr>
+          <p:cNvPr id="162822847" name=""/>
+          <p:cNvSpPr/>
+          <p:nvPr/>
+        </p:nvSpPr>
+        <p:spPr bwMode="auto">
+          <a:xfrm rot="0" flipH="0" flipV="0">
+            <a:off x="5251330" y="5203752"/>
+            <a:ext cx="115724" cy="971100"/>
+          </a:xfrm>
+          <a:prstGeom prst="cube">
+            <a:avLst>
+              <a:gd name="adj" fmla="val 25000"/>
+            </a:avLst>
+          </a:prstGeom>
+          <a:solidFill>
+            <a:srgbClr val="CF73E6"/>
+          </a:solidFill>
+          <a:ln w="12700" cap="flat" cmpd="sng" algn="ctr">
+            <a:solidFill>
+              <a:schemeClr val="tx1"/>
+            </a:solidFill>
+            <a:prstDash val="solid"/>
+            <a:miter lim="800000"/>
+          </a:ln>
+        </p:spPr>
+        <p:style>
+          <a:lnRef idx="2">
+            <a:schemeClr val="accent1">
+              <a:shade val="50000"/>
+            </a:schemeClr>
+          </a:lnRef>
+          <a:fillRef idx="1">
+            <a:schemeClr val="accent1"/>
+          </a:fillRef>
+          <a:effectRef idx="0">
+            <a:schemeClr val="accent1"/>
+          </a:effectRef>
+          <a:fontRef idx="minor">
+            <a:schemeClr val="lt1"/>
+          </a:fontRef>
+        </p:style>
+        <p:txBody>
+          <a:bodyPr anchor="ctr"/>
+          <a:p>
+            <a:pPr algn="ctr">
+              <a:defRPr/>
+            </a:pPr>
+            <a:endParaRPr>
+              <a:latin typeface="Times New Roman"/>
+              <a:cs typeface="Times New Roman"/>
+            </a:endParaRPr>
+          </a:p>
+        </p:txBody>
+      </p:sp>
+      <p:sp>
+        <p:nvSpPr>
+          <p:cNvPr id="333344329" name=""/>
+          <p:cNvSpPr txBox="1"/>
+          <p:nvPr/>
+        </p:nvSpPr>
+        <p:spPr bwMode="auto">
+          <a:xfrm rot="0" flipH="0" flipV="0">
+            <a:off x="3054558" y="5490882"/>
+            <a:ext cx="2126547" cy="853799"/>
+          </a:xfrm>
+          <a:prstGeom prst="rect">
+            <a:avLst/>
+          </a:prstGeom>
+          <a:noFill/>
+        </p:spPr>
+        <p:txBody>
+          <a:bodyPr vertOverflow="overflow" horzOverflow="overflow" vert="horz" wrap="square" lIns="91440" tIns="45720" rIns="91440" bIns="45720" numCol="1" spcCol="0" rtlCol="0" fromWordArt="0" anchor="t" anchorCtr="0" forceAA="0" upright="0" compatLnSpc="0">
+            <a:spAutoFit/>
+          </a:bodyPr>
+          <a:p>
+            <a:pPr algn="ctr">
+              <a:defRPr/>
+            </a:pPr>
+            <a:r>
+              <a:rPr lang="en-US" sz="1400" b="1" i="0" u="none" strike="noStrike" cap="none" spc="0">
+                <a:solidFill>
+                  <a:schemeClr val="tx1"/>
+                </a:solidFill>
+                <a:latin typeface="Times New Roman"/>
+                <a:ea typeface="Times New Roman"/>
+                <a:cs typeface="Times New Roman"/>
+              </a:rPr>
+              <a:t>Likelihood</a:t>
+            </a:r>
+            <a:endParaRPr sz="1400" b="1">
+              <a:latin typeface="Times New Roman"/>
+              <a:ea typeface="Times New Roman"/>
+              <a:cs typeface="Times New Roman"/>
+            </a:endParaRPr>
+          </a:p>
+          <a:p>
+            <a:pPr algn="ctr">
+              <a:defRPr/>
+            </a:pPr>
+            <a:r>
+              <a:rPr sz="1400">
+                <a:latin typeface="Times New Roman"/>
+                <a:ea typeface="Times New Roman"/>
+                <a:cs typeface="Times New Roman"/>
+              </a:rPr>
+              <a:t>B, Num_Heads, Lt, Lv</a:t>
+            </a:r>
+            <a:endParaRPr sz="1400">
+              <a:latin typeface="Times New Roman"/>
+              <a:cs typeface="Times New Roman"/>
+            </a:endParaRPr>
+          </a:p>
+          <a:p>
+            <a:pPr algn="ctr">
+              <a:defRPr/>
+            </a:pPr>
+            <a:r>
+              <a:rPr sz="1100">
+                <a:latin typeface="Times New Roman"/>
+                <a:cs typeface="Times New Roman"/>
+              </a:rPr>
+              <a:t>Lt (Lengh Textual terms)</a:t>
+            </a:r>
+            <a:br>
+              <a:rPr sz="1100">
+                <a:latin typeface="Times New Roman"/>
+                <a:cs typeface="Times New Roman"/>
+              </a:rPr>
+            </a:br>
+            <a:r>
+              <a:rPr sz="1100">
+                <a:latin typeface="Times New Roman"/>
+                <a:cs typeface="Times New Roman"/>
+              </a:rPr>
+              <a:t>Lv (Lengh visual patches)</a:t>
+            </a:r>
+            <a:endParaRPr sz="1400">
+              <a:latin typeface="Times New Roman"/>
+              <a:cs typeface="Times New Roman"/>
+            </a:endParaRPr>
+          </a:p>
+        </p:txBody>
+      </p:sp>
+      <p:sp>
+        <p:nvSpPr>
+          <p:cNvPr id="1899831903" name=""/>
+          <p:cNvSpPr txBox="1"/>
+          <p:nvPr/>
+        </p:nvSpPr>
+        <p:spPr bwMode="auto">
+          <a:xfrm rot="0" flipH="0" flipV="0">
+            <a:off x="5643650" y="3907317"/>
+            <a:ext cx="518245" cy="305159"/>
+          </a:xfrm>
+          <a:prstGeom prst="rect">
+            <a:avLst/>
+          </a:prstGeom>
+          <a:noFill/>
+        </p:spPr>
+        <p:txBody>
+          <a:bodyPr vertOverflow="overflow" horzOverflow="overflow" vert="horz" wrap="square" lIns="91440" tIns="45720" rIns="91440" bIns="45720" numCol="1" spcCol="0" rtlCol="0" fromWordArt="0" anchor="t" anchorCtr="0" forceAA="0" upright="0" compatLnSpc="0">
+            <a:spAutoFit/>
+          </a:bodyPr>
+          <a:p>
+            <a:pPr algn="ctr">
+              <a:defRPr/>
+            </a:pPr>
+            <a:r>
+              <a:rPr sz="1400">
+                <a:latin typeface="Times New Roman"/>
+                <a:cs typeface="Times New Roman"/>
+              </a:rPr>
+              <a:t>X</a:t>
+            </a:r>
+            <a:endParaRPr sz="1400">
+              <a:latin typeface="Times New Roman"/>
+              <a:cs typeface="Times New Roman"/>
+            </a:endParaRPr>
+          </a:p>
+        </p:txBody>
+      </p:sp>
+      <p:sp>
+        <p:nvSpPr>
+          <p:cNvPr id="675217734" name=""/>
+          <p:cNvSpPr txBox="1"/>
+          <p:nvPr/>
+        </p:nvSpPr>
+        <p:spPr bwMode="auto">
+          <a:xfrm rot="0" flipH="0" flipV="0">
+            <a:off x="7656800" y="3480746"/>
+            <a:ext cx="408327" cy="305159"/>
+          </a:xfrm>
+          <a:prstGeom prst="rect">
+            <a:avLst/>
+          </a:prstGeom>
+          <a:noFill/>
+        </p:spPr>
+        <p:txBody>
+          <a:bodyPr vertOverflow="overflow" horzOverflow="overflow" vert="horz" wrap="square" lIns="91440" tIns="45720" rIns="91440" bIns="45720" numCol="1" spcCol="0" rtlCol="0" fromWordArt="0" anchor="t" anchorCtr="0" forceAA="0" upright="0" compatLnSpc="0">
+            <a:spAutoFit/>
+          </a:bodyPr>
+          <a:p>
+            <a:pPr algn="ctr">
+              <a:defRPr/>
+            </a:pPr>
+            <a:r>
+              <a:rPr sz="1400">
+                <a:latin typeface="Times New Roman"/>
+                <a:cs typeface="Times New Roman"/>
+              </a:rPr>
+              <a:t>T</a:t>
+            </a:r>
+            <a:endParaRPr sz="1400">
+              <a:latin typeface="Times New Roman"/>
+              <a:cs typeface="Times New Roman"/>
+            </a:endParaRPr>
           </a:p>
         </p:txBody>
       </p:sp>

--- a/Diagram.pptx
+++ b/Diagram.pptx
@@ -5,11 +5,12 @@
     <p:sldMasterId id="2147483648" r:id="rId1"/>
   </p:sldMasterIdLst>
   <p:notesMasterIdLst>
-    <p:notesMasterId r:id="rId6"/>
+    <p:notesMasterId r:id="rId7"/>
   </p:notesMasterIdLst>
   <p:sldIdLst>
     <p:sldId id="256" r:id="rId4"/>
     <p:sldId id="257" r:id="rId5"/>
+    <p:sldId id="258" r:id="rId6"/>
   </p:sldIdLst>
   <p:sldSz cx="12192000" cy="6858000"/>
   <p:notesSz cx="6858000" cy="9144000"/>
@@ -135,7 +136,7 @@
       </p:grpSpPr>
       <p:sp>
         <p:nvSpPr>
-          <p:cNvPr id="1591346694" name="Header Placeholder 1"/>
+          <p:cNvPr id="52755589" name="Header Placeholder 1"/>
           <p:cNvSpPr>
             <a:spLocks noGrp="1"/>
           </p:cNvSpPr>
@@ -169,7 +170,7 @@
       </p:sp>
       <p:sp>
         <p:nvSpPr>
-          <p:cNvPr id="230271193" name="Date Placeholder 2"/>
+          <p:cNvPr id="720406871" name="Date Placeholder 2"/>
           <p:cNvSpPr>
             <a:spLocks noGrp="1"/>
           </p:cNvSpPr>
@@ -207,7 +208,7 @@
       </p:sp>
       <p:sp>
         <p:nvSpPr>
-          <p:cNvPr id="1073369822" name="Slide Image Placeholder 3"/>
+          <p:cNvPr id="1489622011" name="Slide Image Placeholder 3"/>
           <p:cNvSpPr>
             <a:spLocks noChangeAspect="1" noGrp="1" noRot="1"/>
           </p:cNvSpPr>
@@ -243,7 +244,7 @@
       </p:sp>
       <p:sp>
         <p:nvSpPr>
-          <p:cNvPr id="1132151676" name="Notes Placeholder 4"/>
+          <p:cNvPr id="1024350613" name="Notes Placeholder 4"/>
           <p:cNvSpPr>
             <a:spLocks noGrp="1"/>
           </p:cNvSpPr>
@@ -317,7 +318,7 @@
       </p:sp>
       <p:sp>
         <p:nvSpPr>
-          <p:cNvPr id="2063620904" name="Footer Placeholder 5"/>
+          <p:cNvPr id="342479819" name="Footer Placeholder 5"/>
           <p:cNvSpPr>
             <a:spLocks noGrp="1"/>
           </p:cNvSpPr>
@@ -351,7 +352,7 @@
       </p:sp>
       <p:sp>
         <p:nvSpPr>
-          <p:cNvPr id="1521474989" name="Slide Number Placeholder 6"/>
+          <p:cNvPr id="1902727168" name="Slide Number Placeholder 6"/>
           <p:cNvSpPr>
             <a:spLocks noGrp="1"/>
           </p:cNvSpPr>
@@ -504,7 +505,7 @@
       </p:grpSpPr>
       <p:sp>
         <p:nvSpPr>
-          <p:cNvPr id="1996274625" name="Slide Image Placeholder 1"/>
+          <p:cNvPr id="1193644042" name="Slide Image Placeholder 1"/>
           <p:cNvSpPr>
             <a:spLocks noChangeAspect="1" noGrp="1" noRot="1"/>
           </p:cNvSpPr>
@@ -521,7 +522,7 @@
       </p:sp>
       <p:sp>
         <p:nvSpPr>
-          <p:cNvPr id="1015519726" name="Notes Placeholder 2"/>
+          <p:cNvPr id="420318399" name="Notes Placeholder 2"/>
           <p:cNvSpPr>
             <a:spLocks noGrp="1"/>
           </p:cNvSpPr>
@@ -546,7 +547,7 @@
       </p:sp>
       <p:sp>
         <p:nvSpPr>
-          <p:cNvPr id="1562652848" name="Slide Number Placeholder 3"/>
+          <p:cNvPr id="1919849215" name="Slide Number Placeholder 3"/>
           <p:cNvSpPr>
             <a:spLocks noGrp="1"/>
           </p:cNvSpPr>
@@ -597,6 +598,91 @@
       </p:grpSpPr>
       <p:sp>
         <p:nvSpPr>
+          <p:cNvPr id="1656437085" name="Slide Image Placeholder 1"/>
+          <p:cNvSpPr>
+            <a:spLocks noChangeAspect="1" noGrp="1" noRot="1"/>
+          </p:cNvSpPr>
+          <p:nvPr>
+            <p:ph type="sldImg"/>
+          </p:nvPr>
+        </p:nvSpPr>
+        <p:spPr bwMode="auto"/>
+      </p:sp>
+      <p:sp>
+        <p:nvSpPr>
+          <p:cNvPr id="2110395338" name="Notes Placeholder 2"/>
+          <p:cNvSpPr>
+            <a:spLocks noGrp="1"/>
+          </p:cNvSpPr>
+          <p:nvPr>
+            <p:ph type="body" idx="1"/>
+          </p:nvPr>
+        </p:nvSpPr>
+        <p:spPr bwMode="auto"/>
+        <p:txBody>
+          <a:bodyPr/>
+          <a:lstStyle/>
+          <a:p>
+            <a:pPr>
+              <a:defRPr/>
+            </a:pPr>
+            <a:endParaRPr/>
+          </a:p>
+        </p:txBody>
+      </p:sp>
+      <p:sp>
+        <p:nvSpPr>
+          <p:cNvPr id="506666945" name="Slide Number Placeholder 3"/>
+          <p:cNvSpPr>
+            <a:spLocks noGrp="1"/>
+          </p:cNvSpPr>
+          <p:nvPr>
+            <p:ph type="sldNum" sz="quarter" idx="10"/>
+          </p:nvPr>
+        </p:nvSpPr>
+        <p:spPr bwMode="auto"/>
+        <p:txBody>
+          <a:bodyPr/>
+          <a:lstStyle/>
+          <a:p>
+            <a:pPr>
+              <a:defRPr/>
+            </a:pPr>
+            <a:fld id="{BEFB40B8-C03E-A3D8-FACF-85666CF61227}" type="slidenum">
+              <a:rPr/>
+              <a:t/>
+            </a:fld>
+            <a:endParaRPr/>
+          </a:p>
+        </p:txBody>
+      </p:sp>
+    </p:spTree>
+  </p:cSld>
+  <p:clrMapOvr>
+    <a:masterClrMapping/>
+  </p:clrMapOvr>
+</p:notes>
+</file>
+
+<file path=ppt/notesSlides/notesSlide3.xml><?xml version="1.0" encoding="utf-8"?>
+<p:notes xmlns:a="http://schemas.openxmlformats.org/drawingml/2006/main" xmlns:r="http://schemas.openxmlformats.org/officeDocument/2006/relationships" xmlns:p="http://schemas.openxmlformats.org/presentationml/2006/main" xmlns:m="http://schemas.openxmlformats.org/officeDocument/2006/math" xmlns:w="http://schemas.openxmlformats.org/wordprocessingml/2006/main">
+  <p:cSld name="">
+    <p:spTree>
+      <p:nvGrpSpPr>
+        <p:cNvPr id="1" name=""/>
+        <p:cNvGrpSpPr/>
+        <p:nvPr/>
+      </p:nvGrpSpPr>
+      <p:grpSpPr bwMode="auto">
+        <a:xfrm>
+          <a:off x="0" y="0"/>
+          <a:ext cx="0" cy="0"/>
+          <a:chOff x="0" y="0"/>
+          <a:chExt cx="0" cy="0"/>
+        </a:xfrm>
+      </p:grpSpPr>
+      <p:sp>
+        <p:nvSpPr>
           <p:cNvPr id="2" name="Slide Image Placeholder 1"/>
           <p:cNvSpPr>
             <a:spLocks noChangeAspect="1" noGrp="1" noRot="1"/>
@@ -647,7 +733,7 @@
             <a:pPr>
               <a:defRPr/>
             </a:pPr>
-            <a:fld id="{BEFB40B8-C03E-A3D8-FACF-85666CF61227}" type="slidenum">
+            <a:fld id="{D4988B9D-ECF5-44FE-A9D4-D6E41E6C2E02}" type="slidenum">
               <a:rPr/>
               <a:t/>
             </a:fld>
@@ -682,7 +768,7 @@
       </p:grpSpPr>
       <p:sp>
         <p:nvSpPr>
-          <p:cNvPr id="347350584" name="Title 1"/>
+          <p:cNvPr id="1150034167" name="Title 1"/>
           <p:cNvSpPr>
             <a:spLocks noGrp="1"/>
           </p:cNvSpPr>
@@ -717,7 +803,7 @@
       </p:sp>
       <p:sp>
         <p:nvSpPr>
-          <p:cNvPr id="1996650117" name="Subtitle 2"/>
+          <p:cNvPr id="491454649" name="Subtitle 2"/>
           <p:cNvSpPr>
             <a:spLocks noGrp="1"/>
           </p:cNvSpPr>
@@ -785,7 +871,7 @@
       </p:sp>
       <p:sp>
         <p:nvSpPr>
-          <p:cNvPr id="959509372" name="Date Placeholder 3"/>
+          <p:cNvPr id="283391298" name="Date Placeholder 3"/>
           <p:cNvSpPr>
             <a:spLocks noGrp="1"/>
           </p:cNvSpPr>
@@ -811,7 +897,7 @@
       </p:sp>
       <p:sp>
         <p:nvSpPr>
-          <p:cNvPr id="698586020" name="Footer Placeholder 4"/>
+          <p:cNvPr id="1701912054" name="Footer Placeholder 4"/>
           <p:cNvSpPr>
             <a:spLocks noGrp="1"/>
           </p:cNvSpPr>
@@ -833,7 +919,7 @@
       </p:sp>
       <p:sp>
         <p:nvSpPr>
-          <p:cNvPr id="744291524" name="Slide Number Placeholder 5"/>
+          <p:cNvPr id="1043051959" name="Slide Number Placeholder 5"/>
           <p:cNvSpPr>
             <a:spLocks noGrp="1"/>
           </p:cNvSpPr>
@@ -884,7 +970,7 @@
       </p:grpSpPr>
       <p:sp>
         <p:nvSpPr>
-          <p:cNvPr id="1583323807" name="Title 1"/>
+          <p:cNvPr id="289308792" name="Title 1"/>
           <p:cNvSpPr>
             <a:spLocks noGrp="1"/>
           </p:cNvSpPr>
@@ -910,7 +996,7 @@
       </p:sp>
       <p:sp>
         <p:nvSpPr>
-          <p:cNvPr id="911999057" name="Vertical Text Placeholder 2"/>
+          <p:cNvPr id="1371643889" name="Vertical Text Placeholder 2"/>
           <p:cNvSpPr>
             <a:spLocks noGrp="1"/>
           </p:cNvSpPr>
@@ -976,7 +1062,7 @@
       </p:sp>
       <p:sp>
         <p:nvSpPr>
-          <p:cNvPr id="187654892" name="Date Placeholder 3"/>
+          <p:cNvPr id="190518310" name="Date Placeholder 3"/>
           <p:cNvSpPr>
             <a:spLocks noGrp="1"/>
           </p:cNvSpPr>
@@ -1002,7 +1088,7 @@
       </p:sp>
       <p:sp>
         <p:nvSpPr>
-          <p:cNvPr id="1030409727" name="Footer Placeholder 4"/>
+          <p:cNvPr id="2050538981" name="Footer Placeholder 4"/>
           <p:cNvSpPr>
             <a:spLocks noGrp="1"/>
           </p:cNvSpPr>
@@ -1024,7 +1110,7 @@
       </p:sp>
       <p:sp>
         <p:nvSpPr>
-          <p:cNvPr id="535689725" name="Slide Number Placeholder 5"/>
+          <p:cNvPr id="1810719874" name="Slide Number Placeholder 5"/>
           <p:cNvSpPr>
             <a:spLocks noGrp="1"/>
           </p:cNvSpPr>
@@ -1075,7 +1161,7 @@
       </p:grpSpPr>
       <p:sp>
         <p:nvSpPr>
-          <p:cNvPr id="1806549211" name="Vertical Title 1"/>
+          <p:cNvPr id="1307915881" name="Vertical Title 1"/>
           <p:cNvSpPr>
             <a:spLocks noGrp="1"/>
           </p:cNvSpPr>
@@ -1106,7 +1192,7 @@
       </p:sp>
       <p:sp>
         <p:nvSpPr>
-          <p:cNvPr id="532531487" name="Vertical Text Placeholder 2"/>
+          <p:cNvPr id="100883668" name="Vertical Text Placeholder 2"/>
           <p:cNvSpPr>
             <a:spLocks noGrp="1"/>
           </p:cNvSpPr>
@@ -1177,7 +1263,7 @@
       </p:sp>
       <p:sp>
         <p:nvSpPr>
-          <p:cNvPr id="1447359814" name="Date Placeholder 3"/>
+          <p:cNvPr id="1128658985" name="Date Placeholder 3"/>
           <p:cNvSpPr>
             <a:spLocks noGrp="1"/>
           </p:cNvSpPr>
@@ -1203,7 +1289,7 @@
       </p:sp>
       <p:sp>
         <p:nvSpPr>
-          <p:cNvPr id="231532970" name="Footer Placeholder 4"/>
+          <p:cNvPr id="1069392742" name="Footer Placeholder 4"/>
           <p:cNvSpPr>
             <a:spLocks noGrp="1"/>
           </p:cNvSpPr>
@@ -1225,7 +1311,7 @@
       </p:sp>
       <p:sp>
         <p:nvSpPr>
-          <p:cNvPr id="462929246" name="Slide Number Placeholder 5"/>
+          <p:cNvPr id="1775932364" name="Slide Number Placeholder 5"/>
           <p:cNvSpPr>
             <a:spLocks noGrp="1"/>
           </p:cNvSpPr>
@@ -1276,7 +1362,7 @@
       </p:grpSpPr>
       <p:sp>
         <p:nvSpPr>
-          <p:cNvPr id="1963600996" name="Title 1"/>
+          <p:cNvPr id="332304551" name="Title 1"/>
           <p:cNvSpPr>
             <a:spLocks noGrp="1"/>
           </p:cNvSpPr>
@@ -1302,7 +1388,7 @@
       </p:sp>
       <p:sp>
         <p:nvSpPr>
-          <p:cNvPr id="593129340" name="Content Placeholder 2"/>
+          <p:cNvPr id="97916849" name="Content Placeholder 2"/>
           <p:cNvSpPr>
             <a:spLocks noGrp="1"/>
           </p:cNvSpPr>
@@ -1368,7 +1454,7 @@
       </p:sp>
       <p:sp>
         <p:nvSpPr>
-          <p:cNvPr id="1841461258" name="Date Placeholder 3"/>
+          <p:cNvPr id="919892341" name="Date Placeholder 3"/>
           <p:cNvSpPr>
             <a:spLocks noGrp="1"/>
           </p:cNvSpPr>
@@ -1394,7 +1480,7 @@
       </p:sp>
       <p:sp>
         <p:nvSpPr>
-          <p:cNvPr id="990681336" name="Footer Placeholder 4"/>
+          <p:cNvPr id="629276302" name="Footer Placeholder 4"/>
           <p:cNvSpPr>
             <a:spLocks noGrp="1"/>
           </p:cNvSpPr>
@@ -1416,7 +1502,7 @@
       </p:sp>
       <p:sp>
         <p:nvSpPr>
-          <p:cNvPr id="75843203" name="Slide Number Placeholder 5"/>
+          <p:cNvPr id="706257414" name="Slide Number Placeholder 5"/>
           <p:cNvSpPr>
             <a:spLocks noGrp="1"/>
           </p:cNvSpPr>
@@ -1467,7 +1553,7 @@
       </p:grpSpPr>
       <p:sp>
         <p:nvSpPr>
-          <p:cNvPr id="1920639989" name="Title 1"/>
+          <p:cNvPr id="1253683035" name="Title 1"/>
           <p:cNvSpPr>
             <a:spLocks noGrp="1"/>
           </p:cNvSpPr>
@@ -1502,7 +1588,7 @@
       </p:sp>
       <p:sp>
         <p:nvSpPr>
-          <p:cNvPr id="86001659" name="Text Placeholder 2"/>
+          <p:cNvPr id="429877447" name="Text Placeholder 2"/>
           <p:cNvSpPr>
             <a:spLocks noGrp="1"/>
           </p:cNvSpPr>
@@ -1624,7 +1710,7 @@
       </p:sp>
       <p:sp>
         <p:nvSpPr>
-          <p:cNvPr id="170209575" name="Date Placeholder 3"/>
+          <p:cNvPr id="261122769" name="Date Placeholder 3"/>
           <p:cNvSpPr>
             <a:spLocks noGrp="1"/>
           </p:cNvSpPr>
@@ -1650,7 +1736,7 @@
       </p:sp>
       <p:sp>
         <p:nvSpPr>
-          <p:cNvPr id="72014043" name="Footer Placeholder 4"/>
+          <p:cNvPr id="158357465" name="Footer Placeholder 4"/>
           <p:cNvSpPr>
             <a:spLocks noGrp="1"/>
           </p:cNvSpPr>
@@ -1672,7 +1758,7 @@
       </p:sp>
       <p:sp>
         <p:nvSpPr>
-          <p:cNvPr id="1019042749" name="Slide Number Placeholder 5"/>
+          <p:cNvPr id="334718417" name="Slide Number Placeholder 5"/>
           <p:cNvSpPr>
             <a:spLocks noGrp="1"/>
           </p:cNvSpPr>
@@ -1723,7 +1809,7 @@
       </p:grpSpPr>
       <p:sp>
         <p:nvSpPr>
-          <p:cNvPr id="565876912" name="Title 1"/>
+          <p:cNvPr id="436124902" name="Title 1"/>
           <p:cNvSpPr>
             <a:spLocks noGrp="1"/>
           </p:cNvSpPr>
@@ -1749,7 +1835,7 @@
       </p:sp>
       <p:sp>
         <p:nvSpPr>
-          <p:cNvPr id="1756768194" name="Content Placeholder 2"/>
+          <p:cNvPr id="456252875" name="Content Placeholder 2"/>
           <p:cNvSpPr>
             <a:spLocks noGrp="1"/>
           </p:cNvSpPr>
@@ -1820,7 +1906,7 @@
       </p:sp>
       <p:sp>
         <p:nvSpPr>
-          <p:cNvPr id="1348171525" name="Content Placeholder 3"/>
+          <p:cNvPr id="989180313" name="Content Placeholder 3"/>
           <p:cNvSpPr>
             <a:spLocks noGrp="1"/>
           </p:cNvSpPr>
@@ -1891,7 +1977,7 @@
       </p:sp>
       <p:sp>
         <p:nvSpPr>
-          <p:cNvPr id="795197051" name="Date Placeholder 4"/>
+          <p:cNvPr id="238133352" name="Date Placeholder 4"/>
           <p:cNvSpPr>
             <a:spLocks noGrp="1"/>
           </p:cNvSpPr>
@@ -1917,7 +2003,7 @@
       </p:sp>
       <p:sp>
         <p:nvSpPr>
-          <p:cNvPr id="1496546849" name="Footer Placeholder 5"/>
+          <p:cNvPr id="980943266" name="Footer Placeholder 5"/>
           <p:cNvSpPr>
             <a:spLocks noGrp="1"/>
           </p:cNvSpPr>
@@ -1939,7 +2025,7 @@
       </p:sp>
       <p:sp>
         <p:nvSpPr>
-          <p:cNvPr id="620695216" name="Slide Number Placeholder 6"/>
+          <p:cNvPr id="1984611211" name="Slide Number Placeholder 6"/>
           <p:cNvSpPr>
             <a:spLocks noGrp="1"/>
           </p:cNvSpPr>
@@ -1990,7 +2076,7 @@
       </p:grpSpPr>
       <p:sp>
         <p:nvSpPr>
-          <p:cNvPr id="339561341" name="Title 1"/>
+          <p:cNvPr id="105146817" name="Title 1"/>
           <p:cNvSpPr>
             <a:spLocks noGrp="1"/>
           </p:cNvSpPr>
@@ -2021,7 +2107,7 @@
       </p:sp>
       <p:sp>
         <p:nvSpPr>
-          <p:cNvPr id="353836697" name="Text Placeholder 2"/>
+          <p:cNvPr id="1678458887" name="Text Placeholder 2"/>
           <p:cNvSpPr>
             <a:spLocks noGrp="1"/>
           </p:cNvSpPr>
@@ -2089,7 +2175,7 @@
       </p:sp>
       <p:sp>
         <p:nvSpPr>
-          <p:cNvPr id="448969864" name="Content Placeholder 3"/>
+          <p:cNvPr id="540827843" name="Content Placeholder 3"/>
           <p:cNvSpPr>
             <a:spLocks noGrp="1"/>
           </p:cNvSpPr>
@@ -2160,7 +2246,7 @@
       </p:sp>
       <p:sp>
         <p:nvSpPr>
-          <p:cNvPr id="677581313" name="Text Placeholder 4"/>
+          <p:cNvPr id="791516427" name="Text Placeholder 4"/>
           <p:cNvSpPr>
             <a:spLocks noGrp="1"/>
           </p:cNvSpPr>
@@ -2228,7 +2314,7 @@
       </p:sp>
       <p:sp>
         <p:nvSpPr>
-          <p:cNvPr id="1683937358" name="Content Placeholder 5"/>
+          <p:cNvPr id="1960667272" name="Content Placeholder 5"/>
           <p:cNvSpPr>
             <a:spLocks noGrp="1"/>
           </p:cNvSpPr>
@@ -2299,7 +2385,7 @@
       </p:sp>
       <p:sp>
         <p:nvSpPr>
-          <p:cNvPr id="2011455065" name="Date Placeholder 6"/>
+          <p:cNvPr id="407757637" name="Date Placeholder 6"/>
           <p:cNvSpPr>
             <a:spLocks noGrp="1"/>
           </p:cNvSpPr>
@@ -2325,7 +2411,7 @@
       </p:sp>
       <p:sp>
         <p:nvSpPr>
-          <p:cNvPr id="68706642" name="Footer Placeholder 7"/>
+          <p:cNvPr id="21042411" name="Footer Placeholder 7"/>
           <p:cNvSpPr>
             <a:spLocks noGrp="1"/>
           </p:cNvSpPr>
@@ -2347,7 +2433,7 @@
       </p:sp>
       <p:sp>
         <p:nvSpPr>
-          <p:cNvPr id="435832168" name="Slide Number Placeholder 8"/>
+          <p:cNvPr id="378904241" name="Slide Number Placeholder 8"/>
           <p:cNvSpPr>
             <a:spLocks noGrp="1"/>
           </p:cNvSpPr>
@@ -2398,7 +2484,7 @@
       </p:grpSpPr>
       <p:sp>
         <p:nvSpPr>
-          <p:cNvPr id="1587228119" name="Title 1"/>
+          <p:cNvPr id="1773761514" name="Title 1"/>
           <p:cNvSpPr>
             <a:spLocks noGrp="1"/>
           </p:cNvSpPr>
@@ -2424,7 +2510,7 @@
       </p:sp>
       <p:sp>
         <p:nvSpPr>
-          <p:cNvPr id="301879962" name="Date Placeholder 2"/>
+          <p:cNvPr id="1669845093" name="Date Placeholder 2"/>
           <p:cNvSpPr>
             <a:spLocks noGrp="1"/>
           </p:cNvSpPr>
@@ -2450,7 +2536,7 @@
       </p:sp>
       <p:sp>
         <p:nvSpPr>
-          <p:cNvPr id="562577452" name="Footer Placeholder 3"/>
+          <p:cNvPr id="1030698380" name="Footer Placeholder 3"/>
           <p:cNvSpPr>
             <a:spLocks noGrp="1"/>
           </p:cNvSpPr>
@@ -2472,7 +2558,7 @@
       </p:sp>
       <p:sp>
         <p:nvSpPr>
-          <p:cNvPr id="186886080" name="Slide Number Placeholder 4"/>
+          <p:cNvPr id="1433105838" name="Slide Number Placeholder 4"/>
           <p:cNvSpPr>
             <a:spLocks noGrp="1"/>
           </p:cNvSpPr>
@@ -2523,7 +2609,7 @@
       </p:grpSpPr>
       <p:sp>
         <p:nvSpPr>
-          <p:cNvPr id="1704061685" name="Date Placeholder 1"/>
+          <p:cNvPr id="1248097466" name="Date Placeholder 1"/>
           <p:cNvSpPr>
             <a:spLocks noGrp="1"/>
           </p:cNvSpPr>
@@ -2549,7 +2635,7 @@
       </p:sp>
       <p:sp>
         <p:nvSpPr>
-          <p:cNvPr id="364584825" name="Footer Placeholder 2"/>
+          <p:cNvPr id="2132121633" name="Footer Placeholder 2"/>
           <p:cNvSpPr>
             <a:spLocks noGrp="1"/>
           </p:cNvSpPr>
@@ -2571,7 +2657,7 @@
       </p:sp>
       <p:sp>
         <p:nvSpPr>
-          <p:cNvPr id="1727213065" name="Slide Number Placeholder 3"/>
+          <p:cNvPr id="1289611965" name="Slide Number Placeholder 3"/>
           <p:cNvSpPr>
             <a:spLocks noGrp="1"/>
           </p:cNvSpPr>
@@ -2622,7 +2708,7 @@
       </p:grpSpPr>
       <p:sp>
         <p:nvSpPr>
-          <p:cNvPr id="2050072046" name="Title 1"/>
+          <p:cNvPr id="854547760" name="Title 1"/>
           <p:cNvSpPr>
             <a:spLocks noGrp="1"/>
           </p:cNvSpPr>
@@ -2657,7 +2743,7 @@
       </p:sp>
       <p:sp>
         <p:nvSpPr>
-          <p:cNvPr id="829148357" name="Content Placeholder 2"/>
+          <p:cNvPr id="1415284407" name="Content Placeholder 2"/>
           <p:cNvSpPr>
             <a:spLocks noGrp="1"/>
           </p:cNvSpPr>
@@ -2756,7 +2842,7 @@
       </p:sp>
       <p:sp>
         <p:nvSpPr>
-          <p:cNvPr id="909021469" name="Text Placeholder 3"/>
+          <p:cNvPr id="5726361" name="Text Placeholder 3"/>
           <p:cNvSpPr>
             <a:spLocks noGrp="1"/>
           </p:cNvSpPr>
@@ -2824,7 +2910,7 @@
       </p:sp>
       <p:sp>
         <p:nvSpPr>
-          <p:cNvPr id="1085999207" name="Date Placeholder 4"/>
+          <p:cNvPr id="1356069732" name="Date Placeholder 4"/>
           <p:cNvSpPr>
             <a:spLocks noGrp="1"/>
           </p:cNvSpPr>
@@ -2850,7 +2936,7 @@
       </p:sp>
       <p:sp>
         <p:nvSpPr>
-          <p:cNvPr id="396765600" name="Footer Placeholder 5"/>
+          <p:cNvPr id="433253791" name="Footer Placeholder 5"/>
           <p:cNvSpPr>
             <a:spLocks noGrp="1"/>
           </p:cNvSpPr>
@@ -2872,7 +2958,7 @@
       </p:sp>
       <p:sp>
         <p:nvSpPr>
-          <p:cNvPr id="1379957419" name="Slide Number Placeholder 6"/>
+          <p:cNvPr id="435406430" name="Slide Number Placeholder 6"/>
           <p:cNvSpPr>
             <a:spLocks noGrp="1"/>
           </p:cNvSpPr>
@@ -2923,7 +3009,7 @@
       </p:grpSpPr>
       <p:sp>
         <p:nvSpPr>
-          <p:cNvPr id="487598557" name="Title 1"/>
+          <p:cNvPr id="1183164723" name="Title 1"/>
           <p:cNvSpPr>
             <a:spLocks noGrp="1"/>
           </p:cNvSpPr>
@@ -2958,7 +3044,7 @@
       </p:sp>
       <p:sp>
         <p:nvSpPr>
-          <p:cNvPr id="1838818762" name="Picture Placeholder 2"/>
+          <p:cNvPr id="119855483" name="Picture Placeholder 2"/>
           <p:cNvSpPr>
             <a:spLocks noChangeAspect="1" noGrp="1"/>
           </p:cNvSpPr>
@@ -3026,7 +3112,7 @@
       </p:sp>
       <p:sp>
         <p:nvSpPr>
-          <p:cNvPr id="961735731" name="Text Placeholder 3"/>
+          <p:cNvPr id="944296473" name="Text Placeholder 3"/>
           <p:cNvSpPr>
             <a:spLocks noGrp="1"/>
           </p:cNvSpPr>
@@ -3094,7 +3180,7 @@
       </p:sp>
       <p:sp>
         <p:nvSpPr>
-          <p:cNvPr id="1433543281" name="Date Placeholder 4"/>
+          <p:cNvPr id="776764473" name="Date Placeholder 4"/>
           <p:cNvSpPr>
             <a:spLocks noGrp="1"/>
           </p:cNvSpPr>
@@ -3120,7 +3206,7 @@
       </p:sp>
       <p:sp>
         <p:nvSpPr>
-          <p:cNvPr id="1760693649" name="Footer Placeholder 5"/>
+          <p:cNvPr id="324621543" name="Footer Placeholder 5"/>
           <p:cNvSpPr>
             <a:spLocks noGrp="1"/>
           </p:cNvSpPr>
@@ -3142,7 +3228,7 @@
       </p:sp>
       <p:sp>
         <p:nvSpPr>
-          <p:cNvPr id="1606666418" name="Slide Number Placeholder 6"/>
+          <p:cNvPr id="249939693" name="Slide Number Placeholder 6"/>
           <p:cNvSpPr>
             <a:spLocks noGrp="1"/>
           </p:cNvSpPr>
@@ -3198,7 +3284,7 @@
       </p:grpSpPr>
       <p:sp>
         <p:nvSpPr>
-          <p:cNvPr id="2043647429" name="Title Placeholder 1"/>
+          <p:cNvPr id="323986667" name="Title Placeholder 1"/>
           <p:cNvSpPr>
             <a:spLocks noGrp="1"/>
           </p:cNvSpPr>
@@ -3234,7 +3320,7 @@
       </p:sp>
       <p:sp>
         <p:nvSpPr>
-          <p:cNvPr id="1469580859" name="Text Placeholder 2"/>
+          <p:cNvPr id="853898526" name="Text Placeholder 2"/>
           <p:cNvSpPr>
             <a:spLocks noGrp="1"/>
           </p:cNvSpPr>
@@ -3310,7 +3396,7 @@
       </p:sp>
       <p:sp>
         <p:nvSpPr>
-          <p:cNvPr id="1878917343" name="Date Placeholder 3"/>
+          <p:cNvPr id="1534340258" name="Date Placeholder 3"/>
           <p:cNvSpPr>
             <a:spLocks noGrp="1"/>
           </p:cNvSpPr>
@@ -3354,7 +3440,7 @@
       </p:sp>
       <p:sp>
         <p:nvSpPr>
-          <p:cNvPr id="2138963881" name="Footer Placeholder 4"/>
+          <p:cNvPr id="638072985" name="Footer Placeholder 4"/>
           <p:cNvSpPr>
             <a:spLocks noGrp="1"/>
           </p:cNvSpPr>
@@ -3394,7 +3480,7 @@
       </p:sp>
       <p:sp>
         <p:nvSpPr>
-          <p:cNvPr id="1930394038" name="Slide Number Placeholder 5"/>
+          <p:cNvPr id="1794641101" name="Slide Number Placeholder 5"/>
           <p:cNvSpPr>
             <a:spLocks noGrp="1"/>
           </p:cNvSpPr>
@@ -3754,7 +3840,7 @@
       </p:grpSpPr>
       <p:sp>
         <p:nvSpPr>
-          <p:cNvPr id="143587816" name=""/>
+          <p:cNvPr id="733802750" name=""/>
           <p:cNvSpPr/>
           <p:nvPr/>
         </p:nvSpPr>
@@ -3829,7 +3915,7 @@
       </p:sp>
       <p:sp>
         <p:nvSpPr>
-          <p:cNvPr id="2112198299" name=""/>
+          <p:cNvPr id="885893729" name=""/>
           <p:cNvSpPr/>
           <p:nvPr/>
         </p:nvSpPr>
@@ -3909,7 +3995,7 @@
       </p:sp>
       <p:sp>
         <p:nvSpPr>
-          <p:cNvPr id="1878762556" name=""/>
+          <p:cNvPr id="1356415552" name=""/>
           <p:cNvSpPr/>
           <p:nvPr/>
         </p:nvSpPr>
@@ -3962,7 +4048,7 @@
       </p:sp>
       <p:sp>
         <p:nvSpPr>
-          <p:cNvPr id="463500821" name=""/>
+          <p:cNvPr id="1216326814" name=""/>
           <p:cNvSpPr txBox="1"/>
           <p:nvPr/>
         </p:nvSpPr>
@@ -4001,7 +4087,7 @@
       </p:sp>
       <p:sp>
         <p:nvSpPr>
-          <p:cNvPr id="962717940" name=""/>
+          <p:cNvPr id="1993381123" name=""/>
           <p:cNvSpPr/>
           <p:nvPr/>
         </p:nvSpPr>
@@ -4070,7 +4156,7 @@
       </p:sp>
       <p:sp>
         <p:nvSpPr>
-          <p:cNvPr id="80758464" name=""/>
+          <p:cNvPr id="1963201656" name=""/>
           <p:cNvSpPr txBox="1"/>
           <p:nvPr/>
         </p:nvSpPr>
@@ -4109,7 +4195,7 @@
       </p:sp>
       <p:sp>
         <p:nvSpPr>
-          <p:cNvPr id="1807390435" name=""/>
+          <p:cNvPr id="1077385861" name=""/>
           <p:cNvSpPr/>
           <p:nvPr/>
         </p:nvSpPr>
@@ -4244,7 +4330,7 @@
       </p:sp>
       <p:sp>
         <p:nvSpPr>
-          <p:cNvPr id="309775709" name=""/>
+          <p:cNvPr id="269384289" name=""/>
           <p:cNvSpPr/>
           <p:nvPr/>
         </p:nvSpPr>
@@ -4303,7 +4389,7 @@
       </p:sp>
       <p:sp>
         <p:nvSpPr>
-          <p:cNvPr id="2013582902" name=""/>
+          <p:cNvPr id="40318267" name=""/>
           <p:cNvSpPr txBox="1"/>
           <p:nvPr/>
         </p:nvSpPr>
@@ -4342,7 +4428,7 @@
       </p:sp>
       <p:sp>
         <p:nvSpPr>
-          <p:cNvPr id="931977481" name=""/>
+          <p:cNvPr id="726245115" name=""/>
           <p:cNvSpPr/>
           <p:nvPr/>
         </p:nvSpPr>
@@ -4399,7 +4485,7 @@
       </p:sp>
       <p:sp>
         <p:nvSpPr>
-          <p:cNvPr id="474296952" name=""/>
+          <p:cNvPr id="203622334" name=""/>
           <p:cNvSpPr/>
           <p:nvPr/>
         </p:nvSpPr>
@@ -4452,7 +4538,7 @@
       </p:sp>
       <p:sp>
         <p:nvSpPr>
-          <p:cNvPr id="2131415118" name=""/>
+          <p:cNvPr id="154210803" name=""/>
           <p:cNvSpPr/>
           <p:nvPr/>
         </p:nvSpPr>
@@ -4509,7 +4595,7 @@
       </p:sp>
       <p:sp>
         <p:nvSpPr>
-          <p:cNvPr id="1195896855" name=""/>
+          <p:cNvPr id="349655207" name=""/>
           <p:cNvSpPr/>
           <p:nvPr/>
         </p:nvSpPr>
@@ -4566,7 +4652,7 @@
       </p:sp>
       <p:sp>
         <p:nvSpPr>
-          <p:cNvPr id="1769312677" name=""/>
+          <p:cNvPr id="1204478779" name=""/>
           <p:cNvSpPr txBox="1"/>
           <p:nvPr/>
         </p:nvSpPr>
@@ -4605,7 +4691,7 @@
       </p:sp>
       <p:sp>
         <p:nvSpPr>
-          <p:cNvPr id="2052150878" name=""/>
+          <p:cNvPr id="72438470" name=""/>
           <p:cNvSpPr/>
           <p:nvPr/>
         </p:nvSpPr>
@@ -4674,7 +4760,7 @@
       </p:sp>
       <p:sp>
         <p:nvSpPr>
-          <p:cNvPr id="1351673339" name=""/>
+          <p:cNvPr id="1472990590" name=""/>
           <p:cNvSpPr txBox="1"/>
           <p:nvPr/>
         </p:nvSpPr>
@@ -4713,7 +4799,7 @@
       </p:sp>
       <p:sp>
         <p:nvSpPr>
-          <p:cNvPr id="233432704" name=""/>
+          <p:cNvPr id="877030433" name=""/>
           <p:cNvSpPr/>
           <p:nvPr/>
         </p:nvSpPr>
@@ -4770,13 +4856,13 @@
       </p:sp>
       <p:sp>
         <p:nvSpPr>
-          <p:cNvPr id="2072352170" name=""/>
+          <p:cNvPr id="15209293" name=""/>
           <p:cNvSpPr/>
           <p:nvPr/>
         </p:nvSpPr>
         <p:spPr bwMode="auto">
           <a:xfrm rot="0" flipH="0" flipV="0">
-            <a:off x="10317822" y="2113427"/>
+            <a:off x="10317821" y="2113427"/>
             <a:ext cx="682594" cy="1080867"/>
           </a:xfrm>
           <a:prstGeom prst="cube">
@@ -4823,12 +4909,12 @@
       </p:sp>
       <p:sp>
         <p:nvSpPr>
-          <p:cNvPr id="835518524" name=""/>
+          <p:cNvPr id="801621947" name=""/>
           <p:cNvSpPr/>
           <p:nvPr/>
         </p:nvSpPr>
         <p:spPr bwMode="auto">
-          <a:xfrm rot="5399978" flipH="0" flipV="0">
+          <a:xfrm rot="5399977" flipH="0" flipV="0">
             <a:off x="10405576" y="1715762"/>
             <a:ext cx="507087" cy="182232"/>
           </a:xfrm>
@@ -4880,7 +4966,7 @@
       </p:sp>
       <p:sp>
         <p:nvSpPr>
-          <p:cNvPr id="1878748202" name=""/>
+          <p:cNvPr id="343020316" name=""/>
           <p:cNvSpPr/>
           <p:nvPr/>
         </p:nvSpPr>
@@ -4937,7 +5023,7 @@
       </p:sp>
       <p:sp>
         <p:nvSpPr>
-          <p:cNvPr id="411988997" name=""/>
+          <p:cNvPr id="1967212057" name=""/>
           <p:cNvSpPr/>
           <p:nvPr/>
         </p:nvSpPr>
@@ -5043,12 +5129,12 @@
       </p:sp>
       <p:sp>
         <p:nvSpPr>
-          <p:cNvPr id="163849788" name=""/>
+          <p:cNvPr id="398371555" name=""/>
           <p:cNvSpPr/>
           <p:nvPr/>
         </p:nvSpPr>
         <p:spPr bwMode="auto">
-          <a:xfrm rot="5399978" flipH="0" flipV="0">
+          <a:xfrm rot="5399977" flipH="0" flipV="0">
             <a:off x="6259949" y="2271794"/>
             <a:ext cx="1017867" cy="1782003"/>
           </a:xfrm>
@@ -5102,12 +5188,12 @@
       </p:sp>
       <p:sp>
         <p:nvSpPr>
-          <p:cNvPr id="1952972620" name=""/>
+          <p:cNvPr id="2057162696" name=""/>
           <p:cNvSpPr/>
           <p:nvPr/>
         </p:nvSpPr>
         <p:spPr bwMode="auto">
-          <a:xfrm rot="5399978" flipH="0" flipV="1">
+          <a:xfrm rot="5399977" flipH="0" flipV="1">
             <a:off x="8722926" y="2271793"/>
             <a:ext cx="1017866" cy="1782002"/>
           </a:xfrm>
@@ -5161,7 +5247,7 @@
       </p:sp>
       <p:sp>
         <p:nvSpPr>
-          <p:cNvPr id="1427565375" name=""/>
+          <p:cNvPr id="633503346" name=""/>
           <p:cNvSpPr/>
           <p:nvPr/>
         </p:nvSpPr>
@@ -5218,7 +5304,7 @@
       </p:sp>
       <p:sp>
         <p:nvSpPr>
-          <p:cNvPr id="1323560613" name=""/>
+          <p:cNvPr id="2009390151" name=""/>
           <p:cNvSpPr txBox="1"/>
           <p:nvPr/>
         </p:nvSpPr>
@@ -5256,7 +5342,7 @@
       </p:sp>
       <p:sp>
         <p:nvSpPr>
-          <p:cNvPr id="1629433810" name=""/>
+          <p:cNvPr id="1848281139" name=""/>
           <p:cNvSpPr/>
           <p:nvPr/>
         </p:nvSpPr>
@@ -5339,12 +5425,12 @@
       </p:sp>
       <p:sp>
         <p:nvSpPr>
-          <p:cNvPr id="147346234" name=""/>
+          <p:cNvPr id="1464381734" name=""/>
           <p:cNvSpPr/>
           <p:nvPr/>
         </p:nvSpPr>
         <p:spPr bwMode="auto">
-          <a:xfrm rot="5399978" flipH="0" flipV="0">
+          <a:xfrm rot="5399977" flipH="0" flipV="0">
             <a:off x="7865630" y="5429234"/>
             <a:ext cx="507087" cy="182232"/>
           </a:xfrm>
@@ -5429,7 +5515,7 @@
       </p:grpSpPr>
       <p:sp>
         <p:nvSpPr>
-          <p:cNvPr id="1244737966" name=""/>
+          <p:cNvPr id="1806962945" name=""/>
           <p:cNvSpPr/>
           <p:nvPr/>
         </p:nvSpPr>
@@ -5512,7 +5598,7 @@
       </p:sp>
       <p:sp>
         <p:nvSpPr>
-          <p:cNvPr id="330789754" name=""/>
+          <p:cNvPr id="821482406" name=""/>
           <p:cNvSpPr/>
           <p:nvPr/>
         </p:nvSpPr>
@@ -5571,7 +5657,7 @@
       </p:sp>
       <p:sp>
         <p:nvSpPr>
-          <p:cNvPr id="191813478" name=""/>
+          <p:cNvPr id="2063609152" name=""/>
           <p:cNvSpPr/>
           <p:nvPr/>
         </p:nvSpPr>
@@ -5624,7 +5710,7 @@
       </p:sp>
       <p:sp>
         <p:nvSpPr>
-          <p:cNvPr id="1825126795" name=""/>
+          <p:cNvPr id="1087691766" name=""/>
           <p:cNvSpPr/>
           <p:nvPr/>
         </p:nvSpPr>
@@ -5664,7 +5750,7 @@
       </p:sp>
       <p:sp>
         <p:nvSpPr>
-          <p:cNvPr id="1058035739" name=""/>
+          <p:cNvPr id="1974273313" name=""/>
           <p:cNvSpPr txBox="1"/>
           <p:nvPr/>
         </p:nvSpPr>
@@ -5718,7 +5804,7 @@
       </p:sp>
       <p:sp>
         <p:nvSpPr>
-          <p:cNvPr id="661828217" name=""/>
+          <p:cNvPr id="1562425208" name=""/>
           <p:cNvSpPr/>
           <p:nvPr/>
         </p:nvSpPr>
@@ -5777,7 +5863,7 @@
       </p:sp>
       <p:sp>
         <p:nvSpPr>
-          <p:cNvPr id="188468614" name=""/>
+          <p:cNvPr id="1439931386" name=""/>
           <p:cNvSpPr/>
           <p:nvPr/>
         </p:nvSpPr>
@@ -5817,7 +5903,7 @@
       </p:sp>
       <p:sp>
         <p:nvSpPr>
-          <p:cNvPr id="420476364" name=""/>
+          <p:cNvPr id="1737919059" name=""/>
           <p:cNvSpPr txBox="1"/>
           <p:nvPr/>
         </p:nvSpPr>
@@ -5879,7 +5965,7 @@
       </p:sp>
       <p:sp>
         <p:nvSpPr>
-          <p:cNvPr id="1169719554" name=""/>
+          <p:cNvPr id="810954736" name=""/>
           <p:cNvSpPr/>
           <p:nvPr/>
         </p:nvSpPr>
@@ -5935,7 +6021,7 @@
       </p:sp>
       <p:sp>
         <p:nvSpPr>
-          <p:cNvPr id="1234066283" name=""/>
+          <p:cNvPr id="2088813162" name=""/>
           <p:cNvSpPr/>
           <p:nvPr/>
         </p:nvSpPr>
@@ -5992,7 +6078,7 @@
       </p:sp>
       <p:sp>
         <p:nvSpPr>
-          <p:cNvPr id="1605695488" name=""/>
+          <p:cNvPr id="1630021395" name=""/>
           <p:cNvSpPr/>
           <p:nvPr/>
         </p:nvSpPr>
@@ -6049,7 +6135,7 @@
       </p:sp>
       <p:sp>
         <p:nvSpPr>
-          <p:cNvPr id="2091639205" name=""/>
+          <p:cNvPr id="1935721826" name=""/>
           <p:cNvSpPr txBox="1"/>
           <p:nvPr/>
         </p:nvSpPr>
@@ -6087,7 +6173,7 @@
       </p:sp>
       <p:sp>
         <p:nvSpPr>
-          <p:cNvPr id="456457995" name=""/>
+          <p:cNvPr id="1422933029" name=""/>
           <p:cNvSpPr/>
           <p:nvPr/>
         </p:nvSpPr>
@@ -6170,7 +6256,7 @@
       </p:sp>
       <p:sp>
         <p:nvSpPr>
-          <p:cNvPr id="2000062697" name=""/>
+          <p:cNvPr id="666578000" name=""/>
           <p:cNvSpPr/>
           <p:nvPr/>
         </p:nvSpPr>
@@ -6227,7 +6313,7 @@
       </p:sp>
       <p:sp>
         <p:nvSpPr>
-          <p:cNvPr id="1829542684" name=""/>
+          <p:cNvPr id="826176668" name=""/>
           <p:cNvSpPr txBox="1"/>
           <p:nvPr/>
         </p:nvSpPr>
@@ -6412,7 +6498,7 @@
       </p:sp>
       <p:sp>
         <p:nvSpPr>
-          <p:cNvPr id="1065193096" name=""/>
+          <p:cNvPr id="924383550" name=""/>
           <p:cNvSpPr txBox="1"/>
           <p:nvPr/>
         </p:nvSpPr>
@@ -6450,12 +6536,12 @@
       </p:sp>
       <p:sp>
         <p:nvSpPr>
-          <p:cNvPr id="201324682" name=""/>
+          <p:cNvPr id="947336745" name=""/>
           <p:cNvSpPr/>
           <p:nvPr/>
         </p:nvSpPr>
         <p:spPr bwMode="auto">
-          <a:xfrm rot="5399978" flipH="0" flipV="0">
+          <a:xfrm rot="5399977" flipH="0" flipV="0">
             <a:off x="6447335" y="2885282"/>
             <a:ext cx="709728" cy="243235"/>
           </a:xfrm>
@@ -6507,7 +6593,7 @@
       </p:sp>
       <p:sp>
         <p:nvSpPr>
-          <p:cNvPr id="1254999616" name=""/>
+          <p:cNvPr id="1338073834" name=""/>
           <p:cNvSpPr/>
           <p:nvPr/>
         </p:nvSpPr>
@@ -6590,7 +6676,7 @@
       </p:sp>
       <p:sp>
         <p:nvSpPr>
-          <p:cNvPr id="1463988303" name=""/>
+          <p:cNvPr id="255364048" name=""/>
           <p:cNvSpPr/>
           <p:nvPr/>
         </p:nvSpPr>
@@ -6676,7 +6762,7 @@
       </p:sp>
       <p:sp>
         <p:nvSpPr>
-          <p:cNvPr id="553655163" name=""/>
+          <p:cNvPr id="1863850387" name=""/>
           <p:cNvSpPr/>
           <p:nvPr/>
         </p:nvSpPr>
@@ -6759,14 +6845,14 @@
       </p:sp>
       <p:sp>
         <p:nvSpPr>
-          <p:cNvPr id="1490043761" name=""/>
+          <p:cNvPr id="1343007477" name=""/>
           <p:cNvSpPr txBox="1"/>
           <p:nvPr/>
         </p:nvSpPr>
         <p:spPr bwMode="auto">
           <a:xfrm rot="0" flipH="0" flipV="0">
             <a:off x="4269291" y="4631583"/>
-            <a:ext cx="1296297" cy="305159"/>
+            <a:ext cx="1296296" cy="305159"/>
           </a:xfrm>
           <a:prstGeom prst="rect">
             <a:avLst/>
@@ -6797,7 +6883,7 @@
       </p:sp>
       <p:sp>
         <p:nvSpPr>
-          <p:cNvPr id="1472551906" name=""/>
+          <p:cNvPr id="1686245740" name=""/>
           <p:cNvSpPr txBox="1"/>
           <p:nvPr/>
         </p:nvSpPr>
@@ -6835,7 +6921,7 @@
       </p:sp>
       <p:sp>
         <p:nvSpPr>
-          <p:cNvPr id="1855117497" name=""/>
+          <p:cNvPr id="1752941699" name=""/>
           <p:cNvSpPr txBox="1"/>
           <p:nvPr/>
         </p:nvSpPr>
@@ -6873,14 +6959,14 @@
       </p:sp>
       <p:sp>
         <p:nvSpPr>
-          <p:cNvPr id="1656700138" name=""/>
+          <p:cNvPr id="1230370767" name=""/>
           <p:cNvSpPr/>
           <p:nvPr/>
         </p:nvSpPr>
         <p:spPr bwMode="auto">
           <a:xfrm rot="0" flipH="0" flipV="0">
             <a:off x="3810954" y="3429000"/>
-            <a:ext cx="6175583" cy="1566955"/>
+            <a:ext cx="6175582" cy="1566955"/>
           </a:xfrm>
           <a:prstGeom prst="flowChartAlternateProcess">
             <a:avLst/>
@@ -6913,7 +6999,7 @@
       </p:sp>
       <p:sp>
         <p:nvSpPr>
-          <p:cNvPr id="676372373" name=""/>
+          <p:cNvPr id="15269453" name=""/>
           <p:cNvSpPr txBox="1"/>
           <p:nvPr/>
         </p:nvSpPr>
@@ -6967,12 +7053,12 @@
       </p:sp>
       <p:sp>
         <p:nvSpPr>
-          <p:cNvPr id="826380535" name=""/>
+          <p:cNvPr id="1737869065" name=""/>
           <p:cNvSpPr/>
           <p:nvPr/>
         </p:nvSpPr>
         <p:spPr bwMode="auto">
-          <a:xfrm rot="5399978" flipH="0" flipV="0">
+          <a:xfrm rot="5399977" flipH="0" flipV="0">
             <a:off x="6588903" y="5155967"/>
             <a:ext cx="426593" cy="243234"/>
           </a:xfrm>
@@ -7024,7 +7110,7 @@
       </p:sp>
       <p:sp>
         <p:nvSpPr>
-          <p:cNvPr id="149149895" name=""/>
+          <p:cNvPr id="1789941037" name=""/>
           <p:cNvSpPr/>
           <p:nvPr/>
         </p:nvSpPr>
@@ -7107,13 +7193,13 @@
       </p:sp>
       <p:sp>
         <p:nvSpPr>
-          <p:cNvPr id="727930373" name=""/>
+          <p:cNvPr id="45531226" name=""/>
           <p:cNvSpPr txBox="1"/>
           <p:nvPr/>
         </p:nvSpPr>
         <p:spPr bwMode="auto">
           <a:xfrm rot="0" flipH="0" flipV="0">
-            <a:off x="7688885" y="6174853"/>
+            <a:off x="7688885" y="6174852"/>
             <a:ext cx="1735429" cy="518519"/>
           </a:xfrm>
           <a:prstGeom prst="rect">
@@ -7164,7 +7250,7 @@
       </p:sp>
       <p:sp>
         <p:nvSpPr>
-          <p:cNvPr id="178399591" name=""/>
+          <p:cNvPr id="1847596053" name=""/>
           <p:cNvSpPr/>
           <p:nvPr/>
         </p:nvSpPr>
@@ -7221,7 +7307,7 @@
       </p:sp>
       <p:sp>
         <p:nvSpPr>
-          <p:cNvPr id="214072604" name=""/>
+          <p:cNvPr id="1068899687" name=""/>
           <p:cNvSpPr/>
           <p:nvPr/>
         </p:nvSpPr>
@@ -7277,12 +7363,12 @@
       </p:sp>
       <p:sp>
         <p:nvSpPr>
-          <p:cNvPr id="819522939" name=""/>
+          <p:cNvPr id="1330385973" name=""/>
           <p:cNvSpPr/>
           <p:nvPr/>
         </p:nvSpPr>
         <p:spPr bwMode="auto">
-          <a:xfrm rot="10799990" flipH="0" flipV="0">
+          <a:xfrm rot="10799989" flipH="0" flipV="0">
             <a:off x="5476253" y="5659469"/>
             <a:ext cx="479656" cy="182232"/>
           </a:xfrm>
@@ -7334,7 +7420,7 @@
       </p:sp>
       <p:sp>
         <p:nvSpPr>
-          <p:cNvPr id="162822847" name=""/>
+          <p:cNvPr id="347302295" name=""/>
           <p:cNvSpPr/>
           <p:nvPr/>
         </p:nvSpPr>
@@ -7390,7 +7476,7 @@
       </p:sp>
       <p:sp>
         <p:nvSpPr>
-          <p:cNvPr id="333344329" name=""/>
+          <p:cNvPr id="100807619" name=""/>
           <p:cNvSpPr txBox="1"/>
           <p:nvPr/>
         </p:nvSpPr>
@@ -7479,7 +7565,7 @@
       </p:sp>
       <p:sp>
         <p:nvSpPr>
-          <p:cNvPr id="1899831903" name=""/>
+          <p:cNvPr id="1835377830" name=""/>
           <p:cNvSpPr txBox="1"/>
           <p:nvPr/>
         </p:nvSpPr>
@@ -7517,7 +7603,7 @@
       </p:sp>
       <p:sp>
         <p:nvSpPr>
-          <p:cNvPr id="675217734" name=""/>
+          <p:cNvPr id="934594483" name=""/>
           <p:cNvSpPr txBox="1"/>
           <p:nvPr/>
         </p:nvSpPr>
@@ -7561,6 +7647,937 @@
   <mc:AlternateContent xmlns:mc="http://schemas.openxmlformats.org/markup-compatibility/2006">
     <mc:Choice xmlns:p159="http://schemas.microsoft.com/office/powerpoint/2015/09/main" xmlns:p14="http://schemas.microsoft.com/office/powerpoint/2010/main" Requires="p159">
       <p:transition p14:dur="2000" advClick="1"/>
+    </mc:Choice>
+    <mc:Fallback>
+      <p:transition advClick="1"/>
+    </mc:Fallback>
+  </mc:AlternateContent>
+</p:sld>
+</file>
+
+<file path=ppt/slides/slide3.xml><?xml version="1.0" encoding="utf-8"?>
+<p:sld xmlns:a="http://schemas.openxmlformats.org/drawingml/2006/main" xmlns:r="http://schemas.openxmlformats.org/officeDocument/2006/relationships" xmlns:p="http://schemas.openxmlformats.org/presentationml/2006/main" xmlns:m="http://schemas.openxmlformats.org/officeDocument/2006/math" xmlns:w="http://schemas.openxmlformats.org/wordprocessingml/2006/main" xmlns:mc="http://schemas.openxmlformats.org/markup-compatibility/2006" showMasterPhAnim="0" showMasterSp="1" show="1">
+  <p:cSld name="">
+    <p:spTree>
+      <p:nvGrpSpPr>
+        <p:cNvPr id="1" name=""/>
+        <p:cNvGrpSpPr/>
+        <p:nvPr/>
+      </p:nvGrpSpPr>
+      <p:grpSpPr bwMode="auto">
+        <a:xfrm>
+          <a:off x="0" y="0"/>
+          <a:ext cx="0" cy="0"/>
+          <a:chOff x="0" y="0"/>
+          <a:chExt cx="0" cy="0"/>
+        </a:xfrm>
+      </p:grpSpPr>
+      <p:sp>
+        <p:nvSpPr>
+          <p:cNvPr id="1912279147" name=""/>
+          <p:cNvSpPr/>
+          <p:nvPr/>
+        </p:nvSpPr>
+        <p:spPr bwMode="auto">
+          <a:xfrm rot="0" flipH="0" flipV="0">
+            <a:off x="2037661" y="587331"/>
+            <a:ext cx="1437117" cy="850755"/>
+          </a:xfrm>
+          <a:prstGeom prst="rect">
+            <a:avLst/>
+          </a:prstGeom>
+          <a:gradFill>
+            <a:gsLst>
+              <a:gs pos="19000">
+                <a:schemeClr val="accent1"/>
+              </a:gs>
+              <a:gs pos="100000">
+                <a:srgbClr val="FFFFFF"/>
+              </a:gs>
+            </a:gsLst>
+            <a:lin ang="0" scaled="1"/>
+          </a:gradFill>
+          <a:ln w="19049" cap="flat" cmpd="sng" algn="ctr">
+            <a:solidFill>
+              <a:schemeClr val="accent1">
+                <a:alpha val="99999"/>
+              </a:schemeClr>
+            </a:solidFill>
+            <a:prstDash val="solid"/>
+            <a:miter lim="800000"/>
+          </a:ln>
+        </p:spPr>
+        <p:style>
+          <a:lnRef idx="2">
+            <a:schemeClr val="accent1">
+              <a:shade val="50000"/>
+            </a:schemeClr>
+          </a:lnRef>
+          <a:fillRef idx="1">
+            <a:schemeClr val="accent1"/>
+          </a:fillRef>
+          <a:effectRef idx="0">
+            <a:schemeClr val="accent1"/>
+          </a:effectRef>
+          <a:fontRef idx="minor">
+            <a:schemeClr val="lt1"/>
+          </a:fontRef>
+        </p:style>
+        <p:txBody>
+          <a:bodyPr anchor="ctr"/>
+          <a:p>
+            <a:pPr algn="ctr">
+              <a:defRPr/>
+            </a:pPr>
+            <a:r>
+              <a:rPr sz="1400" b="0">
+                <a:solidFill>
+                  <a:schemeClr val="tx1"/>
+                </a:solidFill>
+                <a:latin typeface="Times New Roman"/>
+                <a:ea typeface="Times New Roman"/>
+                <a:cs typeface="Times New Roman"/>
+              </a:rPr>
+              <a:t>DINOV3</a:t>
+            </a:r>
+            <a:r>
+              <a:rPr sz="1400" b="0">
+                <a:solidFill>
+                  <a:schemeClr val="tx1"/>
+                </a:solidFill>
+                <a:latin typeface="Times New Roman"/>
+                <a:cs typeface="Times New Roman"/>
+              </a:rPr>
+              <a:t> + Upsampler + AVG Pooling</a:t>
+            </a:r>
+            <a:endParaRPr sz="1400" b="0">
+              <a:latin typeface="Times New Roman"/>
+              <a:cs typeface="Times New Roman"/>
+            </a:endParaRPr>
+          </a:p>
+        </p:txBody>
+      </p:sp>
+      <p:sp>
+        <p:nvSpPr>
+          <p:cNvPr id="2065955701" name=""/>
+          <p:cNvSpPr/>
+          <p:nvPr/>
+        </p:nvSpPr>
+        <p:spPr bwMode="auto">
+          <a:xfrm rot="0" flipH="0" flipV="0">
+            <a:off x="2037661" y="2240773"/>
+            <a:ext cx="1203661" cy="701780"/>
+          </a:xfrm>
+          <a:prstGeom prst="rect">
+            <a:avLst/>
+          </a:prstGeom>
+          <a:gradFill>
+            <a:gsLst>
+              <a:gs pos="19000">
+                <a:schemeClr val="accent2">
+                  <a:lumMod val="60000"/>
+                  <a:lumOff val="40000"/>
+                </a:schemeClr>
+              </a:gs>
+              <a:gs pos="100000">
+                <a:srgbClr val="FFFFFF"/>
+              </a:gs>
+            </a:gsLst>
+            <a:lin ang="0" scaled="1"/>
+          </a:gradFill>
+          <a:ln w="19049" cap="flat" cmpd="sng" algn="ctr">
+            <a:solidFill>
+              <a:schemeClr val="accent2">
+                <a:lumMod val="60000"/>
+                <a:lumOff val="40000"/>
+                <a:alpha val="99999"/>
+              </a:schemeClr>
+            </a:solidFill>
+            <a:prstDash val="solid"/>
+            <a:miter lim="800000"/>
+          </a:ln>
+        </p:spPr>
+        <p:style>
+          <a:lnRef idx="2">
+            <a:schemeClr val="accent1">
+              <a:shade val="50000"/>
+            </a:schemeClr>
+          </a:lnRef>
+          <a:fillRef idx="1">
+            <a:schemeClr val="accent1"/>
+          </a:fillRef>
+          <a:effectRef idx="0">
+            <a:schemeClr val="accent1"/>
+          </a:effectRef>
+          <a:fontRef idx="minor">
+            <a:schemeClr val="lt1"/>
+          </a:fontRef>
+        </p:style>
+        <p:txBody>
+          <a:bodyPr anchor="ctr"/>
+          <a:p>
+            <a:pPr algn="ctr">
+              <a:defRPr/>
+            </a:pPr>
+            <a:r>
+              <a:rPr sz="1400" b="0">
+                <a:solidFill>
+                  <a:schemeClr val="tx1"/>
+                </a:solidFill>
+                <a:latin typeface="Times New Roman"/>
+                <a:ea typeface="Times New Roman"/>
+                <a:cs typeface="Times New Roman"/>
+              </a:rPr>
+              <a:t>QWEN3 Embeddings</a:t>
+            </a:r>
+            <a:endParaRPr sz="1400" b="0">
+              <a:latin typeface="Times New Roman"/>
+              <a:cs typeface="Times New Roman"/>
+            </a:endParaRPr>
+          </a:p>
+        </p:txBody>
+      </p:sp>
+      <p:pic>
+        <p:nvPicPr>
+          <p:cNvPr id="466929014" name=""/>
+          <p:cNvPicPr>
+            <a:picLocks noChangeAspect="1"/>
+          </p:cNvPicPr>
+          <p:nvPr/>
+        </p:nvPicPr>
+        <p:blipFill rotWithShape="1">
+          <a:blip r:embed="rId3"/>
+          <a:stretch/>
+        </p:blipFill>
+        <p:spPr bwMode="auto">
+          <a:xfrm flipH="0" flipV="0">
+            <a:off x="183617" y="351334"/>
+            <a:ext cx="1066142" cy="1738276"/>
+          </a:xfrm>
+          <a:prstGeom prst="rect">
+            <a:avLst/>
+          </a:prstGeom>
+        </p:spPr>
+      </p:pic>
+      <p:sp>
+        <p:nvSpPr>
+          <p:cNvPr id="1160665756" name=""/>
+          <p:cNvSpPr txBox="1"/>
+          <p:nvPr/>
+        </p:nvSpPr>
+        <p:spPr bwMode="auto">
+          <a:xfrm rot="0" flipH="0" flipV="0">
+            <a:off x="61699" y="2561698"/>
+            <a:ext cx="1309978" cy="579479"/>
+          </a:xfrm>
+          <a:prstGeom prst="rect">
+            <a:avLst/>
+          </a:prstGeom>
+          <a:noFill/>
+        </p:spPr>
+        <p:txBody>
+          <a:bodyPr vertOverflow="overflow" horzOverflow="overflow" vert="horz" wrap="square" lIns="91440" tIns="45720" rIns="91440" bIns="45720" numCol="1" spcCol="0" rtlCol="0" fromWordArt="0" anchor="t" anchorCtr="0" forceAA="0" upright="0" compatLnSpc="0">
+            <a:spAutoFit/>
+          </a:bodyPr>
+          <a:p>
+            <a:pPr algn="ctr">
+              <a:defRPr/>
+            </a:pPr>
+            <a:r>
+              <a:rPr sz="1600">
+                <a:latin typeface="Times New Roman"/>
+                <a:cs typeface="Times New Roman"/>
+              </a:rPr>
+              <a:t>“the </a:t>
+            </a:r>
+            <a:r>
+              <a:rPr lang="en-US" sz="1600" b="0" i="0" u="none" strike="noStrike" cap="none" spc="0">
+                <a:solidFill>
+                  <a:schemeClr val="tx1"/>
+                </a:solidFill>
+                <a:latin typeface="Times New Roman"/>
+                <a:ea typeface="Times New Roman"/>
+                <a:cs typeface="Times New Roman"/>
+              </a:rPr>
+              <a:t>orange tabby</a:t>
+            </a:r>
+            <a:r>
+              <a:rPr sz="1600">
+                <a:latin typeface="Times New Roman"/>
+                <a:cs typeface="Times New Roman"/>
+              </a:rPr>
+              <a:t>”</a:t>
+            </a:r>
+            <a:endParaRPr sz="1600">
+              <a:latin typeface="Times New Roman"/>
+              <a:cs typeface="Times New Roman"/>
+            </a:endParaRPr>
+          </a:p>
+        </p:txBody>
+      </p:sp>
+      <p:sp>
+        <p:nvSpPr>
+          <p:cNvPr id="316495952" name=""/>
+          <p:cNvSpPr/>
+          <p:nvPr/>
+        </p:nvSpPr>
+        <p:spPr bwMode="auto">
+          <a:xfrm rot="0" flipH="0" flipV="0">
+            <a:off x="3573856" y="997705"/>
+            <a:ext cx="619291" cy="182232"/>
+          </a:xfrm>
+          <a:prstGeom prst="rightArrow">
+            <a:avLst>
+              <a:gd name="adj1" fmla="val 50000"/>
+              <a:gd name="adj2" fmla="val 50000"/>
+            </a:avLst>
+          </a:prstGeom>
+          <a:solidFill>
+            <a:schemeClr val="tx1"/>
+          </a:solidFill>
+          <a:ln w="12699" cap="flat" cmpd="sng" algn="ctr">
+            <a:solidFill>
+              <a:schemeClr val="tx1"/>
+            </a:solidFill>
+            <a:prstDash val="solid"/>
+            <a:miter lim="800000"/>
+          </a:ln>
+        </p:spPr>
+        <p:style>
+          <a:lnRef idx="2">
+            <a:schemeClr val="accent1">
+              <a:shade val="50000"/>
+            </a:schemeClr>
+          </a:lnRef>
+          <a:fillRef idx="1">
+            <a:schemeClr val="accent1"/>
+          </a:fillRef>
+          <a:effectRef idx="0">
+            <a:schemeClr val="accent1"/>
+          </a:effectRef>
+          <a:fontRef idx="minor">
+            <a:schemeClr val="lt1"/>
+          </a:fontRef>
+        </p:style>
+        <p:txBody>
+          <a:bodyPr anchor="ctr"/>
+          <a:p>
+            <a:pPr algn="ctr">
+              <a:defRPr/>
+            </a:pPr>
+            <a:endParaRPr>
+              <a:latin typeface="Times New Roman"/>
+              <a:cs typeface="Times New Roman"/>
+            </a:endParaRPr>
+          </a:p>
+        </p:txBody>
+      </p:sp>
+      <p:sp>
+        <p:nvSpPr>
+          <p:cNvPr id="1503200414" name=""/>
+          <p:cNvSpPr/>
+          <p:nvPr/>
+        </p:nvSpPr>
+        <p:spPr bwMode="auto">
+          <a:xfrm rot="0" flipH="0" flipV="0">
+            <a:off x="1371678" y="1038240"/>
+            <a:ext cx="506262" cy="182232"/>
+          </a:xfrm>
+          <a:prstGeom prst="rightArrow">
+            <a:avLst>
+              <a:gd name="adj1" fmla="val 50000"/>
+              <a:gd name="adj2" fmla="val 50000"/>
+            </a:avLst>
+          </a:prstGeom>
+          <a:solidFill>
+            <a:schemeClr val="tx1"/>
+          </a:solidFill>
+          <a:ln w="12699" cap="flat" cmpd="sng" algn="ctr">
+            <a:solidFill>
+              <a:schemeClr val="tx1"/>
+            </a:solidFill>
+            <a:prstDash val="solid"/>
+            <a:miter lim="800000"/>
+          </a:ln>
+        </p:spPr>
+        <p:style>
+          <a:lnRef idx="2">
+            <a:schemeClr val="accent1">
+              <a:shade val="50000"/>
+            </a:schemeClr>
+          </a:lnRef>
+          <a:fillRef idx="1">
+            <a:schemeClr val="accent1"/>
+          </a:fillRef>
+          <a:effectRef idx="0">
+            <a:schemeClr val="accent1"/>
+          </a:effectRef>
+          <a:fontRef idx="minor">
+            <a:schemeClr val="lt1"/>
+          </a:fontRef>
+        </p:style>
+        <p:txBody>
+          <a:bodyPr anchor="ctr"/>
+          <a:p>
+            <a:pPr algn="ctr">
+              <a:defRPr/>
+            </a:pPr>
+            <a:endParaRPr>
+              <a:latin typeface="Times New Roman"/>
+              <a:cs typeface="Times New Roman"/>
+            </a:endParaRPr>
+          </a:p>
+        </p:txBody>
+      </p:sp>
+      <p:sp>
+        <p:nvSpPr>
+          <p:cNvPr id="73506244" name=""/>
+          <p:cNvSpPr/>
+          <p:nvPr/>
+        </p:nvSpPr>
+        <p:spPr bwMode="auto">
+          <a:xfrm rot="0" flipH="0" flipV="0">
+            <a:off x="1371678" y="2561698"/>
+            <a:ext cx="506261" cy="182232"/>
+          </a:xfrm>
+          <a:prstGeom prst="rightArrow">
+            <a:avLst>
+              <a:gd name="adj1" fmla="val 50000"/>
+              <a:gd name="adj2" fmla="val 50000"/>
+            </a:avLst>
+          </a:prstGeom>
+          <a:solidFill>
+            <a:schemeClr val="tx1"/>
+          </a:solidFill>
+          <a:ln w="12699" cap="flat" cmpd="sng" algn="ctr">
+            <a:solidFill>
+              <a:schemeClr val="tx1"/>
+            </a:solidFill>
+            <a:prstDash val="solid"/>
+            <a:miter lim="800000"/>
+          </a:ln>
+        </p:spPr>
+        <p:style>
+          <a:lnRef idx="2">
+            <a:schemeClr val="accent1">
+              <a:shade val="50000"/>
+            </a:schemeClr>
+          </a:lnRef>
+          <a:fillRef idx="1">
+            <a:schemeClr val="accent1"/>
+          </a:fillRef>
+          <a:effectRef idx="0">
+            <a:schemeClr val="accent1"/>
+          </a:effectRef>
+          <a:fontRef idx="minor">
+            <a:schemeClr val="lt1"/>
+          </a:fontRef>
+        </p:style>
+        <p:txBody>
+          <a:bodyPr anchor="ctr"/>
+          <a:p>
+            <a:pPr algn="ctr">
+              <a:defRPr/>
+            </a:pPr>
+            <a:endParaRPr>
+              <a:latin typeface="Times New Roman"/>
+              <a:cs typeface="Times New Roman"/>
+            </a:endParaRPr>
+          </a:p>
+        </p:txBody>
+      </p:sp>
+      <p:sp>
+        <p:nvSpPr>
+          <p:cNvPr id="1658903551" name=""/>
+          <p:cNvSpPr/>
+          <p:nvPr/>
+        </p:nvSpPr>
+        <p:spPr bwMode="auto">
+          <a:xfrm rot="0" flipH="0" flipV="0">
+            <a:off x="6681925" y="605385"/>
+            <a:ext cx="386885" cy="1149105"/>
+          </a:xfrm>
+          <a:prstGeom prst="cube">
+            <a:avLst>
+              <a:gd name="adj" fmla="val 25000"/>
+            </a:avLst>
+          </a:prstGeom>
+          <a:ln w="12700" cap="flat" cmpd="sng" algn="ctr">
+            <a:solidFill>
+              <a:schemeClr val="tx1"/>
+            </a:solidFill>
+            <a:prstDash val="solid"/>
+            <a:miter lim="800000"/>
+          </a:ln>
+        </p:spPr>
+        <p:style>
+          <a:lnRef idx="2">
+            <a:schemeClr val="accent1">
+              <a:shade val="50000"/>
+            </a:schemeClr>
+          </a:lnRef>
+          <a:fillRef idx="1">
+            <a:schemeClr val="accent1"/>
+          </a:fillRef>
+          <a:effectRef idx="0">
+            <a:schemeClr val="accent1"/>
+          </a:effectRef>
+          <a:fontRef idx="minor">
+            <a:schemeClr val="lt1"/>
+          </a:fontRef>
+        </p:style>
+        <p:txBody>
+          <a:bodyPr anchor="ctr"/>
+          <a:p>
+            <a:pPr algn="ctr">
+              <a:defRPr/>
+            </a:pPr>
+            <a:endParaRPr>
+              <a:latin typeface="Times New Roman"/>
+              <a:cs typeface="Times New Roman"/>
+            </a:endParaRPr>
+          </a:p>
+        </p:txBody>
+      </p:sp>
+      <p:sp>
+        <p:nvSpPr>
+          <p:cNvPr id="1962800642" name=""/>
+          <p:cNvSpPr txBox="1"/>
+          <p:nvPr/>
+        </p:nvSpPr>
+        <p:spPr bwMode="auto">
+          <a:xfrm rot="0" flipH="0" flipV="0">
+            <a:off x="5915573" y="1784450"/>
+            <a:ext cx="1919588" cy="305159"/>
+          </a:xfrm>
+          <a:prstGeom prst="rect">
+            <a:avLst/>
+          </a:prstGeom>
+          <a:noFill/>
+        </p:spPr>
+        <p:txBody>
+          <a:bodyPr vertOverflow="overflow" horzOverflow="overflow" vert="horz" wrap="square" lIns="91440" tIns="45720" rIns="91440" bIns="45720" numCol="1" spcCol="0" rtlCol="0" fromWordArt="0" anchor="t" anchorCtr="0" forceAA="0" upright="0" compatLnSpc="0">
+            <a:spAutoFit/>
+          </a:bodyPr>
+          <a:p>
+            <a:pPr algn="ctr">
+              <a:defRPr/>
+            </a:pPr>
+            <a:r>
+              <a:rPr sz="1400">
+                <a:latin typeface="Times New Roman"/>
+                <a:ea typeface="Times New Roman"/>
+                <a:cs typeface="Times New Roman"/>
+              </a:rPr>
+              <a:t>Batch, 1024, 768</a:t>
+            </a:r>
+            <a:endParaRPr sz="1400">
+              <a:latin typeface="Times New Roman"/>
+              <a:cs typeface="Times New Roman"/>
+            </a:endParaRPr>
+          </a:p>
+        </p:txBody>
+      </p:sp>
+      <p:sp>
+        <p:nvSpPr>
+          <p:cNvPr id="654647595" name=""/>
+          <p:cNvSpPr/>
+          <p:nvPr/>
+        </p:nvSpPr>
+        <p:spPr bwMode="auto">
+          <a:xfrm rot="0" flipH="0" flipV="0">
+            <a:off x="4272434" y="627867"/>
+            <a:ext cx="1559485" cy="922280"/>
+          </a:xfrm>
+          <a:prstGeom prst="rect">
+            <a:avLst/>
+          </a:prstGeom>
+          <a:gradFill>
+            <a:gsLst>
+              <a:gs pos="19000">
+                <a:schemeClr val="accent1"/>
+              </a:gs>
+              <a:gs pos="100000">
+                <a:srgbClr val="FFFFFF"/>
+              </a:gs>
+            </a:gsLst>
+            <a:lin ang="0" scaled="1"/>
+          </a:gradFill>
+          <a:ln w="19049" cap="flat" cmpd="sng" algn="ctr">
+            <a:solidFill>
+              <a:schemeClr val="accent1">
+                <a:alpha val="99999"/>
+              </a:schemeClr>
+            </a:solidFill>
+            <a:prstDash val="solid"/>
+            <a:miter lim="800000"/>
+          </a:ln>
+        </p:spPr>
+        <p:style>
+          <a:lnRef idx="2">
+            <a:schemeClr val="accent1">
+              <a:shade val="50000"/>
+            </a:schemeClr>
+          </a:lnRef>
+          <a:fillRef idx="1">
+            <a:schemeClr val="accent1"/>
+          </a:fillRef>
+          <a:effectRef idx="0">
+            <a:schemeClr val="accent1"/>
+          </a:effectRef>
+          <a:fontRef idx="minor">
+            <a:schemeClr val="lt1"/>
+          </a:fontRef>
+        </p:style>
+        <p:txBody>
+          <a:bodyPr anchor="ctr"/>
+          <a:p>
+            <a:pPr algn="ctr">
+              <a:defRPr/>
+            </a:pPr>
+            <a:r>
+              <a:rPr sz="1400" b="0">
+                <a:solidFill>
+                  <a:schemeClr val="tx1"/>
+                </a:solidFill>
+                <a:latin typeface="Times New Roman"/>
+                <a:ea typeface="Times New Roman"/>
+                <a:cs typeface="Times New Roman"/>
+              </a:rPr>
+              <a:t>Squeeze + reshape + transpose operation</a:t>
+            </a:r>
+            <a:endParaRPr sz="1600" b="0">
+              <a:latin typeface="Times New Roman"/>
+              <a:cs typeface="Times New Roman"/>
+            </a:endParaRPr>
+          </a:p>
+        </p:txBody>
+      </p:sp>
+      <p:sp>
+        <p:nvSpPr>
+          <p:cNvPr id="1042930" name=""/>
+          <p:cNvSpPr/>
+          <p:nvPr/>
+        </p:nvSpPr>
+        <p:spPr bwMode="auto">
+          <a:xfrm rot="0" flipH="0" flipV="0">
+            <a:off x="5887122" y="997705"/>
+            <a:ext cx="619290" cy="182232"/>
+          </a:xfrm>
+          <a:prstGeom prst="rightArrow">
+            <a:avLst>
+              <a:gd name="adj1" fmla="val 50000"/>
+              <a:gd name="adj2" fmla="val 50000"/>
+            </a:avLst>
+          </a:prstGeom>
+          <a:solidFill>
+            <a:schemeClr val="tx1"/>
+          </a:solidFill>
+          <a:ln w="12699" cap="flat" cmpd="sng" algn="ctr">
+            <a:solidFill>
+              <a:schemeClr val="tx1"/>
+            </a:solidFill>
+            <a:prstDash val="solid"/>
+            <a:miter lim="800000"/>
+          </a:ln>
+        </p:spPr>
+        <p:style>
+          <a:lnRef idx="2">
+            <a:schemeClr val="accent1">
+              <a:shade val="50000"/>
+            </a:schemeClr>
+          </a:lnRef>
+          <a:fillRef idx="1">
+            <a:schemeClr val="accent1"/>
+          </a:fillRef>
+          <a:effectRef idx="0">
+            <a:schemeClr val="accent1"/>
+          </a:effectRef>
+          <a:fontRef idx="minor">
+            <a:schemeClr val="lt1"/>
+          </a:fontRef>
+        </p:style>
+        <p:txBody>
+          <a:bodyPr anchor="ctr"/>
+          <a:p>
+            <a:pPr algn="ctr">
+              <a:defRPr/>
+            </a:pPr>
+            <a:endParaRPr>
+              <a:latin typeface="Times New Roman"/>
+              <a:cs typeface="Times New Roman"/>
+            </a:endParaRPr>
+          </a:p>
+        </p:txBody>
+      </p:sp>
+      <p:sp>
+        <p:nvSpPr>
+          <p:cNvPr id="2041827768" name=""/>
+          <p:cNvSpPr/>
+          <p:nvPr/>
+        </p:nvSpPr>
+        <p:spPr bwMode="auto">
+          <a:xfrm rot="0" flipH="0" flipV="0">
+            <a:off x="7754334" y="1713178"/>
+            <a:ext cx="1696915" cy="752865"/>
+          </a:xfrm>
+          <a:prstGeom prst="rect">
+            <a:avLst/>
+          </a:prstGeom>
+          <a:gradFill>
+            <a:gsLst>
+              <a:gs pos="19000">
+                <a:schemeClr val="tx1">
+                  <a:lumMod val="50000"/>
+                  <a:lumOff val="50000"/>
+                </a:schemeClr>
+              </a:gs>
+              <a:gs pos="100000">
+                <a:srgbClr val="FFFFFF"/>
+              </a:gs>
+            </a:gsLst>
+            <a:lin ang="0" scaled="1"/>
+          </a:gradFill>
+          <a:ln w="19049" cap="flat" cmpd="sng" algn="ctr">
+            <a:solidFill>
+              <a:schemeClr val="tx1">
+                <a:lumMod val="65098"/>
+                <a:lumOff val="34902"/>
+                <a:alpha val="99999"/>
+              </a:schemeClr>
+            </a:solidFill>
+            <a:prstDash val="solid"/>
+            <a:miter lim="800000"/>
+          </a:ln>
+        </p:spPr>
+        <p:style>
+          <a:lnRef idx="2">
+            <a:schemeClr val="accent1">
+              <a:shade val="50000"/>
+            </a:schemeClr>
+          </a:lnRef>
+          <a:fillRef idx="1">
+            <a:schemeClr val="accent1"/>
+          </a:fillRef>
+          <a:effectRef idx="0">
+            <a:schemeClr val="accent1"/>
+          </a:effectRef>
+          <a:fontRef idx="minor">
+            <a:schemeClr val="lt1"/>
+          </a:fontRef>
+        </p:style>
+        <p:txBody>
+          <a:bodyPr anchor="ctr"/>
+          <a:p>
+            <a:pPr algn="ctr">
+              <a:defRPr/>
+            </a:pPr>
+            <a:r>
+              <a:rPr sz="1600" b="1">
+                <a:solidFill>
+                  <a:schemeClr val="tx1"/>
+                </a:solidFill>
+                <a:latin typeface="Times New Roman"/>
+                <a:ea typeface="Times New Roman"/>
+                <a:cs typeface="Times New Roman"/>
+              </a:rPr>
+              <a:t>Aligner</a:t>
+            </a:r>
+            <a:endParaRPr sz="1600" b="1">
+              <a:solidFill>
+                <a:schemeClr val="tx1"/>
+              </a:solidFill>
+              <a:latin typeface="Times New Roman"/>
+              <a:cs typeface="Times New Roman"/>
+            </a:endParaRPr>
+          </a:p>
+          <a:p>
+            <a:pPr algn="ctr">
+              <a:defRPr/>
+            </a:pPr>
+            <a:r>
+              <a:rPr lang="en-US" sz="1100" b="0" i="0" u="none" strike="noStrike" cap="none" spc="0">
+                <a:solidFill>
+                  <a:srgbClr val="000000"/>
+                </a:solidFill>
+                <a:latin typeface="Times New Roman"/>
+                <a:ea typeface="Times New Roman"/>
+                <a:cs typeface="Times New Roman"/>
+              </a:rPr>
+              <a:t>(Latent Space Projection)</a:t>
+            </a:r>
+            <a:endParaRPr sz="1600" b="1">
+              <a:solidFill>
+                <a:schemeClr val="tx1"/>
+              </a:solidFill>
+              <a:latin typeface="Times New Roman"/>
+              <a:cs typeface="Times New Roman"/>
+            </a:endParaRPr>
+          </a:p>
+        </p:txBody>
+      </p:sp>
+      <p:sp>
+        <p:nvSpPr>
+          <p:cNvPr id="1533932107" name=""/>
+          <p:cNvSpPr txBox="1"/>
+          <p:nvPr/>
+        </p:nvSpPr>
+        <p:spPr bwMode="auto">
+          <a:xfrm rot="0" flipH="0" flipV="0">
+            <a:off x="3826664" y="72955"/>
+            <a:ext cx="4010510" cy="366119"/>
+          </a:xfrm>
+          <a:prstGeom prst="rect">
+            <a:avLst/>
+          </a:prstGeom>
+          <a:noFill/>
+        </p:spPr>
+        <p:txBody>
+          <a:bodyPr vertOverflow="overflow" horzOverflow="overflow" vert="horz" wrap="square" lIns="91440" tIns="45720" rIns="91440" bIns="45720" numCol="1" spcCol="0" rtlCol="0" fromWordArt="0" anchor="t" anchorCtr="0" forceAA="0" upright="0" compatLnSpc="0">
+            <a:spAutoFit/>
+          </a:bodyPr>
+          <a:p>
+            <a:pPr algn="ctr">
+              <a:defRPr/>
+            </a:pPr>
+            <a:r>
+              <a:rPr sz="1800" b="1">
+                <a:latin typeface="Times New Roman"/>
+                <a:cs typeface="Times New Roman"/>
+              </a:rPr>
+              <a:t>GENERATE SCENE GRAPH</a:t>
+            </a:r>
+            <a:endParaRPr sz="1800" b="1">
+              <a:latin typeface="Times New Roman"/>
+              <a:cs typeface="Times New Roman"/>
+            </a:endParaRPr>
+          </a:p>
+        </p:txBody>
+      </p:sp>
+      <p:sp>
+        <p:nvSpPr>
+          <p:cNvPr id="863549511" name=""/>
+          <p:cNvSpPr/>
+          <p:nvPr/>
+        </p:nvSpPr>
+        <p:spPr bwMode="auto">
+          <a:xfrm rot="0" flipH="0" flipV="0">
+            <a:off x="3377240" y="2561698"/>
+            <a:ext cx="4888053" cy="182232"/>
+          </a:xfrm>
+          <a:prstGeom prst="rightArrow">
+            <a:avLst>
+              <a:gd name="adj1" fmla="val 50000"/>
+              <a:gd name="adj2" fmla="val 50000"/>
+            </a:avLst>
+          </a:prstGeom>
+          <a:solidFill>
+            <a:schemeClr val="tx1"/>
+          </a:solidFill>
+          <a:ln w="12699" cap="flat" cmpd="sng" algn="ctr">
+            <a:solidFill>
+              <a:schemeClr val="tx1"/>
+            </a:solidFill>
+            <a:prstDash val="solid"/>
+            <a:miter lim="800000"/>
+          </a:ln>
+        </p:spPr>
+        <p:style>
+          <a:lnRef idx="2">
+            <a:schemeClr val="accent1">
+              <a:shade val="50000"/>
+            </a:schemeClr>
+          </a:lnRef>
+          <a:fillRef idx="1">
+            <a:schemeClr val="accent1"/>
+          </a:fillRef>
+          <a:effectRef idx="0">
+            <a:schemeClr val="accent1"/>
+          </a:effectRef>
+          <a:fontRef idx="minor">
+            <a:schemeClr val="lt1"/>
+          </a:fontRef>
+        </p:style>
+        <p:txBody>
+          <a:bodyPr anchor="ctr"/>
+          <a:p>
+            <a:pPr algn="ctr">
+              <a:defRPr/>
+            </a:pPr>
+            <a:endParaRPr>
+              <a:latin typeface="Times New Roman"/>
+              <a:cs typeface="Times New Roman"/>
+            </a:endParaRPr>
+          </a:p>
+        </p:txBody>
+      </p:sp>
+      <p:sp>
+        <p:nvSpPr>
+          <p:cNvPr id="1041376230" name=""/>
+          <p:cNvSpPr/>
+          <p:nvPr/>
+        </p:nvSpPr>
+        <p:spPr bwMode="auto">
+          <a:xfrm rot="5399976" flipH="0" flipV="0">
+            <a:off x="7542425" y="649858"/>
+            <a:ext cx="552437" cy="1248148"/>
+          </a:xfrm>
+          <a:prstGeom prst="bentArrow">
+            <a:avLst>
+              <a:gd name="adj1" fmla="val 25000"/>
+              <a:gd name="adj2" fmla="val 25000"/>
+              <a:gd name="adj3" fmla="val 25000"/>
+              <a:gd name="adj4" fmla="val 39272"/>
+            </a:avLst>
+          </a:prstGeom>
+          <a:solidFill>
+            <a:schemeClr val="tx1"/>
+          </a:solidFill>
+          <a:ln w="12700" cap="flat" cmpd="sng" algn="ctr">
+            <a:solidFill>
+              <a:schemeClr val="tx1"/>
+            </a:solidFill>
+            <a:prstDash val="solid"/>
+            <a:miter lim="800000"/>
+          </a:ln>
+        </p:spPr>
+        <p:style>
+          <a:lnRef idx="2">
+            <a:schemeClr val="accent1">
+              <a:shade val="50000"/>
+            </a:schemeClr>
+          </a:lnRef>
+          <a:fillRef idx="1">
+            <a:schemeClr val="accent1"/>
+          </a:fillRef>
+          <a:effectRef idx="0">
+            <a:schemeClr val="accent1"/>
+          </a:effectRef>
+          <a:fontRef idx="minor">
+            <a:schemeClr val="lt1"/>
+          </a:fontRef>
+        </p:style>
+        <p:txBody>
+          <a:bodyPr anchor="ctr"/>
+          <a:p>
+            <a:pPr algn="ctr">
+              <a:defRPr/>
+            </a:pPr>
+            <a:endParaRPr>
+              <a:latin typeface="Times New Roman"/>
+              <a:cs typeface="Times New Roman"/>
+            </a:endParaRPr>
+          </a:p>
+        </p:txBody>
+      </p:sp>
+    </p:spTree>
+  </p:cSld>
+  <p:clrMapOvr>
+    <a:masterClrMapping/>
+  </p:clrMapOvr>
+  <mc:AlternateContent xmlns:mc="http://schemas.openxmlformats.org/markup-compatibility/2006">
+    <mc:Choice xmlns:p159="http://schemas.microsoft.com/office/powerpoint/2015/09/main" xmlns:p14="http://schemas.microsoft.com/office/powerpoint/2010/main" Requires="p159">
+      <p:transition p14:dur="500" advClick="1"/>
     </mc:Choice>
     <mc:Fallback>
       <p:transition advClick="1"/>

--- a/Diagram.pptx
+++ b/Diagram.pptx
@@ -5,12 +5,14 @@
     <p:sldMasterId id="2147483648" r:id="rId1"/>
   </p:sldMasterIdLst>
   <p:notesMasterIdLst>
-    <p:notesMasterId r:id="rId7"/>
+    <p:notesMasterId r:id="rId9"/>
   </p:notesMasterIdLst>
   <p:sldIdLst>
     <p:sldId id="256" r:id="rId4"/>
     <p:sldId id="257" r:id="rId5"/>
     <p:sldId id="258" r:id="rId6"/>
+    <p:sldId id="259" r:id="rId7"/>
+    <p:sldId id="260" r:id="rId8"/>
   </p:sldIdLst>
   <p:sldSz cx="12192000" cy="6858000"/>
   <p:notesSz cx="6858000" cy="9144000"/>
@@ -136,7 +138,7 @@
       </p:grpSpPr>
       <p:sp>
         <p:nvSpPr>
-          <p:cNvPr id="52755589" name="Header Placeholder 1"/>
+          <p:cNvPr id="629123014" name="Header Placeholder 1"/>
           <p:cNvSpPr>
             <a:spLocks noGrp="1"/>
           </p:cNvSpPr>
@@ -170,7 +172,7 @@
       </p:sp>
       <p:sp>
         <p:nvSpPr>
-          <p:cNvPr id="720406871" name="Date Placeholder 2"/>
+          <p:cNvPr id="922533810" name="Date Placeholder 2"/>
           <p:cNvSpPr>
             <a:spLocks noGrp="1"/>
           </p:cNvSpPr>
@@ -208,7 +210,7 @@
       </p:sp>
       <p:sp>
         <p:nvSpPr>
-          <p:cNvPr id="1489622011" name="Slide Image Placeholder 3"/>
+          <p:cNvPr id="303702214" name="Slide Image Placeholder 3"/>
           <p:cNvSpPr>
             <a:spLocks noChangeAspect="1" noGrp="1" noRot="1"/>
           </p:cNvSpPr>
@@ -244,7 +246,7 @@
       </p:sp>
       <p:sp>
         <p:nvSpPr>
-          <p:cNvPr id="1024350613" name="Notes Placeholder 4"/>
+          <p:cNvPr id="979246574" name="Notes Placeholder 4"/>
           <p:cNvSpPr>
             <a:spLocks noGrp="1"/>
           </p:cNvSpPr>
@@ -318,7 +320,7 @@
       </p:sp>
       <p:sp>
         <p:nvSpPr>
-          <p:cNvPr id="342479819" name="Footer Placeholder 5"/>
+          <p:cNvPr id="1016950957" name="Footer Placeholder 5"/>
           <p:cNvSpPr>
             <a:spLocks noGrp="1"/>
           </p:cNvSpPr>
@@ -352,7 +354,7 @@
       </p:sp>
       <p:sp>
         <p:nvSpPr>
-          <p:cNvPr id="1902727168" name="Slide Number Placeholder 6"/>
+          <p:cNvPr id="1137524215" name="Slide Number Placeholder 6"/>
           <p:cNvSpPr>
             <a:spLocks noGrp="1"/>
           </p:cNvSpPr>
@@ -505,7 +507,7 @@
       </p:grpSpPr>
       <p:sp>
         <p:nvSpPr>
-          <p:cNvPr id="1193644042" name="Slide Image Placeholder 1"/>
+          <p:cNvPr id="896153238" name="Slide Image Placeholder 1"/>
           <p:cNvSpPr>
             <a:spLocks noChangeAspect="1" noGrp="1" noRot="1"/>
           </p:cNvSpPr>
@@ -522,7 +524,7 @@
       </p:sp>
       <p:sp>
         <p:nvSpPr>
-          <p:cNvPr id="420318399" name="Notes Placeholder 2"/>
+          <p:cNvPr id="1820098921" name="Notes Placeholder 2"/>
           <p:cNvSpPr>
             <a:spLocks noGrp="1"/>
           </p:cNvSpPr>
@@ -547,7 +549,7 @@
       </p:sp>
       <p:sp>
         <p:nvSpPr>
-          <p:cNvPr id="1919849215" name="Slide Number Placeholder 3"/>
+          <p:cNvPr id="1519950299" name="Slide Number Placeholder 3"/>
           <p:cNvSpPr>
             <a:spLocks noGrp="1"/>
           </p:cNvSpPr>
@@ -598,7 +600,7 @@
       </p:grpSpPr>
       <p:sp>
         <p:nvSpPr>
-          <p:cNvPr id="1656437085" name="Slide Image Placeholder 1"/>
+          <p:cNvPr id="661166203" name="Slide Image Placeholder 1"/>
           <p:cNvSpPr>
             <a:spLocks noChangeAspect="1" noGrp="1" noRot="1"/>
           </p:cNvSpPr>
@@ -610,7 +612,7 @@
       </p:sp>
       <p:sp>
         <p:nvSpPr>
-          <p:cNvPr id="2110395338" name="Notes Placeholder 2"/>
+          <p:cNvPr id="1870651420" name="Notes Placeholder 2"/>
           <p:cNvSpPr>
             <a:spLocks noGrp="1"/>
           </p:cNvSpPr>
@@ -632,7 +634,7 @@
       </p:sp>
       <p:sp>
         <p:nvSpPr>
-          <p:cNvPr id="506666945" name="Slide Number Placeholder 3"/>
+          <p:cNvPr id="42494599" name="Slide Number Placeholder 3"/>
           <p:cNvSpPr>
             <a:spLocks noGrp="1"/>
           </p:cNvSpPr>
@@ -683,7 +685,7 @@
       </p:grpSpPr>
       <p:sp>
         <p:nvSpPr>
-          <p:cNvPr id="2" name="Slide Image Placeholder 1"/>
+          <p:cNvPr id="1719603145" name="Slide Image Placeholder 1"/>
           <p:cNvSpPr>
             <a:spLocks noChangeAspect="1" noGrp="1" noRot="1"/>
           </p:cNvSpPr>
@@ -695,7 +697,7 @@
       </p:sp>
       <p:sp>
         <p:nvSpPr>
-          <p:cNvPr id="3" name="Notes Placeholder 2"/>
+          <p:cNvPr id="1340179367" name="Notes Placeholder 2"/>
           <p:cNvSpPr>
             <a:spLocks noGrp="1"/>
           </p:cNvSpPr>
@@ -717,7 +719,7 @@
       </p:sp>
       <p:sp>
         <p:nvSpPr>
-          <p:cNvPr id="4" name="Slide Number Placeholder 3"/>
+          <p:cNvPr id="563252332" name="Slide Number Placeholder 3"/>
           <p:cNvSpPr>
             <a:spLocks noGrp="1"/>
           </p:cNvSpPr>
@@ -734,6 +736,176 @@
               <a:defRPr/>
             </a:pPr>
             <a:fld id="{D4988B9D-ECF5-44FE-A9D4-D6E41E6C2E02}" type="slidenum">
+              <a:rPr/>
+              <a:t/>
+            </a:fld>
+            <a:endParaRPr/>
+          </a:p>
+        </p:txBody>
+      </p:sp>
+    </p:spTree>
+  </p:cSld>
+  <p:clrMapOvr>
+    <a:masterClrMapping/>
+  </p:clrMapOvr>
+</p:notes>
+</file>
+
+<file path=ppt/notesSlides/notesSlide4.xml><?xml version="1.0" encoding="utf-8"?>
+<p:notes xmlns:a="http://schemas.openxmlformats.org/drawingml/2006/main" xmlns:r="http://schemas.openxmlformats.org/officeDocument/2006/relationships" xmlns:p="http://schemas.openxmlformats.org/presentationml/2006/main" xmlns:m="http://schemas.openxmlformats.org/officeDocument/2006/math" xmlns:w="http://schemas.openxmlformats.org/wordprocessingml/2006/main">
+  <p:cSld name="">
+    <p:spTree>
+      <p:nvGrpSpPr>
+        <p:cNvPr id="1" name=""/>
+        <p:cNvGrpSpPr/>
+        <p:nvPr/>
+      </p:nvGrpSpPr>
+      <p:grpSpPr bwMode="auto">
+        <a:xfrm>
+          <a:off x="0" y="0"/>
+          <a:ext cx="0" cy="0"/>
+          <a:chOff x="0" y="0"/>
+          <a:chExt cx="0" cy="0"/>
+        </a:xfrm>
+      </p:grpSpPr>
+      <p:sp>
+        <p:nvSpPr>
+          <p:cNvPr id="637669315" name="Slide Image Placeholder 1"/>
+          <p:cNvSpPr>
+            <a:spLocks noChangeAspect="1" noGrp="1" noRot="1"/>
+          </p:cNvSpPr>
+          <p:nvPr>
+            <p:ph type="sldImg"/>
+          </p:nvPr>
+        </p:nvSpPr>
+        <p:spPr bwMode="auto"/>
+      </p:sp>
+      <p:sp>
+        <p:nvSpPr>
+          <p:cNvPr id="1468304612" name="Notes Placeholder 2"/>
+          <p:cNvSpPr>
+            <a:spLocks noGrp="1"/>
+          </p:cNvSpPr>
+          <p:nvPr>
+            <p:ph type="body" idx="1"/>
+          </p:nvPr>
+        </p:nvSpPr>
+        <p:spPr bwMode="auto"/>
+        <p:txBody>
+          <a:bodyPr/>
+          <a:lstStyle/>
+          <a:p>
+            <a:pPr>
+              <a:defRPr/>
+            </a:pPr>
+            <a:endParaRPr/>
+          </a:p>
+        </p:txBody>
+      </p:sp>
+      <p:sp>
+        <p:nvSpPr>
+          <p:cNvPr id="1515507482" name="Slide Number Placeholder 3"/>
+          <p:cNvSpPr>
+            <a:spLocks noGrp="1"/>
+          </p:cNvSpPr>
+          <p:nvPr>
+            <p:ph type="sldNum" sz="quarter" idx="10"/>
+          </p:nvPr>
+        </p:nvSpPr>
+        <p:spPr bwMode="auto"/>
+        <p:txBody>
+          <a:bodyPr/>
+          <a:lstStyle/>
+          <a:p>
+            <a:pPr>
+              <a:defRPr/>
+            </a:pPr>
+            <a:fld id="{5808BF53-4763-07FE-4BBC-F948933DEF10}" type="slidenum">
+              <a:rPr/>
+              <a:t/>
+            </a:fld>
+            <a:endParaRPr/>
+          </a:p>
+        </p:txBody>
+      </p:sp>
+    </p:spTree>
+  </p:cSld>
+  <p:clrMapOvr>
+    <a:masterClrMapping/>
+  </p:clrMapOvr>
+</p:notes>
+</file>
+
+<file path=ppt/notesSlides/notesSlide5.xml><?xml version="1.0" encoding="utf-8"?>
+<p:notes xmlns:a="http://schemas.openxmlformats.org/drawingml/2006/main" xmlns:r="http://schemas.openxmlformats.org/officeDocument/2006/relationships" xmlns:p="http://schemas.openxmlformats.org/presentationml/2006/main" xmlns:m="http://schemas.openxmlformats.org/officeDocument/2006/math" xmlns:w="http://schemas.openxmlformats.org/wordprocessingml/2006/main">
+  <p:cSld name="">
+    <p:spTree>
+      <p:nvGrpSpPr>
+        <p:cNvPr id="1" name=""/>
+        <p:cNvGrpSpPr/>
+        <p:nvPr/>
+      </p:nvGrpSpPr>
+      <p:grpSpPr bwMode="auto">
+        <a:xfrm>
+          <a:off x="0" y="0"/>
+          <a:ext cx="0" cy="0"/>
+          <a:chOff x="0" y="0"/>
+          <a:chExt cx="0" cy="0"/>
+        </a:xfrm>
+      </p:grpSpPr>
+      <p:sp>
+        <p:nvSpPr>
+          <p:cNvPr id="826800030" name="Slide Image Placeholder 1"/>
+          <p:cNvSpPr>
+            <a:spLocks noChangeAspect="1" noGrp="1" noRot="1"/>
+          </p:cNvSpPr>
+          <p:nvPr>
+            <p:ph type="sldImg"/>
+          </p:nvPr>
+        </p:nvSpPr>
+        <p:spPr bwMode="auto"/>
+      </p:sp>
+      <p:sp>
+        <p:nvSpPr>
+          <p:cNvPr id="567254539" name="Notes Placeholder 2"/>
+          <p:cNvSpPr>
+            <a:spLocks noGrp="1"/>
+          </p:cNvSpPr>
+          <p:nvPr>
+            <p:ph type="body" idx="1"/>
+          </p:nvPr>
+        </p:nvSpPr>
+        <p:spPr bwMode="auto"/>
+        <p:txBody>
+          <a:bodyPr/>
+          <a:lstStyle/>
+          <a:p>
+            <a:pPr>
+              <a:defRPr/>
+            </a:pPr>
+            <a:endParaRPr/>
+          </a:p>
+        </p:txBody>
+      </p:sp>
+      <p:sp>
+        <p:nvSpPr>
+          <p:cNvPr id="2049234088" name="Slide Number Placeholder 3"/>
+          <p:cNvSpPr>
+            <a:spLocks noGrp="1"/>
+          </p:cNvSpPr>
+          <p:nvPr>
+            <p:ph type="sldNum" sz="quarter" idx="10"/>
+          </p:nvPr>
+        </p:nvSpPr>
+        <p:spPr bwMode="auto"/>
+        <p:txBody>
+          <a:bodyPr/>
+          <a:lstStyle/>
+          <a:p>
+            <a:pPr>
+              <a:defRPr/>
+            </a:pPr>
+            <a:fld id="{126753B7-B744-8E7E-7997-E3C9BA6575C8}" type="slidenum">
               <a:rPr/>
               <a:t/>
             </a:fld>
@@ -768,7 +940,7 @@
       </p:grpSpPr>
       <p:sp>
         <p:nvSpPr>
-          <p:cNvPr id="1150034167" name="Title 1"/>
+          <p:cNvPr id="558927128" name="Title 1"/>
           <p:cNvSpPr>
             <a:spLocks noGrp="1"/>
           </p:cNvSpPr>
@@ -803,7 +975,7 @@
       </p:sp>
       <p:sp>
         <p:nvSpPr>
-          <p:cNvPr id="491454649" name="Subtitle 2"/>
+          <p:cNvPr id="1920099439" name="Subtitle 2"/>
           <p:cNvSpPr>
             <a:spLocks noGrp="1"/>
           </p:cNvSpPr>
@@ -871,7 +1043,7 @@
       </p:sp>
       <p:sp>
         <p:nvSpPr>
-          <p:cNvPr id="283391298" name="Date Placeholder 3"/>
+          <p:cNvPr id="921518261" name="Date Placeholder 3"/>
           <p:cNvSpPr>
             <a:spLocks noGrp="1"/>
           </p:cNvSpPr>
@@ -897,7 +1069,7 @@
       </p:sp>
       <p:sp>
         <p:nvSpPr>
-          <p:cNvPr id="1701912054" name="Footer Placeholder 4"/>
+          <p:cNvPr id="1963185706" name="Footer Placeholder 4"/>
           <p:cNvSpPr>
             <a:spLocks noGrp="1"/>
           </p:cNvSpPr>
@@ -919,7 +1091,7 @@
       </p:sp>
       <p:sp>
         <p:nvSpPr>
-          <p:cNvPr id="1043051959" name="Slide Number Placeholder 5"/>
+          <p:cNvPr id="174675406" name="Slide Number Placeholder 5"/>
           <p:cNvSpPr>
             <a:spLocks noGrp="1"/>
           </p:cNvSpPr>
@@ -970,7 +1142,7 @@
       </p:grpSpPr>
       <p:sp>
         <p:nvSpPr>
-          <p:cNvPr id="289308792" name="Title 1"/>
+          <p:cNvPr id="1596769568" name="Title 1"/>
           <p:cNvSpPr>
             <a:spLocks noGrp="1"/>
           </p:cNvSpPr>
@@ -996,7 +1168,7 @@
       </p:sp>
       <p:sp>
         <p:nvSpPr>
-          <p:cNvPr id="1371643889" name="Vertical Text Placeholder 2"/>
+          <p:cNvPr id="904344155" name="Vertical Text Placeholder 2"/>
           <p:cNvSpPr>
             <a:spLocks noGrp="1"/>
           </p:cNvSpPr>
@@ -1062,7 +1234,7 @@
       </p:sp>
       <p:sp>
         <p:nvSpPr>
-          <p:cNvPr id="190518310" name="Date Placeholder 3"/>
+          <p:cNvPr id="893302157" name="Date Placeholder 3"/>
           <p:cNvSpPr>
             <a:spLocks noGrp="1"/>
           </p:cNvSpPr>
@@ -1088,7 +1260,7 @@
       </p:sp>
       <p:sp>
         <p:nvSpPr>
-          <p:cNvPr id="2050538981" name="Footer Placeholder 4"/>
+          <p:cNvPr id="1819302600" name="Footer Placeholder 4"/>
           <p:cNvSpPr>
             <a:spLocks noGrp="1"/>
           </p:cNvSpPr>
@@ -1110,7 +1282,7 @@
       </p:sp>
       <p:sp>
         <p:nvSpPr>
-          <p:cNvPr id="1810719874" name="Slide Number Placeholder 5"/>
+          <p:cNvPr id="2128941868" name="Slide Number Placeholder 5"/>
           <p:cNvSpPr>
             <a:spLocks noGrp="1"/>
           </p:cNvSpPr>
@@ -1161,7 +1333,7 @@
       </p:grpSpPr>
       <p:sp>
         <p:nvSpPr>
-          <p:cNvPr id="1307915881" name="Vertical Title 1"/>
+          <p:cNvPr id="1372683895" name="Vertical Title 1"/>
           <p:cNvSpPr>
             <a:spLocks noGrp="1"/>
           </p:cNvSpPr>
@@ -1192,7 +1364,7 @@
       </p:sp>
       <p:sp>
         <p:nvSpPr>
-          <p:cNvPr id="100883668" name="Vertical Text Placeholder 2"/>
+          <p:cNvPr id="2128434799" name="Vertical Text Placeholder 2"/>
           <p:cNvSpPr>
             <a:spLocks noGrp="1"/>
           </p:cNvSpPr>
@@ -1263,7 +1435,7 @@
       </p:sp>
       <p:sp>
         <p:nvSpPr>
-          <p:cNvPr id="1128658985" name="Date Placeholder 3"/>
+          <p:cNvPr id="345028333" name="Date Placeholder 3"/>
           <p:cNvSpPr>
             <a:spLocks noGrp="1"/>
           </p:cNvSpPr>
@@ -1289,7 +1461,7 @@
       </p:sp>
       <p:sp>
         <p:nvSpPr>
-          <p:cNvPr id="1069392742" name="Footer Placeholder 4"/>
+          <p:cNvPr id="739337837" name="Footer Placeholder 4"/>
           <p:cNvSpPr>
             <a:spLocks noGrp="1"/>
           </p:cNvSpPr>
@@ -1311,7 +1483,7 @@
       </p:sp>
       <p:sp>
         <p:nvSpPr>
-          <p:cNvPr id="1775932364" name="Slide Number Placeholder 5"/>
+          <p:cNvPr id="332468657" name="Slide Number Placeholder 5"/>
           <p:cNvSpPr>
             <a:spLocks noGrp="1"/>
           </p:cNvSpPr>
@@ -1362,7 +1534,7 @@
       </p:grpSpPr>
       <p:sp>
         <p:nvSpPr>
-          <p:cNvPr id="332304551" name="Title 1"/>
+          <p:cNvPr id="579857755" name="Title 1"/>
           <p:cNvSpPr>
             <a:spLocks noGrp="1"/>
           </p:cNvSpPr>
@@ -1388,7 +1560,7 @@
       </p:sp>
       <p:sp>
         <p:nvSpPr>
-          <p:cNvPr id="97916849" name="Content Placeholder 2"/>
+          <p:cNvPr id="347469346" name="Content Placeholder 2"/>
           <p:cNvSpPr>
             <a:spLocks noGrp="1"/>
           </p:cNvSpPr>
@@ -1454,7 +1626,7 @@
       </p:sp>
       <p:sp>
         <p:nvSpPr>
-          <p:cNvPr id="919892341" name="Date Placeholder 3"/>
+          <p:cNvPr id="410944464" name="Date Placeholder 3"/>
           <p:cNvSpPr>
             <a:spLocks noGrp="1"/>
           </p:cNvSpPr>
@@ -1480,7 +1652,7 @@
       </p:sp>
       <p:sp>
         <p:nvSpPr>
-          <p:cNvPr id="629276302" name="Footer Placeholder 4"/>
+          <p:cNvPr id="725925752" name="Footer Placeholder 4"/>
           <p:cNvSpPr>
             <a:spLocks noGrp="1"/>
           </p:cNvSpPr>
@@ -1502,7 +1674,7 @@
       </p:sp>
       <p:sp>
         <p:nvSpPr>
-          <p:cNvPr id="706257414" name="Slide Number Placeholder 5"/>
+          <p:cNvPr id="1680435856" name="Slide Number Placeholder 5"/>
           <p:cNvSpPr>
             <a:spLocks noGrp="1"/>
           </p:cNvSpPr>
@@ -1553,7 +1725,7 @@
       </p:grpSpPr>
       <p:sp>
         <p:nvSpPr>
-          <p:cNvPr id="1253683035" name="Title 1"/>
+          <p:cNvPr id="1489866339" name="Title 1"/>
           <p:cNvSpPr>
             <a:spLocks noGrp="1"/>
           </p:cNvSpPr>
@@ -1588,7 +1760,7 @@
       </p:sp>
       <p:sp>
         <p:nvSpPr>
-          <p:cNvPr id="429877447" name="Text Placeholder 2"/>
+          <p:cNvPr id="1766132120" name="Text Placeholder 2"/>
           <p:cNvSpPr>
             <a:spLocks noGrp="1"/>
           </p:cNvSpPr>
@@ -1710,7 +1882,7 @@
       </p:sp>
       <p:sp>
         <p:nvSpPr>
-          <p:cNvPr id="261122769" name="Date Placeholder 3"/>
+          <p:cNvPr id="1786490201" name="Date Placeholder 3"/>
           <p:cNvSpPr>
             <a:spLocks noGrp="1"/>
           </p:cNvSpPr>
@@ -1736,7 +1908,7 @@
       </p:sp>
       <p:sp>
         <p:nvSpPr>
-          <p:cNvPr id="158357465" name="Footer Placeholder 4"/>
+          <p:cNvPr id="576115281" name="Footer Placeholder 4"/>
           <p:cNvSpPr>
             <a:spLocks noGrp="1"/>
           </p:cNvSpPr>
@@ -1758,7 +1930,7 @@
       </p:sp>
       <p:sp>
         <p:nvSpPr>
-          <p:cNvPr id="334718417" name="Slide Number Placeholder 5"/>
+          <p:cNvPr id="423585360" name="Slide Number Placeholder 5"/>
           <p:cNvSpPr>
             <a:spLocks noGrp="1"/>
           </p:cNvSpPr>
@@ -1809,7 +1981,7 @@
       </p:grpSpPr>
       <p:sp>
         <p:nvSpPr>
-          <p:cNvPr id="436124902" name="Title 1"/>
+          <p:cNvPr id="634601612" name="Title 1"/>
           <p:cNvSpPr>
             <a:spLocks noGrp="1"/>
           </p:cNvSpPr>
@@ -1835,7 +2007,7 @@
       </p:sp>
       <p:sp>
         <p:nvSpPr>
-          <p:cNvPr id="456252875" name="Content Placeholder 2"/>
+          <p:cNvPr id="360742242" name="Content Placeholder 2"/>
           <p:cNvSpPr>
             <a:spLocks noGrp="1"/>
           </p:cNvSpPr>
@@ -1906,7 +2078,7 @@
       </p:sp>
       <p:sp>
         <p:nvSpPr>
-          <p:cNvPr id="989180313" name="Content Placeholder 3"/>
+          <p:cNvPr id="744835417" name="Content Placeholder 3"/>
           <p:cNvSpPr>
             <a:spLocks noGrp="1"/>
           </p:cNvSpPr>
@@ -1977,7 +2149,7 @@
       </p:sp>
       <p:sp>
         <p:nvSpPr>
-          <p:cNvPr id="238133352" name="Date Placeholder 4"/>
+          <p:cNvPr id="664619482" name="Date Placeholder 4"/>
           <p:cNvSpPr>
             <a:spLocks noGrp="1"/>
           </p:cNvSpPr>
@@ -2003,7 +2175,7 @@
       </p:sp>
       <p:sp>
         <p:nvSpPr>
-          <p:cNvPr id="980943266" name="Footer Placeholder 5"/>
+          <p:cNvPr id="94770827" name="Footer Placeholder 5"/>
           <p:cNvSpPr>
             <a:spLocks noGrp="1"/>
           </p:cNvSpPr>
@@ -2025,7 +2197,7 @@
       </p:sp>
       <p:sp>
         <p:nvSpPr>
-          <p:cNvPr id="1984611211" name="Slide Number Placeholder 6"/>
+          <p:cNvPr id="1922130078" name="Slide Number Placeholder 6"/>
           <p:cNvSpPr>
             <a:spLocks noGrp="1"/>
           </p:cNvSpPr>
@@ -2076,7 +2248,7 @@
       </p:grpSpPr>
       <p:sp>
         <p:nvSpPr>
-          <p:cNvPr id="105146817" name="Title 1"/>
+          <p:cNvPr id="1078840260" name="Title 1"/>
           <p:cNvSpPr>
             <a:spLocks noGrp="1"/>
           </p:cNvSpPr>
@@ -2107,7 +2279,7 @@
       </p:sp>
       <p:sp>
         <p:nvSpPr>
-          <p:cNvPr id="1678458887" name="Text Placeholder 2"/>
+          <p:cNvPr id="2027241687" name="Text Placeholder 2"/>
           <p:cNvSpPr>
             <a:spLocks noGrp="1"/>
           </p:cNvSpPr>
@@ -2175,7 +2347,7 @@
       </p:sp>
       <p:sp>
         <p:nvSpPr>
-          <p:cNvPr id="540827843" name="Content Placeholder 3"/>
+          <p:cNvPr id="2122165261" name="Content Placeholder 3"/>
           <p:cNvSpPr>
             <a:spLocks noGrp="1"/>
           </p:cNvSpPr>
@@ -2246,7 +2418,7 @@
       </p:sp>
       <p:sp>
         <p:nvSpPr>
-          <p:cNvPr id="791516427" name="Text Placeholder 4"/>
+          <p:cNvPr id="1189187826" name="Text Placeholder 4"/>
           <p:cNvSpPr>
             <a:spLocks noGrp="1"/>
           </p:cNvSpPr>
@@ -2314,7 +2486,7 @@
       </p:sp>
       <p:sp>
         <p:nvSpPr>
-          <p:cNvPr id="1960667272" name="Content Placeholder 5"/>
+          <p:cNvPr id="1886297809" name="Content Placeholder 5"/>
           <p:cNvSpPr>
             <a:spLocks noGrp="1"/>
           </p:cNvSpPr>
@@ -2385,7 +2557,7 @@
       </p:sp>
       <p:sp>
         <p:nvSpPr>
-          <p:cNvPr id="407757637" name="Date Placeholder 6"/>
+          <p:cNvPr id="1861461380" name="Date Placeholder 6"/>
           <p:cNvSpPr>
             <a:spLocks noGrp="1"/>
           </p:cNvSpPr>
@@ -2411,7 +2583,7 @@
       </p:sp>
       <p:sp>
         <p:nvSpPr>
-          <p:cNvPr id="21042411" name="Footer Placeholder 7"/>
+          <p:cNvPr id="1497398155" name="Footer Placeholder 7"/>
           <p:cNvSpPr>
             <a:spLocks noGrp="1"/>
           </p:cNvSpPr>
@@ -2433,7 +2605,7 @@
       </p:sp>
       <p:sp>
         <p:nvSpPr>
-          <p:cNvPr id="378904241" name="Slide Number Placeholder 8"/>
+          <p:cNvPr id="93451694" name="Slide Number Placeholder 8"/>
           <p:cNvSpPr>
             <a:spLocks noGrp="1"/>
           </p:cNvSpPr>
@@ -2484,7 +2656,7 @@
       </p:grpSpPr>
       <p:sp>
         <p:nvSpPr>
-          <p:cNvPr id="1773761514" name="Title 1"/>
+          <p:cNvPr id="1811598500" name="Title 1"/>
           <p:cNvSpPr>
             <a:spLocks noGrp="1"/>
           </p:cNvSpPr>
@@ -2510,7 +2682,7 @@
       </p:sp>
       <p:sp>
         <p:nvSpPr>
-          <p:cNvPr id="1669845093" name="Date Placeholder 2"/>
+          <p:cNvPr id="148354588" name="Date Placeholder 2"/>
           <p:cNvSpPr>
             <a:spLocks noGrp="1"/>
           </p:cNvSpPr>
@@ -2536,7 +2708,7 @@
       </p:sp>
       <p:sp>
         <p:nvSpPr>
-          <p:cNvPr id="1030698380" name="Footer Placeholder 3"/>
+          <p:cNvPr id="1092518116" name="Footer Placeholder 3"/>
           <p:cNvSpPr>
             <a:spLocks noGrp="1"/>
           </p:cNvSpPr>
@@ -2558,7 +2730,7 @@
       </p:sp>
       <p:sp>
         <p:nvSpPr>
-          <p:cNvPr id="1433105838" name="Slide Number Placeholder 4"/>
+          <p:cNvPr id="1351125774" name="Slide Number Placeholder 4"/>
           <p:cNvSpPr>
             <a:spLocks noGrp="1"/>
           </p:cNvSpPr>
@@ -2609,7 +2781,7 @@
       </p:grpSpPr>
       <p:sp>
         <p:nvSpPr>
-          <p:cNvPr id="1248097466" name="Date Placeholder 1"/>
+          <p:cNvPr id="131105372" name="Date Placeholder 1"/>
           <p:cNvSpPr>
             <a:spLocks noGrp="1"/>
           </p:cNvSpPr>
@@ -2635,7 +2807,7 @@
       </p:sp>
       <p:sp>
         <p:nvSpPr>
-          <p:cNvPr id="2132121633" name="Footer Placeholder 2"/>
+          <p:cNvPr id="794614867" name="Footer Placeholder 2"/>
           <p:cNvSpPr>
             <a:spLocks noGrp="1"/>
           </p:cNvSpPr>
@@ -2657,7 +2829,7 @@
       </p:sp>
       <p:sp>
         <p:nvSpPr>
-          <p:cNvPr id="1289611965" name="Slide Number Placeholder 3"/>
+          <p:cNvPr id="1890540546" name="Slide Number Placeholder 3"/>
           <p:cNvSpPr>
             <a:spLocks noGrp="1"/>
           </p:cNvSpPr>
@@ -2708,7 +2880,7 @@
       </p:grpSpPr>
       <p:sp>
         <p:nvSpPr>
-          <p:cNvPr id="854547760" name="Title 1"/>
+          <p:cNvPr id="665140018" name="Title 1"/>
           <p:cNvSpPr>
             <a:spLocks noGrp="1"/>
           </p:cNvSpPr>
@@ -2743,7 +2915,7 @@
       </p:sp>
       <p:sp>
         <p:nvSpPr>
-          <p:cNvPr id="1415284407" name="Content Placeholder 2"/>
+          <p:cNvPr id="686138963" name="Content Placeholder 2"/>
           <p:cNvSpPr>
             <a:spLocks noGrp="1"/>
           </p:cNvSpPr>
@@ -2842,7 +3014,7 @@
       </p:sp>
       <p:sp>
         <p:nvSpPr>
-          <p:cNvPr id="5726361" name="Text Placeholder 3"/>
+          <p:cNvPr id="1855618526" name="Text Placeholder 3"/>
           <p:cNvSpPr>
             <a:spLocks noGrp="1"/>
           </p:cNvSpPr>
@@ -2910,7 +3082,7 @@
       </p:sp>
       <p:sp>
         <p:nvSpPr>
-          <p:cNvPr id="1356069732" name="Date Placeholder 4"/>
+          <p:cNvPr id="1539158343" name="Date Placeholder 4"/>
           <p:cNvSpPr>
             <a:spLocks noGrp="1"/>
           </p:cNvSpPr>
@@ -2936,7 +3108,7 @@
       </p:sp>
       <p:sp>
         <p:nvSpPr>
-          <p:cNvPr id="433253791" name="Footer Placeholder 5"/>
+          <p:cNvPr id="1200414379" name="Footer Placeholder 5"/>
           <p:cNvSpPr>
             <a:spLocks noGrp="1"/>
           </p:cNvSpPr>
@@ -2958,7 +3130,7 @@
       </p:sp>
       <p:sp>
         <p:nvSpPr>
-          <p:cNvPr id="435406430" name="Slide Number Placeholder 6"/>
+          <p:cNvPr id="1928345120" name="Slide Number Placeholder 6"/>
           <p:cNvSpPr>
             <a:spLocks noGrp="1"/>
           </p:cNvSpPr>
@@ -3009,7 +3181,7 @@
       </p:grpSpPr>
       <p:sp>
         <p:nvSpPr>
-          <p:cNvPr id="1183164723" name="Title 1"/>
+          <p:cNvPr id="108503605" name="Title 1"/>
           <p:cNvSpPr>
             <a:spLocks noGrp="1"/>
           </p:cNvSpPr>
@@ -3044,7 +3216,7 @@
       </p:sp>
       <p:sp>
         <p:nvSpPr>
-          <p:cNvPr id="119855483" name="Picture Placeholder 2"/>
+          <p:cNvPr id="1128547450" name="Picture Placeholder 2"/>
           <p:cNvSpPr>
             <a:spLocks noChangeAspect="1" noGrp="1"/>
           </p:cNvSpPr>
@@ -3112,7 +3284,7 @@
       </p:sp>
       <p:sp>
         <p:nvSpPr>
-          <p:cNvPr id="944296473" name="Text Placeholder 3"/>
+          <p:cNvPr id="779330719" name="Text Placeholder 3"/>
           <p:cNvSpPr>
             <a:spLocks noGrp="1"/>
           </p:cNvSpPr>
@@ -3180,7 +3352,7 @@
       </p:sp>
       <p:sp>
         <p:nvSpPr>
-          <p:cNvPr id="776764473" name="Date Placeholder 4"/>
+          <p:cNvPr id="678670062" name="Date Placeholder 4"/>
           <p:cNvSpPr>
             <a:spLocks noGrp="1"/>
           </p:cNvSpPr>
@@ -3206,7 +3378,7 @@
       </p:sp>
       <p:sp>
         <p:nvSpPr>
-          <p:cNvPr id="324621543" name="Footer Placeholder 5"/>
+          <p:cNvPr id="455076298" name="Footer Placeholder 5"/>
           <p:cNvSpPr>
             <a:spLocks noGrp="1"/>
           </p:cNvSpPr>
@@ -3228,7 +3400,7 @@
       </p:sp>
       <p:sp>
         <p:nvSpPr>
-          <p:cNvPr id="249939693" name="Slide Number Placeholder 6"/>
+          <p:cNvPr id="1362190530" name="Slide Number Placeholder 6"/>
           <p:cNvSpPr>
             <a:spLocks noGrp="1"/>
           </p:cNvSpPr>
@@ -3284,7 +3456,7 @@
       </p:grpSpPr>
       <p:sp>
         <p:nvSpPr>
-          <p:cNvPr id="323986667" name="Title Placeholder 1"/>
+          <p:cNvPr id="1349116876" name="Title Placeholder 1"/>
           <p:cNvSpPr>
             <a:spLocks noGrp="1"/>
           </p:cNvSpPr>
@@ -3320,7 +3492,7 @@
       </p:sp>
       <p:sp>
         <p:nvSpPr>
-          <p:cNvPr id="853898526" name="Text Placeholder 2"/>
+          <p:cNvPr id="484351917" name="Text Placeholder 2"/>
           <p:cNvSpPr>
             <a:spLocks noGrp="1"/>
           </p:cNvSpPr>
@@ -3396,7 +3568,7 @@
       </p:sp>
       <p:sp>
         <p:nvSpPr>
-          <p:cNvPr id="1534340258" name="Date Placeholder 3"/>
+          <p:cNvPr id="1212333495" name="Date Placeholder 3"/>
           <p:cNvSpPr>
             <a:spLocks noGrp="1"/>
           </p:cNvSpPr>
@@ -3440,7 +3612,7 @@
       </p:sp>
       <p:sp>
         <p:nvSpPr>
-          <p:cNvPr id="638072985" name="Footer Placeholder 4"/>
+          <p:cNvPr id="1237679664" name="Footer Placeholder 4"/>
           <p:cNvSpPr>
             <a:spLocks noGrp="1"/>
           </p:cNvSpPr>
@@ -3480,7 +3652,7 @@
       </p:sp>
       <p:sp>
         <p:nvSpPr>
-          <p:cNvPr id="1794641101" name="Slide Number Placeholder 5"/>
+          <p:cNvPr id="761668061" name="Slide Number Placeholder 5"/>
           <p:cNvSpPr>
             <a:spLocks noGrp="1"/>
           </p:cNvSpPr>
@@ -3840,7 +4012,7 @@
       </p:grpSpPr>
       <p:sp>
         <p:nvSpPr>
-          <p:cNvPr id="733802750" name=""/>
+          <p:cNvPr id="1536213770" name=""/>
           <p:cNvSpPr/>
           <p:nvPr/>
         </p:nvSpPr>
@@ -3915,7 +4087,7 @@
       </p:sp>
       <p:sp>
         <p:nvSpPr>
-          <p:cNvPr id="885893729" name=""/>
+          <p:cNvPr id="1574390950" name=""/>
           <p:cNvSpPr/>
           <p:nvPr/>
         </p:nvSpPr>
@@ -3995,7 +4167,7 @@
       </p:sp>
       <p:sp>
         <p:nvSpPr>
-          <p:cNvPr id="1356415552" name=""/>
+          <p:cNvPr id="632739961" name=""/>
           <p:cNvSpPr/>
           <p:nvPr/>
         </p:nvSpPr>
@@ -4048,7 +4220,7 @@
       </p:sp>
       <p:sp>
         <p:nvSpPr>
-          <p:cNvPr id="1216326814" name=""/>
+          <p:cNvPr id="1689486032" name=""/>
           <p:cNvSpPr txBox="1"/>
           <p:nvPr/>
         </p:nvSpPr>
@@ -4087,7 +4259,7 @@
       </p:sp>
       <p:sp>
         <p:nvSpPr>
-          <p:cNvPr id="1993381123" name=""/>
+          <p:cNvPr id="1994384243" name=""/>
           <p:cNvSpPr/>
           <p:nvPr/>
         </p:nvSpPr>
@@ -4156,7 +4328,7 @@
       </p:sp>
       <p:sp>
         <p:nvSpPr>
-          <p:cNvPr id="1963201656" name=""/>
+          <p:cNvPr id="414556406" name=""/>
           <p:cNvSpPr txBox="1"/>
           <p:nvPr/>
         </p:nvSpPr>
@@ -4195,7 +4367,7 @@
       </p:sp>
       <p:sp>
         <p:nvSpPr>
-          <p:cNvPr id="1077385861" name=""/>
+          <p:cNvPr id="547141235" name=""/>
           <p:cNvSpPr/>
           <p:nvPr/>
         </p:nvSpPr>
@@ -4330,7 +4502,7 @@
       </p:sp>
       <p:sp>
         <p:nvSpPr>
-          <p:cNvPr id="269384289" name=""/>
+          <p:cNvPr id="1851810961" name=""/>
           <p:cNvSpPr/>
           <p:nvPr/>
         </p:nvSpPr>
@@ -4389,14 +4561,14 @@
       </p:sp>
       <p:sp>
         <p:nvSpPr>
-          <p:cNvPr id="40318267" name=""/>
+          <p:cNvPr id="1861519244" name=""/>
           <p:cNvSpPr txBox="1"/>
           <p:nvPr/>
         </p:nvSpPr>
         <p:spPr bwMode="auto">
           <a:xfrm rot="0" flipH="0" flipV="0">
-            <a:off x="4290613" y="3291660"/>
-            <a:ext cx="1269659" cy="305159"/>
+            <a:off x="3832085" y="3291660"/>
+            <a:ext cx="2297925" cy="305159"/>
           </a:xfrm>
           <a:prstGeom prst="rect">
             <a:avLst/>
@@ -4417,7 +4589,7 @@
                 <a:ea typeface="Times New Roman"/>
                 <a:cs typeface="Times New Roman"/>
               </a:rPr>
-              <a:t>Batch, 4096</a:t>
+              <a:t>Batch, Num_texts,  4096</a:t>
             </a:r>
             <a:endParaRPr sz="1400">
               <a:latin typeface="Times New Roman"/>
@@ -4428,7 +4600,7 @@
       </p:sp>
       <p:sp>
         <p:nvSpPr>
-          <p:cNvPr id="726245115" name=""/>
+          <p:cNvPr id="1966886533" name=""/>
           <p:cNvSpPr/>
           <p:nvPr/>
         </p:nvSpPr>
@@ -4485,7 +4657,7 @@
       </p:sp>
       <p:sp>
         <p:nvSpPr>
-          <p:cNvPr id="203622334" name=""/>
+          <p:cNvPr id="1139535562" name=""/>
           <p:cNvSpPr/>
           <p:nvPr/>
         </p:nvSpPr>
@@ -4538,7 +4710,7 @@
       </p:sp>
       <p:sp>
         <p:nvSpPr>
-          <p:cNvPr id="154210803" name=""/>
+          <p:cNvPr id="1703216583" name=""/>
           <p:cNvSpPr/>
           <p:nvPr/>
         </p:nvSpPr>
@@ -4595,7 +4767,7 @@
       </p:sp>
       <p:sp>
         <p:nvSpPr>
-          <p:cNvPr id="349655207" name=""/>
+          <p:cNvPr id="1284983958" name=""/>
           <p:cNvSpPr/>
           <p:nvPr/>
         </p:nvSpPr>
@@ -4652,7 +4824,7 @@
       </p:sp>
       <p:sp>
         <p:nvSpPr>
-          <p:cNvPr id="1204478779" name=""/>
+          <p:cNvPr id="43666206" name=""/>
           <p:cNvSpPr txBox="1"/>
           <p:nvPr/>
         </p:nvSpPr>
@@ -4691,7 +4863,7 @@
       </p:sp>
       <p:sp>
         <p:nvSpPr>
-          <p:cNvPr id="72438470" name=""/>
+          <p:cNvPr id="758679512" name=""/>
           <p:cNvSpPr/>
           <p:nvPr/>
         </p:nvSpPr>
@@ -4760,7 +4932,7 @@
       </p:sp>
       <p:sp>
         <p:nvSpPr>
-          <p:cNvPr id="1472990590" name=""/>
+          <p:cNvPr id="1353780311" name=""/>
           <p:cNvSpPr txBox="1"/>
           <p:nvPr/>
         </p:nvSpPr>
@@ -4799,7 +4971,7 @@
       </p:sp>
       <p:sp>
         <p:nvSpPr>
-          <p:cNvPr id="877030433" name=""/>
+          <p:cNvPr id="733943693" name=""/>
           <p:cNvSpPr/>
           <p:nvPr/>
         </p:nvSpPr>
@@ -4856,7 +5028,7 @@
       </p:sp>
       <p:sp>
         <p:nvSpPr>
-          <p:cNvPr id="15209293" name=""/>
+          <p:cNvPr id="223815239" name=""/>
           <p:cNvSpPr/>
           <p:nvPr/>
         </p:nvSpPr>
@@ -4909,12 +5081,12 @@
       </p:sp>
       <p:sp>
         <p:nvSpPr>
-          <p:cNvPr id="801621947" name=""/>
+          <p:cNvPr id="1370523624" name=""/>
           <p:cNvSpPr/>
           <p:nvPr/>
         </p:nvSpPr>
         <p:spPr bwMode="auto">
-          <a:xfrm rot="5399977" flipH="0" flipV="0">
+          <a:xfrm rot="5399976" flipH="0" flipV="0">
             <a:off x="10405576" y="1715762"/>
             <a:ext cx="507087" cy="182232"/>
           </a:xfrm>
@@ -4966,7 +5138,7 @@
       </p:sp>
       <p:sp>
         <p:nvSpPr>
-          <p:cNvPr id="343020316" name=""/>
+          <p:cNvPr id="2058848834" name=""/>
           <p:cNvSpPr/>
           <p:nvPr/>
         </p:nvSpPr>
@@ -5023,7 +5195,7 @@
       </p:sp>
       <p:sp>
         <p:nvSpPr>
-          <p:cNvPr id="1967212057" name=""/>
+          <p:cNvPr id="431475206" name=""/>
           <p:cNvSpPr/>
           <p:nvPr/>
         </p:nvSpPr>
@@ -5129,12 +5301,12 @@
       </p:sp>
       <p:sp>
         <p:nvSpPr>
-          <p:cNvPr id="398371555" name=""/>
+          <p:cNvPr id="2015355008" name=""/>
           <p:cNvSpPr/>
           <p:nvPr/>
         </p:nvSpPr>
         <p:spPr bwMode="auto">
-          <a:xfrm rot="5399977" flipH="0" flipV="0">
+          <a:xfrm rot="5399976" flipH="0" flipV="0">
             <a:off x="6259949" y="2271794"/>
             <a:ext cx="1017867" cy="1782003"/>
           </a:xfrm>
@@ -5188,12 +5360,12 @@
       </p:sp>
       <p:sp>
         <p:nvSpPr>
-          <p:cNvPr id="2057162696" name=""/>
+          <p:cNvPr id="1408175781" name=""/>
           <p:cNvSpPr/>
           <p:nvPr/>
         </p:nvSpPr>
         <p:spPr bwMode="auto">
-          <a:xfrm rot="5399977" flipH="0" flipV="1">
+          <a:xfrm rot="5399976" flipH="0" flipV="1">
             <a:off x="8722926" y="2271793"/>
             <a:ext cx="1017866" cy="1782002"/>
           </a:xfrm>
@@ -5247,7 +5419,7 @@
       </p:sp>
       <p:sp>
         <p:nvSpPr>
-          <p:cNvPr id="633503346" name=""/>
+          <p:cNvPr id="1154297045" name=""/>
           <p:cNvSpPr/>
           <p:nvPr/>
         </p:nvSpPr>
@@ -5304,7 +5476,7 @@
       </p:sp>
       <p:sp>
         <p:nvSpPr>
-          <p:cNvPr id="2009390151" name=""/>
+          <p:cNvPr id="798503724" name=""/>
           <p:cNvSpPr txBox="1"/>
           <p:nvPr/>
         </p:nvSpPr>
@@ -5342,7 +5514,7 @@
       </p:sp>
       <p:sp>
         <p:nvSpPr>
-          <p:cNvPr id="1848281139" name=""/>
+          <p:cNvPr id="1511221684" name=""/>
           <p:cNvSpPr/>
           <p:nvPr/>
         </p:nvSpPr>
@@ -5425,12 +5597,12 @@
       </p:sp>
       <p:sp>
         <p:nvSpPr>
-          <p:cNvPr id="1464381734" name=""/>
+          <p:cNvPr id="236426250" name=""/>
           <p:cNvSpPr/>
           <p:nvPr/>
         </p:nvSpPr>
         <p:spPr bwMode="auto">
-          <a:xfrm rot="5399977" flipH="0" flipV="0">
+          <a:xfrm rot="5399976" flipH="0" flipV="0">
             <a:off x="7865630" y="5429234"/>
             <a:ext cx="507087" cy="182232"/>
           </a:xfrm>
@@ -5515,7 +5687,7 @@
       </p:grpSpPr>
       <p:sp>
         <p:nvSpPr>
-          <p:cNvPr id="1806962945" name=""/>
+          <p:cNvPr id="2132932116" name=""/>
           <p:cNvSpPr/>
           <p:nvPr/>
         </p:nvSpPr>
@@ -5598,7 +5770,7 @@
       </p:sp>
       <p:sp>
         <p:nvSpPr>
-          <p:cNvPr id="821482406" name=""/>
+          <p:cNvPr id="978679840" name=""/>
           <p:cNvSpPr/>
           <p:nvPr/>
         </p:nvSpPr>
@@ -5657,7 +5829,7 @@
       </p:sp>
       <p:sp>
         <p:nvSpPr>
-          <p:cNvPr id="2063609152" name=""/>
+          <p:cNvPr id="675162881" name=""/>
           <p:cNvSpPr/>
           <p:nvPr/>
         </p:nvSpPr>
@@ -5710,7 +5882,7 @@
       </p:sp>
       <p:sp>
         <p:nvSpPr>
-          <p:cNvPr id="1087691766" name=""/>
+          <p:cNvPr id="479292914" name=""/>
           <p:cNvSpPr/>
           <p:nvPr/>
         </p:nvSpPr>
@@ -5750,7 +5922,7 @@
       </p:sp>
       <p:sp>
         <p:nvSpPr>
-          <p:cNvPr id="1974273313" name=""/>
+          <p:cNvPr id="1609951828" name=""/>
           <p:cNvSpPr txBox="1"/>
           <p:nvPr/>
         </p:nvSpPr>
@@ -5804,7 +5976,7 @@
       </p:sp>
       <p:sp>
         <p:nvSpPr>
-          <p:cNvPr id="1562425208" name=""/>
+          <p:cNvPr id="1276936395" name=""/>
           <p:cNvSpPr/>
           <p:nvPr/>
         </p:nvSpPr>
@@ -5863,7 +6035,7 @@
       </p:sp>
       <p:sp>
         <p:nvSpPr>
-          <p:cNvPr id="1439931386" name=""/>
+          <p:cNvPr id="992094007" name=""/>
           <p:cNvSpPr/>
           <p:nvPr/>
         </p:nvSpPr>
@@ -5903,7 +6075,7 @@
       </p:sp>
       <p:sp>
         <p:nvSpPr>
-          <p:cNvPr id="1737919059" name=""/>
+          <p:cNvPr id="1112516017" name=""/>
           <p:cNvSpPr txBox="1"/>
           <p:nvPr/>
         </p:nvSpPr>
@@ -5965,7 +6137,7 @@
       </p:sp>
       <p:sp>
         <p:nvSpPr>
-          <p:cNvPr id="810954736" name=""/>
+          <p:cNvPr id="907940960" name=""/>
           <p:cNvSpPr/>
           <p:nvPr/>
         </p:nvSpPr>
@@ -6021,7 +6193,7 @@
       </p:sp>
       <p:sp>
         <p:nvSpPr>
-          <p:cNvPr id="2088813162" name=""/>
+          <p:cNvPr id="775446891" name=""/>
           <p:cNvSpPr/>
           <p:nvPr/>
         </p:nvSpPr>
@@ -6078,7 +6250,7 @@
       </p:sp>
       <p:sp>
         <p:nvSpPr>
-          <p:cNvPr id="1630021395" name=""/>
+          <p:cNvPr id="211570867" name=""/>
           <p:cNvSpPr/>
           <p:nvPr/>
         </p:nvSpPr>
@@ -6135,14 +6307,14 @@
       </p:sp>
       <p:sp>
         <p:nvSpPr>
-          <p:cNvPr id="1935721826" name=""/>
+          <p:cNvPr id="1461317080" name=""/>
           <p:cNvSpPr txBox="1"/>
           <p:nvPr/>
         </p:nvSpPr>
         <p:spPr bwMode="auto">
           <a:xfrm rot="0" flipH="0" flipV="0">
-            <a:off x="1984167" y="2284698"/>
-            <a:ext cx="1288378" cy="305159"/>
+            <a:off x="1984167" y="2284697"/>
+            <a:ext cx="1289097" cy="731879"/>
           </a:xfrm>
           <a:prstGeom prst="rect">
             <a:avLst/>
@@ -6169,11 +6341,31 @@
               <a:cs typeface="Times New Roman"/>
             </a:endParaRPr>
           </a:p>
-        </p:txBody>
-      </p:sp>
-      <p:sp>
-        <p:nvSpPr>
-          <p:cNvPr id="1422933029" name=""/>
+          <a:p>
+            <a:pPr algn="ctr">
+              <a:defRPr/>
+            </a:pPr>
+            <a:r>
+              <a:rPr lang="en-US" sz="1400" b="0" i="0" u="none" strike="noStrike" cap="none" spc="0">
+                <a:solidFill>
+                  <a:schemeClr val="tx1"/>
+                </a:solidFill>
+                <a:latin typeface="Times New Roman"/>
+                <a:ea typeface="Times New Roman"/>
+                <a:cs typeface="Times New Roman"/>
+              </a:rPr>
+              <a:t>requires_grad=False</a:t>
+            </a:r>
+            <a:endParaRPr sz="1400">
+              <a:latin typeface="Times New Roman"/>
+              <a:cs typeface="Times New Roman"/>
+            </a:endParaRPr>
+          </a:p>
+        </p:txBody>
+      </p:sp>
+      <p:sp>
+        <p:nvSpPr>
+          <p:cNvPr id="947969375" name=""/>
           <p:cNvSpPr/>
           <p:nvPr/>
         </p:nvSpPr>
@@ -6256,7 +6448,7 @@
       </p:sp>
       <p:sp>
         <p:nvSpPr>
-          <p:cNvPr id="666578000" name=""/>
+          <p:cNvPr id="299440499" name=""/>
           <p:cNvSpPr/>
           <p:nvPr/>
         </p:nvSpPr>
@@ -6313,14 +6505,14 @@
       </p:sp>
       <p:sp>
         <p:nvSpPr>
-          <p:cNvPr id="826176668" name=""/>
+          <p:cNvPr id="989302109" name=""/>
           <p:cNvSpPr txBox="1"/>
           <p:nvPr/>
         </p:nvSpPr>
         <p:spPr bwMode="auto">
           <a:xfrm rot="0" flipH="0" flipV="0">
-            <a:off x="7620955" y="931761"/>
-            <a:ext cx="4339332" cy="1585319"/>
+            <a:off x="7620954" y="931761"/>
+            <a:ext cx="4340052" cy="1585319"/>
           </a:xfrm>
           <a:prstGeom prst="rect">
             <a:avLst/>
@@ -6409,8 +6601,28 @@
                 <a:latin typeface="Times New Roman"/>
                 <a:cs typeface="Times New Roman"/>
               </a:rPr>
-              <a:t> Base</a:t>
-            </a:r>
+              <a:t> </a:t>
+            </a:r>
+            <a:r>
+              <a:rPr lang="en-US" sz="1200" b="0" i="0" u="none" strike="noStrike" cap="none" spc="0">
+                <a:solidFill>
+                  <a:schemeClr val="tx1"/>
+                </a:solidFill>
+                <a:latin typeface="Times New Roman"/>
+                <a:ea typeface="Times New Roman"/>
+                <a:cs typeface="Times New Roman"/>
+              </a:rPr>
+              <a:t>[B, 1024, 768] X A [768, 16] → [B, 1024, 16]</a:t>
+            </a:r>
+            <a:endParaRPr sz="1400">
+              <a:latin typeface="Times New Roman"/>
+              <a:cs typeface="Times New Roman"/>
+            </a:endParaRPr>
+          </a:p>
+          <a:p>
+            <a:pPr algn="l">
+              <a:defRPr/>
+            </a:pPr>
             <a:r>
               <a:rPr lang="en-US" sz="1400" b="0" i="0" u="none" strike="noStrike" cap="none" spc="0">
                 <a:solidFill>
@@ -6420,7 +6632,7 @@
                 <a:ea typeface="Times New Roman"/>
                 <a:cs typeface="Times New Roman"/>
               </a:rPr>
-              <a:t> X Matrix A = [B, 1024, 16]</a:t>
+              <a:t>Matrix B = [16, 4096]</a:t>
             </a:r>
             <a:endParaRPr sz="1400">
               <a:latin typeface="Times New Roman"/>
@@ -6431,6 +6643,13 @@
             <a:pPr algn="l">
               <a:defRPr/>
             </a:pPr>
+            <a:r>
+              <a:rPr sz="1400">
+                <a:latin typeface="Times New Roman"/>
+                <a:cs typeface="Times New Roman"/>
+              </a:rPr>
+              <a:t>Operation 2 : </a:t>
+            </a:r>
             <a:r>
               <a:rPr lang="en-US" sz="1400" b="0" i="0" u="none" strike="noStrike" cap="none" spc="0">
                 <a:solidFill>
@@ -6440,33 +6659,6 @@
                 <a:ea typeface="Times New Roman"/>
                 <a:cs typeface="Times New Roman"/>
               </a:rPr>
-              <a:t>Matrix B = [16, 4096]</a:t>
-            </a:r>
-            <a:endParaRPr sz="1400">
-              <a:latin typeface="Times New Roman"/>
-              <a:cs typeface="Times New Roman"/>
-            </a:endParaRPr>
-          </a:p>
-          <a:p>
-            <a:pPr algn="l">
-              <a:defRPr/>
-            </a:pPr>
-            <a:r>
-              <a:rPr sz="1400">
-                <a:latin typeface="Times New Roman"/>
-                <a:cs typeface="Times New Roman"/>
-              </a:rPr>
-              <a:t>Operation 2 : </a:t>
-            </a:r>
-            <a:r>
-              <a:rPr lang="en-US" sz="1400" b="0" i="0" u="none" strike="noStrike" cap="none" spc="0">
-                <a:solidFill>
-                  <a:schemeClr val="tx1"/>
-                </a:solidFill>
-                <a:latin typeface="Times New Roman"/>
-                <a:ea typeface="Times New Roman"/>
-                <a:cs typeface="Times New Roman"/>
-              </a:rPr>
               <a:t>Operation 1 X Matrix B = [B, 1024, 4096]</a:t>
             </a:r>
             <a:endParaRPr lang="en-US" sz="1400" b="0" i="0" u="none" strike="noStrike" cap="none" spc="0">
@@ -6498,7 +6690,7 @@
       </p:sp>
       <p:sp>
         <p:nvSpPr>
-          <p:cNvPr id="924383550" name=""/>
+          <p:cNvPr id="1438346543" name=""/>
           <p:cNvSpPr txBox="1"/>
           <p:nvPr/>
         </p:nvSpPr>
@@ -6536,12 +6728,12 @@
       </p:sp>
       <p:sp>
         <p:nvSpPr>
-          <p:cNvPr id="947336745" name=""/>
+          <p:cNvPr id="998706563" name=""/>
           <p:cNvSpPr/>
           <p:nvPr/>
         </p:nvSpPr>
         <p:spPr bwMode="auto">
-          <a:xfrm rot="5399977" flipH="0" flipV="0">
+          <a:xfrm rot="5399976" flipH="0" flipV="0">
             <a:off x="6447335" y="2885282"/>
             <a:ext cx="709728" cy="243235"/>
           </a:xfrm>
@@ -6593,7 +6785,7 @@
       </p:sp>
       <p:sp>
         <p:nvSpPr>
-          <p:cNvPr id="1338073834" name=""/>
+          <p:cNvPr id="1153400097" name=""/>
           <p:cNvSpPr/>
           <p:nvPr/>
         </p:nvSpPr>
@@ -6676,7 +6868,7 @@
       </p:sp>
       <p:sp>
         <p:nvSpPr>
-          <p:cNvPr id="255364048" name=""/>
+          <p:cNvPr id="1965812022" name=""/>
           <p:cNvSpPr/>
           <p:nvPr/>
         </p:nvSpPr>
@@ -6762,7 +6954,7 @@
       </p:sp>
       <p:sp>
         <p:nvSpPr>
-          <p:cNvPr id="1863850387" name=""/>
+          <p:cNvPr id="344278264" name=""/>
           <p:cNvSpPr/>
           <p:nvPr/>
         </p:nvSpPr>
@@ -6845,7 +7037,7 @@
       </p:sp>
       <p:sp>
         <p:nvSpPr>
-          <p:cNvPr id="1343007477" name=""/>
+          <p:cNvPr id="1089084889" name=""/>
           <p:cNvSpPr txBox="1"/>
           <p:nvPr/>
         </p:nvSpPr>
@@ -6883,7 +7075,7 @@
       </p:sp>
       <p:sp>
         <p:nvSpPr>
-          <p:cNvPr id="1686245740" name=""/>
+          <p:cNvPr id="1057164117" name=""/>
           <p:cNvSpPr txBox="1"/>
           <p:nvPr/>
         </p:nvSpPr>
@@ -6921,7 +7113,7 @@
       </p:sp>
       <p:sp>
         <p:nvSpPr>
-          <p:cNvPr id="1752941699" name=""/>
+          <p:cNvPr id="1965446028" name=""/>
           <p:cNvSpPr txBox="1"/>
           <p:nvPr/>
         </p:nvSpPr>
@@ -6959,7 +7151,7 @@
       </p:sp>
       <p:sp>
         <p:nvSpPr>
-          <p:cNvPr id="1230370767" name=""/>
+          <p:cNvPr id="886135512" name=""/>
           <p:cNvSpPr/>
           <p:nvPr/>
         </p:nvSpPr>
@@ -6999,7 +7191,7 @@
       </p:sp>
       <p:sp>
         <p:nvSpPr>
-          <p:cNvPr id="15269453" name=""/>
+          <p:cNvPr id="293324964" name=""/>
           <p:cNvSpPr txBox="1"/>
           <p:nvPr/>
         </p:nvSpPr>
@@ -7053,12 +7245,12 @@
       </p:sp>
       <p:sp>
         <p:nvSpPr>
-          <p:cNvPr id="1737869065" name=""/>
+          <p:cNvPr id="1300525318" name=""/>
           <p:cNvSpPr/>
           <p:nvPr/>
         </p:nvSpPr>
         <p:spPr bwMode="auto">
-          <a:xfrm rot="5399977" flipH="0" flipV="0">
+          <a:xfrm rot="5399976" flipH="0" flipV="0">
             <a:off x="6588903" y="5155967"/>
             <a:ext cx="426593" cy="243234"/>
           </a:xfrm>
@@ -7110,7 +7302,7 @@
       </p:sp>
       <p:sp>
         <p:nvSpPr>
-          <p:cNvPr id="1789941037" name=""/>
+          <p:cNvPr id="77774963" name=""/>
           <p:cNvSpPr/>
           <p:nvPr/>
         </p:nvSpPr>
@@ -7193,7 +7385,7 @@
       </p:sp>
       <p:sp>
         <p:nvSpPr>
-          <p:cNvPr id="45531226" name=""/>
+          <p:cNvPr id="1669586710" name=""/>
           <p:cNvSpPr txBox="1"/>
           <p:nvPr/>
         </p:nvSpPr>
@@ -7250,7 +7442,7 @@
       </p:sp>
       <p:sp>
         <p:nvSpPr>
-          <p:cNvPr id="1847596053" name=""/>
+          <p:cNvPr id="341569403" name=""/>
           <p:cNvSpPr/>
           <p:nvPr/>
         </p:nvSpPr>
@@ -7307,7 +7499,7 @@
       </p:sp>
       <p:sp>
         <p:nvSpPr>
-          <p:cNvPr id="1068899687" name=""/>
+          <p:cNvPr id="1244431296" name=""/>
           <p:cNvSpPr/>
           <p:nvPr/>
         </p:nvSpPr>
@@ -7363,7 +7555,7 @@
       </p:sp>
       <p:sp>
         <p:nvSpPr>
-          <p:cNvPr id="1330385973" name=""/>
+          <p:cNvPr id="1129780785" name=""/>
           <p:cNvSpPr/>
           <p:nvPr/>
         </p:nvSpPr>
@@ -7420,7 +7612,7 @@
       </p:sp>
       <p:sp>
         <p:nvSpPr>
-          <p:cNvPr id="347302295" name=""/>
+          <p:cNvPr id="1989382807" name=""/>
           <p:cNvSpPr/>
           <p:nvPr/>
         </p:nvSpPr>
@@ -7476,7 +7668,7 @@
       </p:sp>
       <p:sp>
         <p:nvSpPr>
-          <p:cNvPr id="100807619" name=""/>
+          <p:cNvPr id="1882839422" name=""/>
           <p:cNvSpPr txBox="1"/>
           <p:nvPr/>
         </p:nvSpPr>
@@ -7565,7 +7757,7 @@
       </p:sp>
       <p:sp>
         <p:nvSpPr>
-          <p:cNvPr id="1835377830" name=""/>
+          <p:cNvPr id="1608925364" name=""/>
           <p:cNvSpPr txBox="1"/>
           <p:nvPr/>
         </p:nvSpPr>
@@ -7603,7 +7795,7 @@
       </p:sp>
       <p:sp>
         <p:nvSpPr>
-          <p:cNvPr id="934594483" name=""/>
+          <p:cNvPr id="814282513" name=""/>
           <p:cNvSpPr txBox="1"/>
           <p:nvPr/>
         </p:nvSpPr>
@@ -7674,7 +7866,7 @@
       </p:grpSpPr>
       <p:sp>
         <p:nvSpPr>
-          <p:cNvPr id="1912279147" name=""/>
+          <p:cNvPr id="119109778" name=""/>
           <p:cNvSpPr/>
           <p:nvPr/>
         </p:nvSpPr>
@@ -7759,7 +7951,7 @@
       </p:sp>
       <p:sp>
         <p:nvSpPr>
-          <p:cNvPr id="2065955701" name=""/>
+          <p:cNvPr id="134779773" name=""/>
           <p:cNvSpPr/>
           <p:nvPr/>
         </p:nvSpPr>
@@ -7839,7 +8031,7 @@
       </p:sp>
       <p:pic>
         <p:nvPicPr>
-          <p:cNvPr id="466929014" name=""/>
+          <p:cNvPr id="580580788" name=""/>
           <p:cNvPicPr>
             <a:picLocks noChangeAspect="1"/>
           </p:cNvPicPr>
@@ -7861,13 +8053,13 @@
       </p:pic>
       <p:sp>
         <p:nvSpPr>
-          <p:cNvPr id="1160665756" name=""/>
+          <p:cNvPr id="411196009" name=""/>
           <p:cNvSpPr txBox="1"/>
           <p:nvPr/>
         </p:nvSpPr>
         <p:spPr bwMode="auto">
           <a:xfrm rot="0" flipH="0" flipV="0">
-            <a:off x="61699" y="2561698"/>
+            <a:off x="61698" y="2393553"/>
             <a:ext cx="1309978" cy="579479"/>
           </a:xfrm>
           <a:prstGeom prst="rect">
@@ -7917,13 +8109,13 @@
       </p:sp>
       <p:sp>
         <p:nvSpPr>
-          <p:cNvPr id="316495952" name=""/>
+          <p:cNvPr id="1128368116" name=""/>
           <p:cNvSpPr/>
           <p:nvPr/>
         </p:nvSpPr>
         <p:spPr bwMode="auto">
           <a:xfrm rot="0" flipH="0" flipV="0">
-            <a:off x="3573856" y="997705"/>
+            <a:off x="3573856" y="997704"/>
             <a:ext cx="619291" cy="182232"/>
           </a:xfrm>
           <a:prstGeom prst="rightArrow">
@@ -7974,7 +8166,7 @@
       </p:sp>
       <p:sp>
         <p:nvSpPr>
-          <p:cNvPr id="1503200414" name=""/>
+          <p:cNvPr id="1960687683" name=""/>
           <p:cNvSpPr/>
           <p:nvPr/>
         </p:nvSpPr>
@@ -8031,7 +8223,7 @@
       </p:sp>
       <p:sp>
         <p:nvSpPr>
-          <p:cNvPr id="73506244" name=""/>
+          <p:cNvPr id="63671885" name=""/>
           <p:cNvSpPr/>
           <p:nvPr/>
         </p:nvSpPr>
@@ -8088,7 +8280,7 @@
       </p:sp>
       <p:sp>
         <p:nvSpPr>
-          <p:cNvPr id="1658903551" name=""/>
+          <p:cNvPr id="2026315274" name=""/>
           <p:cNvSpPr/>
           <p:nvPr/>
         </p:nvSpPr>
@@ -8141,14 +8333,14 @@
       </p:sp>
       <p:sp>
         <p:nvSpPr>
-          <p:cNvPr id="1962800642" name=""/>
+          <p:cNvPr id="457938250" name=""/>
           <p:cNvSpPr txBox="1"/>
           <p:nvPr/>
         </p:nvSpPr>
         <p:spPr bwMode="auto">
           <a:xfrm rot="0" flipH="0" flipV="0">
             <a:off x="5915573" y="1784450"/>
-            <a:ext cx="1919588" cy="305159"/>
+            <a:ext cx="1919587" cy="305159"/>
           </a:xfrm>
           <a:prstGeom prst="rect">
             <a:avLst/>
@@ -8180,7 +8372,7 @@
       </p:sp>
       <p:sp>
         <p:nvSpPr>
-          <p:cNvPr id="654647595" name=""/>
+          <p:cNvPr id="301052276" name=""/>
           <p:cNvSpPr/>
           <p:nvPr/>
         </p:nvSpPr>
@@ -8255,13 +8447,13 @@
       </p:sp>
       <p:sp>
         <p:nvSpPr>
-          <p:cNvPr id="1042930" name=""/>
+          <p:cNvPr id="1391627261" name=""/>
           <p:cNvSpPr/>
           <p:nvPr/>
         </p:nvSpPr>
         <p:spPr bwMode="auto">
           <a:xfrm rot="0" flipH="0" flipV="0">
-            <a:off x="5887122" y="997705"/>
+            <a:off x="5887122" y="997704"/>
             <a:ext cx="619290" cy="182232"/>
           </a:xfrm>
           <a:prstGeom prst="rightArrow">
@@ -8312,7 +8504,7 @@
       </p:sp>
       <p:sp>
         <p:nvSpPr>
-          <p:cNvPr id="2041827768" name=""/>
+          <p:cNvPr id="1327053525" name=""/>
           <p:cNvSpPr/>
           <p:nvPr/>
         </p:nvSpPr>
@@ -8418,7 +8610,7 @@
       </p:sp>
       <p:sp>
         <p:nvSpPr>
-          <p:cNvPr id="1533932107" name=""/>
+          <p:cNvPr id="1712293187" name=""/>
           <p:cNvSpPr txBox="1"/>
           <p:nvPr/>
         </p:nvSpPr>
@@ -8456,7 +8648,7 @@
       </p:sp>
       <p:sp>
         <p:nvSpPr>
-          <p:cNvPr id="863549511" name=""/>
+          <p:cNvPr id="957692454" name=""/>
           <p:cNvSpPr/>
           <p:nvPr/>
         </p:nvSpPr>
@@ -8513,7 +8705,7 @@
       </p:sp>
       <p:sp>
         <p:nvSpPr>
-          <p:cNvPr id="1041376230" name=""/>
+          <p:cNvPr id="1264575952" name=""/>
           <p:cNvSpPr/>
           <p:nvPr/>
         </p:nvSpPr>
@@ -8564,6 +8756,6521 @@
               <a:defRPr/>
             </a:pPr>
             <a:endParaRPr>
+              <a:latin typeface="Times New Roman"/>
+              <a:cs typeface="Times New Roman"/>
+            </a:endParaRPr>
+          </a:p>
+        </p:txBody>
+      </p:sp>
+      <p:sp>
+        <p:nvSpPr>
+          <p:cNvPr id="1297402113" name=""/>
+          <p:cNvSpPr/>
+          <p:nvPr/>
+        </p:nvSpPr>
+        <p:spPr bwMode="auto">
+          <a:xfrm rot="0" flipH="0" flipV="0">
+            <a:off x="9747073" y="2240772"/>
+            <a:ext cx="510262" cy="971100"/>
+          </a:xfrm>
+          <a:prstGeom prst="cube">
+            <a:avLst>
+              <a:gd name="adj" fmla="val 25000"/>
+            </a:avLst>
+          </a:prstGeom>
+          <a:solidFill>
+            <a:srgbClr val="CF73E6"/>
+          </a:solidFill>
+          <a:ln w="12700" cap="flat" cmpd="sng" algn="ctr">
+            <a:solidFill>
+              <a:schemeClr val="tx1"/>
+            </a:solidFill>
+            <a:prstDash val="solid"/>
+            <a:miter lim="800000"/>
+          </a:ln>
+        </p:spPr>
+        <p:style>
+          <a:lnRef idx="2">
+            <a:schemeClr val="accent1">
+              <a:shade val="50000"/>
+            </a:schemeClr>
+          </a:lnRef>
+          <a:fillRef idx="1">
+            <a:schemeClr val="accent1"/>
+          </a:fillRef>
+          <a:effectRef idx="0">
+            <a:schemeClr val="accent1"/>
+          </a:effectRef>
+          <a:fontRef idx="minor">
+            <a:schemeClr val="lt1"/>
+          </a:fontRef>
+        </p:style>
+        <p:txBody>
+          <a:bodyPr anchor="ctr"/>
+          <a:p>
+            <a:pPr algn="ctr">
+              <a:defRPr/>
+            </a:pPr>
+            <a:endParaRPr>
+              <a:latin typeface="Times New Roman"/>
+              <a:cs typeface="Times New Roman"/>
+            </a:endParaRPr>
+          </a:p>
+        </p:txBody>
+      </p:sp>
+      <p:sp>
+        <p:nvSpPr>
+          <p:cNvPr id="112185936" name=""/>
+          <p:cNvSpPr/>
+          <p:nvPr/>
+        </p:nvSpPr>
+        <p:spPr bwMode="auto">
+          <a:xfrm rot="0" flipH="0" flipV="0">
+            <a:off x="9944342" y="813349"/>
+            <a:ext cx="115723" cy="971100"/>
+          </a:xfrm>
+          <a:prstGeom prst="cube">
+            <a:avLst>
+              <a:gd name="adj" fmla="val 25000"/>
+            </a:avLst>
+          </a:prstGeom>
+          <a:solidFill>
+            <a:srgbClr val="CF73E6"/>
+          </a:solidFill>
+          <a:ln w="12700" cap="flat" cmpd="sng" algn="ctr">
+            <a:solidFill>
+              <a:schemeClr val="tx1"/>
+            </a:solidFill>
+            <a:prstDash val="solid"/>
+            <a:miter lim="800000"/>
+          </a:ln>
+        </p:spPr>
+        <p:style>
+          <a:lnRef idx="2">
+            <a:schemeClr val="accent1">
+              <a:shade val="50000"/>
+            </a:schemeClr>
+          </a:lnRef>
+          <a:fillRef idx="1">
+            <a:schemeClr val="accent1"/>
+          </a:fillRef>
+          <a:effectRef idx="0">
+            <a:schemeClr val="accent1"/>
+          </a:effectRef>
+          <a:fontRef idx="minor">
+            <a:schemeClr val="lt1"/>
+          </a:fontRef>
+        </p:style>
+        <p:txBody>
+          <a:bodyPr anchor="ctr"/>
+          <a:p>
+            <a:pPr algn="ctr">
+              <a:defRPr/>
+            </a:pPr>
+            <a:endParaRPr>
+              <a:latin typeface="Times New Roman"/>
+              <a:cs typeface="Times New Roman"/>
+            </a:endParaRPr>
+          </a:p>
+        </p:txBody>
+      </p:sp>
+      <p:sp>
+        <p:nvSpPr>
+          <p:cNvPr id="907990439" name=""/>
+          <p:cNvSpPr txBox="1"/>
+          <p:nvPr/>
+        </p:nvSpPr>
+        <p:spPr bwMode="auto">
+          <a:xfrm rot="0" flipH="0" flipV="0">
+            <a:off x="10144109" y="847031"/>
+            <a:ext cx="1941241" cy="853799"/>
+          </a:xfrm>
+          <a:prstGeom prst="rect">
+            <a:avLst/>
+          </a:prstGeom>
+          <a:noFill/>
+        </p:spPr>
+        <p:txBody>
+          <a:bodyPr vertOverflow="overflow" horzOverflow="overflow" vert="horz" wrap="square" lIns="91440" tIns="45720" rIns="91440" bIns="45720" numCol="1" spcCol="0" rtlCol="0" fromWordArt="0" anchor="t" anchorCtr="0" forceAA="0" upright="0" compatLnSpc="0">
+            <a:spAutoFit/>
+          </a:bodyPr>
+          <a:p>
+            <a:pPr algn="ctr">
+              <a:defRPr/>
+            </a:pPr>
+            <a:r>
+              <a:rPr lang="en-US" sz="1400" b="1" i="0" u="none" strike="noStrike" cap="none" spc="0">
+                <a:solidFill>
+                  <a:schemeClr val="tx1"/>
+                </a:solidFill>
+                <a:latin typeface="Times New Roman"/>
+                <a:ea typeface="Times New Roman"/>
+                <a:cs typeface="Times New Roman"/>
+              </a:rPr>
+              <a:t>Likelihood</a:t>
+            </a:r>
+            <a:endParaRPr sz="1400" b="1">
+              <a:latin typeface="Times New Roman"/>
+              <a:ea typeface="Times New Roman"/>
+              <a:cs typeface="Times New Roman"/>
+            </a:endParaRPr>
+          </a:p>
+          <a:p>
+            <a:pPr algn="ctr">
+              <a:defRPr/>
+            </a:pPr>
+            <a:r>
+              <a:rPr sz="1400">
+                <a:latin typeface="Times New Roman"/>
+                <a:ea typeface="Times New Roman"/>
+                <a:cs typeface="Times New Roman"/>
+              </a:rPr>
+              <a:t>B, Num_Heads, Lt, Lv</a:t>
+            </a:r>
+            <a:endParaRPr sz="1400">
+              <a:latin typeface="Times New Roman"/>
+              <a:cs typeface="Times New Roman"/>
+            </a:endParaRPr>
+          </a:p>
+          <a:p>
+            <a:pPr algn="ctr">
+              <a:defRPr/>
+            </a:pPr>
+            <a:r>
+              <a:rPr sz="1100">
+                <a:latin typeface="Times New Roman"/>
+                <a:cs typeface="Times New Roman"/>
+              </a:rPr>
+              <a:t>Lt (Lengh Textual terms)</a:t>
+            </a:r>
+            <a:br>
+              <a:rPr sz="1100">
+                <a:latin typeface="Times New Roman"/>
+                <a:cs typeface="Times New Roman"/>
+              </a:rPr>
+            </a:br>
+            <a:r>
+              <a:rPr sz="1100">
+                <a:latin typeface="Times New Roman"/>
+                <a:cs typeface="Times New Roman"/>
+              </a:rPr>
+              <a:t>Lv (Lengh visual patches)</a:t>
+            </a:r>
+            <a:endParaRPr sz="1400">
+              <a:latin typeface="Times New Roman"/>
+              <a:cs typeface="Times New Roman"/>
+            </a:endParaRPr>
+          </a:p>
+        </p:txBody>
+      </p:sp>
+      <p:sp>
+        <p:nvSpPr>
+          <p:cNvPr id="262810764" name=""/>
+          <p:cNvSpPr txBox="1"/>
+          <p:nvPr/>
+        </p:nvSpPr>
+        <p:spPr bwMode="auto">
+          <a:xfrm rot="0" flipH="0" flipV="0">
+            <a:off x="10349563" y="2424033"/>
+            <a:ext cx="1735788" cy="518519"/>
+          </a:xfrm>
+          <a:prstGeom prst="rect">
+            <a:avLst/>
+          </a:prstGeom>
+          <a:noFill/>
+        </p:spPr>
+        <p:txBody>
+          <a:bodyPr vertOverflow="overflow" horzOverflow="overflow" vert="horz" wrap="square" lIns="91440" tIns="45720" rIns="91440" bIns="45720" numCol="1" spcCol="0" rtlCol="0" fromWordArt="0" anchor="t" anchorCtr="0" forceAA="0" upright="0" compatLnSpc="0">
+            <a:spAutoFit/>
+          </a:bodyPr>
+          <a:p>
+            <a:pPr algn="l">
+              <a:defRPr/>
+            </a:pPr>
+            <a:r>
+              <a:rPr sz="1400" b="1">
+                <a:latin typeface="Times New Roman"/>
+                <a:ea typeface="Times New Roman"/>
+                <a:cs typeface="Times New Roman"/>
+              </a:rPr>
+              <a:t>Aligned Embedding</a:t>
+            </a:r>
+            <a:endParaRPr sz="1400" b="1">
+              <a:latin typeface="Times New Roman"/>
+              <a:ea typeface="Times New Roman"/>
+              <a:cs typeface="Times New Roman"/>
+            </a:endParaRPr>
+          </a:p>
+          <a:p>
+            <a:pPr algn="l">
+              <a:defRPr/>
+            </a:pPr>
+            <a:r>
+              <a:rPr sz="1400">
+                <a:latin typeface="Times New Roman"/>
+                <a:ea typeface="Times New Roman"/>
+                <a:cs typeface="Times New Roman"/>
+              </a:rPr>
+              <a:t>B, Num_Terms, 4096</a:t>
+            </a:r>
+            <a:endParaRPr sz="1400">
+              <a:latin typeface="Times New Roman"/>
+              <a:cs typeface="Times New Roman"/>
+            </a:endParaRPr>
+          </a:p>
+        </p:txBody>
+      </p:sp>
+      <p:sp>
+        <p:nvSpPr>
+          <p:cNvPr id="393428972" name=""/>
+          <p:cNvSpPr/>
+          <p:nvPr/>
+        </p:nvSpPr>
+        <p:spPr bwMode="auto">
+          <a:xfrm rot="19403571" flipH="0" flipV="0">
+            <a:off x="9250273" y="1351923"/>
+            <a:ext cx="619290" cy="182232"/>
+          </a:xfrm>
+          <a:prstGeom prst="rightArrow">
+            <a:avLst>
+              <a:gd name="adj1" fmla="val 50000"/>
+              <a:gd name="adj2" fmla="val 50000"/>
+            </a:avLst>
+          </a:prstGeom>
+          <a:solidFill>
+            <a:schemeClr val="tx1"/>
+          </a:solidFill>
+          <a:ln w="12699" cap="flat" cmpd="sng" algn="ctr">
+            <a:solidFill>
+              <a:schemeClr val="tx1"/>
+            </a:solidFill>
+            <a:prstDash val="solid"/>
+            <a:miter lim="800000"/>
+          </a:ln>
+        </p:spPr>
+        <p:style>
+          <a:lnRef idx="2">
+            <a:schemeClr val="accent1">
+              <a:shade val="50000"/>
+            </a:schemeClr>
+          </a:lnRef>
+          <a:fillRef idx="1">
+            <a:schemeClr val="accent1"/>
+          </a:fillRef>
+          <a:effectRef idx="0">
+            <a:schemeClr val="accent1"/>
+          </a:effectRef>
+          <a:fontRef idx="minor">
+            <a:schemeClr val="lt1"/>
+          </a:fontRef>
+        </p:style>
+        <p:txBody>
+          <a:bodyPr anchor="ctr"/>
+          <a:p>
+            <a:pPr algn="ctr">
+              <a:defRPr/>
+            </a:pPr>
+            <a:endParaRPr>
+              <a:latin typeface="Times New Roman"/>
+              <a:cs typeface="Times New Roman"/>
+            </a:endParaRPr>
+          </a:p>
+        </p:txBody>
+      </p:sp>
+      <p:sp>
+        <p:nvSpPr>
+          <p:cNvPr id="1683862153" name=""/>
+          <p:cNvSpPr/>
+          <p:nvPr/>
+        </p:nvSpPr>
+        <p:spPr bwMode="auto">
+          <a:xfrm rot="2701002" flipH="0" flipV="0">
+            <a:off x="9134528" y="2652813"/>
+            <a:ext cx="619290" cy="182232"/>
+          </a:xfrm>
+          <a:prstGeom prst="rightArrow">
+            <a:avLst>
+              <a:gd name="adj1" fmla="val 50000"/>
+              <a:gd name="adj2" fmla="val 50000"/>
+            </a:avLst>
+          </a:prstGeom>
+          <a:solidFill>
+            <a:schemeClr val="tx1"/>
+          </a:solidFill>
+          <a:ln w="12699" cap="flat" cmpd="sng" algn="ctr">
+            <a:solidFill>
+              <a:schemeClr val="tx1"/>
+            </a:solidFill>
+            <a:prstDash val="solid"/>
+            <a:miter lim="800000"/>
+          </a:ln>
+        </p:spPr>
+        <p:style>
+          <a:lnRef idx="2">
+            <a:schemeClr val="accent1">
+              <a:shade val="50000"/>
+            </a:schemeClr>
+          </a:lnRef>
+          <a:fillRef idx="1">
+            <a:schemeClr val="accent1"/>
+          </a:fillRef>
+          <a:effectRef idx="0">
+            <a:schemeClr val="accent1"/>
+          </a:effectRef>
+          <a:fontRef idx="minor">
+            <a:schemeClr val="lt1"/>
+          </a:fontRef>
+        </p:style>
+        <p:txBody>
+          <a:bodyPr anchor="ctr"/>
+          <a:p>
+            <a:pPr algn="ctr">
+              <a:defRPr/>
+            </a:pPr>
+            <a:endParaRPr>
+              <a:latin typeface="Times New Roman"/>
+              <a:cs typeface="Times New Roman"/>
+            </a:endParaRPr>
+          </a:p>
+        </p:txBody>
+      </p:sp>
+      <p:sp>
+        <p:nvSpPr>
+          <p:cNvPr id="1612674244" name=""/>
+          <p:cNvSpPr/>
+          <p:nvPr/>
+        </p:nvSpPr>
+        <p:spPr bwMode="auto">
+          <a:xfrm rot="0" flipH="0" flipV="0">
+            <a:off x="3241321" y="3596819"/>
+            <a:ext cx="7873409" cy="2192885"/>
+          </a:xfrm>
+          <a:prstGeom prst="rect">
+            <a:avLst/>
+          </a:prstGeom>
+          <a:noFill/>
+          <a:ln w="38100" cap="flat" cmpd="sng" algn="ctr">
+            <a:solidFill>
+              <a:srgbClr val="548235"/>
+            </a:solidFill>
+            <a:prstDash val="sysDot"/>
+            <a:miter lim="800000"/>
+          </a:ln>
+        </p:spPr>
+        <p:style>
+          <a:lnRef idx="2">
+            <a:schemeClr val="accent1">
+              <a:shade val="50000"/>
+            </a:schemeClr>
+          </a:lnRef>
+          <a:fillRef idx="1">
+            <a:schemeClr val="accent1"/>
+          </a:fillRef>
+          <a:effectRef idx="0">
+            <a:schemeClr val="accent1"/>
+          </a:effectRef>
+          <a:fontRef idx="minor">
+            <a:schemeClr val="lt1"/>
+          </a:fontRef>
+        </p:style>
+        <p:txBody>
+          <a:bodyPr anchor="ctr"/>
+          <a:p>
+            <a:pPr algn="ctr">
+              <a:defRPr/>
+            </a:pPr>
+            <a:r>
+              <a:rPr/>
+              <a:t>S</a:t>
+            </a:r>
+            <a:endParaRPr/>
+          </a:p>
+        </p:txBody>
+      </p:sp>
+      <p:sp>
+        <p:nvSpPr>
+          <p:cNvPr id="87571368" name=""/>
+          <p:cNvSpPr txBox="1"/>
+          <p:nvPr/>
+        </p:nvSpPr>
+        <p:spPr bwMode="auto">
+          <a:xfrm rot="0" flipH="0" flipV="0">
+            <a:off x="3103818" y="3261179"/>
+            <a:ext cx="2953854" cy="335639"/>
+          </a:xfrm>
+          <a:prstGeom prst="rect">
+            <a:avLst/>
+          </a:prstGeom>
+          <a:noFill/>
+        </p:spPr>
+        <p:txBody>
+          <a:bodyPr vertOverflow="overflow" horzOverflow="overflow" vert="horz" wrap="square" lIns="91440" tIns="45720" rIns="91440" bIns="45720" numCol="1" spcCol="0" rtlCol="0" fromWordArt="0" anchor="t" anchorCtr="0" forceAA="0" upright="0" compatLnSpc="0">
+            <a:spAutoFit/>
+          </a:bodyPr>
+          <a:p>
+            <a:pPr algn="ctr">
+              <a:defRPr/>
+            </a:pPr>
+            <a:r>
+              <a:rPr sz="1600">
+                <a:latin typeface="Times New Roman"/>
+                <a:ea typeface="Times New Roman"/>
+                <a:cs typeface="Times New Roman"/>
+              </a:rPr>
+              <a:t>For </a:t>
+            </a:r>
+            <a:r>
+              <a:rPr sz="1600" b="1">
+                <a:solidFill>
+                  <a:schemeClr val="accent2">
+                    <a:lumMod val="75000"/>
+                  </a:schemeClr>
+                </a:solidFill>
+                <a:latin typeface="Times New Roman"/>
+                <a:ea typeface="Times New Roman"/>
+                <a:cs typeface="Times New Roman"/>
+              </a:rPr>
+              <a:t>Node</a:t>
+            </a:r>
+            <a:r>
+              <a:rPr sz="1600">
+                <a:latin typeface="Times New Roman"/>
+                <a:ea typeface="Times New Roman"/>
+                <a:cs typeface="Times New Roman"/>
+              </a:rPr>
+              <a:t> in </a:t>
+            </a:r>
+            <a:r>
+              <a:rPr sz="1600" b="1">
+                <a:solidFill>
+                  <a:schemeClr val="accent2">
+                    <a:lumMod val="75000"/>
+                  </a:schemeClr>
+                </a:solidFill>
+                <a:latin typeface="Times New Roman"/>
+                <a:ea typeface="Times New Roman"/>
+                <a:cs typeface="Times New Roman"/>
+              </a:rPr>
+              <a:t>Candidates nodes</a:t>
+            </a:r>
+            <a:endParaRPr sz="1600">
+              <a:latin typeface="Times New Roman"/>
+              <a:cs typeface="Times New Roman"/>
+            </a:endParaRPr>
+          </a:p>
+        </p:txBody>
+      </p:sp>
+      <p:sp>
+        <p:nvSpPr>
+          <p:cNvPr id="1176739307" name=""/>
+          <p:cNvSpPr/>
+          <p:nvPr/>
+        </p:nvSpPr>
+        <p:spPr bwMode="auto">
+          <a:xfrm rot="0" flipH="0" flipV="0">
+            <a:off x="6984052" y="4360193"/>
+            <a:ext cx="403446" cy="581043"/>
+          </a:xfrm>
+          <a:prstGeom prst="cube">
+            <a:avLst>
+              <a:gd name="adj" fmla="val 25000"/>
+            </a:avLst>
+          </a:prstGeom>
+          <a:solidFill>
+            <a:srgbClr val="CF73E6"/>
+          </a:solidFill>
+          <a:ln w="12700" cap="flat" cmpd="sng" algn="ctr">
+            <a:solidFill>
+              <a:schemeClr val="tx1"/>
+            </a:solidFill>
+            <a:prstDash val="solid"/>
+            <a:miter lim="800000"/>
+          </a:ln>
+        </p:spPr>
+        <p:style>
+          <a:lnRef idx="2">
+            <a:schemeClr val="accent1">
+              <a:shade val="50000"/>
+            </a:schemeClr>
+          </a:lnRef>
+          <a:fillRef idx="1">
+            <a:schemeClr val="accent1"/>
+          </a:fillRef>
+          <a:effectRef idx="0">
+            <a:schemeClr val="accent1"/>
+          </a:effectRef>
+          <a:fontRef idx="minor">
+            <a:schemeClr val="lt1"/>
+          </a:fontRef>
+        </p:style>
+        <p:txBody>
+          <a:bodyPr anchor="ctr"/>
+          <a:p>
+            <a:pPr algn="ctr">
+              <a:defRPr/>
+            </a:pPr>
+            <a:endParaRPr>
+              <a:latin typeface="Times New Roman"/>
+              <a:cs typeface="Times New Roman"/>
+            </a:endParaRPr>
+          </a:p>
+        </p:txBody>
+      </p:sp>
+      <p:sp>
+        <p:nvSpPr>
+          <p:cNvPr id="981005764" name=""/>
+          <p:cNvSpPr txBox="1"/>
+          <p:nvPr/>
+        </p:nvSpPr>
+        <p:spPr bwMode="auto">
+          <a:xfrm rot="0" flipH="0" flipV="0">
+            <a:off x="189741" y="4546490"/>
+            <a:ext cx="1341657" cy="945239"/>
+          </a:xfrm>
+          <a:prstGeom prst="rect">
+            <a:avLst/>
+          </a:prstGeom>
+          <a:noFill/>
+        </p:spPr>
+        <p:txBody>
+          <a:bodyPr vertOverflow="overflow" horzOverflow="overflow" vert="horz" wrap="square" lIns="91440" tIns="45720" rIns="91440" bIns="45720" numCol="1" spcCol="0" rtlCol="0" fromWordArt="0" anchor="t" anchorCtr="0" forceAA="0" upright="0" compatLnSpc="0">
+            <a:spAutoFit/>
+          </a:bodyPr>
+          <a:p>
+            <a:pPr algn="ctr">
+              <a:defRPr/>
+            </a:pPr>
+            <a:r>
+              <a:rPr sz="1400">
+                <a:latin typeface="Times New Roman"/>
+                <a:cs typeface="Times New Roman"/>
+              </a:rPr>
+              <a:t>Objects from real-label</a:t>
+            </a:r>
+            <a:endParaRPr sz="1400">
+              <a:latin typeface="Times New Roman"/>
+              <a:cs typeface="Times New Roman"/>
+            </a:endParaRPr>
+          </a:p>
+          <a:p>
+            <a:pPr algn="ctr">
+              <a:defRPr/>
+            </a:pPr>
+            <a:r>
+              <a:rPr sz="1400">
+                <a:latin typeface="Times New Roman"/>
+                <a:cs typeface="Times New Roman"/>
+              </a:rPr>
+              <a:t>(candidates nodes)</a:t>
+            </a:r>
+            <a:endParaRPr sz="1400">
+              <a:latin typeface="Times New Roman"/>
+              <a:cs typeface="Times New Roman"/>
+            </a:endParaRPr>
+          </a:p>
+        </p:txBody>
+      </p:sp>
+      <p:sp>
+        <p:nvSpPr>
+          <p:cNvPr id="791973594" name=""/>
+          <p:cNvSpPr/>
+          <p:nvPr/>
+        </p:nvSpPr>
+        <p:spPr bwMode="auto">
+          <a:xfrm rot="0" flipH="0" flipV="0">
+            <a:off x="242721" y="3383442"/>
+            <a:ext cx="1203660" cy="701779"/>
+          </a:xfrm>
+          <a:prstGeom prst="rect">
+            <a:avLst/>
+          </a:prstGeom>
+          <a:gradFill>
+            <a:gsLst>
+              <a:gs pos="19000">
+                <a:schemeClr val="accent2">
+                  <a:lumMod val="60000"/>
+                  <a:lumOff val="40000"/>
+                </a:schemeClr>
+              </a:gs>
+              <a:gs pos="100000">
+                <a:srgbClr val="FFFFFF"/>
+              </a:gs>
+            </a:gsLst>
+            <a:lin ang="0" scaled="1"/>
+          </a:gradFill>
+          <a:ln w="19049" cap="flat" cmpd="sng" algn="ctr">
+            <a:solidFill>
+              <a:schemeClr val="accent2">
+                <a:lumMod val="60000"/>
+                <a:lumOff val="40000"/>
+                <a:alpha val="99999"/>
+              </a:schemeClr>
+            </a:solidFill>
+            <a:prstDash val="solid"/>
+            <a:miter lim="800000"/>
+          </a:ln>
+        </p:spPr>
+        <p:style>
+          <a:lnRef idx="2">
+            <a:schemeClr val="accent1">
+              <a:shade val="50000"/>
+            </a:schemeClr>
+          </a:lnRef>
+          <a:fillRef idx="1">
+            <a:schemeClr val="accent1"/>
+          </a:fillRef>
+          <a:effectRef idx="0">
+            <a:schemeClr val="accent1"/>
+          </a:effectRef>
+          <a:fontRef idx="minor">
+            <a:schemeClr val="lt1"/>
+          </a:fontRef>
+        </p:style>
+        <p:txBody>
+          <a:bodyPr anchor="ctr"/>
+          <a:p>
+            <a:pPr algn="ctr">
+              <a:defRPr/>
+            </a:pPr>
+            <a:r>
+              <a:rPr sz="1400" b="0">
+                <a:solidFill>
+                  <a:schemeClr val="tx1"/>
+                </a:solidFill>
+                <a:latin typeface="Times New Roman"/>
+                <a:ea typeface="Times New Roman"/>
+                <a:cs typeface="Times New Roman"/>
+              </a:rPr>
+              <a:t>QWEN3 </a:t>
+            </a:r>
+            <a:r>
+              <a:rPr lang="en-US" sz="1400" b="0" i="0" u="none" strike="noStrike" cap="none" spc="0">
+                <a:solidFill>
+                  <a:schemeClr val="tx1"/>
+                </a:solidFill>
+                <a:latin typeface="Times New Roman"/>
+                <a:ea typeface="Times New Roman"/>
+                <a:cs typeface="Times New Roman"/>
+              </a:rPr>
+              <a:t>is like</a:t>
+            </a:r>
+            <a:r>
+              <a:rPr sz="1400" b="0">
+                <a:solidFill>
+                  <a:schemeClr val="tx1"/>
+                </a:solidFill>
+                <a:latin typeface="Times New Roman"/>
+                <a:ea typeface="Times New Roman"/>
+                <a:cs typeface="Times New Roman"/>
+              </a:rPr>
+              <a:t> a LLM</a:t>
+            </a:r>
+            <a:endParaRPr sz="1400" b="0">
+              <a:latin typeface="Times New Roman"/>
+              <a:cs typeface="Times New Roman"/>
+            </a:endParaRPr>
+          </a:p>
+        </p:txBody>
+      </p:sp>
+      <p:sp>
+        <p:nvSpPr>
+          <p:cNvPr id="270057522" name=""/>
+          <p:cNvSpPr/>
+          <p:nvPr/>
+        </p:nvSpPr>
+        <p:spPr bwMode="auto">
+          <a:xfrm rot="5400000" flipH="0" flipV="0">
+            <a:off x="670180" y="4281004"/>
+            <a:ext cx="348741" cy="182232"/>
+          </a:xfrm>
+          <a:prstGeom prst="rightArrow">
+            <a:avLst>
+              <a:gd name="adj1" fmla="val 50000"/>
+              <a:gd name="adj2" fmla="val 50000"/>
+            </a:avLst>
+          </a:prstGeom>
+          <a:solidFill>
+            <a:schemeClr val="tx1"/>
+          </a:solidFill>
+          <a:ln w="12699" cap="flat" cmpd="sng" algn="ctr">
+            <a:solidFill>
+              <a:schemeClr val="tx1"/>
+            </a:solidFill>
+            <a:prstDash val="solid"/>
+            <a:miter lim="800000"/>
+          </a:ln>
+        </p:spPr>
+        <p:style>
+          <a:lnRef idx="2">
+            <a:schemeClr val="accent1">
+              <a:shade val="50000"/>
+            </a:schemeClr>
+          </a:lnRef>
+          <a:fillRef idx="1">
+            <a:schemeClr val="accent1"/>
+          </a:fillRef>
+          <a:effectRef idx="0">
+            <a:schemeClr val="accent1"/>
+          </a:effectRef>
+          <a:fontRef idx="minor">
+            <a:schemeClr val="lt1"/>
+          </a:fontRef>
+        </p:style>
+        <p:txBody>
+          <a:bodyPr anchor="ctr"/>
+          <a:p>
+            <a:pPr algn="ctr">
+              <a:defRPr/>
+            </a:pPr>
+            <a:endParaRPr>
+              <a:latin typeface="Times New Roman"/>
+              <a:cs typeface="Times New Roman"/>
+            </a:endParaRPr>
+          </a:p>
+        </p:txBody>
+      </p:sp>
+      <p:sp>
+        <p:nvSpPr>
+          <p:cNvPr id="1216149760" name=""/>
+          <p:cNvSpPr/>
+          <p:nvPr/>
+        </p:nvSpPr>
+        <p:spPr bwMode="auto">
+          <a:xfrm rot="0" flipH="0" flipV="0">
+            <a:off x="242721" y="5943968"/>
+            <a:ext cx="1203660" cy="701779"/>
+          </a:xfrm>
+          <a:prstGeom prst="rect">
+            <a:avLst/>
+          </a:prstGeom>
+          <a:gradFill>
+            <a:gsLst>
+              <a:gs pos="19000">
+                <a:schemeClr val="accent2">
+                  <a:lumMod val="60000"/>
+                  <a:lumOff val="40000"/>
+                </a:schemeClr>
+              </a:gs>
+              <a:gs pos="100000">
+                <a:srgbClr val="FFFFFF"/>
+              </a:gs>
+            </a:gsLst>
+            <a:lin ang="0" scaled="1"/>
+          </a:gradFill>
+          <a:ln w="19049" cap="flat" cmpd="sng" algn="ctr">
+            <a:solidFill>
+              <a:schemeClr val="accent2">
+                <a:lumMod val="60000"/>
+                <a:lumOff val="40000"/>
+                <a:alpha val="99999"/>
+              </a:schemeClr>
+            </a:solidFill>
+            <a:prstDash val="solid"/>
+            <a:miter lim="800000"/>
+          </a:ln>
+        </p:spPr>
+        <p:style>
+          <a:lnRef idx="2">
+            <a:schemeClr val="accent1">
+              <a:shade val="50000"/>
+            </a:schemeClr>
+          </a:lnRef>
+          <a:fillRef idx="1">
+            <a:schemeClr val="accent1"/>
+          </a:fillRef>
+          <a:effectRef idx="0">
+            <a:schemeClr val="accent1"/>
+          </a:effectRef>
+          <a:fontRef idx="minor">
+            <a:schemeClr val="lt1"/>
+          </a:fontRef>
+        </p:style>
+        <p:txBody>
+          <a:bodyPr anchor="ctr"/>
+          <a:p>
+            <a:pPr algn="ctr">
+              <a:defRPr/>
+            </a:pPr>
+            <a:r>
+              <a:rPr sz="1400" b="0">
+                <a:solidFill>
+                  <a:schemeClr val="tx1"/>
+                </a:solidFill>
+                <a:latin typeface="Times New Roman"/>
+                <a:ea typeface="Times New Roman"/>
+                <a:cs typeface="Times New Roman"/>
+              </a:rPr>
+              <a:t>QWEN3 Embeddings</a:t>
+            </a:r>
+            <a:endParaRPr sz="1400" b="0">
+              <a:latin typeface="Times New Roman"/>
+              <a:cs typeface="Times New Roman"/>
+            </a:endParaRPr>
+          </a:p>
+        </p:txBody>
+      </p:sp>
+      <p:sp>
+        <p:nvSpPr>
+          <p:cNvPr id="1328376950" name=""/>
+          <p:cNvSpPr/>
+          <p:nvPr/>
+        </p:nvSpPr>
+        <p:spPr bwMode="auto">
+          <a:xfrm rot="5400000" flipH="0" flipV="0">
+            <a:off x="681013" y="5648944"/>
+            <a:ext cx="327077" cy="162061"/>
+          </a:xfrm>
+          <a:prstGeom prst="rightArrow">
+            <a:avLst>
+              <a:gd name="adj1" fmla="val 50000"/>
+              <a:gd name="adj2" fmla="val 50000"/>
+            </a:avLst>
+          </a:prstGeom>
+          <a:solidFill>
+            <a:schemeClr val="tx1"/>
+          </a:solidFill>
+          <a:ln w="12699" cap="flat" cmpd="sng" algn="ctr">
+            <a:solidFill>
+              <a:schemeClr val="tx1"/>
+            </a:solidFill>
+            <a:prstDash val="solid"/>
+            <a:miter lim="800000"/>
+          </a:ln>
+        </p:spPr>
+        <p:style>
+          <a:lnRef idx="2">
+            <a:schemeClr val="accent1">
+              <a:shade val="50000"/>
+            </a:schemeClr>
+          </a:lnRef>
+          <a:fillRef idx="1">
+            <a:schemeClr val="accent1"/>
+          </a:fillRef>
+          <a:effectRef idx="0">
+            <a:schemeClr val="accent1"/>
+          </a:effectRef>
+          <a:fontRef idx="minor">
+            <a:schemeClr val="lt1"/>
+          </a:fontRef>
+        </p:style>
+        <p:txBody>
+          <a:bodyPr anchor="ctr"/>
+          <a:p>
+            <a:pPr algn="ctr">
+              <a:defRPr/>
+            </a:pPr>
+            <a:endParaRPr>
+              <a:latin typeface="Times New Roman"/>
+              <a:cs typeface="Times New Roman"/>
+            </a:endParaRPr>
+          </a:p>
+        </p:txBody>
+      </p:sp>
+      <p:sp>
+        <p:nvSpPr>
+          <p:cNvPr id="522968578" name=""/>
+          <p:cNvSpPr/>
+          <p:nvPr/>
+        </p:nvSpPr>
+        <p:spPr bwMode="auto">
+          <a:xfrm rot="0" flipH="0" flipV="0">
+            <a:off x="1531399" y="6203742"/>
+            <a:ext cx="506259" cy="182232"/>
+          </a:xfrm>
+          <a:prstGeom prst="rightArrow">
+            <a:avLst>
+              <a:gd name="adj1" fmla="val 50000"/>
+              <a:gd name="adj2" fmla="val 50000"/>
+            </a:avLst>
+          </a:prstGeom>
+          <a:solidFill>
+            <a:schemeClr val="tx1"/>
+          </a:solidFill>
+          <a:ln w="12699" cap="flat" cmpd="sng" algn="ctr">
+            <a:solidFill>
+              <a:schemeClr val="tx1"/>
+            </a:solidFill>
+            <a:prstDash val="solid"/>
+            <a:miter lim="800000"/>
+          </a:ln>
+        </p:spPr>
+        <p:style>
+          <a:lnRef idx="2">
+            <a:schemeClr val="accent1">
+              <a:shade val="50000"/>
+            </a:schemeClr>
+          </a:lnRef>
+          <a:fillRef idx="1">
+            <a:schemeClr val="accent1"/>
+          </a:fillRef>
+          <a:effectRef idx="0">
+            <a:schemeClr val="accent1"/>
+          </a:effectRef>
+          <a:fontRef idx="minor">
+            <a:schemeClr val="lt1"/>
+          </a:fontRef>
+        </p:style>
+        <p:txBody>
+          <a:bodyPr anchor="ctr"/>
+          <a:p>
+            <a:pPr algn="ctr">
+              <a:defRPr/>
+            </a:pPr>
+            <a:endParaRPr>
+              <a:latin typeface="Times New Roman"/>
+              <a:cs typeface="Times New Roman"/>
+            </a:endParaRPr>
+          </a:p>
+        </p:txBody>
+      </p:sp>
+      <p:sp>
+        <p:nvSpPr>
+          <p:cNvPr id="420378759" name=""/>
+          <p:cNvSpPr txBox="1"/>
+          <p:nvPr/>
+        </p:nvSpPr>
+        <p:spPr bwMode="auto">
+          <a:xfrm rot="0" flipH="0" flipV="0">
+            <a:off x="1371676" y="4941236"/>
+            <a:ext cx="1795658" cy="305159"/>
+          </a:xfrm>
+          <a:prstGeom prst="rect">
+            <a:avLst/>
+          </a:prstGeom>
+          <a:noFill/>
+        </p:spPr>
+        <p:txBody>
+          <a:bodyPr vertOverflow="overflow" horzOverflow="overflow" vert="horz" wrap="square" lIns="91440" tIns="45720" rIns="91440" bIns="45720" numCol="1" spcCol="0" rtlCol="0" fromWordArt="0" anchor="t" anchorCtr="0" forceAA="0" upright="0" compatLnSpc="0">
+            <a:spAutoFit/>
+          </a:bodyPr>
+          <a:p>
+            <a:pPr algn="ctr">
+              <a:defRPr/>
+            </a:pPr>
+            <a:r>
+              <a:rPr sz="1400">
+                <a:latin typeface="Times New Roman"/>
+                <a:cs typeface="Times New Roman"/>
+              </a:rPr>
+              <a:t>E.g: [“Cat”, “</a:t>
+            </a:r>
+            <a:r>
+              <a:rPr lang="en-US" sz="1400" b="0" i="0" u="none" strike="noStrike" cap="none" spc="0">
+                <a:solidFill>
+                  <a:schemeClr val="tx1"/>
+                </a:solidFill>
+                <a:latin typeface="Times New Roman"/>
+                <a:ea typeface="Times New Roman"/>
+                <a:cs typeface="Times New Roman"/>
+              </a:rPr>
+              <a:t>collar”</a:t>
+            </a:r>
+            <a:r>
+              <a:rPr sz="1400">
+                <a:latin typeface="Times New Roman"/>
+                <a:cs typeface="Times New Roman"/>
+              </a:rPr>
+              <a:t>]</a:t>
+            </a:r>
+            <a:endParaRPr sz="1400">
+              <a:latin typeface="Times New Roman"/>
+              <a:cs typeface="Times New Roman"/>
+            </a:endParaRPr>
+          </a:p>
+        </p:txBody>
+      </p:sp>
+      <p:sp>
+        <p:nvSpPr>
+          <p:cNvPr id="1965945464" name=""/>
+          <p:cNvSpPr/>
+          <p:nvPr/>
+        </p:nvSpPr>
+        <p:spPr bwMode="auto">
+          <a:xfrm rot="0" flipH="0" flipV="0">
+            <a:off x="2269506" y="5893514"/>
+            <a:ext cx="701007" cy="599856"/>
+          </a:xfrm>
+          <a:prstGeom prst="cube">
+            <a:avLst>
+              <a:gd name="adj" fmla="val 25000"/>
+            </a:avLst>
+          </a:prstGeom>
+          <a:solidFill>
+            <a:schemeClr val="accent2">
+              <a:lumMod val="60000"/>
+              <a:lumOff val="40000"/>
+            </a:schemeClr>
+          </a:solidFill>
+          <a:ln w="12700" cap="flat" cmpd="sng" algn="ctr">
+            <a:solidFill>
+              <a:schemeClr val="tx1"/>
+            </a:solidFill>
+            <a:prstDash val="solid"/>
+            <a:miter lim="800000"/>
+          </a:ln>
+        </p:spPr>
+        <p:style>
+          <a:lnRef idx="2">
+            <a:schemeClr val="accent1">
+              <a:shade val="50000"/>
+            </a:schemeClr>
+          </a:lnRef>
+          <a:fillRef idx="1">
+            <a:schemeClr val="accent1"/>
+          </a:fillRef>
+          <a:effectRef idx="0">
+            <a:schemeClr val="accent1"/>
+          </a:effectRef>
+          <a:fontRef idx="minor">
+            <a:schemeClr val="lt1"/>
+          </a:fontRef>
+        </p:style>
+        <p:txBody>
+          <a:bodyPr anchor="ctr"/>
+          <a:p>
+            <a:pPr algn="ctr">
+              <a:defRPr/>
+            </a:pPr>
+            <a:endParaRPr>
+              <a:latin typeface="Times New Roman"/>
+              <a:cs typeface="Times New Roman"/>
+            </a:endParaRPr>
+          </a:p>
+        </p:txBody>
+      </p:sp>
+      <p:sp>
+        <p:nvSpPr>
+          <p:cNvPr id="1304993639" name=""/>
+          <p:cNvSpPr txBox="1"/>
+          <p:nvPr/>
+        </p:nvSpPr>
+        <p:spPr bwMode="auto">
+          <a:xfrm rot="0" flipH="0" flipV="0">
+            <a:off x="1614483" y="6493168"/>
+            <a:ext cx="2051095" cy="305159"/>
+          </a:xfrm>
+          <a:prstGeom prst="rect">
+            <a:avLst/>
+          </a:prstGeom>
+          <a:noFill/>
+        </p:spPr>
+        <p:txBody>
+          <a:bodyPr vertOverflow="overflow" horzOverflow="overflow" vert="horz" wrap="square" lIns="91440" tIns="45720" rIns="91440" bIns="45720" numCol="1" spcCol="0" rtlCol="0" fromWordArt="0" anchor="t" anchorCtr="0" forceAA="0" upright="0" compatLnSpc="0">
+            <a:spAutoFit/>
+          </a:bodyPr>
+          <a:p>
+            <a:pPr algn="ctr">
+              <a:defRPr/>
+            </a:pPr>
+            <a:r>
+              <a:rPr sz="1400">
+                <a:latin typeface="Times New Roman"/>
+                <a:ea typeface="Times New Roman"/>
+                <a:cs typeface="Times New Roman"/>
+              </a:rPr>
+              <a:t>Batch, Num_texts, 4096</a:t>
+            </a:r>
+            <a:endParaRPr sz="1400">
+              <a:latin typeface="Times New Roman"/>
+              <a:cs typeface="Times New Roman"/>
+            </a:endParaRPr>
+          </a:p>
+        </p:txBody>
+      </p:sp>
+      <p:sp>
+        <p:nvSpPr>
+          <p:cNvPr id="2058179379" name=""/>
+          <p:cNvSpPr txBox="1"/>
+          <p:nvPr/>
+        </p:nvSpPr>
+        <p:spPr bwMode="auto">
+          <a:xfrm rot="0" flipH="0" flipV="0">
+            <a:off x="6575329" y="3952543"/>
+            <a:ext cx="1801058" cy="305159"/>
+          </a:xfrm>
+          <a:prstGeom prst="rect">
+            <a:avLst/>
+          </a:prstGeom>
+          <a:noFill/>
+        </p:spPr>
+        <p:txBody>
+          <a:bodyPr vertOverflow="overflow" horzOverflow="overflow" vert="horz" wrap="square" lIns="91440" tIns="45720" rIns="91440" bIns="45720" numCol="1" spcCol="0" rtlCol="0" fromWordArt="0" anchor="t" anchorCtr="0" forceAA="0" upright="0" compatLnSpc="0">
+            <a:spAutoFit/>
+          </a:bodyPr>
+          <a:p>
+            <a:pPr algn="ctr">
+              <a:defRPr/>
+            </a:pPr>
+            <a:r>
+              <a:rPr sz="1400">
+                <a:latin typeface="Times New Roman"/>
+                <a:cs typeface="Times New Roman"/>
+              </a:rPr>
+              <a:t>L2</a:t>
+            </a:r>
+            <a:endParaRPr sz="1400">
+              <a:latin typeface="Times New Roman"/>
+              <a:cs typeface="Times New Roman"/>
+            </a:endParaRPr>
+          </a:p>
+        </p:txBody>
+      </p:sp>
+      <p:sp>
+        <p:nvSpPr>
+          <p:cNvPr id="2032792948" name=""/>
+          <p:cNvSpPr/>
+          <p:nvPr/>
+        </p:nvSpPr>
+        <p:spPr bwMode="auto">
+          <a:xfrm rot="0" flipH="0" flipV="0">
+            <a:off x="7557428" y="4459866"/>
+            <a:ext cx="393810" cy="381697"/>
+          </a:xfrm>
+          <a:prstGeom prst="cube">
+            <a:avLst>
+              <a:gd name="adj" fmla="val 25000"/>
+            </a:avLst>
+          </a:prstGeom>
+          <a:solidFill>
+            <a:schemeClr val="accent2">
+              <a:lumMod val="60000"/>
+              <a:lumOff val="40000"/>
+            </a:schemeClr>
+          </a:solidFill>
+          <a:ln w="12700" cap="flat" cmpd="sng" algn="ctr">
+            <a:solidFill>
+              <a:schemeClr val="tx1"/>
+            </a:solidFill>
+            <a:prstDash val="solid"/>
+            <a:miter lim="800000"/>
+          </a:ln>
+        </p:spPr>
+        <p:style>
+          <a:lnRef idx="2">
+            <a:schemeClr val="accent1">
+              <a:shade val="50000"/>
+            </a:schemeClr>
+          </a:lnRef>
+          <a:fillRef idx="1">
+            <a:schemeClr val="accent1"/>
+          </a:fillRef>
+          <a:effectRef idx="0">
+            <a:schemeClr val="accent1"/>
+          </a:effectRef>
+          <a:fontRef idx="minor">
+            <a:schemeClr val="lt1"/>
+          </a:fontRef>
+        </p:style>
+        <p:txBody>
+          <a:bodyPr anchor="ctr"/>
+          <a:p>
+            <a:pPr algn="ctr">
+              <a:defRPr/>
+            </a:pPr>
+            <a:endParaRPr>
+              <a:latin typeface="Times New Roman"/>
+              <a:cs typeface="Times New Roman"/>
+            </a:endParaRPr>
+          </a:p>
+        </p:txBody>
+      </p:sp>
+      <p:sp>
+        <p:nvSpPr>
+          <p:cNvPr id="975827753" name=""/>
+          <p:cNvSpPr/>
+          <p:nvPr/>
+        </p:nvSpPr>
+        <p:spPr bwMode="auto">
+          <a:xfrm rot="0" flipH="0" flipV="0">
+            <a:off x="6310849" y="4546490"/>
+            <a:ext cx="391124" cy="182232"/>
+          </a:xfrm>
+          <a:prstGeom prst="rightArrow">
+            <a:avLst>
+              <a:gd name="adj1" fmla="val 50000"/>
+              <a:gd name="adj2" fmla="val 50000"/>
+            </a:avLst>
+          </a:prstGeom>
+          <a:solidFill>
+            <a:schemeClr val="tx1"/>
+          </a:solidFill>
+          <a:ln w="12699" cap="flat" cmpd="sng" algn="ctr">
+            <a:solidFill>
+              <a:schemeClr val="tx1"/>
+            </a:solidFill>
+            <a:prstDash val="solid"/>
+            <a:miter lim="800000"/>
+          </a:ln>
+        </p:spPr>
+        <p:style>
+          <a:lnRef idx="2">
+            <a:schemeClr val="accent1">
+              <a:shade val="50000"/>
+            </a:schemeClr>
+          </a:lnRef>
+          <a:fillRef idx="1">
+            <a:schemeClr val="accent1"/>
+          </a:fillRef>
+          <a:effectRef idx="0">
+            <a:schemeClr val="accent1"/>
+          </a:effectRef>
+          <a:fontRef idx="minor">
+            <a:schemeClr val="lt1"/>
+          </a:fontRef>
+        </p:style>
+        <p:txBody>
+          <a:bodyPr anchor="ctr"/>
+          <a:p>
+            <a:pPr algn="ctr">
+              <a:defRPr/>
+            </a:pPr>
+            <a:endParaRPr>
+              <a:latin typeface="Times New Roman"/>
+              <a:cs typeface="Times New Roman"/>
+            </a:endParaRPr>
+          </a:p>
+        </p:txBody>
+      </p:sp>
+      <p:sp>
+        <p:nvSpPr>
+          <p:cNvPr id="98622750" name=""/>
+          <p:cNvSpPr/>
+          <p:nvPr/>
+        </p:nvSpPr>
+        <p:spPr bwMode="auto">
+          <a:xfrm rot="0" flipH="0" flipV="0">
+            <a:off x="6803794" y="4228725"/>
+            <a:ext cx="1293409" cy="865090"/>
+          </a:xfrm>
+          <a:prstGeom prst="flowChartAlternateProcess">
+            <a:avLst/>
+          </a:prstGeom>
+          <a:noFill/>
+          <a:ln w="19049" cap="flat" cmpd="sng" algn="ctr">
+            <a:solidFill>
+              <a:schemeClr val="tx1"/>
+            </a:solidFill>
+            <a:prstDash val="solid"/>
+            <a:miter lim="800000"/>
+          </a:ln>
+        </p:spPr>
+        <p:style>
+          <a:lnRef idx="2">
+            <a:schemeClr val="accent1">
+              <a:shade val="50000"/>
+            </a:schemeClr>
+          </a:lnRef>
+          <a:fillRef idx="1">
+            <a:schemeClr val="accent1"/>
+          </a:fillRef>
+          <a:effectRef idx="0">
+            <a:schemeClr val="accent1"/>
+          </a:effectRef>
+          <a:fontRef idx="minor">
+            <a:schemeClr val="lt1"/>
+          </a:fontRef>
+        </p:style>
+      </p:sp>
+      <p:pic>
+        <p:nvPicPr>
+          <p:cNvPr id="1916837497" name=""/>
+          <p:cNvPicPr>
+            <a:picLocks noChangeAspect="1"/>
+          </p:cNvPicPr>
+          <p:nvPr/>
+        </p:nvPicPr>
+        <p:blipFill rotWithShape="1">
+          <a:blip r:embed="rId4"/>
+          <a:stretch/>
+        </p:blipFill>
+        <p:spPr bwMode="auto">
+          <a:xfrm flipH="0" flipV="0">
+            <a:off x="3325367" y="4287294"/>
+            <a:ext cx="2871399" cy="713353"/>
+          </a:xfrm>
+          <a:prstGeom prst="rect">
+            <a:avLst/>
+          </a:prstGeom>
+        </p:spPr>
+      </p:pic>
+      <p:sp>
+        <p:nvSpPr>
+          <p:cNvPr id="1480071752" name=""/>
+          <p:cNvSpPr txBox="1"/>
+          <p:nvPr/>
+        </p:nvSpPr>
+        <p:spPr bwMode="auto">
+          <a:xfrm rot="0" flipH="0" flipV="0">
+            <a:off x="5217932" y="3647383"/>
+            <a:ext cx="4184246" cy="305159"/>
+          </a:xfrm>
+          <a:prstGeom prst="rect">
+            <a:avLst/>
+          </a:prstGeom>
+          <a:noFill/>
+        </p:spPr>
+        <p:txBody>
+          <a:bodyPr vertOverflow="overflow" horzOverflow="overflow" vert="horz" wrap="square" lIns="91440" tIns="45720" rIns="91440" bIns="45720" numCol="1" spcCol="0" rtlCol="0" fromWordArt="0" anchor="t" anchorCtr="0" forceAA="0" upright="0" compatLnSpc="0">
+            <a:spAutoFit/>
+          </a:bodyPr>
+          <a:p>
+            <a:pPr algn="ctr">
+              <a:defRPr/>
+            </a:pPr>
+            <a:r>
+              <a:rPr sz="1400">
+                <a:latin typeface="Times New Roman"/>
+                <a:cs typeface="Times New Roman"/>
+              </a:rPr>
+              <a:t>Cosine similarity calculation</a:t>
+            </a:r>
+            <a:r>
+              <a:rPr sz="1400">
+                <a:latin typeface="Times New Roman"/>
+                <a:cs typeface="Times New Roman"/>
+              </a:rPr>
+              <a:t> for retrieval score</a:t>
+            </a:r>
+            <a:endParaRPr sz="1400">
+              <a:latin typeface="Times New Roman"/>
+              <a:cs typeface="Times New Roman"/>
+            </a:endParaRPr>
+          </a:p>
+        </p:txBody>
+      </p:sp>
+      <p:sp>
+        <p:nvSpPr>
+          <p:cNvPr id="1033766698" name=""/>
+          <p:cNvSpPr/>
+          <p:nvPr/>
+        </p:nvSpPr>
+        <p:spPr bwMode="auto">
+          <a:xfrm rot="0" flipH="0" flipV="0">
+            <a:off x="8265292" y="4546490"/>
+            <a:ext cx="391123" cy="182232"/>
+          </a:xfrm>
+          <a:prstGeom prst="rightArrow">
+            <a:avLst>
+              <a:gd name="adj1" fmla="val 50000"/>
+              <a:gd name="adj2" fmla="val 50000"/>
+            </a:avLst>
+          </a:prstGeom>
+          <a:solidFill>
+            <a:schemeClr val="tx1"/>
+          </a:solidFill>
+          <a:ln w="12699" cap="flat" cmpd="sng" algn="ctr">
+            <a:solidFill>
+              <a:schemeClr val="tx1"/>
+            </a:solidFill>
+            <a:prstDash val="solid"/>
+            <a:miter lim="800000"/>
+          </a:ln>
+        </p:spPr>
+        <p:style>
+          <a:lnRef idx="2">
+            <a:schemeClr val="accent1">
+              <a:shade val="50000"/>
+            </a:schemeClr>
+          </a:lnRef>
+          <a:fillRef idx="1">
+            <a:schemeClr val="accent1"/>
+          </a:fillRef>
+          <a:effectRef idx="0">
+            <a:schemeClr val="accent1"/>
+          </a:effectRef>
+          <a:fontRef idx="minor">
+            <a:schemeClr val="lt1"/>
+          </a:fontRef>
+        </p:style>
+        <p:txBody>
+          <a:bodyPr anchor="ctr"/>
+          <a:p>
+            <a:pPr algn="ctr">
+              <a:defRPr/>
+            </a:pPr>
+            <a:endParaRPr>
+              <a:latin typeface="Times New Roman"/>
+              <a:cs typeface="Times New Roman"/>
+            </a:endParaRPr>
+          </a:p>
+        </p:txBody>
+      </p:sp>
+      <p:pic>
+        <p:nvPicPr>
+          <p:cNvPr id="775045982" name=""/>
+          <p:cNvPicPr>
+            <a:picLocks noChangeAspect="1"/>
+          </p:cNvPicPr>
+          <p:nvPr/>
+        </p:nvPicPr>
+        <p:blipFill rotWithShape="1">
+          <a:blip r:embed="rId5"/>
+          <a:stretch/>
+        </p:blipFill>
+        <p:spPr bwMode="auto">
+          <a:xfrm flipH="0" flipV="0">
+            <a:off x="8731138" y="5181269"/>
+            <a:ext cx="2110410" cy="548706"/>
+          </a:xfrm>
+          <a:prstGeom prst="rect">
+            <a:avLst/>
+          </a:prstGeom>
+          <a:ln w="12700">
+            <a:solidFill>
+              <a:schemeClr val="tx1"/>
+            </a:solidFill>
+            <a:prstDash val="solid"/>
+          </a:ln>
+        </p:spPr>
+      </p:pic>
+      <p:pic>
+        <p:nvPicPr>
+          <p:cNvPr id="1183814530" name=""/>
+          <p:cNvPicPr>
+            <a:picLocks noChangeAspect="1"/>
+          </p:cNvPicPr>
+          <p:nvPr/>
+        </p:nvPicPr>
+        <p:blipFill rotWithShape="1">
+          <a:blip r:embed="rId6"/>
+          <a:stretch/>
+        </p:blipFill>
+        <p:spPr bwMode="auto">
+          <a:xfrm flipH="0" flipV="0">
+            <a:off x="8708791" y="4561704"/>
+            <a:ext cx="2251408" cy="334036"/>
+          </a:xfrm>
+          <a:prstGeom prst="rect">
+            <a:avLst/>
+          </a:prstGeom>
+          <a:ln w="19050">
+            <a:noFill/>
+            <a:prstDash val="solid"/>
+          </a:ln>
+        </p:spPr>
+      </p:pic>
+      <p:pic>
+        <p:nvPicPr>
+          <p:cNvPr id="424009485" name=""/>
+          <p:cNvPicPr>
+            <a:picLocks noChangeAspect="1"/>
+          </p:cNvPicPr>
+          <p:nvPr/>
+        </p:nvPicPr>
+        <p:blipFill rotWithShape="1">
+          <a:blip r:embed="rId7"/>
+          <a:stretch/>
+        </p:blipFill>
+        <p:spPr bwMode="auto">
+          <a:xfrm flipH="0" flipV="0">
+            <a:off x="8708791" y="4018402"/>
+            <a:ext cx="2155105" cy="321769"/>
+          </a:xfrm>
+          <a:prstGeom prst="rect">
+            <a:avLst/>
+          </a:prstGeom>
+        </p:spPr>
+      </p:pic>
+      <p:sp>
+        <p:nvSpPr>
+          <p:cNvPr id="1067153033" name=""/>
+          <p:cNvSpPr/>
+          <p:nvPr/>
+        </p:nvSpPr>
+        <p:spPr bwMode="auto">
+          <a:xfrm rot="5400000" flipH="0" flipV="0">
+            <a:off x="9680614" y="4389188"/>
+            <a:ext cx="211458" cy="162060"/>
+          </a:xfrm>
+          <a:prstGeom prst="rightArrow">
+            <a:avLst>
+              <a:gd name="adj1" fmla="val 50000"/>
+              <a:gd name="adj2" fmla="val 50000"/>
+            </a:avLst>
+          </a:prstGeom>
+          <a:solidFill>
+            <a:schemeClr val="tx1"/>
+          </a:solidFill>
+          <a:ln w="12699" cap="flat" cmpd="sng" algn="ctr">
+            <a:solidFill>
+              <a:schemeClr val="tx1"/>
+            </a:solidFill>
+            <a:prstDash val="solid"/>
+            <a:miter lim="800000"/>
+          </a:ln>
+        </p:spPr>
+        <p:style>
+          <a:lnRef idx="2">
+            <a:schemeClr val="accent1">
+              <a:shade val="50000"/>
+            </a:schemeClr>
+          </a:lnRef>
+          <a:fillRef idx="1">
+            <a:schemeClr val="accent1"/>
+          </a:fillRef>
+          <a:effectRef idx="0">
+            <a:schemeClr val="accent1"/>
+          </a:effectRef>
+          <a:fontRef idx="minor">
+            <a:schemeClr val="lt1"/>
+          </a:fontRef>
+        </p:style>
+        <p:txBody>
+          <a:bodyPr anchor="ctr"/>
+          <a:p>
+            <a:pPr algn="ctr">
+              <a:defRPr/>
+            </a:pPr>
+            <a:endParaRPr>
+              <a:latin typeface="Times New Roman"/>
+              <a:cs typeface="Times New Roman"/>
+            </a:endParaRPr>
+          </a:p>
+        </p:txBody>
+      </p:sp>
+      <p:sp>
+        <p:nvSpPr>
+          <p:cNvPr id="2080437073" name=""/>
+          <p:cNvSpPr/>
+          <p:nvPr/>
+        </p:nvSpPr>
+        <p:spPr bwMode="auto">
+          <a:xfrm rot="5400000" flipH="0" flipV="0">
+            <a:off x="9680614" y="4965935"/>
+            <a:ext cx="211458" cy="162060"/>
+          </a:xfrm>
+          <a:prstGeom prst="rightArrow">
+            <a:avLst>
+              <a:gd name="adj1" fmla="val 50000"/>
+              <a:gd name="adj2" fmla="val 50000"/>
+            </a:avLst>
+          </a:prstGeom>
+          <a:solidFill>
+            <a:schemeClr val="tx1"/>
+          </a:solidFill>
+          <a:ln w="12699" cap="flat" cmpd="sng" algn="ctr">
+            <a:solidFill>
+              <a:schemeClr val="tx1"/>
+            </a:solidFill>
+            <a:prstDash val="solid"/>
+            <a:miter lim="800000"/>
+          </a:ln>
+        </p:spPr>
+        <p:style>
+          <a:lnRef idx="2">
+            <a:schemeClr val="accent1">
+              <a:shade val="50000"/>
+            </a:schemeClr>
+          </a:lnRef>
+          <a:fillRef idx="1">
+            <a:schemeClr val="accent1"/>
+          </a:fillRef>
+          <a:effectRef idx="0">
+            <a:schemeClr val="accent1"/>
+          </a:effectRef>
+          <a:fontRef idx="minor">
+            <a:schemeClr val="lt1"/>
+          </a:fontRef>
+        </p:style>
+        <p:txBody>
+          <a:bodyPr anchor="ctr"/>
+          <a:p>
+            <a:pPr algn="ctr">
+              <a:defRPr/>
+            </a:pPr>
+            <a:endParaRPr>
+              <a:latin typeface="Times New Roman"/>
+              <a:cs typeface="Times New Roman"/>
+            </a:endParaRPr>
+          </a:p>
+        </p:txBody>
+      </p:sp>
+      <p:sp>
+        <p:nvSpPr>
+          <p:cNvPr id="1734129319" name=""/>
+          <p:cNvSpPr/>
+          <p:nvPr/>
+        </p:nvSpPr>
+        <p:spPr bwMode="auto">
+          <a:xfrm rot="0" flipH="0" flipV="0">
+            <a:off x="5640537" y="5943967"/>
+            <a:ext cx="3108068" cy="594729"/>
+          </a:xfrm>
+          <a:prstGeom prst="rect">
+            <a:avLst/>
+          </a:prstGeom>
+          <a:noFill/>
+          <a:ln w="38100" cap="flat" cmpd="sng" algn="ctr">
+            <a:solidFill>
+              <a:schemeClr val="tx1"/>
+            </a:solidFill>
+            <a:prstDash val="sysDot"/>
+            <a:miter lim="800000"/>
+          </a:ln>
+        </p:spPr>
+        <p:style>
+          <a:lnRef idx="2">
+            <a:schemeClr val="accent1">
+              <a:shade val="50000"/>
+            </a:schemeClr>
+          </a:lnRef>
+          <a:fillRef idx="1">
+            <a:schemeClr val="accent1"/>
+          </a:fillRef>
+          <a:effectRef idx="0">
+            <a:schemeClr val="accent1"/>
+          </a:effectRef>
+          <a:fontRef idx="minor">
+            <a:schemeClr val="lt1"/>
+          </a:fontRef>
+        </p:style>
+        <p:txBody>
+          <a:bodyPr anchor="ctr"/>
+          <a:p>
+            <a:pPr>
+              <a:defRPr/>
+            </a:pPr>
+            <a:r>
+              <a:rPr lang="en-US" sz="1400" b="0" i="0" u="none" strike="noStrike" cap="none" spc="0">
+                <a:solidFill>
+                  <a:schemeClr val="tx1">
+                    <a:lumMod val="90000"/>
+                    <a:lumOff val="5000"/>
+                  </a:schemeClr>
+                </a:solidFill>
+                <a:latin typeface="Times New Roman"/>
+                <a:ea typeface="Times New Roman"/>
+                <a:cs typeface="Times New Roman"/>
+              </a:rPr>
+              <a:t>IF Score &gt; threshold :</a:t>
+            </a:r>
+            <a:endParaRPr lang="en-US" sz="1400" b="0" i="0" u="none" strike="noStrike" cap="none" spc="0">
+              <a:solidFill>
+                <a:schemeClr val="tx1">
+                  <a:lumMod val="90000"/>
+                  <a:lumOff val="5000"/>
+                </a:schemeClr>
+              </a:solidFill>
+              <a:latin typeface="Times New Roman"/>
+              <a:ea typeface="Times New Roman"/>
+              <a:cs typeface="Times New Roman"/>
+            </a:endParaRPr>
+          </a:p>
+          <a:p>
+            <a:pPr>
+              <a:defRPr/>
+            </a:pPr>
+            <a:r>
+              <a:rPr lang="en-US" sz="1400" b="0" i="0" u="none" strike="noStrike" cap="none" spc="0">
+                <a:solidFill>
+                  <a:schemeClr val="tx1">
+                    <a:lumMod val="90000"/>
+                    <a:lumOff val="5000"/>
+                  </a:schemeClr>
+                </a:solidFill>
+                <a:latin typeface="Times New Roman"/>
+                <a:ea typeface="Times New Roman"/>
+                <a:cs typeface="Times New Roman"/>
+              </a:rPr>
+              <a:t>	</a:t>
+            </a:r>
+            <a:r>
+              <a:rPr lang="en-US" sz="1400" b="0" i="0" u="none" strike="noStrike" cap="none" spc="0">
+                <a:solidFill>
+                  <a:schemeClr val="tx1">
+                    <a:lumMod val="90000"/>
+                    <a:lumOff val="5000"/>
+                  </a:schemeClr>
+                </a:solidFill>
+                <a:latin typeface="Times New Roman"/>
+                <a:ea typeface="Times New Roman"/>
+                <a:cs typeface="Times New Roman"/>
+              </a:rPr>
+              <a:t>Add </a:t>
+            </a:r>
+            <a:r>
+              <a:rPr lang="en-US" sz="1400" b="1" i="0" u="none" strike="noStrike" cap="none" spc="0">
+                <a:solidFill>
+                  <a:schemeClr val="accent2"/>
+                </a:solidFill>
+                <a:latin typeface="Times New Roman"/>
+                <a:ea typeface="Times New Roman"/>
+                <a:cs typeface="Times New Roman"/>
+              </a:rPr>
+              <a:t>Node</a:t>
+            </a:r>
+            <a:r>
+              <a:rPr lang="en-US" sz="1400" b="0" i="0" u="none" strike="noStrike" cap="none" spc="0">
+                <a:solidFill>
+                  <a:schemeClr val="tx1">
+                    <a:lumMod val="90000"/>
+                    <a:lumOff val="5000"/>
+                  </a:schemeClr>
+                </a:solidFill>
+                <a:latin typeface="Times New Roman"/>
+                <a:ea typeface="Times New Roman"/>
+                <a:cs typeface="Times New Roman"/>
+              </a:rPr>
+              <a:t> in </a:t>
+            </a:r>
+            <a:r>
+              <a:rPr lang="en-US" sz="1400" b="1" i="0" u="sng" strike="noStrike" cap="none" spc="0">
+                <a:solidFill>
+                  <a:schemeClr val="tx1">
+                    <a:lumMod val="90000"/>
+                    <a:lumOff val="5000"/>
+                  </a:schemeClr>
+                </a:solidFill>
+                <a:latin typeface="Times New Roman"/>
+                <a:ea typeface="Times New Roman"/>
+                <a:cs typeface="Times New Roman"/>
+              </a:rPr>
+              <a:t>Final Graph</a:t>
+            </a:r>
+            <a:endParaRPr sz="1400" b="0" i="0" u="none" strike="noStrike" cap="none" spc="0">
+              <a:solidFill>
+                <a:schemeClr val="tx1">
+                  <a:lumMod val="90000"/>
+                  <a:lumOff val="5000"/>
+                </a:schemeClr>
+              </a:solidFill>
+              <a:latin typeface="Times New Roman"/>
+              <a:cs typeface="Times New Roman"/>
+            </a:endParaRPr>
+          </a:p>
+        </p:txBody>
+      </p:sp>
+      <p:pic>
+        <p:nvPicPr>
+          <p:cNvPr id="400161174" name=""/>
+          <p:cNvPicPr>
+            <a:picLocks noChangeAspect="1"/>
+          </p:cNvPicPr>
+          <p:nvPr/>
+        </p:nvPicPr>
+        <p:blipFill rotWithShape="1">
+          <a:blip r:embed="rId6"/>
+          <a:stretch/>
+        </p:blipFill>
+        <p:spPr bwMode="auto">
+          <a:xfrm flipH="0" flipV="0">
+            <a:off x="8708791" y="4569335"/>
+            <a:ext cx="2251408" cy="334036"/>
+          </a:xfrm>
+          <a:prstGeom prst="rect">
+            <a:avLst/>
+          </a:prstGeom>
+          <a:ln w="19050">
+            <a:noFill/>
+            <a:prstDash val="solid"/>
+          </a:ln>
+        </p:spPr>
+      </p:pic>
+      <p:pic>
+        <p:nvPicPr>
+          <p:cNvPr id="616143836" name=""/>
+          <p:cNvPicPr>
+            <a:picLocks noChangeAspect="1"/>
+          </p:cNvPicPr>
+          <p:nvPr/>
+        </p:nvPicPr>
+        <p:blipFill rotWithShape="1">
+          <a:blip r:embed="rId7"/>
+          <a:stretch/>
+        </p:blipFill>
+        <p:spPr bwMode="auto">
+          <a:xfrm flipH="0" flipV="0">
+            <a:off x="8708791" y="4026032"/>
+            <a:ext cx="2155105" cy="321769"/>
+          </a:xfrm>
+          <a:prstGeom prst="rect">
+            <a:avLst/>
+          </a:prstGeom>
+        </p:spPr>
+      </p:pic>
+      <p:sp>
+        <p:nvSpPr>
+          <p:cNvPr id="75642943" name=""/>
+          <p:cNvSpPr/>
+          <p:nvPr/>
+        </p:nvSpPr>
+        <p:spPr bwMode="auto">
+          <a:xfrm rot="5400000" flipH="0" flipV="0">
+            <a:off x="9680614" y="4396819"/>
+            <a:ext cx="211458" cy="162060"/>
+          </a:xfrm>
+          <a:prstGeom prst="rightArrow">
+            <a:avLst>
+              <a:gd name="adj1" fmla="val 50000"/>
+              <a:gd name="adj2" fmla="val 50000"/>
+            </a:avLst>
+          </a:prstGeom>
+          <a:solidFill>
+            <a:schemeClr val="tx1"/>
+          </a:solidFill>
+          <a:ln w="12699" cap="flat" cmpd="sng" algn="ctr">
+            <a:solidFill>
+              <a:schemeClr val="tx1"/>
+            </a:solidFill>
+            <a:prstDash val="solid"/>
+            <a:miter lim="800000"/>
+          </a:ln>
+        </p:spPr>
+        <p:style>
+          <a:lnRef idx="2">
+            <a:schemeClr val="accent1">
+              <a:shade val="50000"/>
+            </a:schemeClr>
+          </a:lnRef>
+          <a:fillRef idx="1">
+            <a:schemeClr val="accent1"/>
+          </a:fillRef>
+          <a:effectRef idx="0">
+            <a:schemeClr val="accent1"/>
+          </a:effectRef>
+          <a:fontRef idx="minor">
+            <a:schemeClr val="lt1"/>
+          </a:fontRef>
+        </p:style>
+        <p:txBody>
+          <a:bodyPr anchor="ctr"/>
+          <a:p>
+            <a:pPr algn="ctr">
+              <a:defRPr/>
+            </a:pPr>
+            <a:endParaRPr>
+              <a:latin typeface="Times New Roman"/>
+              <a:cs typeface="Times New Roman"/>
+            </a:endParaRPr>
+          </a:p>
+        </p:txBody>
+      </p:sp>
+      <p:sp>
+        <p:nvSpPr>
+          <p:cNvPr id="1061167114" name=""/>
+          <p:cNvSpPr/>
+          <p:nvPr/>
+        </p:nvSpPr>
+        <p:spPr bwMode="auto">
+          <a:xfrm rot="5400000" flipH="0" flipV="0">
+            <a:off x="9680614" y="4973566"/>
+            <a:ext cx="211458" cy="162060"/>
+          </a:xfrm>
+          <a:prstGeom prst="rightArrow">
+            <a:avLst>
+              <a:gd name="adj1" fmla="val 50000"/>
+              <a:gd name="adj2" fmla="val 50000"/>
+            </a:avLst>
+          </a:prstGeom>
+          <a:solidFill>
+            <a:schemeClr val="tx1"/>
+          </a:solidFill>
+          <a:ln w="12699" cap="flat" cmpd="sng" algn="ctr">
+            <a:solidFill>
+              <a:schemeClr val="tx1"/>
+            </a:solidFill>
+            <a:prstDash val="solid"/>
+            <a:miter lim="800000"/>
+          </a:ln>
+        </p:spPr>
+        <p:style>
+          <a:lnRef idx="2">
+            <a:schemeClr val="accent1">
+              <a:shade val="50000"/>
+            </a:schemeClr>
+          </a:lnRef>
+          <a:fillRef idx="1">
+            <a:schemeClr val="accent1"/>
+          </a:fillRef>
+          <a:effectRef idx="0">
+            <a:schemeClr val="accent1"/>
+          </a:effectRef>
+          <a:fontRef idx="minor">
+            <a:schemeClr val="lt1"/>
+          </a:fontRef>
+        </p:style>
+        <p:txBody>
+          <a:bodyPr anchor="ctr"/>
+          <a:p>
+            <a:pPr algn="ctr">
+              <a:defRPr/>
+            </a:pPr>
+            <a:endParaRPr>
+              <a:latin typeface="Times New Roman"/>
+              <a:cs typeface="Times New Roman"/>
+            </a:endParaRPr>
+          </a:p>
+        </p:txBody>
+      </p:sp>
+    </p:spTree>
+  </p:cSld>
+  <p:clrMapOvr>
+    <a:masterClrMapping/>
+  </p:clrMapOvr>
+  <mc:AlternateContent xmlns:mc="http://schemas.openxmlformats.org/markup-compatibility/2006">
+    <mc:Choice xmlns:p159="http://schemas.microsoft.com/office/powerpoint/2015/09/main" xmlns:p14="http://schemas.microsoft.com/office/powerpoint/2010/main" Requires="p159">
+      <p:transition p14:dur="500" advClick="1"/>
+    </mc:Choice>
+    <mc:Fallback>
+      <p:transition advClick="1"/>
+    </mc:Fallback>
+  </mc:AlternateContent>
+</p:sld>
+</file>
+
+<file path=ppt/slides/slide4.xml><?xml version="1.0" encoding="utf-8"?>
+<p:sld xmlns:a="http://schemas.openxmlformats.org/drawingml/2006/main" xmlns:r="http://schemas.openxmlformats.org/officeDocument/2006/relationships" xmlns:p="http://schemas.openxmlformats.org/presentationml/2006/main" xmlns:m="http://schemas.openxmlformats.org/officeDocument/2006/math" xmlns:w="http://schemas.openxmlformats.org/wordprocessingml/2006/main" xmlns:mc="http://schemas.openxmlformats.org/markup-compatibility/2006" showMasterPhAnim="0" showMasterSp="1" show="1">
+  <p:cSld name="">
+    <p:spTree>
+      <p:nvGrpSpPr>
+        <p:cNvPr id="1" name=""/>
+        <p:cNvGrpSpPr/>
+        <p:nvPr/>
+      </p:nvGrpSpPr>
+      <p:grpSpPr bwMode="auto">
+        <a:xfrm>
+          <a:off x="0" y="0"/>
+          <a:ext cx="0" cy="0"/>
+          <a:chOff x="0" y="0"/>
+          <a:chExt cx="0" cy="0"/>
+        </a:xfrm>
+      </p:grpSpPr>
+      <p:sp>
+        <p:nvSpPr>
+          <p:cNvPr id="649870990" name=""/>
+          <p:cNvSpPr/>
+          <p:nvPr/>
+        </p:nvSpPr>
+        <p:spPr bwMode="auto">
+          <a:xfrm rot="0" flipH="0" flipV="0">
+            <a:off x="319837" y="1590393"/>
+            <a:ext cx="343858" cy="789378"/>
+          </a:xfrm>
+          <a:prstGeom prst="cube">
+            <a:avLst>
+              <a:gd name="adj" fmla="val 25000"/>
+            </a:avLst>
+          </a:prstGeom>
+          <a:ln w="12700" cap="flat" cmpd="sng" algn="ctr">
+            <a:solidFill>
+              <a:schemeClr val="tx1"/>
+            </a:solidFill>
+            <a:prstDash val="solid"/>
+            <a:miter lim="800000"/>
+          </a:ln>
+        </p:spPr>
+        <p:style>
+          <a:lnRef idx="2">
+            <a:schemeClr val="accent1">
+              <a:shade val="50000"/>
+            </a:schemeClr>
+          </a:lnRef>
+          <a:fillRef idx="1">
+            <a:schemeClr val="accent1"/>
+          </a:fillRef>
+          <a:effectRef idx="0">
+            <a:schemeClr val="accent1"/>
+          </a:effectRef>
+          <a:fontRef idx="minor">
+            <a:schemeClr val="lt1"/>
+          </a:fontRef>
+        </p:style>
+        <p:txBody>
+          <a:bodyPr anchor="ctr"/>
+          <a:p>
+            <a:pPr algn="ctr">
+              <a:defRPr/>
+            </a:pPr>
+            <a:endParaRPr>
+              <a:latin typeface="Times New Roman"/>
+              <a:cs typeface="Times New Roman"/>
+            </a:endParaRPr>
+          </a:p>
+        </p:txBody>
+      </p:sp>
+      <p:sp>
+        <p:nvSpPr>
+          <p:cNvPr id="2136562754" name=""/>
+          <p:cNvSpPr txBox="1"/>
+          <p:nvPr/>
+        </p:nvSpPr>
+        <p:spPr bwMode="auto">
+          <a:xfrm rot="0" flipH="0" flipV="0">
+            <a:off x="725724" y="1870723"/>
+            <a:ext cx="1707866" cy="305159"/>
+          </a:xfrm>
+          <a:prstGeom prst="rect">
+            <a:avLst/>
+          </a:prstGeom>
+          <a:noFill/>
+        </p:spPr>
+        <p:txBody>
+          <a:bodyPr vertOverflow="overflow" horzOverflow="overflow" vert="horz" wrap="square" lIns="91440" tIns="45720" rIns="91440" bIns="45720" numCol="1" spcCol="0" rtlCol="0" fromWordArt="0" anchor="t" anchorCtr="0" forceAA="0" upright="0" compatLnSpc="0">
+            <a:spAutoFit/>
+          </a:bodyPr>
+          <a:p>
+            <a:pPr algn="ctr">
+              <a:defRPr/>
+            </a:pPr>
+            <a:r>
+              <a:rPr sz="1400">
+                <a:latin typeface="Times New Roman"/>
+                <a:ea typeface="Times New Roman"/>
+                <a:cs typeface="Times New Roman"/>
+              </a:rPr>
+              <a:t>Batch, 1024, 768</a:t>
+            </a:r>
+            <a:endParaRPr sz="1400">
+              <a:latin typeface="Times New Roman"/>
+              <a:cs typeface="Times New Roman"/>
+            </a:endParaRPr>
+          </a:p>
+        </p:txBody>
+      </p:sp>
+      <p:sp>
+        <p:nvSpPr>
+          <p:cNvPr id="1291167687" name=""/>
+          <p:cNvSpPr/>
+          <p:nvPr/>
+        </p:nvSpPr>
+        <p:spPr bwMode="auto">
+          <a:xfrm rot="0" flipH="0" flipV="0">
+            <a:off x="283852" y="2610661"/>
+            <a:ext cx="423316" cy="380743"/>
+          </a:xfrm>
+          <a:prstGeom prst="cube">
+            <a:avLst>
+              <a:gd name="adj" fmla="val 25000"/>
+            </a:avLst>
+          </a:prstGeom>
+          <a:solidFill>
+            <a:schemeClr val="accent2">
+              <a:lumMod val="60000"/>
+              <a:lumOff val="40000"/>
+            </a:schemeClr>
+          </a:solidFill>
+          <a:ln w="12700" cap="flat" cmpd="sng" algn="ctr">
+            <a:solidFill>
+              <a:schemeClr val="tx1"/>
+            </a:solidFill>
+            <a:prstDash val="solid"/>
+            <a:miter lim="800000"/>
+          </a:ln>
+        </p:spPr>
+        <p:style>
+          <a:lnRef idx="2">
+            <a:schemeClr val="accent1">
+              <a:shade val="50000"/>
+            </a:schemeClr>
+          </a:lnRef>
+          <a:fillRef idx="1">
+            <a:schemeClr val="accent1"/>
+          </a:fillRef>
+          <a:effectRef idx="0">
+            <a:schemeClr val="accent1"/>
+          </a:effectRef>
+          <a:fontRef idx="minor">
+            <a:schemeClr val="lt1"/>
+          </a:fontRef>
+        </p:style>
+        <p:txBody>
+          <a:bodyPr anchor="ctr"/>
+          <a:p>
+            <a:pPr algn="ctr">
+              <a:defRPr/>
+            </a:pPr>
+            <a:endParaRPr>
+              <a:latin typeface="Times New Roman"/>
+              <a:cs typeface="Times New Roman"/>
+            </a:endParaRPr>
+          </a:p>
+        </p:txBody>
+      </p:sp>
+      <p:sp>
+        <p:nvSpPr>
+          <p:cNvPr id="1136037657" name=""/>
+          <p:cNvSpPr txBox="1"/>
+          <p:nvPr/>
+        </p:nvSpPr>
+        <p:spPr bwMode="auto">
+          <a:xfrm rot="0" flipH="0" flipV="0">
+            <a:off x="566238" y="2516586"/>
+            <a:ext cx="1984839" cy="518519"/>
+          </a:xfrm>
+          <a:prstGeom prst="rect">
+            <a:avLst/>
+          </a:prstGeom>
+          <a:noFill/>
+        </p:spPr>
+        <p:txBody>
+          <a:bodyPr vertOverflow="overflow" horzOverflow="overflow" vert="horz" wrap="square" lIns="91440" tIns="45720" rIns="91440" bIns="45720" numCol="1" spcCol="0" rtlCol="0" fromWordArt="0" anchor="t" anchorCtr="0" forceAA="0" upright="0" compatLnSpc="0">
+            <a:spAutoFit/>
+          </a:bodyPr>
+          <a:p>
+            <a:pPr algn="ctr">
+              <a:defRPr/>
+            </a:pPr>
+            <a:r>
+              <a:rPr sz="1400">
+                <a:latin typeface="Times New Roman"/>
+                <a:ea typeface="Times New Roman"/>
+                <a:cs typeface="Times New Roman"/>
+              </a:rPr>
+              <a:t>Embeddings for </a:t>
+            </a:r>
+            <a:endParaRPr sz="1400">
+              <a:latin typeface="Times New Roman"/>
+              <a:ea typeface="Times New Roman"/>
+              <a:cs typeface="Times New Roman"/>
+            </a:endParaRPr>
+          </a:p>
+          <a:p>
+            <a:pPr algn="ctr">
+              <a:defRPr/>
+            </a:pPr>
+            <a:r>
+              <a:rPr sz="1400">
+                <a:latin typeface="Times New Roman"/>
+                <a:ea typeface="Times New Roman"/>
+                <a:cs typeface="Times New Roman"/>
+              </a:rPr>
+              <a:t>candidate relation</a:t>
+            </a:r>
+            <a:endParaRPr sz="1400">
+              <a:latin typeface="Times New Roman"/>
+              <a:ea typeface="Times New Roman"/>
+              <a:cs typeface="Times New Roman"/>
+            </a:endParaRPr>
+          </a:p>
+        </p:txBody>
+      </p:sp>
+      <p:sp>
+        <p:nvSpPr>
+          <p:cNvPr id="707425461" name=""/>
+          <p:cNvSpPr/>
+          <p:nvPr/>
+        </p:nvSpPr>
+        <p:spPr bwMode="auto">
+          <a:xfrm rot="0" flipH="0" flipV="0">
+            <a:off x="2795067" y="1392883"/>
+            <a:ext cx="8022108" cy="4748473"/>
+          </a:xfrm>
+          <a:prstGeom prst="rect">
+            <a:avLst/>
+          </a:prstGeom>
+          <a:noFill/>
+          <a:ln w="38100" cap="flat" cmpd="sng" algn="ctr">
+            <a:solidFill>
+              <a:srgbClr val="548235"/>
+            </a:solidFill>
+            <a:prstDash val="sysDot"/>
+            <a:miter lim="800000"/>
+          </a:ln>
+        </p:spPr>
+        <p:style>
+          <a:lnRef idx="2">
+            <a:schemeClr val="accent1">
+              <a:shade val="50000"/>
+            </a:schemeClr>
+          </a:lnRef>
+          <a:fillRef idx="1">
+            <a:schemeClr val="accent1"/>
+          </a:fillRef>
+          <a:effectRef idx="0">
+            <a:schemeClr val="accent1"/>
+          </a:effectRef>
+          <a:fontRef idx="minor">
+            <a:schemeClr val="lt1"/>
+          </a:fontRef>
+        </p:style>
+        <p:txBody>
+          <a:bodyPr anchor="ctr"/>
+          <a:p>
+            <a:pPr algn="ctr">
+              <a:defRPr/>
+            </a:pPr>
+            <a:r>
+              <a:rPr/>
+              <a:t>S</a:t>
+            </a:r>
+            <a:endParaRPr/>
+          </a:p>
+        </p:txBody>
+      </p:sp>
+      <p:sp>
+        <p:nvSpPr>
+          <p:cNvPr id="36723230" name=""/>
+          <p:cNvSpPr txBox="1"/>
+          <p:nvPr/>
+        </p:nvSpPr>
+        <p:spPr bwMode="auto">
+          <a:xfrm rot="0" flipH="0" flipV="0">
+            <a:off x="4813128" y="1527771"/>
+            <a:ext cx="4195405" cy="305159"/>
+          </a:xfrm>
+          <a:prstGeom prst="rect">
+            <a:avLst/>
+          </a:prstGeom>
+          <a:noFill/>
+        </p:spPr>
+        <p:txBody>
+          <a:bodyPr vertOverflow="overflow" horzOverflow="overflow" vert="horz" wrap="square" lIns="91440" tIns="45720" rIns="91440" bIns="45720" numCol="1" spcCol="0" rtlCol="0" fromWordArt="0" anchor="t" anchorCtr="0" forceAA="0" upright="0" compatLnSpc="0">
+            <a:spAutoFit/>
+          </a:bodyPr>
+          <a:p>
+            <a:pPr algn="ctr">
+              <a:defRPr/>
+            </a:pPr>
+            <a:r>
+              <a:rPr sz="1400">
+                <a:latin typeface="Times New Roman"/>
+                <a:cs typeface="Times New Roman"/>
+              </a:rPr>
+              <a:t>Compute directional context</a:t>
+            </a:r>
+            <a:endParaRPr sz="1400">
+              <a:latin typeface="Times New Roman"/>
+              <a:cs typeface="Times New Roman"/>
+            </a:endParaRPr>
+          </a:p>
+        </p:txBody>
+      </p:sp>
+      <p:sp>
+        <p:nvSpPr>
+          <p:cNvPr id="115490102" name=""/>
+          <p:cNvSpPr txBox="1"/>
+          <p:nvPr/>
+        </p:nvSpPr>
+        <p:spPr bwMode="auto">
+          <a:xfrm rot="0" flipH="0" flipV="0">
+            <a:off x="2433591" y="804686"/>
+            <a:ext cx="2959254" cy="335639"/>
+          </a:xfrm>
+          <a:prstGeom prst="rect">
+            <a:avLst/>
+          </a:prstGeom>
+          <a:noFill/>
+        </p:spPr>
+        <p:txBody>
+          <a:bodyPr vertOverflow="overflow" horzOverflow="overflow" vert="horz" wrap="square" lIns="91440" tIns="45720" rIns="91440" bIns="45720" numCol="1" spcCol="0" rtlCol="0" fromWordArt="0" anchor="t" anchorCtr="0" forceAA="0" upright="0" compatLnSpc="0">
+            <a:spAutoFit/>
+          </a:bodyPr>
+          <a:p>
+            <a:pPr algn="ctr">
+              <a:defRPr/>
+            </a:pPr>
+            <a:r>
+              <a:rPr sz="1600">
+                <a:latin typeface="Times New Roman"/>
+                <a:ea typeface="Times New Roman"/>
+                <a:cs typeface="Times New Roman"/>
+              </a:rPr>
+              <a:t>For </a:t>
+            </a:r>
+            <a:r>
+              <a:rPr sz="1600" b="1">
+                <a:solidFill>
+                  <a:schemeClr val="accent2">
+                    <a:lumMod val="75000"/>
+                  </a:schemeClr>
+                </a:solidFill>
+                <a:latin typeface="Times New Roman"/>
+                <a:ea typeface="Times New Roman"/>
+                <a:cs typeface="Times New Roman"/>
+              </a:rPr>
+              <a:t>Node</a:t>
+            </a:r>
+            <a:r>
+              <a:rPr sz="1600" b="1">
+                <a:latin typeface="Times New Roman"/>
+                <a:ea typeface="Times New Roman"/>
+                <a:cs typeface="Times New Roman"/>
+              </a:rPr>
+              <a:t>_a</a:t>
+            </a:r>
+            <a:r>
+              <a:rPr sz="1600">
+                <a:latin typeface="Times New Roman"/>
+                <a:ea typeface="Times New Roman"/>
+                <a:cs typeface="Times New Roman"/>
+              </a:rPr>
+              <a:t> in </a:t>
+            </a:r>
+            <a:r>
+              <a:rPr sz="1600" b="1">
+                <a:solidFill>
+                  <a:schemeClr val="accent2">
+                    <a:lumMod val="75000"/>
+                  </a:schemeClr>
+                </a:solidFill>
+                <a:latin typeface="Times New Roman"/>
+                <a:ea typeface="Times New Roman"/>
+                <a:cs typeface="Times New Roman"/>
+              </a:rPr>
+              <a:t>Final_graph</a:t>
+            </a:r>
+            <a:endParaRPr sz="1600">
+              <a:latin typeface="Times New Roman"/>
+              <a:cs typeface="Times New Roman"/>
+            </a:endParaRPr>
+          </a:p>
+        </p:txBody>
+      </p:sp>
+      <p:sp>
+        <p:nvSpPr>
+          <p:cNvPr id="1253134314" name=""/>
+          <p:cNvSpPr txBox="1"/>
+          <p:nvPr/>
+        </p:nvSpPr>
+        <p:spPr bwMode="auto">
+          <a:xfrm rot="0" flipH="0" flipV="0">
+            <a:off x="2571896" y="1057243"/>
+            <a:ext cx="2962134" cy="335639"/>
+          </a:xfrm>
+          <a:prstGeom prst="rect">
+            <a:avLst/>
+          </a:prstGeom>
+          <a:noFill/>
+        </p:spPr>
+        <p:txBody>
+          <a:bodyPr vertOverflow="overflow" horzOverflow="overflow" vert="horz" wrap="square" lIns="91440" tIns="45720" rIns="91440" bIns="45720" numCol="1" spcCol="0" rtlCol="0" fromWordArt="0" anchor="t" anchorCtr="0" forceAA="0" upright="0" compatLnSpc="0">
+            <a:spAutoFit/>
+          </a:bodyPr>
+          <a:p>
+            <a:pPr algn="ctr">
+              <a:defRPr/>
+            </a:pPr>
+            <a:r>
+              <a:rPr sz="1600">
+                <a:latin typeface="Times New Roman"/>
+                <a:ea typeface="Times New Roman"/>
+                <a:cs typeface="Times New Roman"/>
+              </a:rPr>
+              <a:t>For </a:t>
+            </a:r>
+            <a:r>
+              <a:rPr sz="1600" b="1">
+                <a:solidFill>
+                  <a:schemeClr val="accent2">
+                    <a:lumMod val="75000"/>
+                  </a:schemeClr>
+                </a:solidFill>
+                <a:latin typeface="Times New Roman"/>
+                <a:ea typeface="Times New Roman"/>
+                <a:cs typeface="Times New Roman"/>
+              </a:rPr>
+              <a:t>Node</a:t>
+            </a:r>
+            <a:r>
+              <a:rPr sz="1600" b="1">
+                <a:latin typeface="Times New Roman"/>
+                <a:ea typeface="Times New Roman"/>
+                <a:cs typeface="Times New Roman"/>
+              </a:rPr>
+              <a:t>_b</a:t>
+            </a:r>
+            <a:r>
+              <a:rPr sz="1600">
+                <a:latin typeface="Times New Roman"/>
+                <a:ea typeface="Times New Roman"/>
+                <a:cs typeface="Times New Roman"/>
+              </a:rPr>
+              <a:t> in </a:t>
+            </a:r>
+            <a:r>
+              <a:rPr sz="1600" b="1">
+                <a:solidFill>
+                  <a:schemeClr val="accent2">
+                    <a:lumMod val="75000"/>
+                  </a:schemeClr>
+                </a:solidFill>
+                <a:latin typeface="Times New Roman"/>
+                <a:ea typeface="Times New Roman"/>
+                <a:cs typeface="Times New Roman"/>
+              </a:rPr>
+              <a:t>Final_graph</a:t>
+            </a:r>
+            <a:endParaRPr sz="1600">
+              <a:latin typeface="Times New Roman"/>
+              <a:cs typeface="Times New Roman"/>
+            </a:endParaRPr>
+          </a:p>
+        </p:txBody>
+      </p:sp>
+      <p:sp>
+        <p:nvSpPr>
+          <p:cNvPr id="641946903" name=""/>
+          <p:cNvSpPr/>
+          <p:nvPr/>
+        </p:nvSpPr>
+        <p:spPr bwMode="auto">
+          <a:xfrm rot="0" flipH="0" flipV="0">
+            <a:off x="3546554" y="1994904"/>
+            <a:ext cx="253999" cy="235856"/>
+          </a:xfrm>
+          <a:prstGeom prst="flowChartConnector">
+            <a:avLst/>
+          </a:prstGeom>
+          <a:solidFill>
+            <a:schemeClr val="accent4">
+              <a:lumMod val="60000"/>
+              <a:lumOff val="40000"/>
+            </a:schemeClr>
+          </a:solidFill>
+          <a:ln w="12700" cap="flat" cmpd="sng" algn="ctr">
+            <a:solidFill>
+              <a:schemeClr val="tx1"/>
+            </a:solidFill>
+            <a:prstDash val="solid"/>
+            <a:miter lim="800000"/>
+          </a:ln>
+        </p:spPr>
+        <p:style>
+          <a:lnRef idx="2">
+            <a:schemeClr val="accent1">
+              <a:shade val="50000"/>
+            </a:schemeClr>
+          </a:lnRef>
+          <a:fillRef idx="1">
+            <a:schemeClr val="accent1"/>
+          </a:fillRef>
+          <a:effectRef idx="0">
+            <a:schemeClr val="accent1"/>
+          </a:effectRef>
+          <a:fontRef idx="minor">
+            <a:schemeClr val="lt1"/>
+          </a:fontRef>
+        </p:style>
+      </p:sp>
+      <p:sp>
+        <p:nvSpPr>
+          <p:cNvPr id="1727487538" name=""/>
+          <p:cNvSpPr/>
+          <p:nvPr/>
+        </p:nvSpPr>
+        <p:spPr bwMode="auto">
+          <a:xfrm rot="0" flipH="0" flipV="0">
+            <a:off x="3546554" y="2991405"/>
+            <a:ext cx="253999" cy="235856"/>
+          </a:xfrm>
+          <a:prstGeom prst="flowChartConnector">
+            <a:avLst/>
+          </a:prstGeom>
+          <a:ln w="12700" cap="flat" cmpd="sng" algn="ctr">
+            <a:solidFill>
+              <a:schemeClr val="tx1"/>
+            </a:solidFill>
+            <a:prstDash val="solid"/>
+            <a:miter lim="800000"/>
+          </a:ln>
+        </p:spPr>
+        <p:style>
+          <a:lnRef idx="2">
+            <a:schemeClr val="accent1">
+              <a:shade val="50000"/>
+            </a:schemeClr>
+          </a:lnRef>
+          <a:fillRef idx="1">
+            <a:schemeClr val="accent1"/>
+          </a:fillRef>
+          <a:effectRef idx="0">
+            <a:schemeClr val="accent1"/>
+          </a:effectRef>
+          <a:fontRef idx="minor">
+            <a:schemeClr val="lt1"/>
+          </a:fontRef>
+        </p:style>
+      </p:sp>
+      <p:sp>
+        <p:nvSpPr>
+          <p:cNvPr id="1163718877" name=""/>
+          <p:cNvSpPr txBox="1"/>
+          <p:nvPr/>
+        </p:nvSpPr>
+        <p:spPr bwMode="auto">
+          <a:xfrm rot="0" flipH="0" flipV="0">
+            <a:off x="2839651" y="2230761"/>
+            <a:ext cx="1709666" cy="305159"/>
+          </a:xfrm>
+          <a:prstGeom prst="rect">
+            <a:avLst/>
+          </a:prstGeom>
+          <a:noFill/>
+        </p:spPr>
+        <p:txBody>
+          <a:bodyPr vertOverflow="overflow" horzOverflow="overflow" vert="horz" wrap="square" lIns="91440" tIns="45720" rIns="91440" bIns="45720" numCol="1" spcCol="0" rtlCol="0" fromWordArt="0" anchor="t" anchorCtr="0" forceAA="0" upright="0" compatLnSpc="0">
+            <a:spAutoFit/>
+          </a:bodyPr>
+          <a:p>
+            <a:pPr algn="ctr">
+              <a:defRPr/>
+            </a:pPr>
+            <a:r>
+              <a:rPr sz="1400">
+                <a:latin typeface="Times New Roman"/>
+                <a:ea typeface="Times New Roman"/>
+                <a:cs typeface="Times New Roman"/>
+              </a:rPr>
+              <a:t>Node_a</a:t>
+            </a:r>
+            <a:endParaRPr sz="1400">
+              <a:latin typeface="Times New Roman"/>
+              <a:cs typeface="Times New Roman"/>
+            </a:endParaRPr>
+          </a:p>
+        </p:txBody>
+      </p:sp>
+      <p:sp>
+        <p:nvSpPr>
+          <p:cNvPr id="1750101597" name=""/>
+          <p:cNvSpPr txBox="1"/>
+          <p:nvPr/>
+        </p:nvSpPr>
+        <p:spPr bwMode="auto">
+          <a:xfrm rot="0" flipH="0" flipV="0">
+            <a:off x="2818181" y="3183093"/>
+            <a:ext cx="1710745" cy="305159"/>
+          </a:xfrm>
+          <a:prstGeom prst="rect">
+            <a:avLst/>
+          </a:prstGeom>
+          <a:noFill/>
+        </p:spPr>
+        <p:txBody>
+          <a:bodyPr vertOverflow="overflow" horzOverflow="overflow" vert="horz" wrap="square" lIns="91440" tIns="45720" rIns="91440" bIns="45720" numCol="1" spcCol="0" rtlCol="0" fromWordArt="0" anchor="t" anchorCtr="0" forceAA="0" upright="0" compatLnSpc="0">
+            <a:spAutoFit/>
+          </a:bodyPr>
+          <a:p>
+            <a:pPr algn="ctr">
+              <a:defRPr/>
+            </a:pPr>
+            <a:r>
+              <a:rPr sz="1400">
+                <a:latin typeface="Times New Roman"/>
+                <a:ea typeface="Times New Roman"/>
+                <a:cs typeface="Times New Roman"/>
+              </a:rPr>
+              <a:t>Node_b</a:t>
+            </a:r>
+            <a:endParaRPr sz="1400">
+              <a:latin typeface="Times New Roman"/>
+              <a:cs typeface="Times New Roman"/>
+            </a:endParaRPr>
+          </a:p>
+        </p:txBody>
+      </p:sp>
+      <p:sp>
+        <p:nvSpPr>
+          <p:cNvPr id="744326331" name=""/>
+          <p:cNvSpPr/>
+          <p:nvPr/>
+        </p:nvSpPr>
+        <p:spPr bwMode="auto">
+          <a:xfrm rot="0" flipH="0" flipV="0">
+            <a:off x="4602415" y="2433223"/>
+            <a:ext cx="1173671" cy="512695"/>
+          </a:xfrm>
+          <a:prstGeom prst="rect">
+            <a:avLst/>
+          </a:prstGeom>
+          <a:gradFill>
+            <a:gsLst>
+              <a:gs pos="19000">
+                <a:schemeClr val="accent1"/>
+              </a:gs>
+              <a:gs pos="100000">
+                <a:srgbClr val="FFFFFF"/>
+              </a:gs>
+            </a:gsLst>
+            <a:lin ang="0" scaled="1"/>
+          </a:gradFill>
+          <a:ln w="19049" cap="flat" cmpd="sng" algn="ctr">
+            <a:solidFill>
+              <a:schemeClr val="accent1">
+                <a:alpha val="99999"/>
+              </a:schemeClr>
+            </a:solidFill>
+            <a:prstDash val="solid"/>
+            <a:miter lim="800000"/>
+          </a:ln>
+        </p:spPr>
+        <p:style>
+          <a:lnRef idx="2">
+            <a:schemeClr val="accent1">
+              <a:shade val="50000"/>
+            </a:schemeClr>
+          </a:lnRef>
+          <a:fillRef idx="1">
+            <a:schemeClr val="accent1"/>
+          </a:fillRef>
+          <a:effectRef idx="0">
+            <a:schemeClr val="accent1"/>
+          </a:effectRef>
+          <a:fontRef idx="minor">
+            <a:schemeClr val="lt1"/>
+          </a:fontRef>
+        </p:style>
+        <p:txBody>
+          <a:bodyPr anchor="ctr"/>
+          <a:p>
+            <a:pPr algn="ctr">
+              <a:defRPr/>
+            </a:pPr>
+            <a:r>
+              <a:rPr sz="1400" b="0">
+                <a:solidFill>
+                  <a:schemeClr val="tx1"/>
+                </a:solidFill>
+                <a:latin typeface="Times New Roman"/>
+                <a:ea typeface="Times New Roman"/>
+                <a:cs typeface="Times New Roman"/>
+              </a:rPr>
+              <a:t>unsqueeze</a:t>
+            </a:r>
+            <a:endParaRPr sz="1600" b="0">
+              <a:latin typeface="Times New Roman"/>
+              <a:cs typeface="Times New Roman"/>
+            </a:endParaRPr>
+          </a:p>
+        </p:txBody>
+      </p:sp>
+      <p:sp>
+        <p:nvSpPr>
+          <p:cNvPr id="1016464312" name=""/>
+          <p:cNvSpPr/>
+          <p:nvPr/>
+        </p:nvSpPr>
+        <p:spPr bwMode="auto">
+          <a:xfrm rot="2611531" flipH="0" flipV="0">
+            <a:off x="3989235" y="2329004"/>
+            <a:ext cx="576596" cy="182232"/>
+          </a:xfrm>
+          <a:prstGeom prst="rightArrow">
+            <a:avLst>
+              <a:gd name="adj1" fmla="val 50000"/>
+              <a:gd name="adj2" fmla="val 50000"/>
+            </a:avLst>
+          </a:prstGeom>
+          <a:solidFill>
+            <a:schemeClr val="tx1"/>
+          </a:solidFill>
+          <a:ln w="12699" cap="flat" cmpd="sng" algn="ctr">
+            <a:solidFill>
+              <a:schemeClr val="tx1"/>
+            </a:solidFill>
+            <a:prstDash val="solid"/>
+            <a:miter lim="800000"/>
+          </a:ln>
+        </p:spPr>
+        <p:style>
+          <a:lnRef idx="2">
+            <a:schemeClr val="accent1">
+              <a:shade val="50000"/>
+            </a:schemeClr>
+          </a:lnRef>
+          <a:fillRef idx="1">
+            <a:schemeClr val="accent1"/>
+          </a:fillRef>
+          <a:effectRef idx="0">
+            <a:schemeClr val="accent1"/>
+          </a:effectRef>
+          <a:fontRef idx="minor">
+            <a:schemeClr val="lt1"/>
+          </a:fontRef>
+        </p:style>
+        <p:txBody>
+          <a:bodyPr anchor="ctr"/>
+          <a:p>
+            <a:pPr algn="ctr">
+              <a:defRPr/>
+            </a:pPr>
+            <a:endParaRPr>
+              <a:latin typeface="Times New Roman"/>
+              <a:cs typeface="Times New Roman"/>
+            </a:endParaRPr>
+          </a:p>
+        </p:txBody>
+      </p:sp>
+      <p:sp>
+        <p:nvSpPr>
+          <p:cNvPr id="370485698" name=""/>
+          <p:cNvSpPr/>
+          <p:nvPr/>
+        </p:nvSpPr>
+        <p:spPr bwMode="auto">
+          <a:xfrm rot="19403571" flipH="0" flipV="0">
+            <a:off x="3967940" y="2844495"/>
+            <a:ext cx="584712" cy="182232"/>
+          </a:xfrm>
+          <a:prstGeom prst="rightArrow">
+            <a:avLst>
+              <a:gd name="adj1" fmla="val 50000"/>
+              <a:gd name="adj2" fmla="val 50000"/>
+            </a:avLst>
+          </a:prstGeom>
+          <a:solidFill>
+            <a:schemeClr val="tx1"/>
+          </a:solidFill>
+          <a:ln w="12699" cap="flat" cmpd="sng" algn="ctr">
+            <a:solidFill>
+              <a:schemeClr val="tx1"/>
+            </a:solidFill>
+            <a:prstDash val="solid"/>
+            <a:miter lim="800000"/>
+          </a:ln>
+        </p:spPr>
+        <p:style>
+          <a:lnRef idx="2">
+            <a:schemeClr val="accent1">
+              <a:shade val="50000"/>
+            </a:schemeClr>
+          </a:lnRef>
+          <a:fillRef idx="1">
+            <a:schemeClr val="accent1"/>
+          </a:fillRef>
+          <a:effectRef idx="0">
+            <a:schemeClr val="accent1"/>
+          </a:effectRef>
+          <a:fontRef idx="minor">
+            <a:schemeClr val="lt1"/>
+          </a:fontRef>
+        </p:style>
+        <p:txBody>
+          <a:bodyPr anchor="ctr"/>
+          <a:p>
+            <a:pPr algn="ctr">
+              <a:defRPr/>
+            </a:pPr>
+            <a:endParaRPr>
+              <a:latin typeface="Times New Roman"/>
+              <a:cs typeface="Times New Roman"/>
+            </a:endParaRPr>
+          </a:p>
+        </p:txBody>
+      </p:sp>
+      <p:sp>
+        <p:nvSpPr>
+          <p:cNvPr id="932394781" name=""/>
+          <p:cNvSpPr txBox="1"/>
+          <p:nvPr/>
+        </p:nvSpPr>
+        <p:spPr bwMode="auto">
+          <a:xfrm rot="0" flipH="0" flipV="0">
+            <a:off x="3963821" y="2991405"/>
+            <a:ext cx="2452299" cy="457559"/>
+          </a:xfrm>
+          <a:prstGeom prst="rect">
+            <a:avLst/>
+          </a:prstGeom>
+          <a:noFill/>
+        </p:spPr>
+        <p:txBody>
+          <a:bodyPr vertOverflow="overflow" horzOverflow="overflow" vert="horz" wrap="square" lIns="91440" tIns="45720" rIns="91440" bIns="45720" numCol="1" spcCol="0" rtlCol="0" fromWordArt="0" anchor="t" anchorCtr="0" forceAA="0" upright="0" compatLnSpc="0">
+            <a:spAutoFit/>
+          </a:bodyPr>
+          <a:p>
+            <a:pPr algn="ctr">
+              <a:defRPr/>
+            </a:pPr>
+            <a:r>
+              <a:rPr sz="1200">
+                <a:latin typeface="Times New Roman"/>
+                <a:ea typeface="Times New Roman"/>
+                <a:cs typeface="Times New Roman"/>
+              </a:rPr>
+              <a:t>1, 1, 4096</a:t>
+            </a:r>
+            <a:endParaRPr sz="1200">
+              <a:latin typeface="Times New Roman"/>
+              <a:cs typeface="Times New Roman"/>
+            </a:endParaRPr>
+          </a:p>
+          <a:p>
+            <a:pPr algn="ctr">
+              <a:defRPr/>
+            </a:pPr>
+            <a:r>
+              <a:rPr sz="1200">
+                <a:latin typeface="Times New Roman"/>
+                <a:cs typeface="Times New Roman"/>
+              </a:rPr>
+              <a:t>(B, Lenght_Seq, Dim_Embed)</a:t>
+            </a:r>
+            <a:endParaRPr sz="1400">
+              <a:latin typeface="Times New Roman"/>
+              <a:cs typeface="Times New Roman"/>
+            </a:endParaRPr>
+          </a:p>
+        </p:txBody>
+      </p:sp>
+      <p:sp>
+        <p:nvSpPr>
+          <p:cNvPr id="1480899019" name=""/>
+          <p:cNvSpPr/>
+          <p:nvPr/>
+        </p:nvSpPr>
+        <p:spPr bwMode="auto">
+          <a:xfrm rot="0" flipH="0" flipV="0">
+            <a:off x="6367834" y="2127051"/>
+            <a:ext cx="181428" cy="306172"/>
+          </a:xfrm>
+          <a:prstGeom prst="flowChartOffpageConnector">
+            <a:avLst/>
+          </a:prstGeom>
+          <a:solidFill>
+            <a:schemeClr val="accent4">
+              <a:lumMod val="60000"/>
+              <a:lumOff val="40000"/>
+            </a:schemeClr>
+          </a:solidFill>
+          <a:ln w="12700" cap="flat" cmpd="sng" algn="ctr">
+            <a:solidFill>
+              <a:schemeClr val="tx1"/>
+            </a:solidFill>
+            <a:prstDash val="solid"/>
+            <a:miter lim="800000"/>
+          </a:ln>
+        </p:spPr>
+        <p:style>
+          <a:lnRef idx="2">
+            <a:schemeClr val="accent1">
+              <a:shade val="50000"/>
+            </a:schemeClr>
+          </a:lnRef>
+          <a:fillRef idx="1">
+            <a:schemeClr val="accent1"/>
+          </a:fillRef>
+          <a:effectRef idx="0">
+            <a:schemeClr val="accent1"/>
+          </a:effectRef>
+          <a:fontRef idx="minor">
+            <a:schemeClr val="lt1"/>
+          </a:fontRef>
+        </p:style>
+      </p:sp>
+      <p:sp>
+        <p:nvSpPr>
+          <p:cNvPr id="2089691950" name=""/>
+          <p:cNvSpPr/>
+          <p:nvPr/>
+        </p:nvSpPr>
+        <p:spPr bwMode="auto">
+          <a:xfrm rot="0" flipH="0" flipV="0">
+            <a:off x="6367834" y="2608364"/>
+            <a:ext cx="181427" cy="306171"/>
+          </a:xfrm>
+          <a:prstGeom prst="flowChartOffpageConnector">
+            <a:avLst/>
+          </a:prstGeom>
+          <a:solidFill>
+            <a:schemeClr val="accent1"/>
+          </a:solidFill>
+          <a:ln w="12700" cap="flat" cmpd="sng" algn="ctr">
+            <a:solidFill>
+              <a:schemeClr val="tx1"/>
+            </a:solidFill>
+            <a:prstDash val="solid"/>
+            <a:miter lim="800000"/>
+          </a:ln>
+        </p:spPr>
+        <p:style>
+          <a:lnRef idx="2">
+            <a:schemeClr val="accent1">
+              <a:shade val="50000"/>
+            </a:schemeClr>
+          </a:lnRef>
+          <a:fillRef idx="1">
+            <a:schemeClr val="accent1"/>
+          </a:fillRef>
+          <a:effectRef idx="0">
+            <a:schemeClr val="accent1"/>
+          </a:effectRef>
+          <a:fontRef idx="minor">
+            <a:schemeClr val="lt1"/>
+          </a:fontRef>
+        </p:style>
+      </p:sp>
+      <p:sp>
+        <p:nvSpPr>
+          <p:cNvPr id="2141583404" name=""/>
+          <p:cNvSpPr/>
+          <p:nvPr/>
+        </p:nvSpPr>
+        <p:spPr bwMode="auto">
+          <a:xfrm rot="0" flipH="0" flipV="0">
+            <a:off x="6367834" y="3136292"/>
+            <a:ext cx="181427" cy="306171"/>
+          </a:xfrm>
+          <a:prstGeom prst="flowChartOffpageConnector">
+            <a:avLst/>
+          </a:prstGeom>
+          <a:solidFill>
+            <a:schemeClr val="accent1"/>
+          </a:solidFill>
+          <a:ln w="12700" cap="flat" cmpd="sng" algn="ctr">
+            <a:solidFill>
+              <a:schemeClr val="tx1"/>
+            </a:solidFill>
+            <a:prstDash val="solid"/>
+            <a:miter lim="800000"/>
+          </a:ln>
+        </p:spPr>
+        <p:style>
+          <a:lnRef idx="2">
+            <a:schemeClr val="accent1">
+              <a:shade val="50000"/>
+            </a:schemeClr>
+          </a:lnRef>
+          <a:fillRef idx="1">
+            <a:schemeClr val="accent1"/>
+          </a:fillRef>
+          <a:effectRef idx="0">
+            <a:schemeClr val="accent1"/>
+          </a:effectRef>
+          <a:fontRef idx="minor">
+            <a:schemeClr val="lt1"/>
+          </a:fontRef>
+        </p:style>
+      </p:sp>
+      <p:sp>
+        <p:nvSpPr>
+          <p:cNvPr id="1900993254" name=""/>
+          <p:cNvSpPr/>
+          <p:nvPr/>
+        </p:nvSpPr>
+        <p:spPr bwMode="auto">
+          <a:xfrm rot="0" flipH="0" flipV="0">
+            <a:off x="5856906" y="2593614"/>
+            <a:ext cx="394803" cy="182232"/>
+          </a:xfrm>
+          <a:prstGeom prst="rightArrow">
+            <a:avLst>
+              <a:gd name="adj1" fmla="val 50000"/>
+              <a:gd name="adj2" fmla="val 50000"/>
+            </a:avLst>
+          </a:prstGeom>
+          <a:solidFill>
+            <a:schemeClr val="tx1"/>
+          </a:solidFill>
+          <a:ln w="12699" cap="flat" cmpd="sng" algn="ctr">
+            <a:solidFill>
+              <a:schemeClr val="tx1"/>
+            </a:solidFill>
+            <a:prstDash val="solid"/>
+            <a:miter lim="800000"/>
+          </a:ln>
+        </p:spPr>
+        <p:style>
+          <a:lnRef idx="2">
+            <a:schemeClr val="accent1">
+              <a:shade val="50000"/>
+            </a:schemeClr>
+          </a:lnRef>
+          <a:fillRef idx="1">
+            <a:schemeClr val="accent1"/>
+          </a:fillRef>
+          <a:effectRef idx="0">
+            <a:schemeClr val="accent1"/>
+          </a:effectRef>
+          <a:fontRef idx="minor">
+            <a:schemeClr val="lt1"/>
+          </a:fontRef>
+        </p:style>
+        <p:txBody>
+          <a:bodyPr anchor="ctr"/>
+          <a:p>
+            <a:pPr algn="ctr">
+              <a:defRPr/>
+            </a:pPr>
+            <a:endParaRPr>
+              <a:latin typeface="Times New Roman"/>
+              <a:cs typeface="Times New Roman"/>
+            </a:endParaRPr>
+          </a:p>
+        </p:txBody>
+      </p:sp>
+      <p:sp>
+        <p:nvSpPr>
+          <p:cNvPr id="940917402" name=""/>
+          <p:cNvSpPr txBox="1"/>
+          <p:nvPr/>
+        </p:nvSpPr>
+        <p:spPr bwMode="auto">
+          <a:xfrm rot="0" flipH="0" flipV="0">
+            <a:off x="6542191" y="2128064"/>
+            <a:ext cx="360128" cy="305159"/>
+          </a:xfrm>
+          <a:prstGeom prst="rect">
+            <a:avLst/>
+          </a:prstGeom>
+          <a:noFill/>
+        </p:spPr>
+        <p:txBody>
+          <a:bodyPr vertOverflow="overflow" horzOverflow="overflow" vert="horz" wrap="square" lIns="91440" tIns="45720" rIns="91440" bIns="45720" numCol="1" spcCol="0" rtlCol="0" fromWordArt="0" anchor="t" anchorCtr="0" forceAA="0" upright="0" compatLnSpc="0">
+            <a:spAutoFit/>
+          </a:bodyPr>
+          <a:p>
+            <a:pPr algn="ctr">
+              <a:defRPr/>
+            </a:pPr>
+            <a:r>
+              <a:rPr sz="1400">
+                <a:latin typeface="Times New Roman"/>
+                <a:ea typeface="Times New Roman"/>
+                <a:cs typeface="Times New Roman"/>
+              </a:rPr>
+              <a:t>Q</a:t>
+            </a:r>
+            <a:endParaRPr sz="1400">
+              <a:latin typeface="Times New Roman"/>
+              <a:cs typeface="Times New Roman"/>
+            </a:endParaRPr>
+          </a:p>
+        </p:txBody>
+      </p:sp>
+      <p:sp>
+        <p:nvSpPr>
+          <p:cNvPr id="786399047" name=""/>
+          <p:cNvSpPr txBox="1"/>
+          <p:nvPr/>
+        </p:nvSpPr>
+        <p:spPr bwMode="auto">
+          <a:xfrm rot="0" flipH="0" flipV="0">
+            <a:off x="6500009" y="2609375"/>
+            <a:ext cx="444491" cy="305159"/>
+          </a:xfrm>
+          <a:prstGeom prst="rect">
+            <a:avLst/>
+          </a:prstGeom>
+          <a:noFill/>
+        </p:spPr>
+        <p:txBody>
+          <a:bodyPr vertOverflow="overflow" horzOverflow="overflow" vert="horz" wrap="square" lIns="91440" tIns="45720" rIns="91440" bIns="45720" numCol="1" spcCol="0" rtlCol="0" fromWordArt="0" anchor="t" anchorCtr="0" forceAA="0" upright="0" compatLnSpc="0">
+            <a:spAutoFit/>
+          </a:bodyPr>
+          <a:p>
+            <a:pPr algn="ctr">
+              <a:defRPr/>
+            </a:pPr>
+            <a:r>
+              <a:rPr sz="1400">
+                <a:latin typeface="Times New Roman"/>
+                <a:cs typeface="Times New Roman"/>
+              </a:rPr>
+              <a:t>K</a:t>
+            </a:r>
+            <a:endParaRPr sz="1400">
+              <a:latin typeface="Times New Roman"/>
+              <a:cs typeface="Times New Roman"/>
+            </a:endParaRPr>
+          </a:p>
+        </p:txBody>
+      </p:sp>
+      <p:sp>
+        <p:nvSpPr>
+          <p:cNvPr id="989760208" name=""/>
+          <p:cNvSpPr txBox="1"/>
+          <p:nvPr/>
+        </p:nvSpPr>
+        <p:spPr bwMode="auto">
+          <a:xfrm rot="0" flipH="0" flipV="0">
+            <a:off x="6549261" y="3144821"/>
+            <a:ext cx="361568" cy="305159"/>
+          </a:xfrm>
+          <a:prstGeom prst="rect">
+            <a:avLst/>
+          </a:prstGeom>
+          <a:noFill/>
+        </p:spPr>
+        <p:txBody>
+          <a:bodyPr vertOverflow="overflow" horzOverflow="overflow" vert="horz" wrap="square" lIns="91440" tIns="45720" rIns="91440" bIns="45720" numCol="1" spcCol="0" rtlCol="0" fromWordArt="0" anchor="t" anchorCtr="0" forceAA="0" upright="0" compatLnSpc="0">
+            <a:spAutoFit/>
+          </a:bodyPr>
+          <a:p>
+            <a:pPr algn="ctr">
+              <a:defRPr/>
+            </a:pPr>
+            <a:r>
+              <a:rPr sz="1400">
+                <a:latin typeface="Times New Roman"/>
+                <a:cs typeface="Times New Roman"/>
+              </a:rPr>
+              <a:t>V</a:t>
+            </a:r>
+            <a:endParaRPr sz="1400">
+              <a:latin typeface="Times New Roman"/>
+              <a:cs typeface="Times New Roman"/>
+            </a:endParaRPr>
+          </a:p>
+        </p:txBody>
+      </p:sp>
+      <p:sp>
+        <p:nvSpPr>
+          <p:cNvPr id="1358064925" name=""/>
+          <p:cNvSpPr txBox="1"/>
+          <p:nvPr/>
+        </p:nvSpPr>
+        <p:spPr bwMode="auto">
+          <a:xfrm rot="0" flipH="0" flipV="0">
+            <a:off x="6600338" y="2532996"/>
+            <a:ext cx="411566" cy="228959"/>
+          </a:xfrm>
+          <a:prstGeom prst="rect">
+            <a:avLst/>
+          </a:prstGeom>
+          <a:noFill/>
+        </p:spPr>
+        <p:txBody>
+          <a:bodyPr vertOverflow="overflow" horzOverflow="overflow" vert="horz" wrap="square" lIns="91440" tIns="45720" rIns="91440" bIns="45720" numCol="1" spcCol="0" rtlCol="0" fromWordArt="0" anchor="t" anchorCtr="0" forceAA="0" upright="0" compatLnSpc="0">
+            <a:spAutoFit/>
+          </a:bodyPr>
+          <a:p>
+            <a:pPr algn="ctr">
+              <a:defRPr/>
+            </a:pPr>
+            <a:r>
+              <a:rPr sz="900">
+                <a:latin typeface="Times New Roman"/>
+                <a:cs typeface="Times New Roman"/>
+              </a:rPr>
+              <a:t>T</a:t>
+            </a:r>
+            <a:endParaRPr sz="900">
+              <a:latin typeface="Times New Roman"/>
+              <a:cs typeface="Times New Roman"/>
+            </a:endParaRPr>
+          </a:p>
+        </p:txBody>
+      </p:sp>
+      <p:sp>
+        <p:nvSpPr>
+          <p:cNvPr id="838785588" name=""/>
+          <p:cNvSpPr/>
+          <p:nvPr/>
+        </p:nvSpPr>
+        <p:spPr bwMode="auto">
+          <a:xfrm rot="0" flipH="0" flipV="0">
+            <a:off x="6902320" y="2608364"/>
+            <a:ext cx="426591" cy="182232"/>
+          </a:xfrm>
+          <a:prstGeom prst="rightArrow">
+            <a:avLst>
+              <a:gd name="adj1" fmla="val 50000"/>
+              <a:gd name="adj2" fmla="val 50000"/>
+            </a:avLst>
+          </a:prstGeom>
+          <a:solidFill>
+            <a:schemeClr val="tx1"/>
+          </a:solidFill>
+          <a:ln w="12699" cap="flat" cmpd="sng" algn="ctr">
+            <a:solidFill>
+              <a:schemeClr val="tx1"/>
+            </a:solidFill>
+            <a:prstDash val="solid"/>
+            <a:miter lim="800000"/>
+          </a:ln>
+        </p:spPr>
+        <p:style>
+          <a:lnRef idx="2">
+            <a:schemeClr val="accent1">
+              <a:shade val="50000"/>
+            </a:schemeClr>
+          </a:lnRef>
+          <a:fillRef idx="1">
+            <a:schemeClr val="accent1"/>
+          </a:fillRef>
+          <a:effectRef idx="0">
+            <a:schemeClr val="accent1"/>
+          </a:effectRef>
+          <a:fontRef idx="minor">
+            <a:schemeClr val="lt1"/>
+          </a:fontRef>
+        </p:style>
+        <p:txBody>
+          <a:bodyPr anchor="ctr"/>
+          <a:p>
+            <a:pPr algn="ctr">
+              <a:defRPr/>
+            </a:pPr>
+            <a:endParaRPr>
+              <a:latin typeface="Times New Roman"/>
+              <a:cs typeface="Times New Roman"/>
+            </a:endParaRPr>
+          </a:p>
+        </p:txBody>
+      </p:sp>
+      <p:pic>
+        <p:nvPicPr>
+          <p:cNvPr id="1926427206" name=""/>
+          <p:cNvPicPr>
+            <a:picLocks noChangeAspect="1"/>
+          </p:cNvPicPr>
+          <p:nvPr/>
+        </p:nvPicPr>
+        <p:blipFill rotWithShape="1">
+          <a:blip r:embed="rId3"/>
+          <a:stretch/>
+        </p:blipFill>
+        <p:spPr bwMode="auto">
+          <a:xfrm flipH="0" flipV="0">
+            <a:off x="7548034" y="2469039"/>
+            <a:ext cx="3182662" cy="476880"/>
+          </a:xfrm>
+          <a:prstGeom prst="rect">
+            <a:avLst/>
+          </a:prstGeom>
+        </p:spPr>
+      </p:pic>
+      <p:pic>
+        <p:nvPicPr>
+          <p:cNvPr id="569196672" name=""/>
+          <p:cNvPicPr>
+            <a:picLocks noChangeAspect="1"/>
+          </p:cNvPicPr>
+          <p:nvPr/>
+        </p:nvPicPr>
+        <p:blipFill rotWithShape="1">
+          <a:blip r:embed="rId4"/>
+          <a:stretch/>
+        </p:blipFill>
+        <p:spPr bwMode="auto">
+          <a:xfrm flipH="0" flipV="0">
+            <a:off x="7954840" y="1758779"/>
+            <a:ext cx="1832428" cy="569952"/>
+          </a:xfrm>
+          <a:prstGeom prst="rect">
+            <a:avLst/>
+          </a:prstGeom>
+        </p:spPr>
+      </p:pic>
+      <p:sp>
+        <p:nvSpPr>
+          <p:cNvPr id="1135614231" name=""/>
+          <p:cNvSpPr/>
+          <p:nvPr/>
+        </p:nvSpPr>
+        <p:spPr bwMode="auto">
+          <a:xfrm rot="5400000" flipH="0" flipV="0">
+            <a:off x="8902805" y="2269024"/>
+            <a:ext cx="211458" cy="162060"/>
+          </a:xfrm>
+          <a:prstGeom prst="rightArrow">
+            <a:avLst>
+              <a:gd name="adj1" fmla="val 50000"/>
+              <a:gd name="adj2" fmla="val 50000"/>
+            </a:avLst>
+          </a:prstGeom>
+          <a:solidFill>
+            <a:schemeClr val="tx1"/>
+          </a:solidFill>
+          <a:ln w="12699" cap="flat" cmpd="sng" algn="ctr">
+            <a:solidFill>
+              <a:schemeClr val="tx1"/>
+            </a:solidFill>
+            <a:prstDash val="solid"/>
+            <a:miter lim="800000"/>
+          </a:ln>
+        </p:spPr>
+        <p:style>
+          <a:lnRef idx="2">
+            <a:schemeClr val="accent1">
+              <a:shade val="50000"/>
+            </a:schemeClr>
+          </a:lnRef>
+          <a:fillRef idx="1">
+            <a:schemeClr val="accent1"/>
+          </a:fillRef>
+          <a:effectRef idx="0">
+            <a:schemeClr val="accent1"/>
+          </a:effectRef>
+          <a:fontRef idx="minor">
+            <a:schemeClr val="lt1"/>
+          </a:fontRef>
+        </p:style>
+        <p:txBody>
+          <a:bodyPr anchor="ctr"/>
+          <a:p>
+            <a:pPr algn="ctr">
+              <a:defRPr/>
+            </a:pPr>
+            <a:endParaRPr>
+              <a:latin typeface="Times New Roman"/>
+              <a:cs typeface="Times New Roman"/>
+            </a:endParaRPr>
+          </a:p>
+        </p:txBody>
+      </p:sp>
+      <p:pic>
+        <p:nvPicPr>
+          <p:cNvPr id="1797155299" name=""/>
+          <p:cNvPicPr>
+            <a:picLocks noChangeAspect="1"/>
+          </p:cNvPicPr>
+          <p:nvPr/>
+        </p:nvPicPr>
+        <p:blipFill rotWithShape="1">
+          <a:blip r:embed="rId5"/>
+          <a:stretch/>
+        </p:blipFill>
+        <p:spPr bwMode="auto">
+          <a:xfrm flipH="0" flipV="0">
+            <a:off x="7752574" y="3220185"/>
+            <a:ext cx="2673981" cy="265803"/>
+          </a:xfrm>
+          <a:prstGeom prst="rect">
+            <a:avLst/>
+          </a:prstGeom>
+        </p:spPr>
+      </p:pic>
+      <p:sp>
+        <p:nvSpPr>
+          <p:cNvPr id="2038677187" name=""/>
+          <p:cNvSpPr/>
+          <p:nvPr/>
+        </p:nvSpPr>
+        <p:spPr bwMode="auto">
+          <a:xfrm rot="5400000" flipH="0" flipV="0">
+            <a:off x="8902805" y="2996332"/>
+            <a:ext cx="211458" cy="162060"/>
+          </a:xfrm>
+          <a:prstGeom prst="rightArrow">
+            <a:avLst>
+              <a:gd name="adj1" fmla="val 50000"/>
+              <a:gd name="adj2" fmla="val 50000"/>
+            </a:avLst>
+          </a:prstGeom>
+          <a:solidFill>
+            <a:schemeClr val="tx1"/>
+          </a:solidFill>
+          <a:ln w="12699" cap="flat" cmpd="sng" algn="ctr">
+            <a:solidFill>
+              <a:schemeClr val="tx1"/>
+            </a:solidFill>
+            <a:prstDash val="solid"/>
+            <a:miter lim="800000"/>
+          </a:ln>
+        </p:spPr>
+        <p:style>
+          <a:lnRef idx="2">
+            <a:schemeClr val="accent1">
+              <a:shade val="50000"/>
+            </a:schemeClr>
+          </a:lnRef>
+          <a:fillRef idx="1">
+            <a:schemeClr val="accent1"/>
+          </a:fillRef>
+          <a:effectRef idx="0">
+            <a:schemeClr val="accent1"/>
+          </a:effectRef>
+          <a:fontRef idx="minor">
+            <a:schemeClr val="lt1"/>
+          </a:fontRef>
+        </p:style>
+        <p:txBody>
+          <a:bodyPr anchor="ctr"/>
+          <a:p>
+            <a:pPr algn="ctr">
+              <a:defRPr/>
+            </a:pPr>
+            <a:endParaRPr>
+              <a:latin typeface="Times New Roman"/>
+              <a:cs typeface="Times New Roman"/>
+            </a:endParaRPr>
+          </a:p>
+        </p:txBody>
+      </p:sp>
+      <p:sp>
+        <p:nvSpPr>
+          <p:cNvPr id="914344965" name=""/>
+          <p:cNvSpPr txBox="1"/>
+          <p:nvPr/>
+        </p:nvSpPr>
+        <p:spPr bwMode="auto">
+          <a:xfrm rot="0" flipH="0" flipV="0">
+            <a:off x="7752574" y="3449981"/>
+            <a:ext cx="1061362" cy="274679"/>
+          </a:xfrm>
+          <a:prstGeom prst="rect">
+            <a:avLst/>
+          </a:prstGeom>
+          <a:noFill/>
+        </p:spPr>
+        <p:txBody>
+          <a:bodyPr vertOverflow="overflow" horzOverflow="overflow" vert="horz" wrap="square" lIns="91440" tIns="45720" rIns="91440" bIns="45720" numCol="1" spcCol="0" rtlCol="0" fromWordArt="0" anchor="t" anchorCtr="0" forceAA="0" upright="0" compatLnSpc="0">
+            <a:spAutoFit/>
+          </a:bodyPr>
+          <a:p>
+            <a:pPr algn="ctr">
+              <a:defRPr/>
+            </a:pPr>
+            <a:r>
+              <a:rPr sz="1200">
+                <a:latin typeface="Times New Roman"/>
+                <a:ea typeface="Times New Roman"/>
+                <a:cs typeface="Times New Roman"/>
+              </a:rPr>
+              <a:t>(softmax)</a:t>
+            </a:r>
+            <a:endParaRPr sz="1400">
+              <a:latin typeface="Times New Roman"/>
+              <a:cs typeface="Times New Roman"/>
+            </a:endParaRPr>
+          </a:p>
+        </p:txBody>
+      </p:sp>
+      <p:pic>
+        <p:nvPicPr>
+          <p:cNvPr id="371195566" name=""/>
+          <p:cNvPicPr>
+            <a:picLocks noChangeAspect="1"/>
+          </p:cNvPicPr>
+          <p:nvPr/>
+        </p:nvPicPr>
+        <p:blipFill rotWithShape="1">
+          <a:blip r:embed="rId6"/>
+          <a:stretch/>
+        </p:blipFill>
+        <p:spPr bwMode="auto">
+          <a:xfrm flipH="0" flipV="0">
+            <a:off x="7845413" y="3955447"/>
+            <a:ext cx="2488303" cy="221056"/>
+          </a:xfrm>
+          <a:prstGeom prst="rect">
+            <a:avLst/>
+          </a:prstGeom>
+        </p:spPr>
+      </p:pic>
+      <p:sp>
+        <p:nvSpPr>
+          <p:cNvPr id="1452396334" name=""/>
+          <p:cNvSpPr/>
+          <p:nvPr/>
+        </p:nvSpPr>
+        <p:spPr bwMode="auto">
+          <a:xfrm rot="5400000" flipH="0" flipV="0">
+            <a:off x="8893144" y="3749360"/>
+            <a:ext cx="211458" cy="162060"/>
+          </a:xfrm>
+          <a:prstGeom prst="rightArrow">
+            <a:avLst>
+              <a:gd name="adj1" fmla="val 50000"/>
+              <a:gd name="adj2" fmla="val 50000"/>
+            </a:avLst>
+          </a:prstGeom>
+          <a:solidFill>
+            <a:schemeClr val="tx1"/>
+          </a:solidFill>
+          <a:ln w="12699" cap="flat" cmpd="sng" algn="ctr">
+            <a:solidFill>
+              <a:schemeClr val="tx1"/>
+            </a:solidFill>
+            <a:prstDash val="solid"/>
+            <a:miter lim="800000"/>
+          </a:ln>
+        </p:spPr>
+        <p:style>
+          <a:lnRef idx="2">
+            <a:schemeClr val="accent1">
+              <a:shade val="50000"/>
+            </a:schemeClr>
+          </a:lnRef>
+          <a:fillRef idx="1">
+            <a:schemeClr val="accent1"/>
+          </a:fillRef>
+          <a:effectRef idx="0">
+            <a:schemeClr val="accent1"/>
+          </a:effectRef>
+          <a:fontRef idx="minor">
+            <a:schemeClr val="lt1"/>
+          </a:fontRef>
+        </p:style>
+        <p:txBody>
+          <a:bodyPr anchor="ctr"/>
+          <a:p>
+            <a:pPr algn="ctr">
+              <a:defRPr/>
+            </a:pPr>
+            <a:endParaRPr>
+              <a:latin typeface="Times New Roman"/>
+              <a:cs typeface="Times New Roman"/>
+            </a:endParaRPr>
+          </a:p>
+        </p:txBody>
+      </p:sp>
+      <p:sp>
+        <p:nvSpPr>
+          <p:cNvPr id="1315730779" name=""/>
+          <p:cNvSpPr/>
+          <p:nvPr/>
+        </p:nvSpPr>
+        <p:spPr bwMode="auto">
+          <a:xfrm rot="0" flipH="0" flipV="0">
+            <a:off x="8421699" y="4508782"/>
+            <a:ext cx="1173670" cy="512695"/>
+          </a:xfrm>
+          <a:prstGeom prst="rect">
+            <a:avLst/>
+          </a:prstGeom>
+          <a:gradFill>
+            <a:gsLst>
+              <a:gs pos="19000">
+                <a:schemeClr val="accent1"/>
+              </a:gs>
+              <a:gs pos="100000">
+                <a:srgbClr val="FFFFFF"/>
+              </a:gs>
+            </a:gsLst>
+            <a:lin ang="0" scaled="1"/>
+          </a:gradFill>
+          <a:ln w="19049" cap="flat" cmpd="sng" algn="ctr">
+            <a:solidFill>
+              <a:schemeClr val="accent1">
+                <a:alpha val="99999"/>
+              </a:schemeClr>
+            </a:solidFill>
+            <a:prstDash val="solid"/>
+            <a:miter lim="800000"/>
+          </a:ln>
+        </p:spPr>
+        <p:style>
+          <a:lnRef idx="2">
+            <a:schemeClr val="accent1">
+              <a:shade val="50000"/>
+            </a:schemeClr>
+          </a:lnRef>
+          <a:fillRef idx="1">
+            <a:schemeClr val="accent1"/>
+          </a:fillRef>
+          <a:effectRef idx="0">
+            <a:schemeClr val="accent1"/>
+          </a:effectRef>
+          <a:fontRef idx="minor">
+            <a:schemeClr val="lt1"/>
+          </a:fontRef>
+        </p:style>
+        <p:txBody>
+          <a:bodyPr anchor="ctr"/>
+          <a:p>
+            <a:pPr algn="ctr">
+              <a:defRPr/>
+            </a:pPr>
+            <a:r>
+              <a:rPr sz="1400" b="0">
+                <a:solidFill>
+                  <a:schemeClr val="tx1"/>
+                </a:solidFill>
+                <a:latin typeface="Times New Roman"/>
+                <a:ea typeface="Times New Roman"/>
+                <a:cs typeface="Times New Roman"/>
+              </a:rPr>
+              <a:t>squeeze</a:t>
+            </a:r>
+            <a:endParaRPr sz="1600" b="0">
+              <a:latin typeface="Times New Roman"/>
+              <a:cs typeface="Times New Roman"/>
+            </a:endParaRPr>
+          </a:p>
+        </p:txBody>
+      </p:sp>
+      <p:sp>
+        <p:nvSpPr>
+          <p:cNvPr id="1316463464" name=""/>
+          <p:cNvSpPr/>
+          <p:nvPr/>
+        </p:nvSpPr>
+        <p:spPr bwMode="auto">
+          <a:xfrm rot="5400000" flipH="0" flipV="0">
+            <a:off x="8893144" y="4249451"/>
+            <a:ext cx="211458" cy="162060"/>
+          </a:xfrm>
+          <a:prstGeom prst="rightArrow">
+            <a:avLst>
+              <a:gd name="adj1" fmla="val 50000"/>
+              <a:gd name="adj2" fmla="val 50000"/>
+            </a:avLst>
+          </a:prstGeom>
+          <a:solidFill>
+            <a:schemeClr val="tx1"/>
+          </a:solidFill>
+          <a:ln w="12699" cap="flat" cmpd="sng" algn="ctr">
+            <a:solidFill>
+              <a:schemeClr val="tx1"/>
+            </a:solidFill>
+            <a:prstDash val="solid"/>
+            <a:miter lim="800000"/>
+          </a:ln>
+        </p:spPr>
+        <p:style>
+          <a:lnRef idx="2">
+            <a:schemeClr val="accent1">
+              <a:shade val="50000"/>
+            </a:schemeClr>
+          </a:lnRef>
+          <a:fillRef idx="1">
+            <a:schemeClr val="accent1"/>
+          </a:fillRef>
+          <a:effectRef idx="0">
+            <a:schemeClr val="accent1"/>
+          </a:effectRef>
+          <a:fontRef idx="minor">
+            <a:schemeClr val="lt1"/>
+          </a:fontRef>
+        </p:style>
+        <p:txBody>
+          <a:bodyPr anchor="ctr"/>
+          <a:p>
+            <a:pPr algn="ctr">
+              <a:defRPr/>
+            </a:pPr>
+            <a:endParaRPr>
+              <a:latin typeface="Times New Roman"/>
+              <a:cs typeface="Times New Roman"/>
+            </a:endParaRPr>
+          </a:p>
+        </p:txBody>
+      </p:sp>
+      <p:sp>
+        <p:nvSpPr>
+          <p:cNvPr id="1418461238" name=""/>
+          <p:cNvSpPr txBox="1"/>
+          <p:nvPr/>
+        </p:nvSpPr>
+        <p:spPr bwMode="auto">
+          <a:xfrm rot="0" flipH="0" flipV="0">
+            <a:off x="7752574" y="4193141"/>
+            <a:ext cx="1072650" cy="274679"/>
+          </a:xfrm>
+          <a:prstGeom prst="rect">
+            <a:avLst/>
+          </a:prstGeom>
+          <a:noFill/>
+        </p:spPr>
+        <p:txBody>
+          <a:bodyPr vertOverflow="overflow" horzOverflow="overflow" vert="horz" wrap="square" lIns="91440" tIns="45720" rIns="91440" bIns="45720" numCol="1" spcCol="0" rtlCol="0" fromWordArt="0" anchor="t" anchorCtr="0" forceAA="0" upright="0" compatLnSpc="0">
+            <a:spAutoFit/>
+          </a:bodyPr>
+          <a:p>
+            <a:pPr algn="ctr">
+              <a:defRPr/>
+            </a:pPr>
+            <a:r>
+              <a:rPr lang="en-US" sz="1200" b="0" i="0" u="none" strike="noStrike" cap="none" spc="0">
+                <a:solidFill>
+                  <a:schemeClr val="tx1"/>
+                </a:solidFill>
+                <a:latin typeface="Times New Roman"/>
+                <a:ea typeface="Times New Roman"/>
+                <a:cs typeface="Times New Roman"/>
+              </a:rPr>
+              <a:t>[1, 1, 4096]</a:t>
+            </a:r>
+            <a:endParaRPr sz="1200">
+              <a:latin typeface="Times New Roman"/>
+              <a:cs typeface="Times New Roman"/>
+            </a:endParaRPr>
+          </a:p>
+        </p:txBody>
+      </p:sp>
+      <p:sp>
+        <p:nvSpPr>
+          <p:cNvPr id="257456279" name=""/>
+          <p:cNvSpPr/>
+          <p:nvPr/>
+        </p:nvSpPr>
+        <p:spPr bwMode="auto">
+          <a:xfrm rot="0" flipH="0" flipV="0">
+            <a:off x="8749195" y="5402223"/>
+            <a:ext cx="518678" cy="494510"/>
+          </a:xfrm>
+          <a:prstGeom prst="cube">
+            <a:avLst>
+              <a:gd name="adj" fmla="val 25000"/>
+            </a:avLst>
+          </a:prstGeom>
+          <a:solidFill>
+            <a:schemeClr val="tx1">
+              <a:lumMod val="75000"/>
+              <a:lumOff val="25000"/>
+            </a:schemeClr>
+          </a:solidFill>
+          <a:ln w="12700" cap="flat" cmpd="sng" algn="ctr">
+            <a:solidFill>
+              <a:schemeClr val="tx1"/>
+            </a:solidFill>
+            <a:prstDash val="solid"/>
+            <a:miter lim="800000"/>
+          </a:ln>
+        </p:spPr>
+        <p:style>
+          <a:lnRef idx="2">
+            <a:schemeClr val="accent1">
+              <a:shade val="50000"/>
+            </a:schemeClr>
+          </a:lnRef>
+          <a:fillRef idx="1">
+            <a:schemeClr val="accent1"/>
+          </a:fillRef>
+          <a:effectRef idx="0">
+            <a:schemeClr val="accent1"/>
+          </a:effectRef>
+          <a:fontRef idx="minor">
+            <a:schemeClr val="lt1"/>
+          </a:fontRef>
+        </p:style>
+        <p:txBody>
+          <a:bodyPr anchor="ctr"/>
+          <a:p>
+            <a:pPr algn="ctr">
+              <a:defRPr/>
+            </a:pPr>
+            <a:endParaRPr>
+              <a:latin typeface="Times New Roman"/>
+              <a:cs typeface="Times New Roman"/>
+            </a:endParaRPr>
+          </a:p>
+        </p:txBody>
+      </p:sp>
+      <p:sp>
+        <p:nvSpPr>
+          <p:cNvPr id="717884340" name=""/>
+          <p:cNvSpPr/>
+          <p:nvPr/>
+        </p:nvSpPr>
+        <p:spPr bwMode="auto">
+          <a:xfrm rot="5400000" flipH="0" flipV="0">
+            <a:off x="8893144" y="5145707"/>
+            <a:ext cx="211458" cy="162060"/>
+          </a:xfrm>
+          <a:prstGeom prst="rightArrow">
+            <a:avLst>
+              <a:gd name="adj1" fmla="val 50000"/>
+              <a:gd name="adj2" fmla="val 50000"/>
+            </a:avLst>
+          </a:prstGeom>
+          <a:solidFill>
+            <a:schemeClr val="tx1"/>
+          </a:solidFill>
+          <a:ln w="12699" cap="flat" cmpd="sng" algn="ctr">
+            <a:solidFill>
+              <a:schemeClr val="tx1"/>
+            </a:solidFill>
+            <a:prstDash val="solid"/>
+            <a:miter lim="800000"/>
+          </a:ln>
+        </p:spPr>
+        <p:style>
+          <a:lnRef idx="2">
+            <a:schemeClr val="accent1">
+              <a:shade val="50000"/>
+            </a:schemeClr>
+          </a:lnRef>
+          <a:fillRef idx="1">
+            <a:schemeClr val="accent1"/>
+          </a:fillRef>
+          <a:effectRef idx="0">
+            <a:schemeClr val="accent1"/>
+          </a:effectRef>
+          <a:fontRef idx="minor">
+            <a:schemeClr val="lt1"/>
+          </a:fontRef>
+        </p:style>
+        <p:txBody>
+          <a:bodyPr anchor="ctr"/>
+          <a:p>
+            <a:pPr algn="ctr">
+              <a:defRPr/>
+            </a:pPr>
+            <a:endParaRPr>
+              <a:latin typeface="Times New Roman"/>
+              <a:cs typeface="Times New Roman"/>
+            </a:endParaRPr>
+          </a:p>
+        </p:txBody>
+      </p:sp>
+      <p:sp>
+        <p:nvSpPr>
+          <p:cNvPr id="1458319005" name=""/>
+          <p:cNvSpPr txBox="1"/>
+          <p:nvPr/>
+        </p:nvSpPr>
+        <p:spPr bwMode="auto">
+          <a:xfrm rot="0" flipH="0" flipV="0">
+            <a:off x="9314196" y="5496898"/>
+            <a:ext cx="773150" cy="305159"/>
+          </a:xfrm>
+          <a:prstGeom prst="rect">
+            <a:avLst/>
+          </a:prstGeom>
+          <a:noFill/>
+        </p:spPr>
+        <p:txBody>
+          <a:bodyPr vertOverflow="overflow" horzOverflow="overflow" vert="horz" wrap="square" lIns="91440" tIns="45720" rIns="91440" bIns="45720" numCol="1" spcCol="0" rtlCol="0" fromWordArt="0" anchor="t" anchorCtr="0" forceAA="0" upright="0" compatLnSpc="0">
+            <a:spAutoFit/>
+          </a:bodyPr>
+          <a:p>
+            <a:pPr algn="l">
+              <a:defRPr/>
+            </a:pPr>
+            <a:r>
+              <a:rPr sz="1400">
+                <a:latin typeface="Times New Roman"/>
+                <a:cs typeface="Times New Roman"/>
+              </a:rPr>
+              <a:t>[4096]</a:t>
+            </a:r>
+            <a:endParaRPr sz="1100">
+              <a:latin typeface="Times New Roman"/>
+              <a:cs typeface="Times New Roman"/>
+            </a:endParaRPr>
+          </a:p>
+        </p:txBody>
+      </p:sp>
+      <p:sp>
+        <p:nvSpPr>
+          <p:cNvPr id="637826588" name=""/>
+          <p:cNvSpPr txBox="1"/>
+          <p:nvPr/>
+        </p:nvSpPr>
+        <p:spPr bwMode="auto">
+          <a:xfrm rot="0" flipH="0" flipV="0">
+            <a:off x="9700771" y="2046163"/>
+            <a:ext cx="1080210" cy="259439"/>
+          </a:xfrm>
+          <a:prstGeom prst="rect">
+            <a:avLst/>
+          </a:prstGeom>
+          <a:noFill/>
+        </p:spPr>
+        <p:txBody>
+          <a:bodyPr vertOverflow="overflow" horzOverflow="overflow" vert="horz" wrap="square" lIns="91440" tIns="45720" rIns="91440" bIns="45720" numCol="1" spcCol="0" rtlCol="0" fromWordArt="0" anchor="t" anchorCtr="0" forceAA="0" upright="0" compatLnSpc="0">
+            <a:spAutoFit/>
+          </a:bodyPr>
+          <a:p>
+            <a:pPr algn="ctr">
+              <a:defRPr/>
+            </a:pPr>
+            <a:r>
+              <a:rPr lang="en-US" sz="1100" b="0" i="0" u="none" strike="noStrike" cap="none" spc="0">
+                <a:solidFill>
+                  <a:schemeClr val="tx1"/>
+                </a:solidFill>
+                <a:latin typeface="Times New Roman"/>
+                <a:ea typeface="Times New Roman"/>
+                <a:cs typeface="Times New Roman"/>
+              </a:rPr>
+              <a:t>(dk = 4096)</a:t>
+            </a:r>
+            <a:endParaRPr sz="1100">
+              <a:latin typeface="Times New Roman"/>
+              <a:cs typeface="Times New Roman"/>
+            </a:endParaRPr>
+          </a:p>
+        </p:txBody>
+      </p:sp>
+      <p:sp>
+        <p:nvSpPr>
+          <p:cNvPr id="58197489" name=""/>
+          <p:cNvSpPr/>
+          <p:nvPr/>
+        </p:nvSpPr>
+        <p:spPr bwMode="auto">
+          <a:xfrm rot="5399976" flipH="0" flipV="0">
+            <a:off x="952727" y="3531395"/>
+            <a:ext cx="486679" cy="243234"/>
+          </a:xfrm>
+          <a:prstGeom prst="rightArrow">
+            <a:avLst>
+              <a:gd name="adj1" fmla="val 50000"/>
+              <a:gd name="adj2" fmla="val 50000"/>
+            </a:avLst>
+          </a:prstGeom>
+          <a:solidFill>
+            <a:schemeClr val="tx1"/>
+          </a:solidFill>
+          <a:ln w="12699" cap="flat" cmpd="sng" algn="ctr">
+            <a:solidFill>
+              <a:schemeClr val="tx1"/>
+            </a:solidFill>
+            <a:prstDash val="solid"/>
+            <a:miter lim="800000"/>
+          </a:ln>
+        </p:spPr>
+        <p:style>
+          <a:lnRef idx="2">
+            <a:schemeClr val="accent1">
+              <a:shade val="50000"/>
+            </a:schemeClr>
+          </a:lnRef>
+          <a:fillRef idx="1">
+            <a:schemeClr val="accent1"/>
+          </a:fillRef>
+          <a:effectRef idx="0">
+            <a:schemeClr val="accent1"/>
+          </a:effectRef>
+          <a:fontRef idx="minor">
+            <a:schemeClr val="lt1"/>
+          </a:fontRef>
+        </p:style>
+        <p:txBody>
+          <a:bodyPr anchor="ctr"/>
+          <a:p>
+            <a:pPr algn="ctr">
+              <a:defRPr/>
+            </a:pPr>
+            <a:endParaRPr>
+              <a:latin typeface="Times New Roman"/>
+              <a:cs typeface="Times New Roman"/>
+            </a:endParaRPr>
+          </a:p>
+        </p:txBody>
+      </p:sp>
+      <p:sp>
+        <p:nvSpPr>
+          <p:cNvPr id="1858579269" name=""/>
+          <p:cNvSpPr/>
+          <p:nvPr/>
+        </p:nvSpPr>
+        <p:spPr bwMode="auto">
+          <a:xfrm rot="0" flipH="0" flipV="0">
+            <a:off x="319837" y="4093567"/>
+            <a:ext cx="1742668" cy="1001985"/>
+          </a:xfrm>
+          <a:prstGeom prst="rect">
+            <a:avLst/>
+          </a:prstGeom>
+          <a:gradFill>
+            <a:gsLst>
+              <a:gs pos="19000">
+                <a:schemeClr val="tx1">
+                  <a:lumMod val="50000"/>
+                  <a:lumOff val="50000"/>
+                </a:schemeClr>
+              </a:gs>
+              <a:gs pos="100000">
+                <a:srgbClr val="FFFFFF"/>
+              </a:gs>
+            </a:gsLst>
+            <a:lin ang="0" scaled="1"/>
+          </a:gradFill>
+          <a:ln w="19049" cap="flat" cmpd="sng" algn="ctr">
+            <a:solidFill>
+              <a:schemeClr val="tx1">
+                <a:lumMod val="65098"/>
+                <a:lumOff val="34902"/>
+                <a:alpha val="99999"/>
+              </a:schemeClr>
+            </a:solidFill>
+            <a:prstDash val="solid"/>
+            <a:miter lim="800000"/>
+          </a:ln>
+        </p:spPr>
+        <p:style>
+          <a:lnRef idx="2">
+            <a:schemeClr val="accent1">
+              <a:shade val="50000"/>
+            </a:schemeClr>
+          </a:lnRef>
+          <a:fillRef idx="1">
+            <a:schemeClr val="accent1"/>
+          </a:fillRef>
+          <a:effectRef idx="0">
+            <a:schemeClr val="accent1"/>
+          </a:effectRef>
+          <a:fontRef idx="minor">
+            <a:schemeClr val="lt1"/>
+          </a:fontRef>
+        </p:style>
+        <p:txBody>
+          <a:bodyPr anchor="ctr"/>
+          <a:p>
+            <a:pPr algn="ctr">
+              <a:defRPr/>
+            </a:pPr>
+            <a:r>
+              <a:rPr sz="2200" b="1">
+                <a:solidFill>
+                  <a:schemeClr val="tx1"/>
+                </a:solidFill>
+                <a:latin typeface="Times New Roman"/>
+                <a:ea typeface="Times New Roman"/>
+                <a:cs typeface="Times New Roman"/>
+              </a:rPr>
+              <a:t>Aligner</a:t>
+            </a:r>
+            <a:endParaRPr sz="2200" b="1">
+              <a:solidFill>
+                <a:schemeClr val="tx1"/>
+              </a:solidFill>
+              <a:latin typeface="Times New Roman"/>
+              <a:cs typeface="Times New Roman"/>
+            </a:endParaRPr>
+          </a:p>
+          <a:p>
+            <a:pPr algn="ctr">
+              <a:defRPr/>
+            </a:pPr>
+            <a:r>
+              <a:rPr lang="en-US" sz="1600" b="0" i="0" u="none" strike="noStrike" cap="none" spc="0">
+                <a:solidFill>
+                  <a:srgbClr val="000000"/>
+                </a:solidFill>
+                <a:latin typeface="Times New Roman"/>
+                <a:ea typeface="Times New Roman"/>
+                <a:cs typeface="Times New Roman"/>
+              </a:rPr>
+              <a:t>(Latent Space Projection)</a:t>
+            </a:r>
+            <a:endParaRPr sz="2200" b="1">
+              <a:solidFill>
+                <a:schemeClr val="tx1"/>
+              </a:solidFill>
+              <a:latin typeface="Times New Roman"/>
+              <a:cs typeface="Times New Roman"/>
+            </a:endParaRPr>
+          </a:p>
+        </p:txBody>
+      </p:sp>
+      <p:sp>
+        <p:nvSpPr>
+          <p:cNvPr id="242719654" name=""/>
+          <p:cNvSpPr/>
+          <p:nvPr/>
+        </p:nvSpPr>
+        <p:spPr bwMode="auto">
+          <a:xfrm rot="0" flipH="0" flipV="0">
+            <a:off x="188095" y="1445323"/>
+            <a:ext cx="2354211" cy="1844054"/>
+          </a:xfrm>
+          <a:prstGeom prst="flowChartAlternateProcess">
+            <a:avLst/>
+          </a:prstGeom>
+          <a:noFill/>
+          <a:ln w="19049" cap="flat" cmpd="sng" algn="ctr">
+            <a:solidFill>
+              <a:schemeClr val="tx1"/>
+            </a:solidFill>
+            <a:prstDash val="solid"/>
+            <a:miter lim="800000"/>
+          </a:ln>
+        </p:spPr>
+        <p:style>
+          <a:lnRef idx="2">
+            <a:schemeClr val="accent1">
+              <a:shade val="50000"/>
+            </a:schemeClr>
+          </a:lnRef>
+          <a:fillRef idx="1">
+            <a:schemeClr val="accent1"/>
+          </a:fillRef>
+          <a:effectRef idx="0">
+            <a:schemeClr val="accent1"/>
+          </a:effectRef>
+          <a:fontRef idx="minor">
+            <a:schemeClr val="lt1"/>
+          </a:fontRef>
+        </p:style>
+      </p:sp>
+      <p:sp>
+        <p:nvSpPr>
+          <p:cNvPr id="285776780" name=""/>
+          <p:cNvSpPr/>
+          <p:nvPr/>
+        </p:nvSpPr>
+        <p:spPr bwMode="auto">
+          <a:xfrm rot="0" flipH="0" flipV="0">
+            <a:off x="283852" y="5701510"/>
+            <a:ext cx="510262" cy="971100"/>
+          </a:xfrm>
+          <a:prstGeom prst="cube">
+            <a:avLst>
+              <a:gd name="adj" fmla="val 25000"/>
+            </a:avLst>
+          </a:prstGeom>
+          <a:solidFill>
+            <a:srgbClr val="CF73E6"/>
+          </a:solidFill>
+          <a:ln w="12700" cap="flat" cmpd="sng" algn="ctr">
+            <a:solidFill>
+              <a:schemeClr val="tx1"/>
+            </a:solidFill>
+            <a:prstDash val="solid"/>
+            <a:miter lim="800000"/>
+          </a:ln>
+        </p:spPr>
+        <p:style>
+          <a:lnRef idx="2">
+            <a:schemeClr val="accent1">
+              <a:shade val="50000"/>
+            </a:schemeClr>
+          </a:lnRef>
+          <a:fillRef idx="1">
+            <a:schemeClr val="accent1"/>
+          </a:fillRef>
+          <a:effectRef idx="0">
+            <a:schemeClr val="accent1"/>
+          </a:effectRef>
+          <a:fontRef idx="minor">
+            <a:schemeClr val="lt1"/>
+          </a:fontRef>
+        </p:style>
+        <p:txBody>
+          <a:bodyPr anchor="ctr"/>
+          <a:p>
+            <a:pPr algn="ctr">
+              <a:defRPr/>
+            </a:pPr>
+            <a:endParaRPr>
+              <a:latin typeface="Times New Roman"/>
+              <a:cs typeface="Times New Roman"/>
+            </a:endParaRPr>
+          </a:p>
+        </p:txBody>
+      </p:sp>
+      <p:sp>
+        <p:nvSpPr>
+          <p:cNvPr id="543845206" name=""/>
+          <p:cNvSpPr/>
+          <p:nvPr/>
+        </p:nvSpPr>
+        <p:spPr bwMode="auto">
+          <a:xfrm rot="5399976" flipH="0" flipV="0">
+            <a:off x="982768" y="5366597"/>
+            <a:ext cx="426592" cy="243234"/>
+          </a:xfrm>
+          <a:prstGeom prst="rightArrow">
+            <a:avLst>
+              <a:gd name="adj1" fmla="val 50000"/>
+              <a:gd name="adj2" fmla="val 50000"/>
+            </a:avLst>
+          </a:prstGeom>
+          <a:solidFill>
+            <a:schemeClr val="tx1"/>
+          </a:solidFill>
+          <a:ln w="12699" cap="flat" cmpd="sng" algn="ctr">
+            <a:solidFill>
+              <a:schemeClr val="tx1"/>
+            </a:solidFill>
+            <a:prstDash val="solid"/>
+            <a:miter lim="800000"/>
+          </a:ln>
+        </p:spPr>
+        <p:style>
+          <a:lnRef idx="2">
+            <a:schemeClr val="accent1">
+              <a:shade val="50000"/>
+            </a:schemeClr>
+          </a:lnRef>
+          <a:fillRef idx="1">
+            <a:schemeClr val="accent1"/>
+          </a:fillRef>
+          <a:effectRef idx="0">
+            <a:schemeClr val="accent1"/>
+          </a:effectRef>
+          <a:fontRef idx="minor">
+            <a:schemeClr val="lt1"/>
+          </a:fontRef>
+        </p:style>
+        <p:txBody>
+          <a:bodyPr anchor="ctr"/>
+          <a:p>
+            <a:pPr algn="ctr">
+              <a:defRPr/>
+            </a:pPr>
+            <a:endParaRPr>
+              <a:latin typeface="Times New Roman"/>
+              <a:cs typeface="Times New Roman"/>
+            </a:endParaRPr>
+          </a:p>
+        </p:txBody>
+      </p:sp>
+      <p:sp>
+        <p:nvSpPr>
+          <p:cNvPr id="660117899" name=""/>
+          <p:cNvSpPr txBox="1"/>
+          <p:nvPr/>
+        </p:nvSpPr>
+        <p:spPr bwMode="auto">
+          <a:xfrm rot="0" flipH="0" flipV="0">
+            <a:off x="923625" y="5938812"/>
+            <a:ext cx="1835138" cy="518519"/>
+          </a:xfrm>
+          <a:prstGeom prst="rect">
+            <a:avLst/>
+          </a:prstGeom>
+          <a:noFill/>
+        </p:spPr>
+        <p:txBody>
+          <a:bodyPr vertOverflow="overflow" horzOverflow="overflow" vert="horz" wrap="square" lIns="91440" tIns="45720" rIns="91440" bIns="45720" numCol="1" spcCol="0" rtlCol="0" fromWordArt="0" anchor="t" anchorCtr="0" forceAA="0" upright="0" compatLnSpc="0">
+            <a:spAutoFit/>
+          </a:bodyPr>
+          <a:p>
+            <a:pPr algn="l">
+              <a:defRPr/>
+            </a:pPr>
+            <a:r>
+              <a:rPr sz="1400" b="1">
+                <a:latin typeface="Times New Roman"/>
+                <a:ea typeface="Times New Roman"/>
+                <a:cs typeface="Times New Roman"/>
+              </a:rPr>
+              <a:t>Aligned Embedding</a:t>
+            </a:r>
+            <a:endParaRPr sz="1400" b="1">
+              <a:latin typeface="Times New Roman"/>
+              <a:ea typeface="Times New Roman"/>
+              <a:cs typeface="Times New Roman"/>
+            </a:endParaRPr>
+          </a:p>
+          <a:p>
+            <a:pPr algn="l">
+              <a:defRPr/>
+            </a:pPr>
+            <a:r>
+              <a:rPr sz="1400">
+                <a:latin typeface="Times New Roman"/>
+                <a:ea typeface="Times New Roman"/>
+                <a:cs typeface="Times New Roman"/>
+              </a:rPr>
+              <a:t>B, Num_Terms, 4096</a:t>
+            </a:r>
+            <a:endParaRPr sz="1400">
+              <a:latin typeface="Times New Roman"/>
+              <a:cs typeface="Times New Roman"/>
+            </a:endParaRPr>
+          </a:p>
+        </p:txBody>
+      </p:sp>
+      <p:sp>
+        <p:nvSpPr>
+          <p:cNvPr id="1629199070" name=""/>
+          <p:cNvSpPr txBox="1"/>
+          <p:nvPr/>
+        </p:nvSpPr>
+        <p:spPr bwMode="auto">
+          <a:xfrm rot="0" flipH="0" flipV="0">
+            <a:off x="3348786" y="3936119"/>
+            <a:ext cx="2905081" cy="1371960"/>
+          </a:xfrm>
+          <a:prstGeom prst="rect">
+            <a:avLst/>
+          </a:prstGeom>
+          <a:noFill/>
+          <a:ln w="12700">
+            <a:solidFill>
+              <a:schemeClr val="tx1"/>
+            </a:solidFill>
+            <a:prstDash val="solid"/>
+          </a:ln>
+        </p:spPr>
+        <p:txBody>
+          <a:bodyPr vertOverflow="overflow" horzOverflow="overflow" vert="horz" wrap="square" lIns="91440" tIns="45720" rIns="91440" bIns="45720" numCol="1" spcCol="0" rtlCol="0" fromWordArt="0" anchor="t" anchorCtr="0" forceAA="0" upright="0" compatLnSpc="0">
+            <a:spAutoFit/>
+          </a:bodyPr>
+          <a:p>
+            <a:pPr algn="l">
+              <a:defRPr/>
+            </a:pPr>
+            <a:r>
+              <a:rPr sz="1400">
+                <a:latin typeface="Times New Roman"/>
+                <a:cs typeface="Times New Roman"/>
+              </a:rPr>
+              <a:t>Each Node:</a:t>
+            </a:r>
+            <a:endParaRPr sz="1400">
+              <a:latin typeface="Times New Roman"/>
+              <a:cs typeface="Times New Roman"/>
+            </a:endParaRPr>
+          </a:p>
+          <a:p>
+            <a:pPr marL="239821" indent="-239821" algn="l">
+              <a:buFont typeface="Arial"/>
+              <a:buChar char="•"/>
+              <a:defRPr/>
+            </a:pPr>
+            <a:r>
+              <a:rPr sz="1400">
+                <a:latin typeface="Times New Roman"/>
+                <a:cs typeface="Times New Roman"/>
+              </a:rPr>
+              <a:t>ID</a:t>
+            </a:r>
+            <a:endParaRPr sz="1400">
+              <a:latin typeface="Times New Roman"/>
+              <a:cs typeface="Times New Roman"/>
+            </a:endParaRPr>
+          </a:p>
+          <a:p>
+            <a:pPr marL="239821" indent="-239821" algn="l">
+              <a:buFont typeface="Arial"/>
+              <a:buChar char="•"/>
+              <a:defRPr/>
+            </a:pPr>
+            <a:r>
+              <a:rPr sz="1400">
+                <a:latin typeface="Times New Roman"/>
+                <a:cs typeface="Times New Roman"/>
+              </a:rPr>
+              <a:t>Label</a:t>
+            </a:r>
+            <a:endParaRPr sz="1400">
+              <a:latin typeface="Times New Roman"/>
+              <a:cs typeface="Times New Roman"/>
+            </a:endParaRPr>
+          </a:p>
+          <a:p>
+            <a:pPr marL="239821" indent="-239821" algn="l">
+              <a:buFont typeface="Arial"/>
+              <a:buChar char="•"/>
+              <a:defRPr/>
+            </a:pPr>
+            <a:r>
+              <a:rPr sz="1400">
+                <a:latin typeface="Times New Roman"/>
+                <a:cs typeface="Times New Roman"/>
+              </a:rPr>
+              <a:t>Embedding (</a:t>
+            </a:r>
+            <a:r>
+              <a:rPr sz="1400" b="1">
+                <a:latin typeface="Times New Roman"/>
+                <a:cs typeface="Times New Roman"/>
+              </a:rPr>
+              <a:t>used in operations</a:t>
+            </a:r>
+            <a:r>
+              <a:rPr sz="1400">
+                <a:latin typeface="Times New Roman"/>
+                <a:cs typeface="Times New Roman"/>
+              </a:rPr>
+              <a:t>)</a:t>
+            </a:r>
+            <a:endParaRPr sz="1400">
+              <a:latin typeface="Times New Roman"/>
+              <a:cs typeface="Times New Roman"/>
+            </a:endParaRPr>
+          </a:p>
+          <a:p>
+            <a:pPr marL="239821" indent="-239821" algn="l">
+              <a:buFont typeface="Arial"/>
+              <a:buChar char="•"/>
+              <a:defRPr/>
+            </a:pPr>
+            <a:r>
+              <a:rPr sz="1400">
+                <a:latin typeface="Times New Roman"/>
+                <a:cs typeface="Times New Roman"/>
+              </a:rPr>
+              <a:t>attn_weights</a:t>
+            </a:r>
+            <a:endParaRPr sz="1400">
+              <a:latin typeface="Times New Roman"/>
+              <a:cs typeface="Times New Roman"/>
+            </a:endParaRPr>
+          </a:p>
+          <a:p>
+            <a:pPr marL="239821" indent="-239821" algn="l">
+              <a:buFont typeface="Arial"/>
+              <a:buChar char="•"/>
+              <a:defRPr/>
+            </a:pPr>
+            <a:r>
+              <a:rPr sz="1400">
+                <a:latin typeface="Times New Roman"/>
+                <a:cs typeface="Times New Roman"/>
+              </a:rPr>
+              <a:t>Score</a:t>
+            </a:r>
+            <a:endParaRPr sz="1400">
+              <a:latin typeface="Times New Roman"/>
+              <a:cs typeface="Times New Roman"/>
+            </a:endParaRPr>
+          </a:p>
+        </p:txBody>
+      </p:sp>
+      <p:sp>
+        <p:nvSpPr>
+          <p:cNvPr id="690488158" name=""/>
+          <p:cNvSpPr/>
+          <p:nvPr/>
+        </p:nvSpPr>
+        <p:spPr bwMode="auto">
+          <a:xfrm rot="0" flipH="0" flipV="0">
+            <a:off x="129251" y="112690"/>
+            <a:ext cx="1203660" cy="701779"/>
+          </a:xfrm>
+          <a:prstGeom prst="rect">
+            <a:avLst/>
+          </a:prstGeom>
+          <a:gradFill>
+            <a:gsLst>
+              <a:gs pos="19000">
+                <a:schemeClr val="accent2">
+                  <a:lumMod val="60000"/>
+                  <a:lumOff val="40000"/>
+                </a:schemeClr>
+              </a:gs>
+              <a:gs pos="100000">
+                <a:srgbClr val="FFFFFF"/>
+              </a:gs>
+            </a:gsLst>
+            <a:lin ang="0" scaled="1"/>
+          </a:gradFill>
+          <a:ln w="19049" cap="flat" cmpd="sng" algn="ctr">
+            <a:solidFill>
+              <a:schemeClr val="accent2">
+                <a:lumMod val="60000"/>
+                <a:lumOff val="40000"/>
+                <a:alpha val="99999"/>
+              </a:schemeClr>
+            </a:solidFill>
+            <a:prstDash val="solid"/>
+            <a:miter lim="800000"/>
+          </a:ln>
+        </p:spPr>
+        <p:style>
+          <a:lnRef idx="2">
+            <a:schemeClr val="accent1">
+              <a:shade val="50000"/>
+            </a:schemeClr>
+          </a:lnRef>
+          <a:fillRef idx="1">
+            <a:schemeClr val="accent1"/>
+          </a:fillRef>
+          <a:effectRef idx="0">
+            <a:schemeClr val="accent1"/>
+          </a:effectRef>
+          <a:fontRef idx="minor">
+            <a:schemeClr val="lt1"/>
+          </a:fontRef>
+        </p:style>
+        <p:txBody>
+          <a:bodyPr anchor="ctr"/>
+          <a:p>
+            <a:pPr algn="ctr">
+              <a:defRPr/>
+            </a:pPr>
+            <a:r>
+              <a:rPr sz="1400" b="0">
+                <a:solidFill>
+                  <a:schemeClr val="tx1"/>
+                </a:solidFill>
+                <a:latin typeface="Times New Roman"/>
+                <a:ea typeface="Times New Roman"/>
+                <a:cs typeface="Times New Roman"/>
+              </a:rPr>
+              <a:t>QWEN3 Embeddings</a:t>
+            </a:r>
+            <a:endParaRPr sz="1400" b="0">
+              <a:latin typeface="Times New Roman"/>
+              <a:cs typeface="Times New Roman"/>
+            </a:endParaRPr>
+          </a:p>
+        </p:txBody>
+      </p:sp>
+      <p:sp>
+        <p:nvSpPr>
+          <p:cNvPr id="1198344344" name=""/>
+          <p:cNvSpPr/>
+          <p:nvPr/>
+        </p:nvSpPr>
+        <p:spPr bwMode="auto">
+          <a:xfrm rot="0" flipH="0" flipV="0">
+            <a:off x="1409889" y="372464"/>
+            <a:ext cx="297538" cy="182232"/>
+          </a:xfrm>
+          <a:prstGeom prst="rightArrow">
+            <a:avLst>
+              <a:gd name="adj1" fmla="val 50000"/>
+              <a:gd name="adj2" fmla="val 50000"/>
+            </a:avLst>
+          </a:prstGeom>
+          <a:solidFill>
+            <a:schemeClr val="tx1"/>
+          </a:solidFill>
+          <a:ln w="12699" cap="flat" cmpd="sng" algn="ctr">
+            <a:solidFill>
+              <a:schemeClr val="tx1"/>
+            </a:solidFill>
+            <a:prstDash val="solid"/>
+            <a:miter lim="800000"/>
+          </a:ln>
+        </p:spPr>
+        <p:style>
+          <a:lnRef idx="2">
+            <a:schemeClr val="accent1">
+              <a:shade val="50000"/>
+            </a:schemeClr>
+          </a:lnRef>
+          <a:fillRef idx="1">
+            <a:schemeClr val="accent1"/>
+          </a:fillRef>
+          <a:effectRef idx="0">
+            <a:schemeClr val="accent1"/>
+          </a:effectRef>
+          <a:fontRef idx="minor">
+            <a:schemeClr val="lt1"/>
+          </a:fontRef>
+        </p:style>
+        <p:txBody>
+          <a:bodyPr anchor="ctr"/>
+          <a:p>
+            <a:pPr algn="ctr">
+              <a:defRPr/>
+            </a:pPr>
+            <a:endParaRPr>
+              <a:latin typeface="Times New Roman"/>
+              <a:cs typeface="Times New Roman"/>
+            </a:endParaRPr>
+          </a:p>
+        </p:txBody>
+      </p:sp>
+      <p:sp>
+        <p:nvSpPr>
+          <p:cNvPr id="1495159772" name=""/>
+          <p:cNvSpPr/>
+          <p:nvPr/>
+        </p:nvSpPr>
+        <p:spPr bwMode="auto">
+          <a:xfrm rot="0" flipH="0" flipV="0">
+            <a:off x="1841195" y="273207"/>
+            <a:ext cx="423316" cy="380743"/>
+          </a:xfrm>
+          <a:prstGeom prst="cube">
+            <a:avLst>
+              <a:gd name="adj" fmla="val 25000"/>
+            </a:avLst>
+          </a:prstGeom>
+          <a:solidFill>
+            <a:schemeClr val="accent2">
+              <a:lumMod val="60000"/>
+              <a:lumOff val="40000"/>
+            </a:schemeClr>
+          </a:solidFill>
+          <a:ln w="12700" cap="flat" cmpd="sng" algn="ctr">
+            <a:solidFill>
+              <a:schemeClr val="tx1"/>
+            </a:solidFill>
+            <a:prstDash val="solid"/>
+            <a:miter lim="800000"/>
+          </a:ln>
+        </p:spPr>
+        <p:style>
+          <a:lnRef idx="2">
+            <a:schemeClr val="accent1">
+              <a:shade val="50000"/>
+            </a:schemeClr>
+          </a:lnRef>
+          <a:fillRef idx="1">
+            <a:schemeClr val="accent1"/>
+          </a:fillRef>
+          <a:effectRef idx="0">
+            <a:schemeClr val="accent1"/>
+          </a:effectRef>
+          <a:fontRef idx="minor">
+            <a:schemeClr val="lt1"/>
+          </a:fontRef>
+        </p:style>
+        <p:txBody>
+          <a:bodyPr anchor="ctr"/>
+          <a:p>
+            <a:pPr algn="ctr">
+              <a:defRPr/>
+            </a:pPr>
+            <a:endParaRPr>
+              <a:latin typeface="Times New Roman"/>
+              <a:cs typeface="Times New Roman"/>
+            </a:endParaRPr>
+          </a:p>
+        </p:txBody>
+      </p:sp>
+      <p:sp>
+        <p:nvSpPr>
+          <p:cNvPr id="935471570" name=""/>
+          <p:cNvSpPr txBox="1"/>
+          <p:nvPr/>
+        </p:nvSpPr>
+        <p:spPr bwMode="auto">
+          <a:xfrm rot="0" flipH="0" flipV="0">
+            <a:off x="2152055" y="234800"/>
+            <a:ext cx="2554444" cy="457559"/>
+          </a:xfrm>
+          <a:prstGeom prst="rect">
+            <a:avLst/>
+          </a:prstGeom>
+          <a:noFill/>
+        </p:spPr>
+        <p:txBody>
+          <a:bodyPr vertOverflow="overflow" horzOverflow="overflow" vert="horz" wrap="square" lIns="91440" tIns="45720" rIns="91440" bIns="45720" numCol="1" spcCol="0" rtlCol="0" fromWordArt="0" anchor="t" anchorCtr="0" forceAA="0" upright="0" compatLnSpc="0">
+            <a:spAutoFit/>
+          </a:bodyPr>
+          <a:p>
+            <a:pPr algn="ctr">
+              <a:defRPr/>
+            </a:pPr>
+            <a:r>
+              <a:rPr sz="1200">
+                <a:latin typeface="Times New Roman"/>
+                <a:ea typeface="Times New Roman"/>
+                <a:cs typeface="Times New Roman"/>
+              </a:rPr>
+              <a:t>Embeddings for candidate relations</a:t>
+            </a:r>
+            <a:endParaRPr sz="1200">
+              <a:latin typeface="Times New Roman"/>
+              <a:ea typeface="Times New Roman"/>
+              <a:cs typeface="Times New Roman"/>
+            </a:endParaRPr>
+          </a:p>
+          <a:p>
+            <a:pPr algn="ctr">
+              <a:defRPr/>
+            </a:pPr>
+            <a:r>
+              <a:rPr lang="en-US" sz="1200" b="0" i="0" u="none" strike="noStrike" cap="none" spc="0">
+                <a:solidFill>
+                  <a:schemeClr val="tx1"/>
+                </a:solidFill>
+                <a:latin typeface="Times New Roman"/>
+                <a:ea typeface="Times New Roman"/>
+                <a:cs typeface="Times New Roman"/>
+              </a:rPr>
+              <a:t>[</a:t>
+            </a:r>
+            <a:r>
+              <a:rPr lang="en-US" sz="1200" b="1" i="0" u="none" strike="noStrike" cap="none" spc="0">
+                <a:solidFill>
+                  <a:schemeClr val="tx1"/>
+                </a:solidFill>
+                <a:latin typeface="Times New Roman"/>
+                <a:ea typeface="Times New Roman"/>
+                <a:cs typeface="Times New Roman"/>
+              </a:rPr>
+              <a:t>"near", "mounted on"</a:t>
+            </a:r>
+            <a:r>
+              <a:rPr lang="en-US" sz="1200" b="0" i="0" u="none" strike="noStrike" cap="none" spc="0">
+                <a:solidFill>
+                  <a:schemeClr val="tx1"/>
+                </a:solidFill>
+                <a:latin typeface="Times New Roman"/>
+                <a:ea typeface="Times New Roman"/>
+                <a:cs typeface="Times New Roman"/>
+              </a:rPr>
+              <a:t>, ...]</a:t>
+            </a:r>
+            <a:endParaRPr sz="1200">
+              <a:latin typeface="Times New Roman"/>
+              <a:cs typeface="Times New Roman"/>
+            </a:endParaRPr>
+          </a:p>
+        </p:txBody>
+      </p:sp>
+      <p:sp>
+        <p:nvSpPr>
+          <p:cNvPr id="1562032278" name=""/>
+          <p:cNvSpPr/>
+          <p:nvPr/>
+        </p:nvSpPr>
+        <p:spPr bwMode="auto">
+          <a:xfrm rot="5399976" flipH="0" flipV="0">
+            <a:off x="1857275" y="993362"/>
+            <a:ext cx="391155" cy="198406"/>
+          </a:xfrm>
+          <a:prstGeom prst="rightArrow">
+            <a:avLst>
+              <a:gd name="adj1" fmla="val 50000"/>
+              <a:gd name="adj2" fmla="val 50000"/>
+            </a:avLst>
+          </a:prstGeom>
+          <a:solidFill>
+            <a:schemeClr val="tx1"/>
+          </a:solidFill>
+          <a:ln w="12699" cap="flat" cmpd="sng" algn="ctr">
+            <a:solidFill>
+              <a:schemeClr val="tx1"/>
+            </a:solidFill>
+            <a:prstDash val="solid"/>
+            <a:miter lim="800000"/>
+          </a:ln>
+        </p:spPr>
+        <p:style>
+          <a:lnRef idx="2">
+            <a:schemeClr val="accent1">
+              <a:shade val="50000"/>
+            </a:schemeClr>
+          </a:lnRef>
+          <a:fillRef idx="1">
+            <a:schemeClr val="accent1"/>
+          </a:fillRef>
+          <a:effectRef idx="0">
+            <a:schemeClr val="accent1"/>
+          </a:effectRef>
+          <a:fontRef idx="minor">
+            <a:schemeClr val="lt1"/>
+          </a:fontRef>
+        </p:style>
+        <p:txBody>
+          <a:bodyPr anchor="ctr"/>
+          <a:p>
+            <a:pPr algn="ctr">
+              <a:defRPr/>
+            </a:pPr>
+            <a:endParaRPr>
+              <a:latin typeface="Times New Roman"/>
+              <a:cs typeface="Times New Roman"/>
+            </a:endParaRPr>
+          </a:p>
+        </p:txBody>
+      </p:sp>
+    </p:spTree>
+  </p:cSld>
+  <p:clrMapOvr>
+    <a:masterClrMapping/>
+  </p:clrMapOvr>
+  <mc:AlternateContent xmlns:mc="http://schemas.openxmlformats.org/markup-compatibility/2006">
+    <mc:Choice xmlns:p159="http://schemas.microsoft.com/office/powerpoint/2015/09/main" xmlns:p14="http://schemas.microsoft.com/office/powerpoint/2010/main" Requires="p159">
+      <p:transition p14:dur="500" advClick="1"/>
+    </mc:Choice>
+    <mc:Fallback>
+      <p:transition advClick="1"/>
+    </mc:Fallback>
+  </mc:AlternateContent>
+</p:sld>
+</file>
+
+<file path=ppt/slides/slide5.xml><?xml version="1.0" encoding="utf-8"?>
+<p:sld xmlns:a="http://schemas.openxmlformats.org/drawingml/2006/main" xmlns:r="http://schemas.openxmlformats.org/officeDocument/2006/relationships" xmlns:p="http://schemas.openxmlformats.org/presentationml/2006/main" xmlns:m="http://schemas.openxmlformats.org/officeDocument/2006/math" xmlns:w="http://schemas.openxmlformats.org/wordprocessingml/2006/main" xmlns:mc="http://schemas.openxmlformats.org/markup-compatibility/2006" showMasterPhAnim="0" showMasterSp="1" show="1">
+  <p:cSld name="">
+    <p:spTree>
+      <p:nvGrpSpPr>
+        <p:cNvPr id="1" name=""/>
+        <p:cNvGrpSpPr/>
+        <p:nvPr/>
+      </p:nvGrpSpPr>
+      <p:grpSpPr bwMode="auto">
+        <a:xfrm>
+          <a:off x="0" y="0"/>
+          <a:ext cx="0" cy="0"/>
+          <a:chOff x="0" y="0"/>
+          <a:chExt cx="0" cy="0"/>
+        </a:xfrm>
+      </p:grpSpPr>
+      <p:sp>
+        <p:nvSpPr>
+          <p:cNvPr id="1430529942" name=""/>
+          <p:cNvSpPr/>
+          <p:nvPr/>
+        </p:nvSpPr>
+        <p:spPr bwMode="auto">
+          <a:xfrm rot="0" flipH="0" flipV="0">
+            <a:off x="510718" y="986724"/>
+            <a:ext cx="7960016" cy="4545927"/>
+          </a:xfrm>
+          <a:prstGeom prst="rect">
+            <a:avLst/>
+          </a:prstGeom>
+          <a:noFill/>
+          <a:ln w="38100" cap="flat" cmpd="sng" algn="ctr">
+            <a:solidFill>
+              <a:srgbClr val="548235"/>
+            </a:solidFill>
+            <a:prstDash val="sysDot"/>
+            <a:miter lim="800000"/>
+          </a:ln>
+        </p:spPr>
+        <p:style>
+          <a:lnRef idx="2">
+            <a:schemeClr val="accent1">
+              <a:shade val="50000"/>
+            </a:schemeClr>
+          </a:lnRef>
+          <a:fillRef idx="1">
+            <a:schemeClr val="accent1"/>
+          </a:fillRef>
+          <a:effectRef idx="0">
+            <a:schemeClr val="accent1"/>
+          </a:effectRef>
+          <a:fontRef idx="minor">
+            <a:schemeClr val="lt1"/>
+          </a:fontRef>
+        </p:style>
+        <p:txBody>
+          <a:bodyPr anchor="ctr"/>
+          <a:p>
+            <a:pPr algn="ctr">
+              <a:defRPr/>
+            </a:pPr>
+            <a:r>
+              <a:rPr/>
+              <a:t>S</a:t>
+            </a:r>
+            <a:endParaRPr/>
+          </a:p>
+        </p:txBody>
+      </p:sp>
+      <p:sp>
+        <p:nvSpPr>
+          <p:cNvPr id="1655348921" name=""/>
+          <p:cNvSpPr txBox="1"/>
+          <p:nvPr/>
+        </p:nvSpPr>
+        <p:spPr bwMode="auto">
+          <a:xfrm rot="0" flipH="0" flipV="0">
+            <a:off x="366296" y="606645"/>
+            <a:ext cx="3938009" cy="335639"/>
+          </a:xfrm>
+          <a:prstGeom prst="rect">
+            <a:avLst/>
+          </a:prstGeom>
+          <a:noFill/>
+        </p:spPr>
+        <p:txBody>
+          <a:bodyPr vertOverflow="overflow" horzOverflow="overflow" vert="horz" wrap="square" lIns="91440" tIns="45720" rIns="91440" bIns="45720" numCol="1" spcCol="0" rtlCol="0" fromWordArt="0" anchor="t" anchorCtr="0" forceAA="0" upright="0" compatLnSpc="0">
+            <a:spAutoFit/>
+          </a:bodyPr>
+          <a:p>
+            <a:pPr algn="ctr">
+              <a:defRPr/>
+            </a:pPr>
+            <a:r>
+              <a:rPr sz="1600">
+                <a:latin typeface="Times New Roman"/>
+                <a:ea typeface="Times New Roman"/>
+                <a:cs typeface="Times New Roman"/>
+              </a:rPr>
+              <a:t>For </a:t>
+            </a:r>
+            <a:r>
+              <a:rPr sz="1600" b="1">
+                <a:solidFill>
+                  <a:schemeClr val="accent2">
+                    <a:lumMod val="75000"/>
+                  </a:schemeClr>
+                </a:solidFill>
+                <a:latin typeface="Times New Roman"/>
+                <a:ea typeface="Times New Roman"/>
+                <a:cs typeface="Times New Roman"/>
+              </a:rPr>
+              <a:t>Relation_label</a:t>
+            </a:r>
+            <a:r>
+              <a:rPr sz="1600">
+                <a:latin typeface="Times New Roman"/>
+                <a:ea typeface="Times New Roman"/>
+                <a:cs typeface="Times New Roman"/>
+              </a:rPr>
+              <a:t> in </a:t>
+            </a:r>
+            <a:r>
+              <a:rPr lang="en-US" sz="1600" b="1" i="0" u="none" strike="noStrike" cap="none" spc="0">
+                <a:solidFill>
+                  <a:schemeClr val="accent2"/>
+                </a:solidFill>
+                <a:latin typeface="Times New Roman"/>
+                <a:ea typeface="Times New Roman"/>
+                <a:cs typeface="Times New Roman"/>
+              </a:rPr>
+              <a:t>Candidates relation</a:t>
+            </a:r>
+            <a:r>
+              <a:rPr sz="1600" b="1">
+                <a:solidFill>
+                  <a:schemeClr val="accent2"/>
+                </a:solidFill>
+                <a:latin typeface="Times New Roman"/>
+                <a:cs typeface="Times New Roman"/>
+              </a:rPr>
+              <a:t>s</a:t>
+            </a:r>
+            <a:endParaRPr sz="1600">
+              <a:latin typeface="Times New Roman"/>
+              <a:cs typeface="Times New Roman"/>
+            </a:endParaRPr>
+          </a:p>
+        </p:txBody>
+      </p:sp>
+      <p:sp>
+        <p:nvSpPr>
+          <p:cNvPr id="1507235935" name=""/>
+          <p:cNvSpPr/>
+          <p:nvPr/>
+        </p:nvSpPr>
+        <p:spPr bwMode="auto">
+          <a:xfrm rot="0" flipH="0" flipV="0">
+            <a:off x="923032" y="1328734"/>
+            <a:ext cx="510262" cy="971100"/>
+          </a:xfrm>
+          <a:prstGeom prst="cube">
+            <a:avLst>
+              <a:gd name="adj" fmla="val 25000"/>
+            </a:avLst>
+          </a:prstGeom>
+          <a:solidFill>
+            <a:srgbClr val="CF73E6"/>
+          </a:solidFill>
+          <a:ln w="12700" cap="flat" cmpd="sng" algn="ctr">
+            <a:solidFill>
+              <a:schemeClr val="tx1"/>
+            </a:solidFill>
+            <a:prstDash val="solid"/>
+            <a:miter lim="800000"/>
+          </a:ln>
+        </p:spPr>
+        <p:style>
+          <a:lnRef idx="2">
+            <a:schemeClr val="accent1">
+              <a:shade val="50000"/>
+            </a:schemeClr>
+          </a:lnRef>
+          <a:fillRef idx="1">
+            <a:schemeClr val="accent1"/>
+          </a:fillRef>
+          <a:effectRef idx="0">
+            <a:schemeClr val="accent1"/>
+          </a:effectRef>
+          <a:fontRef idx="minor">
+            <a:schemeClr val="lt1"/>
+          </a:fontRef>
+        </p:style>
+        <p:txBody>
+          <a:bodyPr anchor="ctr"/>
+          <a:p>
+            <a:pPr algn="ctr">
+              <a:defRPr/>
+            </a:pPr>
+            <a:endParaRPr>
+              <a:latin typeface="Times New Roman"/>
+              <a:cs typeface="Times New Roman"/>
+            </a:endParaRPr>
+          </a:p>
+        </p:txBody>
+      </p:sp>
+      <p:sp>
+        <p:nvSpPr>
+          <p:cNvPr id="2119128755" name=""/>
+          <p:cNvSpPr txBox="1"/>
+          <p:nvPr/>
+        </p:nvSpPr>
+        <p:spPr bwMode="auto">
+          <a:xfrm rot="0" flipH="0" flipV="0">
+            <a:off x="1535436" y="1555024"/>
+            <a:ext cx="2151003" cy="518519"/>
+          </a:xfrm>
+          <a:prstGeom prst="rect">
+            <a:avLst/>
+          </a:prstGeom>
+          <a:noFill/>
+        </p:spPr>
+        <p:txBody>
+          <a:bodyPr vertOverflow="overflow" horzOverflow="overflow" vert="horz" wrap="square" lIns="91440" tIns="45720" rIns="91440" bIns="45720" numCol="1" spcCol="0" rtlCol="0" fromWordArt="0" anchor="t" anchorCtr="0" forceAA="0" upright="0" compatLnSpc="0">
+            <a:spAutoFit/>
+          </a:bodyPr>
+          <a:p>
+            <a:pPr algn="l">
+              <a:defRPr/>
+            </a:pPr>
+            <a:r>
+              <a:rPr lang="en-US" sz="1400" b="1" i="0" u="none" strike="noStrike" cap="none" spc="0">
+                <a:solidFill>
+                  <a:schemeClr val="tx1"/>
+                </a:solidFill>
+                <a:latin typeface="Times New Roman"/>
+                <a:ea typeface="Times New Roman"/>
+                <a:cs typeface="Times New Roman"/>
+              </a:rPr>
+              <a:t>Aligned Embedding</a:t>
+            </a:r>
+            <a:endParaRPr sz="1400">
+              <a:latin typeface="Times New Roman"/>
+              <a:cs typeface="Times New Roman"/>
+            </a:endParaRPr>
+          </a:p>
+          <a:p>
+            <a:pPr algn="l">
+              <a:defRPr/>
+            </a:pPr>
+            <a:r>
+              <a:rPr sz="1400">
+                <a:latin typeface="Times New Roman"/>
+                <a:cs typeface="Times New Roman"/>
+              </a:rPr>
+              <a:t>index [0, </a:t>
+            </a:r>
+            <a:r>
+              <a:rPr sz="1400" b="1">
+                <a:solidFill>
+                  <a:schemeClr val="accent2"/>
+                </a:solidFill>
+                <a:latin typeface="Times New Roman"/>
+                <a:cs typeface="Times New Roman"/>
+              </a:rPr>
+              <a:t>relation_label</a:t>
+            </a:r>
+            <a:r>
+              <a:rPr sz="1400">
+                <a:latin typeface="Times New Roman"/>
+                <a:cs typeface="Times New Roman"/>
+              </a:rPr>
+              <a:t>]</a:t>
+            </a:r>
+            <a:endParaRPr sz="1400">
+              <a:latin typeface="Times New Roman"/>
+              <a:cs typeface="Times New Roman"/>
+            </a:endParaRPr>
+          </a:p>
+        </p:txBody>
+      </p:sp>
+      <p:sp>
+        <p:nvSpPr>
+          <p:cNvPr id="161729689" name=""/>
+          <p:cNvSpPr/>
+          <p:nvPr/>
+        </p:nvSpPr>
+        <p:spPr bwMode="auto">
+          <a:xfrm rot="0" flipH="0" flipV="0">
+            <a:off x="1061736" y="2457899"/>
+            <a:ext cx="232853" cy="971100"/>
+          </a:xfrm>
+          <a:prstGeom prst="cube">
+            <a:avLst>
+              <a:gd name="adj" fmla="val 25000"/>
+            </a:avLst>
+          </a:prstGeom>
+          <a:solidFill>
+            <a:srgbClr val="CF73E6"/>
+          </a:solidFill>
+          <a:ln w="12700" cap="flat" cmpd="sng" algn="ctr">
+            <a:solidFill>
+              <a:schemeClr val="tx1"/>
+            </a:solidFill>
+            <a:prstDash val="solid"/>
+            <a:miter lim="800000"/>
+          </a:ln>
+        </p:spPr>
+        <p:style>
+          <a:lnRef idx="2">
+            <a:schemeClr val="accent1">
+              <a:shade val="50000"/>
+            </a:schemeClr>
+          </a:lnRef>
+          <a:fillRef idx="1">
+            <a:schemeClr val="accent1"/>
+          </a:fillRef>
+          <a:effectRef idx="0">
+            <a:schemeClr val="accent1"/>
+          </a:effectRef>
+          <a:fontRef idx="minor">
+            <a:schemeClr val="lt1"/>
+          </a:fontRef>
+        </p:style>
+        <p:txBody>
+          <a:bodyPr anchor="ctr"/>
+          <a:p>
+            <a:pPr algn="ctr">
+              <a:defRPr/>
+            </a:pPr>
+            <a:endParaRPr>
+              <a:latin typeface="Times New Roman"/>
+              <a:cs typeface="Times New Roman"/>
+            </a:endParaRPr>
+          </a:p>
+        </p:txBody>
+      </p:sp>
+      <p:sp>
+        <p:nvSpPr>
+          <p:cNvPr id="1701696105" name=""/>
+          <p:cNvSpPr/>
+          <p:nvPr/>
+        </p:nvSpPr>
+        <p:spPr bwMode="auto">
+          <a:xfrm rot="10800000" flipH="0" flipV="0">
+            <a:off x="1945816" y="2299834"/>
+            <a:ext cx="482122" cy="825043"/>
+          </a:xfrm>
+          <a:prstGeom prst="bentArrow">
+            <a:avLst>
+              <a:gd name="adj1" fmla="val 25000"/>
+              <a:gd name="adj2" fmla="val 25000"/>
+              <a:gd name="adj3" fmla="val 25000"/>
+              <a:gd name="adj4" fmla="val 39272"/>
+            </a:avLst>
+          </a:prstGeom>
+          <a:solidFill>
+            <a:schemeClr val="tx1"/>
+          </a:solidFill>
+          <a:ln w="12700" cap="flat" cmpd="sng" algn="ctr">
+            <a:solidFill>
+              <a:schemeClr val="tx1"/>
+            </a:solidFill>
+            <a:prstDash val="solid"/>
+            <a:miter lim="800000"/>
+          </a:ln>
+        </p:spPr>
+        <p:style>
+          <a:lnRef idx="2">
+            <a:schemeClr val="accent1">
+              <a:shade val="50000"/>
+            </a:schemeClr>
+          </a:lnRef>
+          <a:fillRef idx="1">
+            <a:schemeClr val="accent1"/>
+          </a:fillRef>
+          <a:effectRef idx="0">
+            <a:schemeClr val="accent1"/>
+          </a:effectRef>
+          <a:fontRef idx="minor">
+            <a:schemeClr val="lt1"/>
+          </a:fontRef>
+        </p:style>
+        <p:txBody>
+          <a:bodyPr anchor="ctr"/>
+          <a:p>
+            <a:pPr algn="ctr">
+              <a:defRPr/>
+            </a:pPr>
+            <a:endParaRPr>
+              <a:latin typeface="Times New Roman"/>
+              <a:cs typeface="Times New Roman"/>
+            </a:endParaRPr>
+          </a:p>
+        </p:txBody>
+      </p:sp>
+      <p:sp>
+        <p:nvSpPr>
+          <p:cNvPr id="2032312819" name=""/>
+          <p:cNvSpPr/>
+          <p:nvPr/>
+        </p:nvSpPr>
+        <p:spPr bwMode="auto">
+          <a:xfrm rot="0" flipH="0" flipV="0">
+            <a:off x="802397" y="4163784"/>
+            <a:ext cx="733038" cy="680356"/>
+          </a:xfrm>
+          <a:prstGeom prst="cube">
+            <a:avLst>
+              <a:gd name="adj" fmla="val 25000"/>
+            </a:avLst>
+          </a:prstGeom>
+          <a:solidFill>
+            <a:schemeClr val="tx1">
+              <a:lumMod val="75000"/>
+              <a:lumOff val="25000"/>
+            </a:schemeClr>
+          </a:solidFill>
+          <a:ln w="12700" cap="flat" cmpd="sng" algn="ctr">
+            <a:solidFill>
+              <a:schemeClr val="tx1"/>
+            </a:solidFill>
+            <a:prstDash val="solid"/>
+            <a:miter lim="800000"/>
+          </a:ln>
+        </p:spPr>
+        <p:style>
+          <a:lnRef idx="2">
+            <a:schemeClr val="accent1">
+              <a:shade val="50000"/>
+            </a:schemeClr>
+          </a:lnRef>
+          <a:fillRef idx="1">
+            <a:schemeClr val="accent1"/>
+          </a:fillRef>
+          <a:effectRef idx="0">
+            <a:schemeClr val="accent1"/>
+          </a:effectRef>
+          <a:fontRef idx="minor">
+            <a:schemeClr val="lt1"/>
+          </a:fontRef>
+        </p:style>
+        <p:txBody>
+          <a:bodyPr anchor="ctr"/>
+          <a:p>
+            <a:pPr algn="ctr">
+              <a:defRPr/>
+            </a:pPr>
+            <a:endParaRPr>
+              <a:latin typeface="Times New Roman"/>
+              <a:cs typeface="Times New Roman"/>
+            </a:endParaRPr>
+          </a:p>
+        </p:txBody>
+      </p:sp>
+      <p:sp>
+        <p:nvSpPr>
+          <p:cNvPr id="620713163" name=""/>
+          <p:cNvSpPr txBox="1"/>
+          <p:nvPr/>
+        </p:nvSpPr>
+        <p:spPr bwMode="auto">
+          <a:xfrm rot="0" flipH="0" flipV="0">
+            <a:off x="335371" y="4844140"/>
+            <a:ext cx="1667091" cy="518519"/>
+          </a:xfrm>
+          <a:prstGeom prst="rect">
+            <a:avLst/>
+          </a:prstGeom>
+          <a:noFill/>
+        </p:spPr>
+        <p:txBody>
+          <a:bodyPr vertOverflow="overflow" horzOverflow="overflow" vert="horz" wrap="square" lIns="91440" tIns="45720" rIns="91440" bIns="45720" numCol="1" spcCol="0" rtlCol="0" fromWordArt="0" anchor="t" anchorCtr="0" forceAA="0" upright="0" compatLnSpc="0">
+            <a:spAutoFit/>
+          </a:bodyPr>
+          <a:p>
+            <a:pPr algn="ctr">
+              <a:defRPr/>
+            </a:pPr>
+            <a:r>
+              <a:rPr sz="1400">
+                <a:latin typeface="Times New Roman"/>
+                <a:cs typeface="Times New Roman"/>
+              </a:rPr>
+              <a:t>Pair context</a:t>
+            </a:r>
+            <a:endParaRPr sz="1100">
+              <a:latin typeface="Times New Roman"/>
+              <a:cs typeface="Times New Roman"/>
+            </a:endParaRPr>
+          </a:p>
+          <a:p>
+            <a:pPr algn="ctr">
+              <a:defRPr/>
+            </a:pPr>
+            <a:r>
+              <a:rPr sz="1400">
+                <a:latin typeface="Times New Roman"/>
+                <a:cs typeface="Times New Roman"/>
+              </a:rPr>
+              <a:t>[4096]</a:t>
+            </a:r>
+            <a:endParaRPr sz="1400">
+              <a:latin typeface="Times New Roman"/>
+              <a:cs typeface="Times New Roman"/>
+            </a:endParaRPr>
+          </a:p>
+        </p:txBody>
+      </p:sp>
+      <p:sp>
+        <p:nvSpPr>
+          <p:cNvPr id="1470894221" name=""/>
+          <p:cNvSpPr txBox="1"/>
+          <p:nvPr/>
+        </p:nvSpPr>
+        <p:spPr bwMode="auto">
+          <a:xfrm rot="0" flipH="0" flipV="0">
+            <a:off x="2610578" y="3257292"/>
+            <a:ext cx="2431498" cy="1067159"/>
+          </a:xfrm>
+          <a:prstGeom prst="rect">
+            <a:avLst/>
+          </a:prstGeom>
+          <a:solidFill>
+            <a:schemeClr val="accent2">
+              <a:alpha val="99999"/>
+            </a:schemeClr>
+          </a:solidFill>
+          <a:ln w="19050">
+            <a:solidFill>
+              <a:schemeClr val="tx1"/>
+            </a:solidFill>
+            <a:prstDash val="solid"/>
+          </a:ln>
+        </p:spPr>
+        <p:txBody>
+          <a:bodyPr vertOverflow="overflow" horzOverflow="overflow" vert="horz" wrap="square" lIns="91440" tIns="45720" rIns="91440" bIns="45720" numCol="1" spcCol="0" rtlCol="0" fromWordArt="0" anchor="t" anchorCtr="0" forceAA="0" upright="0" compatLnSpc="0">
+            <a:spAutoFit/>
+          </a:bodyPr>
+          <a:p>
+            <a:pPr algn="ctr">
+              <a:defRPr/>
+            </a:pPr>
+            <a:r>
+              <a:rPr sz="1600">
+                <a:latin typeface="Times New Roman"/>
+                <a:cs typeface="Times New Roman"/>
+              </a:rPr>
+              <a:t>Cosine similarity </a:t>
+            </a:r>
+            <a:endParaRPr sz="1600">
+              <a:latin typeface="Times New Roman"/>
+              <a:cs typeface="Times New Roman"/>
+            </a:endParaRPr>
+          </a:p>
+          <a:p>
+            <a:pPr algn="ctr">
+              <a:defRPr/>
+            </a:pPr>
+            <a:r>
+              <a:rPr sz="1600">
+                <a:latin typeface="Times New Roman"/>
+                <a:cs typeface="Times New Roman"/>
+              </a:rPr>
+              <a:t>calculation</a:t>
+            </a:r>
+            <a:r>
+              <a:rPr sz="1600">
+                <a:latin typeface="Times New Roman"/>
+                <a:cs typeface="Times New Roman"/>
+              </a:rPr>
+              <a:t> for </a:t>
+            </a:r>
+            <a:endParaRPr sz="1600">
+              <a:latin typeface="Times New Roman"/>
+              <a:cs typeface="Times New Roman"/>
+            </a:endParaRPr>
+          </a:p>
+          <a:p>
+            <a:pPr algn="ctr">
+              <a:defRPr/>
+            </a:pPr>
+            <a:r>
+              <a:rPr sz="1600">
+                <a:latin typeface="Times New Roman"/>
+                <a:cs typeface="Times New Roman"/>
+              </a:rPr>
+              <a:t>retrieval score</a:t>
+            </a:r>
+            <a:br>
+              <a:rPr sz="1600" u="sng">
+                <a:latin typeface="Times New Roman"/>
+                <a:ea typeface="Times New Roman"/>
+                <a:cs typeface="Times New Roman"/>
+              </a:rPr>
+            </a:br>
+            <a:r>
+              <a:rPr sz="1600" u="sng">
+                <a:latin typeface="Times New Roman"/>
+                <a:ea typeface="Times New Roman"/>
+                <a:cs typeface="Times New Roman"/>
+              </a:rPr>
+              <a:t>(relation score)</a:t>
+            </a:r>
+            <a:endParaRPr sz="1600">
+              <a:latin typeface="Times New Roman"/>
+              <a:cs typeface="Times New Roman"/>
+            </a:endParaRPr>
+          </a:p>
+        </p:txBody>
+      </p:sp>
+      <p:sp>
+        <p:nvSpPr>
+          <p:cNvPr id="2108747894" name=""/>
+          <p:cNvSpPr/>
+          <p:nvPr/>
+        </p:nvSpPr>
+        <p:spPr bwMode="auto">
+          <a:xfrm rot="2611531" flipH="0" flipV="0">
+            <a:off x="1942051" y="3470363"/>
+            <a:ext cx="576596" cy="182232"/>
+          </a:xfrm>
+          <a:prstGeom prst="rightArrow">
+            <a:avLst>
+              <a:gd name="adj1" fmla="val 50000"/>
+              <a:gd name="adj2" fmla="val 50000"/>
+            </a:avLst>
+          </a:prstGeom>
+          <a:solidFill>
+            <a:schemeClr val="tx1"/>
+          </a:solidFill>
+          <a:ln w="12699" cap="flat" cmpd="sng" algn="ctr">
+            <a:solidFill>
+              <a:schemeClr val="tx1"/>
+            </a:solidFill>
+            <a:prstDash val="solid"/>
+            <a:miter lim="800000"/>
+          </a:ln>
+        </p:spPr>
+        <p:style>
+          <a:lnRef idx="2">
+            <a:schemeClr val="accent1">
+              <a:shade val="50000"/>
+            </a:schemeClr>
+          </a:lnRef>
+          <a:fillRef idx="1">
+            <a:schemeClr val="accent1"/>
+          </a:fillRef>
+          <a:effectRef idx="0">
+            <a:schemeClr val="accent1"/>
+          </a:effectRef>
+          <a:fontRef idx="minor">
+            <a:schemeClr val="lt1"/>
+          </a:fontRef>
+        </p:style>
+        <p:txBody>
+          <a:bodyPr anchor="ctr"/>
+          <a:p>
+            <a:pPr algn="ctr">
+              <a:defRPr/>
+            </a:pPr>
+            <a:endParaRPr>
+              <a:latin typeface="Times New Roman"/>
+              <a:cs typeface="Times New Roman"/>
+            </a:endParaRPr>
+          </a:p>
+        </p:txBody>
+      </p:sp>
+      <p:sp>
+        <p:nvSpPr>
+          <p:cNvPr id="489014723" name=""/>
+          <p:cNvSpPr/>
+          <p:nvPr/>
+        </p:nvSpPr>
+        <p:spPr bwMode="auto">
+          <a:xfrm rot="19403571" flipH="0" flipV="0">
+            <a:off x="1920757" y="3985854"/>
+            <a:ext cx="584712" cy="182232"/>
+          </a:xfrm>
+          <a:prstGeom prst="rightArrow">
+            <a:avLst>
+              <a:gd name="adj1" fmla="val 50000"/>
+              <a:gd name="adj2" fmla="val 50000"/>
+            </a:avLst>
+          </a:prstGeom>
+          <a:solidFill>
+            <a:schemeClr val="tx1"/>
+          </a:solidFill>
+          <a:ln w="12699" cap="flat" cmpd="sng" algn="ctr">
+            <a:solidFill>
+              <a:schemeClr val="tx1"/>
+            </a:solidFill>
+            <a:prstDash val="solid"/>
+            <a:miter lim="800000"/>
+          </a:ln>
+        </p:spPr>
+        <p:style>
+          <a:lnRef idx="2">
+            <a:schemeClr val="accent1">
+              <a:shade val="50000"/>
+            </a:schemeClr>
+          </a:lnRef>
+          <a:fillRef idx="1">
+            <a:schemeClr val="accent1"/>
+          </a:fillRef>
+          <a:effectRef idx="0">
+            <a:schemeClr val="accent1"/>
+          </a:effectRef>
+          <a:fontRef idx="minor">
+            <a:schemeClr val="lt1"/>
+          </a:fontRef>
+        </p:style>
+        <p:txBody>
+          <a:bodyPr anchor="ctr"/>
+          <a:p>
+            <a:pPr algn="ctr">
+              <a:defRPr/>
+            </a:pPr>
+            <a:endParaRPr>
+              <a:latin typeface="Times New Roman"/>
+              <a:cs typeface="Times New Roman"/>
+            </a:endParaRPr>
+          </a:p>
+        </p:txBody>
+      </p:sp>
+      <p:sp>
+        <p:nvSpPr>
+          <p:cNvPr id="1172629800" name=""/>
+          <p:cNvSpPr/>
+          <p:nvPr/>
+        </p:nvSpPr>
+        <p:spPr bwMode="auto">
+          <a:xfrm rot="0" flipH="0" flipV="0">
+            <a:off x="5136428" y="3493507"/>
+            <a:ext cx="3211285" cy="594729"/>
+          </a:xfrm>
+          <a:prstGeom prst="rect">
+            <a:avLst/>
+          </a:prstGeom>
+          <a:noFill/>
+          <a:ln w="38100" cap="flat" cmpd="sng" algn="ctr">
+            <a:solidFill>
+              <a:schemeClr val="tx1"/>
+            </a:solidFill>
+            <a:prstDash val="sysDot"/>
+            <a:miter lim="800000"/>
+          </a:ln>
+        </p:spPr>
+        <p:style>
+          <a:lnRef idx="2">
+            <a:schemeClr val="accent1">
+              <a:shade val="50000"/>
+            </a:schemeClr>
+          </a:lnRef>
+          <a:fillRef idx="1">
+            <a:schemeClr val="accent1"/>
+          </a:fillRef>
+          <a:effectRef idx="0">
+            <a:schemeClr val="accent1"/>
+          </a:effectRef>
+          <a:fontRef idx="minor">
+            <a:schemeClr val="lt1"/>
+          </a:fontRef>
+        </p:style>
+        <p:txBody>
+          <a:bodyPr anchor="ctr"/>
+          <a:p>
+            <a:pPr>
+              <a:defRPr/>
+            </a:pPr>
+            <a:r>
+              <a:rPr lang="en-US" sz="1400" b="0" i="0" u="none" strike="noStrike" cap="none" spc="0">
+                <a:solidFill>
+                  <a:schemeClr val="tx1">
+                    <a:lumMod val="90000"/>
+                    <a:lumOff val="5000"/>
+                  </a:schemeClr>
+                </a:solidFill>
+                <a:latin typeface="Times New Roman"/>
+                <a:ea typeface="Times New Roman"/>
+                <a:cs typeface="Times New Roman"/>
+              </a:rPr>
+              <a:t>IF Score &gt; 0.55 :</a:t>
+            </a:r>
+            <a:endParaRPr lang="en-US" sz="1400" b="0" i="0" u="none" strike="noStrike" cap="none" spc="0">
+              <a:solidFill>
+                <a:schemeClr val="tx1">
+                  <a:lumMod val="90000"/>
+                  <a:lumOff val="5000"/>
+                </a:schemeClr>
+              </a:solidFill>
+              <a:latin typeface="Times New Roman"/>
+              <a:ea typeface="Times New Roman"/>
+              <a:cs typeface="Times New Roman"/>
+            </a:endParaRPr>
+          </a:p>
+          <a:p>
+            <a:pPr>
+              <a:defRPr/>
+            </a:pPr>
+            <a:r>
+              <a:rPr lang="en-US" sz="1400" b="0" i="0" u="none" strike="noStrike" cap="none" spc="0">
+                <a:solidFill>
+                  <a:schemeClr val="tx1">
+                    <a:lumMod val="90000"/>
+                    <a:lumOff val="5000"/>
+                  </a:schemeClr>
+                </a:solidFill>
+                <a:latin typeface="Times New Roman"/>
+                <a:ea typeface="Times New Roman"/>
+                <a:cs typeface="Times New Roman"/>
+              </a:rPr>
+              <a:t>	</a:t>
+            </a:r>
+            <a:r>
+              <a:rPr lang="en-US" sz="1400" b="0" i="0" u="none" strike="noStrike" cap="none" spc="0">
+                <a:solidFill>
+                  <a:schemeClr val="tx1">
+                    <a:lumMod val="90000"/>
+                    <a:lumOff val="5000"/>
+                  </a:schemeClr>
+                </a:solidFill>
+                <a:latin typeface="Times New Roman"/>
+                <a:ea typeface="Times New Roman"/>
+                <a:cs typeface="Times New Roman"/>
+              </a:rPr>
+              <a:t>Add </a:t>
+            </a:r>
+            <a:r>
+              <a:rPr lang="en-US" sz="1400" b="1" i="0" u="none" strike="noStrike" cap="none" spc="0">
+                <a:solidFill>
+                  <a:schemeClr val="accent2"/>
+                </a:solidFill>
+                <a:latin typeface="Times New Roman"/>
+                <a:ea typeface="Times New Roman"/>
+                <a:cs typeface="Times New Roman"/>
+              </a:rPr>
+              <a:t>Vertice </a:t>
+            </a:r>
+            <a:r>
+              <a:rPr lang="en-US" sz="1400" b="0" i="0" u="none" strike="noStrike" cap="none" spc="0">
+                <a:solidFill>
+                  <a:schemeClr val="tx1">
+                    <a:lumMod val="90000"/>
+                    <a:lumOff val="5000"/>
+                  </a:schemeClr>
+                </a:solidFill>
+                <a:latin typeface="Times New Roman"/>
+                <a:ea typeface="Times New Roman"/>
+                <a:cs typeface="Times New Roman"/>
+              </a:rPr>
+              <a:t>in </a:t>
+            </a:r>
+            <a:r>
+              <a:rPr lang="en-US" sz="1400" b="1" i="0" u="sng" strike="noStrike" cap="none" spc="0">
+                <a:solidFill>
+                  <a:schemeClr val="tx1">
+                    <a:lumMod val="90000"/>
+                    <a:lumOff val="5000"/>
+                  </a:schemeClr>
+                </a:solidFill>
+                <a:latin typeface="Times New Roman"/>
+                <a:ea typeface="Times New Roman"/>
+                <a:cs typeface="Times New Roman"/>
+              </a:rPr>
+              <a:t>Final Graph</a:t>
+            </a:r>
+            <a:endParaRPr sz="1400" b="0" i="0" u="none" strike="noStrike" cap="none" spc="0">
+              <a:solidFill>
+                <a:schemeClr val="tx1">
+                  <a:lumMod val="90000"/>
+                  <a:lumOff val="5000"/>
+                </a:schemeClr>
+              </a:solidFill>
+              <a:latin typeface="Times New Roman"/>
+              <a:cs typeface="Times New Roman"/>
+            </a:endParaRPr>
+          </a:p>
+        </p:txBody>
+      </p:sp>
+      <p:sp>
+        <p:nvSpPr>
+          <p:cNvPr id="1461103968" name=""/>
+          <p:cNvSpPr/>
+          <p:nvPr/>
+        </p:nvSpPr>
+        <p:spPr bwMode="auto">
+          <a:xfrm rot="0" flipH="0" flipV="0">
+            <a:off x="8648569" y="3025776"/>
+            <a:ext cx="522532" cy="182232"/>
+          </a:xfrm>
+          <a:prstGeom prst="rightArrow">
+            <a:avLst>
+              <a:gd name="adj1" fmla="val 50000"/>
+              <a:gd name="adj2" fmla="val 50000"/>
+            </a:avLst>
+          </a:prstGeom>
+          <a:solidFill>
+            <a:schemeClr val="tx1"/>
+          </a:solidFill>
+          <a:ln w="12699" cap="flat" cmpd="sng" algn="ctr">
+            <a:solidFill>
+              <a:schemeClr val="tx1"/>
+            </a:solidFill>
+            <a:prstDash val="solid"/>
+            <a:miter lim="800000"/>
+          </a:ln>
+        </p:spPr>
+        <p:style>
+          <a:lnRef idx="2">
+            <a:schemeClr val="accent1">
+              <a:shade val="50000"/>
+            </a:schemeClr>
+          </a:lnRef>
+          <a:fillRef idx="1">
+            <a:schemeClr val="accent1"/>
+          </a:fillRef>
+          <a:effectRef idx="0">
+            <a:schemeClr val="accent1"/>
+          </a:effectRef>
+          <a:fontRef idx="minor">
+            <a:schemeClr val="lt1"/>
+          </a:fontRef>
+        </p:style>
+        <p:txBody>
+          <a:bodyPr anchor="ctr"/>
+          <a:p>
+            <a:pPr algn="ctr">
+              <a:defRPr/>
+            </a:pPr>
+            <a:endParaRPr>
+              <a:latin typeface="Times New Roman"/>
+              <a:cs typeface="Times New Roman"/>
+            </a:endParaRPr>
+          </a:p>
+        </p:txBody>
+      </p:sp>
+      <p:sp>
+        <p:nvSpPr>
+          <p:cNvPr id="149568677" name=""/>
+          <p:cNvSpPr/>
+          <p:nvPr/>
+        </p:nvSpPr>
+        <p:spPr bwMode="auto">
+          <a:xfrm rot="0" flipH="0" flipV="0">
+            <a:off x="9382950" y="2543257"/>
+            <a:ext cx="253998" cy="235855"/>
+          </a:xfrm>
+          <a:prstGeom prst="flowChartConnector">
+            <a:avLst/>
+          </a:prstGeom>
+          <a:solidFill>
+            <a:schemeClr val="accent4">
+              <a:lumMod val="60000"/>
+              <a:lumOff val="40000"/>
+            </a:schemeClr>
+          </a:solidFill>
+          <a:ln w="12700" cap="flat" cmpd="sng" algn="ctr">
+            <a:solidFill>
+              <a:schemeClr val="tx1"/>
+            </a:solidFill>
+            <a:prstDash val="solid"/>
+            <a:miter lim="800000"/>
+          </a:ln>
+        </p:spPr>
+        <p:style>
+          <a:lnRef idx="2">
+            <a:schemeClr val="accent1">
+              <a:shade val="50000"/>
+            </a:schemeClr>
+          </a:lnRef>
+          <a:fillRef idx="1">
+            <a:schemeClr val="accent1"/>
+          </a:fillRef>
+          <a:effectRef idx="0">
+            <a:schemeClr val="accent1"/>
+          </a:effectRef>
+          <a:fontRef idx="minor">
+            <a:schemeClr val="lt1"/>
+          </a:fontRef>
+        </p:style>
+      </p:sp>
+      <p:sp>
+        <p:nvSpPr>
+          <p:cNvPr id="1304136826" name=""/>
+          <p:cNvSpPr/>
+          <p:nvPr/>
+        </p:nvSpPr>
+        <p:spPr bwMode="auto">
+          <a:xfrm rot="0" flipH="0" flipV="0">
+            <a:off x="10017877" y="2222042"/>
+            <a:ext cx="253998" cy="235855"/>
+          </a:xfrm>
+          <a:prstGeom prst="flowChartConnector">
+            <a:avLst/>
+          </a:prstGeom>
+          <a:solidFill>
+            <a:schemeClr val="accent1"/>
+          </a:solidFill>
+          <a:ln w="12700" cap="flat" cmpd="sng" algn="ctr">
+            <a:solidFill>
+              <a:schemeClr val="tx1"/>
+            </a:solidFill>
+            <a:prstDash val="solid"/>
+            <a:miter lim="800000"/>
+          </a:ln>
+        </p:spPr>
+        <p:style>
+          <a:lnRef idx="2">
+            <a:schemeClr val="accent1">
+              <a:shade val="50000"/>
+            </a:schemeClr>
+          </a:lnRef>
+          <a:fillRef idx="1">
+            <a:schemeClr val="accent1"/>
+          </a:fillRef>
+          <a:effectRef idx="0">
+            <a:schemeClr val="accent1"/>
+          </a:effectRef>
+          <a:fontRef idx="minor">
+            <a:schemeClr val="lt1"/>
+          </a:fontRef>
+        </p:style>
+      </p:sp>
+      <p:sp>
+        <p:nvSpPr>
+          <p:cNvPr id="1802556005" name=""/>
+          <p:cNvSpPr/>
+          <p:nvPr/>
+        </p:nvSpPr>
+        <p:spPr bwMode="auto">
+          <a:xfrm rot="0" flipH="0" flipV="0">
+            <a:off x="10034012" y="3124876"/>
+            <a:ext cx="253998" cy="235855"/>
+          </a:xfrm>
+          <a:prstGeom prst="flowChartConnector">
+            <a:avLst/>
+          </a:prstGeom>
+          <a:solidFill>
+            <a:schemeClr val="tx2">
+              <a:lumMod val="40000"/>
+              <a:lumOff val="60000"/>
+            </a:schemeClr>
+          </a:solidFill>
+          <a:ln w="12700" cap="flat" cmpd="sng" algn="ctr">
+            <a:solidFill>
+              <a:schemeClr val="tx1"/>
+            </a:solidFill>
+            <a:prstDash val="solid"/>
+            <a:miter lim="800000"/>
+          </a:ln>
+        </p:spPr>
+        <p:style>
+          <a:lnRef idx="2">
+            <a:schemeClr val="accent1">
+              <a:shade val="50000"/>
+            </a:schemeClr>
+          </a:lnRef>
+          <a:fillRef idx="1">
+            <a:schemeClr val="accent1"/>
+          </a:fillRef>
+          <a:effectRef idx="0">
+            <a:schemeClr val="accent1"/>
+          </a:effectRef>
+          <a:fontRef idx="minor">
+            <a:schemeClr val="lt1"/>
+          </a:fontRef>
+        </p:style>
+      </p:sp>
+      <p:sp>
+        <p:nvSpPr>
+          <p:cNvPr id="773221640" name=""/>
+          <p:cNvSpPr/>
+          <p:nvPr/>
+        </p:nvSpPr>
+        <p:spPr bwMode="auto">
+          <a:xfrm rot="0" flipH="0" flipV="0">
+            <a:off x="9563364" y="3826088"/>
+            <a:ext cx="253998" cy="235855"/>
+          </a:xfrm>
+          <a:prstGeom prst="flowChartConnector">
+            <a:avLst/>
+          </a:prstGeom>
+          <a:solidFill>
+            <a:schemeClr val="bg1">
+              <a:lumMod val="65000"/>
+            </a:schemeClr>
+          </a:solidFill>
+          <a:ln w="12700" cap="flat" cmpd="sng" algn="ctr">
+            <a:solidFill>
+              <a:schemeClr val="tx1"/>
+            </a:solidFill>
+            <a:prstDash val="solid"/>
+            <a:miter lim="800000"/>
+          </a:ln>
+        </p:spPr>
+        <p:style>
+          <a:lnRef idx="2">
+            <a:schemeClr val="accent1">
+              <a:shade val="50000"/>
+            </a:schemeClr>
+          </a:lnRef>
+          <a:fillRef idx="1">
+            <a:schemeClr val="accent1"/>
+          </a:fillRef>
+          <a:effectRef idx="0">
+            <a:schemeClr val="accent1"/>
+          </a:effectRef>
+          <a:fontRef idx="minor">
+            <a:schemeClr val="lt1"/>
+          </a:fontRef>
+        </p:style>
+      </p:sp>
+      <p:sp>
+        <p:nvSpPr>
+          <p:cNvPr id="1302013914" name=""/>
+          <p:cNvSpPr/>
+          <p:nvPr/>
+        </p:nvSpPr>
+        <p:spPr bwMode="auto">
+          <a:xfrm rot="0" flipH="0" flipV="0">
+            <a:off x="10739982" y="2104114"/>
+            <a:ext cx="253998" cy="235855"/>
+          </a:xfrm>
+          <a:prstGeom prst="flowChartConnector">
+            <a:avLst/>
+          </a:prstGeom>
+          <a:solidFill>
+            <a:schemeClr val="accent2">
+              <a:lumMod val="75000"/>
+            </a:schemeClr>
+          </a:solidFill>
+          <a:ln w="12700" cap="flat" cmpd="sng" algn="ctr">
+            <a:solidFill>
+              <a:schemeClr val="tx1"/>
+            </a:solidFill>
+            <a:prstDash val="solid"/>
+            <a:miter lim="800000"/>
+          </a:ln>
+        </p:spPr>
+        <p:style>
+          <a:lnRef idx="2">
+            <a:schemeClr val="accent1">
+              <a:shade val="50000"/>
+            </a:schemeClr>
+          </a:lnRef>
+          <a:fillRef idx="1">
+            <a:schemeClr val="accent1"/>
+          </a:fillRef>
+          <a:effectRef idx="0">
+            <a:schemeClr val="accent1"/>
+          </a:effectRef>
+          <a:fontRef idx="minor">
+            <a:schemeClr val="lt1"/>
+          </a:fontRef>
+        </p:style>
+      </p:sp>
+      <p:sp>
+        <p:nvSpPr>
+          <p:cNvPr id="1358628236" name=""/>
+          <p:cNvSpPr/>
+          <p:nvPr/>
+        </p:nvSpPr>
+        <p:spPr bwMode="auto">
+          <a:xfrm rot="0" flipH="0" flipV="0">
+            <a:off x="10612982" y="3006948"/>
+            <a:ext cx="253998" cy="235855"/>
+          </a:xfrm>
+          <a:prstGeom prst="flowChartConnector">
+            <a:avLst/>
+          </a:prstGeom>
+          <a:solidFill>
+            <a:schemeClr val="accent6">
+              <a:lumMod val="75000"/>
+            </a:schemeClr>
+          </a:solidFill>
+          <a:ln w="12700" cap="flat" cmpd="sng" algn="ctr">
+            <a:solidFill>
+              <a:schemeClr val="tx1"/>
+            </a:solidFill>
+            <a:prstDash val="solid"/>
+            <a:miter lim="800000"/>
+          </a:ln>
+        </p:spPr>
+        <p:style>
+          <a:lnRef idx="2">
+            <a:schemeClr val="accent1">
+              <a:shade val="50000"/>
+            </a:schemeClr>
+          </a:lnRef>
+          <a:fillRef idx="1">
+            <a:schemeClr val="accent1"/>
+          </a:fillRef>
+          <a:effectRef idx="0">
+            <a:schemeClr val="accent1"/>
+          </a:effectRef>
+          <a:fontRef idx="minor">
+            <a:schemeClr val="lt1"/>
+          </a:fontRef>
+        </p:style>
+      </p:sp>
+      <p:sp>
+        <p:nvSpPr>
+          <p:cNvPr id="1141005775" name=""/>
+          <p:cNvSpPr/>
+          <p:nvPr/>
+        </p:nvSpPr>
+        <p:spPr bwMode="auto">
+          <a:xfrm rot="0" flipH="0" flipV="0">
+            <a:off x="10485983" y="3672943"/>
+            <a:ext cx="253998" cy="235855"/>
+          </a:xfrm>
+          <a:prstGeom prst="flowChartConnector">
+            <a:avLst/>
+          </a:prstGeom>
+          <a:solidFill>
+            <a:srgbClr val="CF73E6"/>
+          </a:solidFill>
+          <a:ln w="12700" cap="flat" cmpd="sng" algn="ctr">
+            <a:solidFill>
+              <a:schemeClr val="tx1"/>
+            </a:solidFill>
+            <a:prstDash val="solid"/>
+            <a:miter lim="800000"/>
+          </a:ln>
+        </p:spPr>
+        <p:style>
+          <a:lnRef idx="2">
+            <a:schemeClr val="accent1">
+              <a:shade val="50000"/>
+            </a:schemeClr>
+          </a:lnRef>
+          <a:fillRef idx="1">
+            <a:schemeClr val="accent1"/>
+          </a:fillRef>
+          <a:effectRef idx="0">
+            <a:schemeClr val="accent1"/>
+          </a:effectRef>
+          <a:fontRef idx="minor">
+            <a:schemeClr val="lt1"/>
+          </a:fontRef>
+        </p:style>
+      </p:sp>
+      <p:sp>
+        <p:nvSpPr>
+          <p:cNvPr id="1230817448" name=""/>
+          <p:cNvSpPr/>
+          <p:nvPr/>
+        </p:nvSpPr>
+        <p:spPr bwMode="auto">
+          <a:xfrm rot="2700000" flipH="0" flipV="0">
+            <a:off x="9597732" y="2839397"/>
+            <a:ext cx="476249" cy="177426"/>
+          </a:xfrm>
+          <a:prstGeom prst="leftRightArrow">
+            <a:avLst>
+              <a:gd name="adj1" fmla="val 50000"/>
+              <a:gd name="adj2" fmla="val 50000"/>
+            </a:avLst>
+          </a:prstGeom>
+          <a:solidFill>
+            <a:schemeClr val="tx1"/>
+          </a:solidFill>
+        </p:spPr>
+        <p:style>
+          <a:lnRef idx="2">
+            <a:schemeClr val="accent1">
+              <a:shade val="50000"/>
+            </a:schemeClr>
+          </a:lnRef>
+          <a:fillRef idx="1">
+            <a:schemeClr val="accent1"/>
+          </a:fillRef>
+          <a:effectRef idx="0">
+            <a:schemeClr val="accent1"/>
+          </a:effectRef>
+          <a:fontRef idx="minor">
+            <a:schemeClr val="lt1"/>
+          </a:fontRef>
+        </p:style>
+      </p:sp>
+      <p:sp>
+        <p:nvSpPr>
+          <p:cNvPr id="893290230" name=""/>
+          <p:cNvSpPr/>
+          <p:nvPr/>
+        </p:nvSpPr>
+        <p:spPr bwMode="auto">
+          <a:xfrm rot="2700000" flipH="0" flipV="0">
+            <a:off x="10212350" y="2618895"/>
+            <a:ext cx="476249" cy="177425"/>
+          </a:xfrm>
+          <a:prstGeom prst="leftRightArrow">
+            <a:avLst>
+              <a:gd name="adj1" fmla="val 50000"/>
+              <a:gd name="adj2" fmla="val 50000"/>
+            </a:avLst>
+          </a:prstGeom>
+          <a:solidFill>
+            <a:schemeClr val="tx1"/>
+          </a:solidFill>
+        </p:spPr>
+        <p:style>
+          <a:lnRef idx="2">
+            <a:schemeClr val="accent1">
+              <a:shade val="50000"/>
+            </a:schemeClr>
+          </a:lnRef>
+          <a:fillRef idx="1">
+            <a:schemeClr val="accent1"/>
+          </a:fillRef>
+          <a:effectRef idx="0">
+            <a:schemeClr val="accent1"/>
+          </a:effectRef>
+          <a:fontRef idx="minor">
+            <a:schemeClr val="lt1"/>
+          </a:fontRef>
+        </p:style>
+      </p:sp>
+      <p:sp>
+        <p:nvSpPr>
+          <p:cNvPr id="1450060894" name=""/>
+          <p:cNvSpPr/>
+          <p:nvPr/>
+        </p:nvSpPr>
+        <p:spPr bwMode="auto">
+          <a:xfrm rot="20362837" flipH="0" flipV="0">
+            <a:off x="9623988" y="2354223"/>
+            <a:ext cx="374647" cy="177425"/>
+          </a:xfrm>
+          <a:prstGeom prst="leftRightArrow">
+            <a:avLst>
+              <a:gd name="adj1" fmla="val 50000"/>
+              <a:gd name="adj2" fmla="val 50000"/>
+            </a:avLst>
+          </a:prstGeom>
+          <a:solidFill>
+            <a:schemeClr val="tx1"/>
+          </a:solidFill>
+        </p:spPr>
+        <p:style>
+          <a:lnRef idx="2">
+            <a:schemeClr val="accent1">
+              <a:shade val="50000"/>
+            </a:schemeClr>
+          </a:lnRef>
+          <a:fillRef idx="1">
+            <a:schemeClr val="accent1"/>
+          </a:fillRef>
+          <a:effectRef idx="0">
+            <a:schemeClr val="accent1"/>
+          </a:effectRef>
+          <a:fontRef idx="minor">
+            <a:schemeClr val="lt1"/>
+          </a:fontRef>
+        </p:style>
+      </p:sp>
+      <p:sp>
+        <p:nvSpPr>
+          <p:cNvPr id="1643130970" name=""/>
+          <p:cNvSpPr/>
+          <p:nvPr/>
+        </p:nvSpPr>
+        <p:spPr bwMode="auto">
+          <a:xfrm rot="16199999" flipH="0" flipV="0">
+            <a:off x="9948288" y="2690400"/>
+            <a:ext cx="374646" cy="177425"/>
+          </a:xfrm>
+          <a:prstGeom prst="leftRightArrow">
+            <a:avLst>
+              <a:gd name="adj1" fmla="val 50000"/>
+              <a:gd name="adj2" fmla="val 50000"/>
+            </a:avLst>
+          </a:prstGeom>
+          <a:solidFill>
+            <a:schemeClr val="tx1"/>
+          </a:solidFill>
+        </p:spPr>
+        <p:style>
+          <a:lnRef idx="2">
+            <a:schemeClr val="accent1">
+              <a:shade val="50000"/>
+            </a:schemeClr>
+          </a:lnRef>
+          <a:fillRef idx="1">
+            <a:schemeClr val="accent1"/>
+          </a:fillRef>
+          <a:effectRef idx="0">
+            <a:schemeClr val="accent1"/>
+          </a:effectRef>
+          <a:fontRef idx="minor">
+            <a:schemeClr val="lt1"/>
+          </a:fontRef>
+        </p:style>
+      </p:sp>
+      <p:sp>
+        <p:nvSpPr>
+          <p:cNvPr id="430974899" name=""/>
+          <p:cNvSpPr/>
+          <p:nvPr/>
+        </p:nvSpPr>
+        <p:spPr bwMode="auto">
+          <a:xfrm rot="0" flipH="0" flipV="0">
+            <a:off x="10307252" y="2150392"/>
+            <a:ext cx="374646" cy="177425"/>
+          </a:xfrm>
+          <a:prstGeom prst="leftRightArrow">
+            <a:avLst>
+              <a:gd name="adj1" fmla="val 50000"/>
+              <a:gd name="adj2" fmla="val 50000"/>
+            </a:avLst>
+          </a:prstGeom>
+          <a:solidFill>
+            <a:schemeClr val="tx1"/>
+          </a:solidFill>
+        </p:spPr>
+        <p:style>
+          <a:lnRef idx="2">
+            <a:schemeClr val="accent1">
+              <a:shade val="50000"/>
+            </a:schemeClr>
+          </a:lnRef>
+          <a:fillRef idx="1">
+            <a:schemeClr val="accent1"/>
+          </a:fillRef>
+          <a:effectRef idx="0">
+            <a:schemeClr val="accent1"/>
+          </a:effectRef>
+          <a:fontRef idx="minor">
+            <a:schemeClr val="lt1"/>
+          </a:fontRef>
+        </p:style>
+      </p:sp>
+      <p:sp>
+        <p:nvSpPr>
+          <p:cNvPr id="551066871" name=""/>
+          <p:cNvSpPr/>
+          <p:nvPr/>
+        </p:nvSpPr>
+        <p:spPr bwMode="auto">
+          <a:xfrm rot="16641566" flipH="0" flipV="0">
+            <a:off x="10544316" y="2540453"/>
+            <a:ext cx="538321" cy="177425"/>
+          </a:xfrm>
+          <a:prstGeom prst="leftRightArrow">
+            <a:avLst>
+              <a:gd name="adj1" fmla="val 50000"/>
+              <a:gd name="adj2" fmla="val 50000"/>
+            </a:avLst>
+          </a:prstGeom>
+          <a:solidFill>
+            <a:schemeClr val="tx1"/>
+          </a:solidFill>
+        </p:spPr>
+        <p:style>
+          <a:lnRef idx="2">
+            <a:schemeClr val="accent1">
+              <a:shade val="50000"/>
+            </a:schemeClr>
+          </a:lnRef>
+          <a:fillRef idx="1">
+            <a:schemeClr val="accent1"/>
+          </a:fillRef>
+          <a:effectRef idx="0">
+            <a:schemeClr val="accent1"/>
+          </a:effectRef>
+          <a:fontRef idx="minor">
+            <a:schemeClr val="lt1"/>
+          </a:fontRef>
+        </p:style>
+      </p:sp>
+      <p:sp>
+        <p:nvSpPr>
+          <p:cNvPr id="577638664" name=""/>
+          <p:cNvSpPr/>
+          <p:nvPr/>
+        </p:nvSpPr>
+        <p:spPr bwMode="auto">
+          <a:xfrm rot="16641566" flipH="0" flipV="0">
+            <a:off x="10485007" y="3375212"/>
+            <a:ext cx="393784" cy="177425"/>
+          </a:xfrm>
+          <a:prstGeom prst="leftRightArrow">
+            <a:avLst>
+              <a:gd name="adj1" fmla="val 50000"/>
+              <a:gd name="adj2" fmla="val 50000"/>
+            </a:avLst>
+          </a:prstGeom>
+          <a:solidFill>
+            <a:schemeClr val="tx1"/>
+          </a:solidFill>
+        </p:spPr>
+        <p:style>
+          <a:lnRef idx="2">
+            <a:schemeClr val="accent1">
+              <a:shade val="50000"/>
+            </a:schemeClr>
+          </a:lnRef>
+          <a:fillRef idx="1">
+            <a:schemeClr val="accent1"/>
+          </a:fillRef>
+          <a:effectRef idx="0">
+            <a:schemeClr val="accent1"/>
+          </a:effectRef>
+          <a:fontRef idx="minor">
+            <a:schemeClr val="lt1"/>
+          </a:fontRef>
+        </p:style>
+      </p:sp>
+      <p:sp>
+        <p:nvSpPr>
+          <p:cNvPr id="2109338489" name=""/>
+          <p:cNvSpPr/>
+          <p:nvPr/>
+        </p:nvSpPr>
+        <p:spPr bwMode="auto">
+          <a:xfrm rot="20714750" flipH="0" flipV="0">
+            <a:off x="10302222" y="3071263"/>
+            <a:ext cx="296505" cy="177425"/>
+          </a:xfrm>
+          <a:prstGeom prst="leftRightArrow">
+            <a:avLst>
+              <a:gd name="adj1" fmla="val 50000"/>
+              <a:gd name="adj2" fmla="val 50000"/>
+            </a:avLst>
+          </a:prstGeom>
+          <a:solidFill>
+            <a:schemeClr val="tx1"/>
+          </a:solidFill>
+        </p:spPr>
+        <p:style>
+          <a:lnRef idx="2">
+            <a:schemeClr val="accent1">
+              <a:shade val="50000"/>
+            </a:schemeClr>
+          </a:lnRef>
+          <a:fillRef idx="1">
+            <a:schemeClr val="accent1"/>
+          </a:fillRef>
+          <a:effectRef idx="0">
+            <a:schemeClr val="accent1"/>
+          </a:effectRef>
+          <a:fontRef idx="minor">
+            <a:schemeClr val="lt1"/>
+          </a:fontRef>
+        </p:style>
+      </p:sp>
+      <p:sp>
+        <p:nvSpPr>
+          <p:cNvPr id="176399278" name=""/>
+          <p:cNvSpPr/>
+          <p:nvPr/>
+        </p:nvSpPr>
+        <p:spPr bwMode="auto">
+          <a:xfrm rot="18278077" flipH="0" flipV="0">
+            <a:off x="9665883" y="3520741"/>
+            <a:ext cx="538320" cy="177425"/>
+          </a:xfrm>
+          <a:prstGeom prst="leftRightArrow">
+            <a:avLst>
+              <a:gd name="adj1" fmla="val 50000"/>
+              <a:gd name="adj2" fmla="val 50000"/>
+            </a:avLst>
+          </a:prstGeom>
+          <a:solidFill>
+            <a:schemeClr val="tx1"/>
+          </a:solidFill>
+        </p:spPr>
+        <p:style>
+          <a:lnRef idx="2">
+            <a:schemeClr val="accent1">
+              <a:shade val="50000"/>
+            </a:schemeClr>
+          </a:lnRef>
+          <a:fillRef idx="1">
+            <a:schemeClr val="accent1"/>
+          </a:fillRef>
+          <a:effectRef idx="0">
+            <a:schemeClr val="accent1"/>
+          </a:effectRef>
+          <a:fontRef idx="minor">
+            <a:schemeClr val="lt1"/>
+          </a:fontRef>
+        </p:style>
+      </p:sp>
+      <p:sp>
+        <p:nvSpPr>
+          <p:cNvPr id="1258865397" name=""/>
+          <p:cNvSpPr/>
+          <p:nvPr/>
+        </p:nvSpPr>
+        <p:spPr bwMode="auto">
+          <a:xfrm rot="15716853" flipH="0" flipV="0">
+            <a:off x="9117635" y="3228315"/>
+            <a:ext cx="974223" cy="162513"/>
+          </a:xfrm>
+          <a:prstGeom prst="leftRightArrow">
+            <a:avLst>
+              <a:gd name="adj1" fmla="val 50000"/>
+              <a:gd name="adj2" fmla="val 50000"/>
+            </a:avLst>
+          </a:prstGeom>
+          <a:solidFill>
+            <a:schemeClr val="tx1"/>
+          </a:solidFill>
+        </p:spPr>
+        <p:style>
+          <a:lnRef idx="2">
+            <a:schemeClr val="accent1">
+              <a:shade val="50000"/>
+            </a:schemeClr>
+          </a:lnRef>
+          <a:fillRef idx="1">
+            <a:schemeClr val="accent1"/>
+          </a:fillRef>
+          <a:effectRef idx="0">
+            <a:schemeClr val="accent1"/>
+          </a:effectRef>
+          <a:fontRef idx="minor">
+            <a:schemeClr val="lt1"/>
+          </a:fontRef>
+        </p:style>
+      </p:sp>
+      <p:sp>
+        <p:nvSpPr>
+          <p:cNvPr id="443091887" name=""/>
+          <p:cNvSpPr/>
+          <p:nvPr/>
+        </p:nvSpPr>
+        <p:spPr bwMode="auto">
+          <a:xfrm rot="21056224" flipH="0" flipV="0">
+            <a:off x="9891851" y="3785982"/>
+            <a:ext cx="538320" cy="177425"/>
+          </a:xfrm>
+          <a:prstGeom prst="leftRightArrow">
+            <a:avLst>
+              <a:gd name="adj1" fmla="val 50000"/>
+              <a:gd name="adj2" fmla="val 50000"/>
+            </a:avLst>
+          </a:prstGeom>
+          <a:solidFill>
+            <a:schemeClr val="tx1"/>
+          </a:solidFill>
+        </p:spPr>
+        <p:style>
+          <a:lnRef idx="2">
+            <a:schemeClr val="accent1">
+              <a:shade val="50000"/>
+            </a:schemeClr>
+          </a:lnRef>
+          <a:fillRef idx="1">
+            <a:schemeClr val="accent1"/>
+          </a:fillRef>
+          <a:effectRef idx="0">
+            <a:schemeClr val="accent1"/>
+          </a:effectRef>
+          <a:fontRef idx="minor">
+            <a:schemeClr val="lt1"/>
+          </a:fontRef>
+        </p:style>
+      </p:sp>
+      <p:sp>
+        <p:nvSpPr>
+          <p:cNvPr id="1355962164" name=""/>
+          <p:cNvSpPr/>
+          <p:nvPr/>
+        </p:nvSpPr>
+        <p:spPr bwMode="auto">
+          <a:xfrm rot="2700000" flipH="0" flipV="0">
+            <a:off x="10187659" y="3408166"/>
+            <a:ext cx="388286" cy="177425"/>
+          </a:xfrm>
+          <a:prstGeom prst="leftRightArrow">
+            <a:avLst>
+              <a:gd name="adj1" fmla="val 50000"/>
+              <a:gd name="adj2" fmla="val 50000"/>
+            </a:avLst>
+          </a:prstGeom>
+          <a:solidFill>
+            <a:schemeClr val="tx1"/>
+          </a:solidFill>
+        </p:spPr>
+        <p:style>
+          <a:lnRef idx="2">
+            <a:schemeClr val="accent1">
+              <a:shade val="50000"/>
+            </a:schemeClr>
+          </a:lnRef>
+          <a:fillRef idx="1">
+            <a:schemeClr val="accent1"/>
+          </a:fillRef>
+          <a:effectRef idx="0">
+            <a:schemeClr val="accent1"/>
+          </a:effectRef>
+          <a:fontRef idx="minor">
+            <a:schemeClr val="lt1"/>
+          </a:fontRef>
+        </p:style>
+      </p:sp>
+      <p:sp>
+        <p:nvSpPr>
+          <p:cNvPr id="607453950" name=""/>
+          <p:cNvSpPr txBox="1"/>
+          <p:nvPr/>
+        </p:nvSpPr>
+        <p:spPr bwMode="auto">
+          <a:xfrm rot="0" flipH="0" flipV="0">
+            <a:off x="9163771" y="4240406"/>
+            <a:ext cx="1962210" cy="366119"/>
+          </a:xfrm>
+          <a:prstGeom prst="rect">
+            <a:avLst/>
+          </a:prstGeom>
+          <a:noFill/>
+        </p:spPr>
+        <p:txBody>
+          <a:bodyPr vertOverflow="overflow" horzOverflow="overflow" vert="horz" wrap="square" lIns="91440" tIns="45720" rIns="91440" bIns="45720" numCol="1" spcCol="0" rtlCol="0" fromWordArt="0" anchor="t" anchorCtr="0" forceAA="0" upright="0" compatLnSpc="0">
+            <a:spAutoFit/>
+          </a:bodyPr>
+          <a:p>
+            <a:pPr algn="ctr">
+              <a:defRPr/>
+            </a:pPr>
+            <a:r>
+              <a:rPr sz="1800" b="1">
+                <a:latin typeface="Times New Roman"/>
+                <a:cs typeface="Times New Roman"/>
+              </a:rPr>
+              <a:t>Final scene graph</a:t>
+            </a:r>
+            <a:endParaRPr sz="1800" b="1">
               <a:latin typeface="Times New Roman"/>
               <a:cs typeface="Times New Roman"/>
             </a:endParaRPr>

--- a/Diagram.pptx
+++ b/Diagram.pptx
@@ -136,7 +136,7 @@
       </p:grpSpPr>
       <p:sp>
         <p:nvSpPr>
-          <p:cNvPr id="1201092491" name="Header Placeholder 1"/>
+          <p:cNvPr id="1140177832" name="Header Placeholder 1"/>
           <p:cNvSpPr>
             <a:spLocks noGrp="1"/>
           </p:cNvSpPr>
@@ -170,7 +170,7 @@
       </p:sp>
       <p:sp>
         <p:nvSpPr>
-          <p:cNvPr id="873850066" name="Date Placeholder 2"/>
+          <p:cNvPr id="1369934933" name="Date Placeholder 2"/>
           <p:cNvSpPr>
             <a:spLocks noGrp="1"/>
           </p:cNvSpPr>
@@ -208,7 +208,7 @@
       </p:sp>
       <p:sp>
         <p:nvSpPr>
-          <p:cNvPr id="51782315" name="Slide Image Placeholder 3"/>
+          <p:cNvPr id="710642646" name="Slide Image Placeholder 3"/>
           <p:cNvSpPr>
             <a:spLocks noChangeAspect="1" noGrp="1" noRot="1"/>
           </p:cNvSpPr>
@@ -244,7 +244,7 @@
       </p:sp>
       <p:sp>
         <p:nvSpPr>
-          <p:cNvPr id="544226186" name="Notes Placeholder 4"/>
+          <p:cNvPr id="1983468985" name="Notes Placeholder 4"/>
           <p:cNvSpPr>
             <a:spLocks noGrp="1"/>
           </p:cNvSpPr>
@@ -318,7 +318,7 @@
       </p:sp>
       <p:sp>
         <p:nvSpPr>
-          <p:cNvPr id="591571328" name="Footer Placeholder 5"/>
+          <p:cNvPr id="1417070830" name="Footer Placeholder 5"/>
           <p:cNvSpPr>
             <a:spLocks noGrp="1"/>
           </p:cNvSpPr>
@@ -352,7 +352,7 @@
       </p:sp>
       <p:sp>
         <p:nvSpPr>
-          <p:cNvPr id="2054866446" name="Slide Number Placeholder 6"/>
+          <p:cNvPr id="945695173" name="Slide Number Placeholder 6"/>
           <p:cNvSpPr>
             <a:spLocks noGrp="1"/>
           </p:cNvSpPr>
@@ -505,7 +505,7 @@
       </p:grpSpPr>
       <p:sp>
         <p:nvSpPr>
-          <p:cNvPr id="904073824" name="Slide Image Placeholder 1"/>
+          <p:cNvPr id="1872287219" name="Slide Image Placeholder 1"/>
           <p:cNvSpPr>
             <a:spLocks noChangeAspect="1" noGrp="1" noRot="1"/>
           </p:cNvSpPr>
@@ -522,7 +522,7 @@
       </p:sp>
       <p:sp>
         <p:nvSpPr>
-          <p:cNvPr id="1650943360" name="Notes Placeholder 2"/>
+          <p:cNvPr id="1480060702" name="Notes Placeholder 2"/>
           <p:cNvSpPr>
             <a:spLocks noGrp="1"/>
           </p:cNvSpPr>
@@ -547,7 +547,7 @@
       </p:sp>
       <p:sp>
         <p:nvSpPr>
-          <p:cNvPr id="235438466" name="Slide Number Placeholder 3"/>
+          <p:cNvPr id="1191316464" name="Slide Number Placeholder 3"/>
           <p:cNvSpPr>
             <a:spLocks noGrp="1"/>
           </p:cNvSpPr>
@@ -598,7 +598,7 @@
       </p:grpSpPr>
       <p:sp>
         <p:nvSpPr>
-          <p:cNvPr id="890476691" name="Slide Image Placeholder 1"/>
+          <p:cNvPr id="1630870160" name="Slide Image Placeholder 1"/>
           <p:cNvSpPr>
             <a:spLocks noChangeAspect="1" noGrp="1" noRot="1"/>
           </p:cNvSpPr>
@@ -610,7 +610,7 @@
       </p:sp>
       <p:sp>
         <p:nvSpPr>
-          <p:cNvPr id="81608501" name="Notes Placeholder 2"/>
+          <p:cNvPr id="1816027449" name="Notes Placeholder 2"/>
           <p:cNvSpPr>
             <a:spLocks noGrp="1"/>
           </p:cNvSpPr>
@@ -632,7 +632,7 @@
       </p:sp>
       <p:sp>
         <p:nvSpPr>
-          <p:cNvPr id="935253061" name="Slide Number Placeholder 3"/>
+          <p:cNvPr id="1714266658" name="Slide Number Placeholder 3"/>
           <p:cNvSpPr>
             <a:spLocks noGrp="1"/>
           </p:cNvSpPr>
@@ -683,7 +683,7 @@
       </p:grpSpPr>
       <p:sp>
         <p:nvSpPr>
-          <p:cNvPr id="2" name="Slide Image Placeholder 1"/>
+          <p:cNvPr id="408330842" name="Slide Image Placeholder 1"/>
           <p:cNvSpPr>
             <a:spLocks noChangeAspect="1" noGrp="1" noRot="1"/>
           </p:cNvSpPr>
@@ -695,7 +695,7 @@
       </p:sp>
       <p:sp>
         <p:nvSpPr>
-          <p:cNvPr id="3" name="Notes Placeholder 2"/>
+          <p:cNvPr id="1107271330" name="Notes Placeholder 2"/>
           <p:cNvSpPr>
             <a:spLocks noGrp="1"/>
           </p:cNvSpPr>
@@ -717,7 +717,7 @@
       </p:sp>
       <p:sp>
         <p:nvSpPr>
-          <p:cNvPr id="4" name="Slide Number Placeholder 3"/>
+          <p:cNvPr id="18016481" name="Slide Number Placeholder 3"/>
           <p:cNvSpPr>
             <a:spLocks noGrp="1"/>
           </p:cNvSpPr>
@@ -768,7 +768,7 @@
       </p:grpSpPr>
       <p:sp>
         <p:nvSpPr>
-          <p:cNvPr id="332774434" name="Title 1"/>
+          <p:cNvPr id="720622070" name="Title 1"/>
           <p:cNvSpPr>
             <a:spLocks noGrp="1"/>
           </p:cNvSpPr>
@@ -803,7 +803,7 @@
       </p:sp>
       <p:sp>
         <p:nvSpPr>
-          <p:cNvPr id="103826861" name="Subtitle 2"/>
+          <p:cNvPr id="113172965" name="Subtitle 2"/>
           <p:cNvSpPr>
             <a:spLocks noGrp="1"/>
           </p:cNvSpPr>
@@ -871,7 +871,7 @@
       </p:sp>
       <p:sp>
         <p:nvSpPr>
-          <p:cNvPr id="1860443973" name="Date Placeholder 3"/>
+          <p:cNvPr id="1119644886" name="Date Placeholder 3"/>
           <p:cNvSpPr>
             <a:spLocks noGrp="1"/>
           </p:cNvSpPr>
@@ -897,7 +897,7 @@
       </p:sp>
       <p:sp>
         <p:nvSpPr>
-          <p:cNvPr id="98070781" name="Footer Placeholder 4"/>
+          <p:cNvPr id="132622082" name="Footer Placeholder 4"/>
           <p:cNvSpPr>
             <a:spLocks noGrp="1"/>
           </p:cNvSpPr>
@@ -919,7 +919,7 @@
       </p:sp>
       <p:sp>
         <p:nvSpPr>
-          <p:cNvPr id="1664881423" name="Slide Number Placeholder 5"/>
+          <p:cNvPr id="135491539" name="Slide Number Placeholder 5"/>
           <p:cNvSpPr>
             <a:spLocks noGrp="1"/>
           </p:cNvSpPr>
@@ -970,7 +970,7 @@
       </p:grpSpPr>
       <p:sp>
         <p:nvSpPr>
-          <p:cNvPr id="2050289376" name="Title 1"/>
+          <p:cNvPr id="1762555695" name="Title 1"/>
           <p:cNvSpPr>
             <a:spLocks noGrp="1"/>
           </p:cNvSpPr>
@@ -996,7 +996,7 @@
       </p:sp>
       <p:sp>
         <p:nvSpPr>
-          <p:cNvPr id="1131014252" name="Vertical Text Placeholder 2"/>
+          <p:cNvPr id="1149202603" name="Vertical Text Placeholder 2"/>
           <p:cNvSpPr>
             <a:spLocks noGrp="1"/>
           </p:cNvSpPr>
@@ -1062,7 +1062,7 @@
       </p:sp>
       <p:sp>
         <p:nvSpPr>
-          <p:cNvPr id="52873325" name="Date Placeholder 3"/>
+          <p:cNvPr id="1775086518" name="Date Placeholder 3"/>
           <p:cNvSpPr>
             <a:spLocks noGrp="1"/>
           </p:cNvSpPr>
@@ -1088,7 +1088,7 @@
       </p:sp>
       <p:sp>
         <p:nvSpPr>
-          <p:cNvPr id="2049754408" name="Footer Placeholder 4"/>
+          <p:cNvPr id="952346310" name="Footer Placeholder 4"/>
           <p:cNvSpPr>
             <a:spLocks noGrp="1"/>
           </p:cNvSpPr>
@@ -1110,7 +1110,7 @@
       </p:sp>
       <p:sp>
         <p:nvSpPr>
-          <p:cNvPr id="694223006" name="Slide Number Placeholder 5"/>
+          <p:cNvPr id="868255861" name="Slide Number Placeholder 5"/>
           <p:cNvSpPr>
             <a:spLocks noGrp="1"/>
           </p:cNvSpPr>
@@ -1161,7 +1161,7 @@
       </p:grpSpPr>
       <p:sp>
         <p:nvSpPr>
-          <p:cNvPr id="1289262130" name="Vertical Title 1"/>
+          <p:cNvPr id="658760839" name="Vertical Title 1"/>
           <p:cNvSpPr>
             <a:spLocks noGrp="1"/>
           </p:cNvSpPr>
@@ -1192,7 +1192,7 @@
       </p:sp>
       <p:sp>
         <p:nvSpPr>
-          <p:cNvPr id="68233920" name="Vertical Text Placeholder 2"/>
+          <p:cNvPr id="948695324" name="Vertical Text Placeholder 2"/>
           <p:cNvSpPr>
             <a:spLocks noGrp="1"/>
           </p:cNvSpPr>
@@ -1263,7 +1263,7 @@
       </p:sp>
       <p:sp>
         <p:nvSpPr>
-          <p:cNvPr id="1273142648" name="Date Placeholder 3"/>
+          <p:cNvPr id="1090873273" name="Date Placeholder 3"/>
           <p:cNvSpPr>
             <a:spLocks noGrp="1"/>
           </p:cNvSpPr>
@@ -1289,7 +1289,7 @@
       </p:sp>
       <p:sp>
         <p:nvSpPr>
-          <p:cNvPr id="1499605793" name="Footer Placeholder 4"/>
+          <p:cNvPr id="1650728553" name="Footer Placeholder 4"/>
           <p:cNvSpPr>
             <a:spLocks noGrp="1"/>
           </p:cNvSpPr>
@@ -1311,7 +1311,7 @@
       </p:sp>
       <p:sp>
         <p:nvSpPr>
-          <p:cNvPr id="713063721" name="Slide Number Placeholder 5"/>
+          <p:cNvPr id="1823298805" name="Slide Number Placeholder 5"/>
           <p:cNvSpPr>
             <a:spLocks noGrp="1"/>
           </p:cNvSpPr>
@@ -1362,7 +1362,7 @@
       </p:grpSpPr>
       <p:sp>
         <p:nvSpPr>
-          <p:cNvPr id="837895858" name="Title 1"/>
+          <p:cNvPr id="198819773" name="Title 1"/>
           <p:cNvSpPr>
             <a:spLocks noGrp="1"/>
           </p:cNvSpPr>
@@ -1388,7 +1388,7 @@
       </p:sp>
       <p:sp>
         <p:nvSpPr>
-          <p:cNvPr id="1711431520" name="Content Placeholder 2"/>
+          <p:cNvPr id="1006159479" name="Content Placeholder 2"/>
           <p:cNvSpPr>
             <a:spLocks noGrp="1"/>
           </p:cNvSpPr>
@@ -1454,7 +1454,7 @@
       </p:sp>
       <p:sp>
         <p:nvSpPr>
-          <p:cNvPr id="757940319" name="Date Placeholder 3"/>
+          <p:cNvPr id="402490200" name="Date Placeholder 3"/>
           <p:cNvSpPr>
             <a:spLocks noGrp="1"/>
           </p:cNvSpPr>
@@ -1480,7 +1480,7 @@
       </p:sp>
       <p:sp>
         <p:nvSpPr>
-          <p:cNvPr id="1723634570" name="Footer Placeholder 4"/>
+          <p:cNvPr id="1911900021" name="Footer Placeholder 4"/>
           <p:cNvSpPr>
             <a:spLocks noGrp="1"/>
           </p:cNvSpPr>
@@ -1502,7 +1502,7 @@
       </p:sp>
       <p:sp>
         <p:nvSpPr>
-          <p:cNvPr id="99615263" name="Slide Number Placeholder 5"/>
+          <p:cNvPr id="1530880679" name="Slide Number Placeholder 5"/>
           <p:cNvSpPr>
             <a:spLocks noGrp="1"/>
           </p:cNvSpPr>
@@ -1553,7 +1553,7 @@
       </p:grpSpPr>
       <p:sp>
         <p:nvSpPr>
-          <p:cNvPr id="311747314" name="Title 1"/>
+          <p:cNvPr id="669647143" name="Title 1"/>
           <p:cNvSpPr>
             <a:spLocks noGrp="1"/>
           </p:cNvSpPr>
@@ -1588,7 +1588,7 @@
       </p:sp>
       <p:sp>
         <p:nvSpPr>
-          <p:cNvPr id="294429765" name="Text Placeholder 2"/>
+          <p:cNvPr id="153431083" name="Text Placeholder 2"/>
           <p:cNvSpPr>
             <a:spLocks noGrp="1"/>
           </p:cNvSpPr>
@@ -1710,7 +1710,7 @@
       </p:sp>
       <p:sp>
         <p:nvSpPr>
-          <p:cNvPr id="40630106" name="Date Placeholder 3"/>
+          <p:cNvPr id="1619546274" name="Date Placeholder 3"/>
           <p:cNvSpPr>
             <a:spLocks noGrp="1"/>
           </p:cNvSpPr>
@@ -1736,7 +1736,7 @@
       </p:sp>
       <p:sp>
         <p:nvSpPr>
-          <p:cNvPr id="1213607106" name="Footer Placeholder 4"/>
+          <p:cNvPr id="151310360" name="Footer Placeholder 4"/>
           <p:cNvSpPr>
             <a:spLocks noGrp="1"/>
           </p:cNvSpPr>
@@ -1758,7 +1758,7 @@
       </p:sp>
       <p:sp>
         <p:nvSpPr>
-          <p:cNvPr id="1491937610" name="Slide Number Placeholder 5"/>
+          <p:cNvPr id="646505135" name="Slide Number Placeholder 5"/>
           <p:cNvSpPr>
             <a:spLocks noGrp="1"/>
           </p:cNvSpPr>
@@ -1809,7 +1809,7 @@
       </p:grpSpPr>
       <p:sp>
         <p:nvSpPr>
-          <p:cNvPr id="6904322" name="Title 1"/>
+          <p:cNvPr id="1358743542" name="Title 1"/>
           <p:cNvSpPr>
             <a:spLocks noGrp="1"/>
           </p:cNvSpPr>
@@ -1835,7 +1835,7 @@
       </p:sp>
       <p:sp>
         <p:nvSpPr>
-          <p:cNvPr id="1835510962" name="Content Placeholder 2"/>
+          <p:cNvPr id="1657826317" name="Content Placeholder 2"/>
           <p:cNvSpPr>
             <a:spLocks noGrp="1"/>
           </p:cNvSpPr>
@@ -1906,7 +1906,7 @@
       </p:sp>
       <p:sp>
         <p:nvSpPr>
-          <p:cNvPr id="1419964102" name="Content Placeholder 3"/>
+          <p:cNvPr id="809712406" name="Content Placeholder 3"/>
           <p:cNvSpPr>
             <a:spLocks noGrp="1"/>
           </p:cNvSpPr>
@@ -1977,7 +1977,7 @@
       </p:sp>
       <p:sp>
         <p:nvSpPr>
-          <p:cNvPr id="879676465" name="Date Placeholder 4"/>
+          <p:cNvPr id="1763833465" name="Date Placeholder 4"/>
           <p:cNvSpPr>
             <a:spLocks noGrp="1"/>
           </p:cNvSpPr>
@@ -2003,7 +2003,7 @@
       </p:sp>
       <p:sp>
         <p:nvSpPr>
-          <p:cNvPr id="72310431" name="Footer Placeholder 5"/>
+          <p:cNvPr id="1185647088" name="Footer Placeholder 5"/>
           <p:cNvSpPr>
             <a:spLocks noGrp="1"/>
           </p:cNvSpPr>
@@ -2025,7 +2025,7 @@
       </p:sp>
       <p:sp>
         <p:nvSpPr>
-          <p:cNvPr id="587105362" name="Slide Number Placeholder 6"/>
+          <p:cNvPr id="1480356531" name="Slide Number Placeholder 6"/>
           <p:cNvSpPr>
             <a:spLocks noGrp="1"/>
           </p:cNvSpPr>
@@ -2076,7 +2076,7 @@
       </p:grpSpPr>
       <p:sp>
         <p:nvSpPr>
-          <p:cNvPr id="1486315579" name="Title 1"/>
+          <p:cNvPr id="1575450269" name="Title 1"/>
           <p:cNvSpPr>
             <a:spLocks noGrp="1"/>
           </p:cNvSpPr>
@@ -2107,7 +2107,7 @@
       </p:sp>
       <p:sp>
         <p:nvSpPr>
-          <p:cNvPr id="698920341" name="Text Placeholder 2"/>
+          <p:cNvPr id="2059986109" name="Text Placeholder 2"/>
           <p:cNvSpPr>
             <a:spLocks noGrp="1"/>
           </p:cNvSpPr>
@@ -2175,7 +2175,7 @@
       </p:sp>
       <p:sp>
         <p:nvSpPr>
-          <p:cNvPr id="348312544" name="Content Placeholder 3"/>
+          <p:cNvPr id="832021885" name="Content Placeholder 3"/>
           <p:cNvSpPr>
             <a:spLocks noGrp="1"/>
           </p:cNvSpPr>
@@ -2246,7 +2246,7 @@
       </p:sp>
       <p:sp>
         <p:nvSpPr>
-          <p:cNvPr id="1999421204" name="Text Placeholder 4"/>
+          <p:cNvPr id="1018461726" name="Text Placeholder 4"/>
           <p:cNvSpPr>
             <a:spLocks noGrp="1"/>
           </p:cNvSpPr>
@@ -2314,7 +2314,7 @@
       </p:sp>
       <p:sp>
         <p:nvSpPr>
-          <p:cNvPr id="363805999" name="Content Placeholder 5"/>
+          <p:cNvPr id="515974677" name="Content Placeholder 5"/>
           <p:cNvSpPr>
             <a:spLocks noGrp="1"/>
           </p:cNvSpPr>
@@ -2385,7 +2385,7 @@
       </p:sp>
       <p:sp>
         <p:nvSpPr>
-          <p:cNvPr id="1308927651" name="Date Placeholder 6"/>
+          <p:cNvPr id="1303477150" name="Date Placeholder 6"/>
           <p:cNvSpPr>
             <a:spLocks noGrp="1"/>
           </p:cNvSpPr>
@@ -2411,7 +2411,7 @@
       </p:sp>
       <p:sp>
         <p:nvSpPr>
-          <p:cNvPr id="490403098" name="Footer Placeholder 7"/>
+          <p:cNvPr id="1718392733" name="Footer Placeholder 7"/>
           <p:cNvSpPr>
             <a:spLocks noGrp="1"/>
           </p:cNvSpPr>
@@ -2433,7 +2433,7 @@
       </p:sp>
       <p:sp>
         <p:nvSpPr>
-          <p:cNvPr id="2120411711" name="Slide Number Placeholder 8"/>
+          <p:cNvPr id="301519563" name="Slide Number Placeholder 8"/>
           <p:cNvSpPr>
             <a:spLocks noGrp="1"/>
           </p:cNvSpPr>
@@ -2484,7 +2484,7 @@
       </p:grpSpPr>
       <p:sp>
         <p:nvSpPr>
-          <p:cNvPr id="898096176" name="Title 1"/>
+          <p:cNvPr id="539729745" name="Title 1"/>
           <p:cNvSpPr>
             <a:spLocks noGrp="1"/>
           </p:cNvSpPr>
@@ -2510,7 +2510,7 @@
       </p:sp>
       <p:sp>
         <p:nvSpPr>
-          <p:cNvPr id="1687907001" name="Date Placeholder 2"/>
+          <p:cNvPr id="623274195" name="Date Placeholder 2"/>
           <p:cNvSpPr>
             <a:spLocks noGrp="1"/>
           </p:cNvSpPr>
@@ -2536,7 +2536,7 @@
       </p:sp>
       <p:sp>
         <p:nvSpPr>
-          <p:cNvPr id="1285649290" name="Footer Placeholder 3"/>
+          <p:cNvPr id="593047916" name="Footer Placeholder 3"/>
           <p:cNvSpPr>
             <a:spLocks noGrp="1"/>
           </p:cNvSpPr>
@@ -2558,7 +2558,7 @@
       </p:sp>
       <p:sp>
         <p:nvSpPr>
-          <p:cNvPr id="1387771189" name="Slide Number Placeholder 4"/>
+          <p:cNvPr id="1366298147" name="Slide Number Placeholder 4"/>
           <p:cNvSpPr>
             <a:spLocks noGrp="1"/>
           </p:cNvSpPr>
@@ -2609,7 +2609,7 @@
       </p:grpSpPr>
       <p:sp>
         <p:nvSpPr>
-          <p:cNvPr id="1422905941" name="Date Placeholder 1"/>
+          <p:cNvPr id="34558345" name="Date Placeholder 1"/>
           <p:cNvSpPr>
             <a:spLocks noGrp="1"/>
           </p:cNvSpPr>
@@ -2635,7 +2635,7 @@
       </p:sp>
       <p:sp>
         <p:nvSpPr>
-          <p:cNvPr id="300147622" name="Footer Placeholder 2"/>
+          <p:cNvPr id="1622832443" name="Footer Placeholder 2"/>
           <p:cNvSpPr>
             <a:spLocks noGrp="1"/>
           </p:cNvSpPr>
@@ -2657,7 +2657,7 @@
       </p:sp>
       <p:sp>
         <p:nvSpPr>
-          <p:cNvPr id="1629550334" name="Slide Number Placeholder 3"/>
+          <p:cNvPr id="1967212036" name="Slide Number Placeholder 3"/>
           <p:cNvSpPr>
             <a:spLocks noGrp="1"/>
           </p:cNvSpPr>
@@ -2708,7 +2708,7 @@
       </p:grpSpPr>
       <p:sp>
         <p:nvSpPr>
-          <p:cNvPr id="1750387072" name="Title 1"/>
+          <p:cNvPr id="1236871562" name="Title 1"/>
           <p:cNvSpPr>
             <a:spLocks noGrp="1"/>
           </p:cNvSpPr>
@@ -2743,7 +2743,7 @@
       </p:sp>
       <p:sp>
         <p:nvSpPr>
-          <p:cNvPr id="598316175" name="Content Placeholder 2"/>
+          <p:cNvPr id="1565490591" name="Content Placeholder 2"/>
           <p:cNvSpPr>
             <a:spLocks noGrp="1"/>
           </p:cNvSpPr>
@@ -2842,7 +2842,7 @@
       </p:sp>
       <p:sp>
         <p:nvSpPr>
-          <p:cNvPr id="1227508089" name="Text Placeholder 3"/>
+          <p:cNvPr id="213017909" name="Text Placeholder 3"/>
           <p:cNvSpPr>
             <a:spLocks noGrp="1"/>
           </p:cNvSpPr>
@@ -2910,7 +2910,7 @@
       </p:sp>
       <p:sp>
         <p:nvSpPr>
-          <p:cNvPr id="803129390" name="Date Placeholder 4"/>
+          <p:cNvPr id="1064222367" name="Date Placeholder 4"/>
           <p:cNvSpPr>
             <a:spLocks noGrp="1"/>
           </p:cNvSpPr>
@@ -2936,7 +2936,7 @@
       </p:sp>
       <p:sp>
         <p:nvSpPr>
-          <p:cNvPr id="229064313" name="Footer Placeholder 5"/>
+          <p:cNvPr id="177675923" name="Footer Placeholder 5"/>
           <p:cNvSpPr>
             <a:spLocks noGrp="1"/>
           </p:cNvSpPr>
@@ -2958,7 +2958,7 @@
       </p:sp>
       <p:sp>
         <p:nvSpPr>
-          <p:cNvPr id="757520220" name="Slide Number Placeholder 6"/>
+          <p:cNvPr id="644252817" name="Slide Number Placeholder 6"/>
           <p:cNvSpPr>
             <a:spLocks noGrp="1"/>
           </p:cNvSpPr>
@@ -3009,7 +3009,7 @@
       </p:grpSpPr>
       <p:sp>
         <p:nvSpPr>
-          <p:cNvPr id="637253410" name="Title 1"/>
+          <p:cNvPr id="1966048243" name="Title 1"/>
           <p:cNvSpPr>
             <a:spLocks noGrp="1"/>
           </p:cNvSpPr>
@@ -3044,7 +3044,7 @@
       </p:sp>
       <p:sp>
         <p:nvSpPr>
-          <p:cNvPr id="1067628971" name="Picture Placeholder 2"/>
+          <p:cNvPr id="123089155" name="Picture Placeholder 2"/>
           <p:cNvSpPr>
             <a:spLocks noChangeAspect="1" noGrp="1"/>
           </p:cNvSpPr>
@@ -3112,7 +3112,7 @@
       </p:sp>
       <p:sp>
         <p:nvSpPr>
-          <p:cNvPr id="207673262" name="Text Placeholder 3"/>
+          <p:cNvPr id="1265098606" name="Text Placeholder 3"/>
           <p:cNvSpPr>
             <a:spLocks noGrp="1"/>
           </p:cNvSpPr>
@@ -3180,7 +3180,7 @@
       </p:sp>
       <p:sp>
         <p:nvSpPr>
-          <p:cNvPr id="1940553930" name="Date Placeholder 4"/>
+          <p:cNvPr id="1592547936" name="Date Placeholder 4"/>
           <p:cNvSpPr>
             <a:spLocks noGrp="1"/>
           </p:cNvSpPr>
@@ -3206,7 +3206,7 @@
       </p:sp>
       <p:sp>
         <p:nvSpPr>
-          <p:cNvPr id="1564571807" name="Footer Placeholder 5"/>
+          <p:cNvPr id="191177061" name="Footer Placeholder 5"/>
           <p:cNvSpPr>
             <a:spLocks noGrp="1"/>
           </p:cNvSpPr>
@@ -3228,7 +3228,7 @@
       </p:sp>
       <p:sp>
         <p:nvSpPr>
-          <p:cNvPr id="340155033" name="Slide Number Placeholder 6"/>
+          <p:cNvPr id="1667065055" name="Slide Number Placeholder 6"/>
           <p:cNvSpPr>
             <a:spLocks noGrp="1"/>
           </p:cNvSpPr>
@@ -3284,7 +3284,7 @@
       </p:grpSpPr>
       <p:sp>
         <p:nvSpPr>
-          <p:cNvPr id="1707482521" name="Title Placeholder 1"/>
+          <p:cNvPr id="441339934" name="Title Placeholder 1"/>
           <p:cNvSpPr>
             <a:spLocks noGrp="1"/>
           </p:cNvSpPr>
@@ -3320,7 +3320,7 @@
       </p:sp>
       <p:sp>
         <p:nvSpPr>
-          <p:cNvPr id="101126959" name="Text Placeholder 2"/>
+          <p:cNvPr id="953791304" name="Text Placeholder 2"/>
           <p:cNvSpPr>
             <a:spLocks noGrp="1"/>
           </p:cNvSpPr>
@@ -3396,7 +3396,7 @@
       </p:sp>
       <p:sp>
         <p:nvSpPr>
-          <p:cNvPr id="990270419" name="Date Placeholder 3"/>
+          <p:cNvPr id="1714070188" name="Date Placeholder 3"/>
           <p:cNvSpPr>
             <a:spLocks noGrp="1"/>
           </p:cNvSpPr>
@@ -3440,7 +3440,7 @@
       </p:sp>
       <p:sp>
         <p:nvSpPr>
-          <p:cNvPr id="176612294" name="Footer Placeholder 4"/>
+          <p:cNvPr id="1493894341" name="Footer Placeholder 4"/>
           <p:cNvSpPr>
             <a:spLocks noGrp="1"/>
           </p:cNvSpPr>
@@ -3480,7 +3480,7 @@
       </p:sp>
       <p:sp>
         <p:nvSpPr>
-          <p:cNvPr id="137563821" name="Slide Number Placeholder 5"/>
+          <p:cNvPr id="1575577628" name="Slide Number Placeholder 5"/>
           <p:cNvSpPr>
             <a:spLocks noGrp="1"/>
           </p:cNvSpPr>
@@ -3840,7 +3840,7 @@
       </p:grpSpPr>
       <p:sp>
         <p:nvSpPr>
-          <p:cNvPr id="458150227" name=""/>
+          <p:cNvPr id="1368927905" name=""/>
           <p:cNvSpPr/>
           <p:nvPr/>
         </p:nvSpPr>
@@ -3915,7 +3915,7 @@
       </p:sp>
       <p:sp>
         <p:nvSpPr>
-          <p:cNvPr id="162626719" name=""/>
+          <p:cNvPr id="405789796" name=""/>
           <p:cNvSpPr/>
           <p:nvPr/>
         </p:nvSpPr>
@@ -3995,7 +3995,7 @@
       </p:sp>
       <p:sp>
         <p:nvSpPr>
-          <p:cNvPr id="1678673881" name=""/>
+          <p:cNvPr id="1245866572" name=""/>
           <p:cNvSpPr/>
           <p:nvPr/>
         </p:nvSpPr>
@@ -4048,7 +4048,7 @@
       </p:sp>
       <p:sp>
         <p:nvSpPr>
-          <p:cNvPr id="592970918" name=""/>
+          <p:cNvPr id="44852967" name=""/>
           <p:cNvSpPr txBox="1"/>
           <p:nvPr/>
         </p:nvSpPr>
@@ -4105,7 +4105,7 @@
       </p:sp>
       <p:sp>
         <p:nvSpPr>
-          <p:cNvPr id="1794264481" name=""/>
+          <p:cNvPr id="307828820" name=""/>
           <p:cNvSpPr/>
           <p:nvPr/>
         </p:nvSpPr>
@@ -4174,7 +4174,7 @@
       </p:sp>
       <p:sp>
         <p:nvSpPr>
-          <p:cNvPr id="1218502262" name=""/>
+          <p:cNvPr id="2135045341" name=""/>
           <p:cNvSpPr txBox="1"/>
           <p:nvPr/>
         </p:nvSpPr>
@@ -4224,7 +4224,7 @@
       </p:sp>
       <p:sp>
         <p:nvSpPr>
-          <p:cNvPr id="57714444" name=""/>
+          <p:cNvPr id="1165078815" name=""/>
           <p:cNvSpPr/>
           <p:nvPr/>
         </p:nvSpPr>
@@ -4383,7 +4383,7 @@
       </p:sp>
       <p:sp>
         <p:nvSpPr>
-          <p:cNvPr id="1027909168" name=""/>
+          <p:cNvPr id="1456989990" name=""/>
           <p:cNvSpPr/>
           <p:nvPr/>
         </p:nvSpPr>
@@ -4442,7 +4442,7 @@
       </p:sp>
       <p:sp>
         <p:nvSpPr>
-          <p:cNvPr id="957605480" name=""/>
+          <p:cNvPr id="1505097996" name=""/>
           <p:cNvSpPr txBox="1"/>
           <p:nvPr/>
         </p:nvSpPr>
@@ -4481,7 +4481,7 @@
       </p:sp>
       <p:sp>
         <p:nvSpPr>
-          <p:cNvPr id="676411353" name=""/>
+          <p:cNvPr id="539769137" name=""/>
           <p:cNvSpPr/>
           <p:nvPr/>
         </p:nvSpPr>
@@ -4538,7 +4538,7 @@
       </p:sp>
       <p:sp>
         <p:nvSpPr>
-          <p:cNvPr id="1967214887" name=""/>
+          <p:cNvPr id="1423810575" name=""/>
           <p:cNvSpPr/>
           <p:nvPr/>
         </p:nvSpPr>
@@ -4591,7 +4591,7 @@
       </p:sp>
       <p:sp>
         <p:nvSpPr>
-          <p:cNvPr id="2038263443" name=""/>
+          <p:cNvPr id="1309308935" name=""/>
           <p:cNvSpPr/>
           <p:nvPr/>
         </p:nvSpPr>
@@ -4648,7 +4648,7 @@
       </p:sp>
       <p:sp>
         <p:nvSpPr>
-          <p:cNvPr id="1702293801" name=""/>
+          <p:cNvPr id="674590273" name=""/>
           <p:cNvSpPr/>
           <p:nvPr/>
         </p:nvSpPr>
@@ -4705,7 +4705,7 @@
       </p:sp>
       <p:sp>
         <p:nvSpPr>
-          <p:cNvPr id="1319734309" name=""/>
+          <p:cNvPr id="1761518599" name=""/>
           <p:cNvSpPr txBox="1"/>
           <p:nvPr/>
         </p:nvSpPr>
@@ -4744,7 +4744,7 @@
       </p:sp>
       <p:sp>
         <p:nvSpPr>
-          <p:cNvPr id="2064375556" name=""/>
+          <p:cNvPr id="1612268020" name=""/>
           <p:cNvSpPr/>
           <p:nvPr/>
         </p:nvSpPr>
@@ -4813,7 +4813,7 @@
       </p:sp>
       <p:sp>
         <p:nvSpPr>
-          <p:cNvPr id="2136268664" name=""/>
+          <p:cNvPr id="759074485" name=""/>
           <p:cNvSpPr txBox="1"/>
           <p:nvPr/>
         </p:nvSpPr>
@@ -4852,7 +4852,7 @@
       </p:sp>
       <p:sp>
         <p:nvSpPr>
-          <p:cNvPr id="1980980337" name=""/>
+          <p:cNvPr id="531414463" name=""/>
           <p:cNvSpPr/>
           <p:nvPr/>
         </p:nvSpPr>
@@ -4909,7 +4909,7 @@
       </p:sp>
       <p:sp>
         <p:nvSpPr>
-          <p:cNvPr id="1334288953" name=""/>
+          <p:cNvPr id="285460547" name=""/>
           <p:cNvSpPr/>
           <p:nvPr/>
         </p:nvSpPr>
@@ -4962,7 +4962,7 @@
       </p:sp>
       <p:sp>
         <p:nvSpPr>
-          <p:cNvPr id="1875616308" name=""/>
+          <p:cNvPr id="188138076" name=""/>
           <p:cNvSpPr/>
           <p:nvPr/>
         </p:nvSpPr>
@@ -5019,7 +5019,7 @@
       </p:sp>
       <p:sp>
         <p:nvSpPr>
-          <p:cNvPr id="385756816" name=""/>
+          <p:cNvPr id="1204475769" name=""/>
           <p:cNvSpPr/>
           <p:nvPr/>
         </p:nvSpPr>
@@ -5076,7 +5076,7 @@
       </p:sp>
       <p:sp>
         <p:nvSpPr>
-          <p:cNvPr id="1245827845" name=""/>
+          <p:cNvPr id="715296239" name=""/>
           <p:cNvSpPr/>
           <p:nvPr/>
         </p:nvSpPr>
@@ -5182,7 +5182,7 @@
       </p:sp>
       <p:sp>
         <p:nvSpPr>
-          <p:cNvPr id="916087404" name=""/>
+          <p:cNvPr id="1131890942" name=""/>
           <p:cNvSpPr/>
           <p:nvPr/>
         </p:nvSpPr>
@@ -5235,13 +5235,13 @@
       </p:sp>
       <p:sp>
         <p:nvSpPr>
-          <p:cNvPr id="1410810678" name=""/>
+          <p:cNvPr id="495373068" name=""/>
           <p:cNvSpPr/>
           <p:nvPr/>
         </p:nvSpPr>
         <p:spPr bwMode="auto">
           <a:xfrm rot="0" flipH="0" flipV="0">
-            <a:off x="5233206" y="997705"/>
+            <a:off x="5233206" y="997704"/>
             <a:ext cx="507087" cy="182232"/>
           </a:xfrm>
           <a:prstGeom prst="rightArrow">
@@ -5292,13 +5292,13 @@
       </p:sp>
       <p:sp>
         <p:nvSpPr>
-          <p:cNvPr id="582496041" name=""/>
+          <p:cNvPr id="985564579" name=""/>
           <p:cNvSpPr txBox="1"/>
           <p:nvPr/>
         </p:nvSpPr>
         <p:spPr bwMode="auto">
           <a:xfrm rot="0" flipH="0" flipV="0">
-            <a:off x="4178289" y="1590311"/>
+            <a:off x="4178288" y="1590311"/>
             <a:ext cx="1290538" cy="731879"/>
           </a:xfrm>
           <a:prstGeom prst="rect">
@@ -5382,7 +5382,7 @@
       </p:sp>
       <p:sp>
         <p:nvSpPr>
-          <p:cNvPr id="755078422" name=""/>
+          <p:cNvPr id="63191556" name=""/>
           <p:cNvSpPr/>
           <p:nvPr/>
         </p:nvSpPr>
@@ -5439,7 +5439,7 @@
       </p:sp>
       <p:sp>
         <p:nvSpPr>
-          <p:cNvPr id="448845057" name=""/>
+          <p:cNvPr id="1781877905" name=""/>
           <p:cNvSpPr/>
           <p:nvPr/>
         </p:nvSpPr>
@@ -5492,7 +5492,7 @@
       </p:sp>
       <p:sp>
         <p:nvSpPr>
-          <p:cNvPr id="899495631" name=""/>
+          <p:cNvPr id="723626082" name=""/>
           <p:cNvSpPr txBox="1"/>
           <p:nvPr/>
         </p:nvSpPr>
@@ -5531,7 +5531,7 @@
       </p:sp>
       <p:sp>
         <p:nvSpPr>
-          <p:cNvPr id="930084244" name=""/>
+          <p:cNvPr id="1180003956" name=""/>
           <p:cNvSpPr/>
           <p:nvPr/>
         </p:nvSpPr>
@@ -5600,7 +5600,7 @@
       </p:sp>
       <p:sp>
         <p:nvSpPr>
-          <p:cNvPr id="1289048764" name=""/>
+          <p:cNvPr id="1764940955" name=""/>
           <p:cNvSpPr/>
           <p:nvPr/>
         </p:nvSpPr>
@@ -5657,7 +5657,7 @@
       </p:sp>
       <p:sp>
         <p:nvSpPr>
-          <p:cNvPr id="2133519105" name=""/>
+          <p:cNvPr id="850815193" name=""/>
           <p:cNvSpPr/>
           <p:nvPr/>
         </p:nvSpPr>
@@ -5714,7 +5714,7 @@
       </p:sp>
       <p:sp>
         <p:nvSpPr>
-          <p:cNvPr id="718732021" name=""/>
+          <p:cNvPr id="1154480205" name=""/>
           <p:cNvSpPr/>
           <p:nvPr/>
         </p:nvSpPr>
@@ -5771,7 +5771,7 @@
       </p:sp>
       <p:sp>
         <p:nvSpPr>
-          <p:cNvPr id="1911152787" name=""/>
+          <p:cNvPr id="2046787193" name=""/>
           <p:cNvSpPr/>
           <p:nvPr/>
         </p:nvSpPr>
@@ -5828,7 +5828,7 @@
       </p:sp>
       <p:sp>
         <p:nvSpPr>
-          <p:cNvPr id="312976116" name=""/>
+          <p:cNvPr id="1878937196" name=""/>
           <p:cNvSpPr/>
           <p:nvPr/>
         </p:nvSpPr>
@@ -5885,7 +5885,7 @@
       </p:sp>
       <p:sp>
         <p:nvSpPr>
-          <p:cNvPr id="168985092" name=""/>
+          <p:cNvPr id="1725572349" name=""/>
           <p:cNvSpPr/>
           <p:nvPr/>
         </p:nvSpPr>
@@ -5948,7 +5948,7 @@
       </p:sp>
       <p:sp>
         <p:nvSpPr>
-          <p:cNvPr id="784019662" name=""/>
+          <p:cNvPr id="951245201" name=""/>
           <p:cNvSpPr txBox="1"/>
           <p:nvPr/>
         </p:nvSpPr>
@@ -6005,7 +6005,7 @@
       </p:sp>
       <p:sp>
         <p:nvSpPr>
-          <p:cNvPr id="221928989" name=""/>
+          <p:cNvPr id="185183380" name=""/>
           <p:cNvSpPr/>
           <p:nvPr/>
         </p:nvSpPr>
@@ -6062,12 +6062,12 @@
       </p:sp>
       <p:sp>
         <p:nvSpPr>
-          <p:cNvPr id="1842623598" name=""/>
+          <p:cNvPr id="1474604916" name=""/>
           <p:cNvSpPr/>
           <p:nvPr/>
         </p:nvSpPr>
         <p:spPr bwMode="auto">
-          <a:xfrm rot="3266977" flipH="0" flipV="0">
+          <a:xfrm rot="3266976" flipH="0" flipV="0">
             <a:off x="997684" y="5065538"/>
             <a:ext cx="1112151" cy="172503"/>
           </a:xfrm>
@@ -6119,7 +6119,7 @@
       </p:sp>
       <p:pic>
         <p:nvPicPr>
-          <p:cNvPr id="1949491350" name=""/>
+          <p:cNvPr id="1740304906" name=""/>
           <p:cNvPicPr>
             <a:picLocks noChangeAspect="1"/>
           </p:cNvPicPr>
@@ -6132,7 +6132,7 @@
         <p:spPr bwMode="auto">
           <a:xfrm flipH="0" flipV="0">
             <a:off x="2090133" y="608476"/>
-            <a:ext cx="350285" cy="350285"/>
+            <a:ext cx="350284" cy="350284"/>
           </a:xfrm>
           <a:prstGeom prst="rect">
             <a:avLst/>
@@ -6141,7 +6141,7 @@
       </p:pic>
       <p:pic>
         <p:nvPicPr>
-          <p:cNvPr id="2004619964" name=""/>
+          <p:cNvPr id="84778755" name=""/>
           <p:cNvPicPr>
             <a:picLocks noChangeAspect="1"/>
           </p:cNvPicPr>
@@ -6163,7 +6163,7 @@
       </p:pic>
       <p:pic>
         <p:nvPicPr>
-          <p:cNvPr id="818492348" name=""/>
+          <p:cNvPr id="475284836" name=""/>
           <p:cNvPicPr>
             <a:picLocks noChangeAspect="1"/>
           </p:cNvPicPr>
@@ -6218,7 +6218,7 @@
       </p:grpSpPr>
       <p:sp>
         <p:nvSpPr>
-          <p:cNvPr id="727044823" name=""/>
+          <p:cNvPr id="1742124423" name=""/>
           <p:cNvSpPr/>
           <p:nvPr/>
         </p:nvSpPr>
@@ -6301,7 +6301,7 @@
       </p:sp>
       <p:sp>
         <p:nvSpPr>
-          <p:cNvPr id="320432614" name=""/>
+          <p:cNvPr id="1042848463" name=""/>
           <p:cNvSpPr/>
           <p:nvPr/>
         </p:nvSpPr>
@@ -6360,7 +6360,7 @@
       </p:sp>
       <p:sp>
         <p:nvSpPr>
-          <p:cNvPr id="1301019564" name=""/>
+          <p:cNvPr id="1492812789" name=""/>
           <p:cNvSpPr/>
           <p:nvPr/>
         </p:nvSpPr>
@@ -6413,7 +6413,7 @@
       </p:sp>
       <p:sp>
         <p:nvSpPr>
-          <p:cNvPr id="1463940880" name=""/>
+          <p:cNvPr id="1550676239" name=""/>
           <p:cNvSpPr/>
           <p:nvPr/>
         </p:nvSpPr>
@@ -6453,7 +6453,7 @@
       </p:sp>
       <p:sp>
         <p:nvSpPr>
-          <p:cNvPr id="353706307" name=""/>
+          <p:cNvPr id="960776124" name=""/>
           <p:cNvSpPr txBox="1"/>
           <p:nvPr/>
         </p:nvSpPr>
@@ -6507,7 +6507,7 @@
       </p:sp>
       <p:sp>
         <p:nvSpPr>
-          <p:cNvPr id="1194424685" name=""/>
+          <p:cNvPr id="24555322" name=""/>
           <p:cNvSpPr/>
           <p:nvPr/>
         </p:nvSpPr>
@@ -6566,7 +6566,7 @@
       </p:sp>
       <p:sp>
         <p:nvSpPr>
-          <p:cNvPr id="1290779589" name=""/>
+          <p:cNvPr id="370585334" name=""/>
           <p:cNvSpPr/>
           <p:nvPr/>
         </p:nvSpPr>
@@ -6606,7 +6606,7 @@
       </p:sp>
       <p:sp>
         <p:nvSpPr>
-          <p:cNvPr id="1112212159" name=""/>
+          <p:cNvPr id="484156708" name=""/>
           <p:cNvSpPr txBox="1"/>
           <p:nvPr/>
         </p:nvSpPr>
@@ -6668,7 +6668,7 @@
       </p:sp>
       <p:sp>
         <p:nvSpPr>
-          <p:cNvPr id="644965476" name=""/>
+          <p:cNvPr id="179831988" name=""/>
           <p:cNvSpPr/>
           <p:nvPr/>
         </p:nvSpPr>
@@ -6724,7 +6724,7 @@
       </p:sp>
       <p:sp>
         <p:nvSpPr>
-          <p:cNvPr id="1500265080" name=""/>
+          <p:cNvPr id="957306498" name=""/>
           <p:cNvSpPr/>
           <p:nvPr/>
         </p:nvSpPr>
@@ -6781,7 +6781,7 @@
       </p:sp>
       <p:sp>
         <p:nvSpPr>
-          <p:cNvPr id="1964470180" name=""/>
+          <p:cNvPr id="1350166079" name=""/>
           <p:cNvSpPr/>
           <p:nvPr/>
         </p:nvSpPr>
@@ -6838,7 +6838,7 @@
       </p:sp>
       <p:sp>
         <p:nvSpPr>
-          <p:cNvPr id="1073638969" name=""/>
+          <p:cNvPr id="1702350784" name=""/>
           <p:cNvSpPr/>
           <p:nvPr/>
         </p:nvSpPr>
@@ -6921,7 +6921,7 @@
       </p:sp>
       <p:sp>
         <p:nvSpPr>
-          <p:cNvPr id="476055147" name=""/>
+          <p:cNvPr id="2025146942" name=""/>
           <p:cNvSpPr/>
           <p:nvPr/>
         </p:nvSpPr>
@@ -6978,7 +6978,7 @@
       </p:sp>
       <p:sp>
         <p:nvSpPr>
-          <p:cNvPr id="1260486644" name=""/>
+          <p:cNvPr id="867906706" name=""/>
           <p:cNvSpPr txBox="1"/>
           <p:nvPr/>
         </p:nvSpPr>
@@ -7243,7 +7243,7 @@
       </p:sp>
       <p:sp>
         <p:nvSpPr>
-          <p:cNvPr id="1646567357" name=""/>
+          <p:cNvPr id="867522566" name=""/>
           <p:cNvSpPr/>
           <p:nvPr/>
         </p:nvSpPr>
@@ -7300,7 +7300,7 @@
       </p:sp>
       <p:sp>
         <p:nvSpPr>
-          <p:cNvPr id="1389774085" name=""/>
+          <p:cNvPr id="1557041859" name=""/>
           <p:cNvSpPr/>
           <p:nvPr/>
         </p:nvSpPr>
@@ -7383,7 +7383,7 @@
       </p:sp>
       <p:sp>
         <p:nvSpPr>
-          <p:cNvPr id="1082361204" name=""/>
+          <p:cNvPr id="722157019" name=""/>
           <p:cNvSpPr/>
           <p:nvPr/>
         </p:nvSpPr>
@@ -7469,7 +7469,7 @@
       </p:sp>
       <p:sp>
         <p:nvSpPr>
-          <p:cNvPr id="773204605" name=""/>
+          <p:cNvPr id="1914535106" name=""/>
           <p:cNvSpPr/>
           <p:nvPr/>
         </p:nvSpPr>
@@ -7552,7 +7552,7 @@
       </p:sp>
       <p:sp>
         <p:nvSpPr>
-          <p:cNvPr id="232196035" name=""/>
+          <p:cNvPr id="1080498760" name=""/>
           <p:cNvSpPr txBox="1"/>
           <p:nvPr/>
         </p:nvSpPr>
@@ -7590,7 +7590,7 @@
       </p:sp>
       <p:sp>
         <p:nvSpPr>
-          <p:cNvPr id="97548827" name=""/>
+          <p:cNvPr id="1626860272" name=""/>
           <p:cNvSpPr txBox="1"/>
           <p:nvPr/>
         </p:nvSpPr>
@@ -7628,7 +7628,7 @@
       </p:sp>
       <p:sp>
         <p:nvSpPr>
-          <p:cNvPr id="104209196" name=""/>
+          <p:cNvPr id="1383805978" name=""/>
           <p:cNvSpPr txBox="1"/>
           <p:nvPr/>
         </p:nvSpPr>
@@ -7666,7 +7666,7 @@
       </p:sp>
       <p:sp>
         <p:nvSpPr>
-          <p:cNvPr id="1979151934" name=""/>
+          <p:cNvPr id="807895721" name=""/>
           <p:cNvSpPr/>
           <p:nvPr/>
         </p:nvSpPr>
@@ -7706,7 +7706,7 @@
       </p:sp>
       <p:sp>
         <p:nvSpPr>
-          <p:cNvPr id="897533140" name=""/>
+          <p:cNvPr id="1019660637" name=""/>
           <p:cNvSpPr txBox="1"/>
           <p:nvPr/>
         </p:nvSpPr>
@@ -7760,7 +7760,7 @@
       </p:sp>
       <p:sp>
         <p:nvSpPr>
-          <p:cNvPr id="1666158646" name=""/>
+          <p:cNvPr id="877143986" name=""/>
           <p:cNvSpPr/>
           <p:nvPr/>
         </p:nvSpPr>
@@ -7817,7 +7817,7 @@
       </p:sp>
       <p:sp>
         <p:nvSpPr>
-          <p:cNvPr id="2090688655" name=""/>
+          <p:cNvPr id="758104486" name=""/>
           <p:cNvSpPr/>
           <p:nvPr/>
         </p:nvSpPr>
@@ -7900,7 +7900,7 @@
       </p:sp>
       <p:sp>
         <p:nvSpPr>
-          <p:cNvPr id="1097905475" name=""/>
+          <p:cNvPr id="1069439750" name=""/>
           <p:cNvSpPr txBox="1"/>
           <p:nvPr/>
         </p:nvSpPr>
@@ -7957,7 +7957,7 @@
       </p:sp>
       <p:sp>
         <p:nvSpPr>
-          <p:cNvPr id="1863392997" name=""/>
+          <p:cNvPr id="2020776614" name=""/>
           <p:cNvSpPr/>
           <p:nvPr/>
         </p:nvSpPr>
@@ -8014,7 +8014,7 @@
       </p:sp>
       <p:sp>
         <p:nvSpPr>
-          <p:cNvPr id="989649812" name=""/>
+          <p:cNvPr id="1355545901" name=""/>
           <p:cNvSpPr/>
           <p:nvPr/>
         </p:nvSpPr>
@@ -8070,7 +8070,7 @@
       </p:sp>
       <p:sp>
         <p:nvSpPr>
-          <p:cNvPr id="527140870" name=""/>
+          <p:cNvPr id="219054039" name=""/>
           <p:cNvSpPr/>
           <p:nvPr/>
         </p:nvSpPr>
@@ -8127,7 +8127,7 @@
       </p:sp>
       <p:sp>
         <p:nvSpPr>
-          <p:cNvPr id="634785939" name=""/>
+          <p:cNvPr id="783972345" name=""/>
           <p:cNvSpPr/>
           <p:nvPr/>
         </p:nvSpPr>
@@ -8183,14 +8183,14 @@
       </p:sp>
       <p:sp>
         <p:nvSpPr>
-          <p:cNvPr id="148134643" name=""/>
+          <p:cNvPr id="1721973329" name=""/>
           <p:cNvSpPr txBox="1"/>
           <p:nvPr/>
         </p:nvSpPr>
         <p:spPr bwMode="auto">
           <a:xfrm rot="0" flipH="0" flipV="0">
             <a:off x="3054557" y="5490881"/>
-            <a:ext cx="2138426" cy="1021439"/>
+            <a:ext cx="2138426" cy="1021438"/>
           </a:xfrm>
           <a:prstGeom prst="rect">
             <a:avLst/>
@@ -8288,7 +8288,7 @@
       </p:sp>
       <p:sp>
         <p:nvSpPr>
-          <p:cNvPr id="889694640" name=""/>
+          <p:cNvPr id="896501043" name=""/>
           <p:cNvSpPr txBox="1"/>
           <p:nvPr/>
         </p:nvSpPr>
@@ -8326,7 +8326,7 @@
       </p:sp>
       <p:sp>
         <p:nvSpPr>
-          <p:cNvPr id="1942875511" name=""/>
+          <p:cNvPr id="211128397" name=""/>
           <p:cNvSpPr txBox="1"/>
           <p:nvPr/>
         </p:nvSpPr>
@@ -8364,7 +8364,7 @@
       </p:sp>
       <p:sp>
         <p:nvSpPr>
-          <p:cNvPr id="2020724203" name=""/>
+          <p:cNvPr id="54281917" name=""/>
           <p:cNvSpPr txBox="1"/>
           <p:nvPr/>
         </p:nvSpPr>
@@ -8428,7 +8428,7 @@
       </p:sp>
       <p:sp>
         <p:nvSpPr>
-          <p:cNvPr id="1833227163" name=""/>
+          <p:cNvPr id="1692309044" name=""/>
           <p:cNvSpPr txBox="1"/>
           <p:nvPr/>
         </p:nvSpPr>
@@ -8496,7 +8496,7 @@
       </p:sp>
       <p:sp>
         <p:nvSpPr>
-          <p:cNvPr id="2013737220" name=""/>
+          <p:cNvPr id="73897901" name=""/>
           <p:cNvSpPr txBox="1"/>
           <p:nvPr/>
         </p:nvSpPr>
@@ -8597,7 +8597,7 @@
       </p:grpSpPr>
       <p:sp>
         <p:nvSpPr>
-          <p:cNvPr id="1727273554" name=""/>
+          <p:cNvPr id="1856802711" name=""/>
           <p:cNvSpPr/>
           <p:nvPr/>
         </p:nvSpPr>
@@ -8680,7 +8680,7 @@
       </p:sp>
       <p:pic>
         <p:nvPicPr>
-          <p:cNvPr id="536681213" name=""/>
+          <p:cNvPr id="396675782" name=""/>
           <p:cNvPicPr>
             <a:picLocks noChangeAspect="1"/>
           </p:cNvPicPr>
@@ -8702,7 +8702,7 @@
       </p:pic>
       <p:sp>
         <p:nvSpPr>
-          <p:cNvPr id="95119750" name=""/>
+          <p:cNvPr id="923002429" name=""/>
           <p:cNvSpPr txBox="1"/>
           <p:nvPr/>
         </p:nvSpPr>
@@ -8741,7 +8741,7 @@
       </p:sp>
       <p:sp>
         <p:nvSpPr>
-          <p:cNvPr id="249778380" name=""/>
+          <p:cNvPr id="900835662" name=""/>
           <p:cNvSpPr txBox="1"/>
           <p:nvPr/>
         </p:nvSpPr>
@@ -8780,7 +8780,7 @@
       </p:sp>
       <p:sp>
         <p:nvSpPr>
-          <p:cNvPr id="438567554" name=""/>
+          <p:cNvPr id="647060293" name=""/>
           <p:cNvSpPr/>
           <p:nvPr/>
         </p:nvSpPr>
@@ -8837,7 +8837,7 @@
       </p:sp>
       <p:sp>
         <p:nvSpPr>
-          <p:cNvPr id="626613426" name=""/>
+          <p:cNvPr id="124506145" name=""/>
           <p:cNvSpPr/>
           <p:nvPr/>
         </p:nvSpPr>
@@ -8894,7 +8894,7 @@
       </p:sp>
       <p:sp>
         <p:nvSpPr>
-          <p:cNvPr id="211242750" name=""/>
+          <p:cNvPr id="707306024" name=""/>
           <p:cNvSpPr/>
           <p:nvPr/>
         </p:nvSpPr>
@@ -8950,7 +8950,7 @@
       </p:sp>
       <p:sp>
         <p:nvSpPr>
-          <p:cNvPr id="2043255231" name=""/>
+          <p:cNvPr id="1916680599" name=""/>
           <p:cNvSpPr/>
           <p:nvPr/>
         </p:nvSpPr>
@@ -9007,7 +9007,7 @@
       </p:sp>
       <p:sp>
         <p:nvSpPr>
-          <p:cNvPr id="819656377" name=""/>
+          <p:cNvPr id="517687379" name=""/>
           <p:cNvSpPr/>
           <p:nvPr/>
         </p:nvSpPr>
@@ -9060,7 +9060,7 @@
       </p:sp>
       <p:sp>
         <p:nvSpPr>
-          <p:cNvPr id="139090897" name=""/>
+          <p:cNvPr id="1579375624" name=""/>
           <p:cNvSpPr/>
           <p:nvPr/>
         </p:nvSpPr>
@@ -9123,7 +9123,7 @@
       </p:sp>
       <p:sp>
         <p:nvSpPr>
-          <p:cNvPr id="474880056" name=""/>
+          <p:cNvPr id="597810768" name=""/>
           <p:cNvSpPr/>
           <p:nvPr/>
         </p:nvSpPr>
@@ -9180,7 +9180,7 @@
       </p:sp>
       <p:sp>
         <p:nvSpPr>
-          <p:cNvPr id="158678054" name=""/>
+          <p:cNvPr id="1485373133" name=""/>
           <p:cNvSpPr/>
           <p:nvPr/>
         </p:nvSpPr>
@@ -9239,7 +9239,7 @@
       </p:sp>
       <p:sp>
         <p:nvSpPr>
-          <p:cNvPr id="1376827083" name=""/>
+          <p:cNvPr id="1664563665" name=""/>
           <p:cNvSpPr txBox="1"/>
           <p:nvPr/>
         </p:nvSpPr>
@@ -9278,7 +9278,7 @@
       </p:sp>
       <p:sp>
         <p:nvSpPr>
-          <p:cNvPr id="1083322050" name=""/>
+          <p:cNvPr id="872374732" name=""/>
           <p:cNvSpPr/>
           <p:nvPr/>
         </p:nvSpPr>
@@ -9347,7 +9347,7 @@
       </p:sp>
       <p:sp>
         <p:nvSpPr>
-          <p:cNvPr id="314008204" name=""/>
+          <p:cNvPr id="1225013783" name=""/>
           <p:cNvSpPr/>
           <p:nvPr/>
         </p:nvSpPr>
@@ -9404,7 +9404,7 @@
       </p:sp>
       <p:sp>
         <p:nvSpPr>
-          <p:cNvPr id="1423884697" name=""/>
+          <p:cNvPr id="1092592931" name=""/>
           <p:cNvSpPr/>
           <p:nvPr/>
         </p:nvSpPr>
@@ -9460,7 +9460,7 @@
       </p:sp>
       <p:sp>
         <p:nvSpPr>
-          <p:cNvPr id="1438849403" name=""/>
+          <p:cNvPr id="1676855262" name=""/>
           <p:cNvSpPr/>
           <p:nvPr/>
         </p:nvSpPr>
@@ -9517,7 +9517,7 @@
       </p:sp>
       <p:sp>
         <p:nvSpPr>
-          <p:cNvPr id="919135715" name=""/>
+          <p:cNvPr id="1701395163" name=""/>
           <p:cNvSpPr txBox="1"/>
           <p:nvPr/>
         </p:nvSpPr>
@@ -9556,7 +9556,7 @@
       </p:sp>
       <p:sp>
         <p:nvSpPr>
-          <p:cNvPr id="547252349" name=""/>
+          <p:cNvPr id="1748645851" name=""/>
           <p:cNvSpPr/>
           <p:nvPr/>
         </p:nvSpPr>
@@ -9625,13 +9625,13 @@
       </p:sp>
       <p:sp>
         <p:nvSpPr>
-          <p:cNvPr id="604955416" name=""/>
+          <p:cNvPr id="1779434937" name=""/>
           <p:cNvSpPr/>
           <p:nvPr/>
         </p:nvSpPr>
         <p:spPr bwMode="auto">
           <a:xfrm rot="0" flipH="0" flipV="0">
-            <a:off x="3984145" y="2470729"/>
+            <a:off x="3984145" y="2470728"/>
             <a:ext cx="479655" cy="182232"/>
           </a:xfrm>
           <a:prstGeom prst="rightArrow">
@@ -9682,7 +9682,7 @@
       </p:sp>
       <p:sp>
         <p:nvSpPr>
-          <p:cNvPr id="630955041" name=""/>
+          <p:cNvPr id="328018776" name=""/>
           <p:cNvSpPr/>
           <p:nvPr/>
         </p:nvSpPr>
@@ -9741,7 +9741,7 @@
       </p:sp>
       <p:sp>
         <p:nvSpPr>
-          <p:cNvPr id="1903406774" name=""/>
+          <p:cNvPr id="2080392294" name=""/>
           <p:cNvSpPr txBox="1"/>
           <p:nvPr/>
         </p:nvSpPr>
@@ -9780,7 +9780,7 @@
       </p:sp>
       <p:sp>
         <p:nvSpPr>
-          <p:cNvPr id="2008194211" name=""/>
+          <p:cNvPr id="934140602" name=""/>
           <p:cNvSpPr/>
           <p:nvPr/>
         </p:nvSpPr>
@@ -9837,7 +9837,7 @@
       </p:sp>
       <p:sp>
         <p:nvSpPr>
-          <p:cNvPr id="1030985958" name=""/>
+          <p:cNvPr id="301650985" name=""/>
           <p:cNvSpPr/>
           <p:nvPr/>
         </p:nvSpPr>
@@ -9894,7 +9894,7 @@
       </p:sp>
       <p:sp>
         <p:nvSpPr>
-          <p:cNvPr id="85226534" name=""/>
+          <p:cNvPr id="1519144881" name=""/>
           <p:cNvSpPr/>
           <p:nvPr/>
         </p:nvSpPr>
@@ -9951,7 +9951,7 @@
       </p:sp>
       <p:sp>
         <p:nvSpPr>
-          <p:cNvPr id="1948128818" name=""/>
+          <p:cNvPr id="1251321748" name=""/>
           <p:cNvSpPr/>
           <p:nvPr/>
         </p:nvSpPr>
@@ -9991,7 +9991,7 @@
       </p:sp>
       <p:pic>
         <p:nvPicPr>
-          <p:cNvPr id="1119746520" name=""/>
+          <p:cNvPr id="489844924" name=""/>
           <p:cNvPicPr>
             <a:picLocks noChangeAspect="1"/>
           </p:cNvPicPr>
@@ -10013,14 +10013,14 @@
       </p:pic>
       <p:sp>
         <p:nvSpPr>
-          <p:cNvPr id="1940584870" name=""/>
+          <p:cNvPr id="366479872" name=""/>
           <p:cNvSpPr txBox="1"/>
           <p:nvPr/>
         </p:nvSpPr>
         <p:spPr bwMode="auto">
           <a:xfrm rot="0" flipH="0" flipV="0">
             <a:off x="7202840" y="4194386"/>
-            <a:ext cx="1605849" cy="335639"/>
+            <a:ext cx="1605848" cy="335639"/>
           </a:xfrm>
           <a:prstGeom prst="rect">
             <a:avLst/>
@@ -10052,7 +10052,7 @@
       </p:sp>
       <p:pic>
         <p:nvPicPr>
-          <p:cNvPr id="1864791893" name=""/>
+          <p:cNvPr id="286254095" name=""/>
           <p:cNvPicPr>
             <a:picLocks noChangeAspect="1"/>
           </p:cNvPicPr>
@@ -10074,13 +10074,13 @@
       </p:pic>
       <p:sp>
         <p:nvSpPr>
-          <p:cNvPr id="178794457" name=""/>
+          <p:cNvPr id="1298525427" name=""/>
           <p:cNvSpPr txBox="1"/>
           <p:nvPr/>
         </p:nvSpPr>
         <p:spPr bwMode="auto">
           <a:xfrm rot="0" flipH="0" flipV="0">
-            <a:off x="6761538" y="5237451"/>
+            <a:off x="6658536" y="5237451"/>
             <a:ext cx="2806816" cy="335639"/>
           </a:xfrm>
           <a:prstGeom prst="rect">
